--- a/quick-presentation.pptx
+++ b/quick-presentation.pptx
@@ -14,14 +14,21 @@
     <p:sldId id="259" r:id="rId8"/>
     <p:sldId id="260" r:id="rId9"/>
     <p:sldId id="261" r:id="rId10"/>
+    <p:sldId id="262" r:id="rId11"/>
+    <p:sldId id="263" r:id="rId12"/>
+    <p:sldId id="264" r:id="rId13"/>
+    <p:sldId id="265" r:id="rId14"/>
+    <p:sldId id="266" r:id="rId15"/>
+    <p:sldId id="267" r:id="rId16"/>
+    <p:sldId id="268" r:id="rId17"/>
   </p:sldIdLst>
   <p:sldSz cy="6858000" cx="12192000"/>
   <p:notesSz cx="6858000" cy="9144000"/>
   <p:embeddedFontLst>
     <p:embeddedFont>
       <p:font typeface="Play"/>
-      <p:regular r:id="rId11"/>
-      <p:bold r:id="rId12"/>
+      <p:regular r:id="rId18"/>
+      <p:bold r:id="rId19"/>
     </p:embeddedFont>
   </p:embeddedFontLst>
   <p:defaultTextStyle>
@@ -255,7 +262,7 @@
   </p:defaultTextStyle>
   <p:extLst>
     <p:ext uri="GoogleSlidesCustomDataVersion2">
-      <go:slidesCustomData xmlns:go="http://customooxmlschemas.google.com/" r:id="rId13" roundtripDataSignature="AMtx7mhColqvEE0HIO6yo5SNfjXYxX8EIw=="/>
+      <go:slidesCustomData xmlns:go="http://customooxmlschemas.google.com/" r:id="rId20" roundtripDataSignature="AMtx7mhRjTtPN1Wy9WdGLyqcMQ/NOK7ZCw=="/>
     </p:ext>
   </p:extLst>
 </p:presentation>
@@ -349,104 +356,239 @@
             <a:noAutofit/>
           </a:bodyPr>
           <a:lstStyle>
-            <a:lvl1pPr indent="-298450" lvl="0" marL="457200">
-              <a:spcBef>
-                <a:spcPts val="0"/>
-              </a:spcBef>
-              <a:spcAft>
-                <a:spcPts val="0"/>
-              </a:spcAft>
+            <a:lvl1pPr indent="-298450" lvl="0" marL="457200" marR="0" rtl="0" algn="l">
+              <a:lnSpc>
+                <a:spcPct val="100000"/>
+              </a:lnSpc>
+              <a:spcBef>
+                <a:spcPts val="0"/>
+              </a:spcBef>
+              <a:spcAft>
+                <a:spcPts val="0"/>
+              </a:spcAft>
+              <a:buClr>
+                <a:srgbClr val="000000"/>
+              </a:buClr>
               <a:buSzPts val="1100"/>
+              <a:buFont typeface="Arial"/>
               <a:buChar char="●"/>
-              <a:defRPr sz="1100"/>
+              <a:defRPr b="0" i="0" sz="1100" u="none" cap="none" strike="noStrike">
+                <a:solidFill>
+                  <a:srgbClr val="000000"/>
+                </a:solidFill>
+                <a:latin typeface="Arial"/>
+                <a:ea typeface="Arial"/>
+                <a:cs typeface="Arial"/>
+                <a:sym typeface="Arial"/>
+              </a:defRPr>
             </a:lvl1pPr>
-            <a:lvl2pPr indent="-298450" lvl="1" marL="914400">
-              <a:spcBef>
-                <a:spcPts val="0"/>
-              </a:spcBef>
-              <a:spcAft>
-                <a:spcPts val="0"/>
-              </a:spcAft>
+            <a:lvl2pPr indent="-298450" lvl="1" marL="914400" marR="0" rtl="0" algn="l">
+              <a:lnSpc>
+                <a:spcPct val="100000"/>
+              </a:lnSpc>
+              <a:spcBef>
+                <a:spcPts val="0"/>
+              </a:spcBef>
+              <a:spcAft>
+                <a:spcPts val="0"/>
+              </a:spcAft>
+              <a:buClr>
+                <a:srgbClr val="000000"/>
+              </a:buClr>
               <a:buSzPts val="1100"/>
+              <a:buFont typeface="Arial"/>
               <a:buChar char="○"/>
-              <a:defRPr sz="1100"/>
+              <a:defRPr b="0" i="0" sz="1100" u="none" cap="none" strike="noStrike">
+                <a:solidFill>
+                  <a:srgbClr val="000000"/>
+                </a:solidFill>
+                <a:latin typeface="Arial"/>
+                <a:ea typeface="Arial"/>
+                <a:cs typeface="Arial"/>
+                <a:sym typeface="Arial"/>
+              </a:defRPr>
             </a:lvl2pPr>
-            <a:lvl3pPr indent="-298450" lvl="2" marL="1371600">
-              <a:spcBef>
-                <a:spcPts val="0"/>
-              </a:spcBef>
-              <a:spcAft>
-                <a:spcPts val="0"/>
-              </a:spcAft>
+            <a:lvl3pPr indent="-298450" lvl="2" marL="1371600" marR="0" rtl="0" algn="l">
+              <a:lnSpc>
+                <a:spcPct val="100000"/>
+              </a:lnSpc>
+              <a:spcBef>
+                <a:spcPts val="0"/>
+              </a:spcBef>
+              <a:spcAft>
+                <a:spcPts val="0"/>
+              </a:spcAft>
+              <a:buClr>
+                <a:srgbClr val="000000"/>
+              </a:buClr>
               <a:buSzPts val="1100"/>
+              <a:buFont typeface="Arial"/>
               <a:buChar char="■"/>
-              <a:defRPr sz="1100"/>
+              <a:defRPr b="0" i="0" sz="1100" u="none" cap="none" strike="noStrike">
+                <a:solidFill>
+                  <a:srgbClr val="000000"/>
+                </a:solidFill>
+                <a:latin typeface="Arial"/>
+                <a:ea typeface="Arial"/>
+                <a:cs typeface="Arial"/>
+                <a:sym typeface="Arial"/>
+              </a:defRPr>
             </a:lvl3pPr>
-            <a:lvl4pPr indent="-298450" lvl="3" marL="1828800">
-              <a:spcBef>
-                <a:spcPts val="0"/>
-              </a:spcBef>
-              <a:spcAft>
-                <a:spcPts val="0"/>
-              </a:spcAft>
+            <a:lvl4pPr indent="-298450" lvl="3" marL="1828800" marR="0" rtl="0" algn="l">
+              <a:lnSpc>
+                <a:spcPct val="100000"/>
+              </a:lnSpc>
+              <a:spcBef>
+                <a:spcPts val="0"/>
+              </a:spcBef>
+              <a:spcAft>
+                <a:spcPts val="0"/>
+              </a:spcAft>
+              <a:buClr>
+                <a:srgbClr val="000000"/>
+              </a:buClr>
               <a:buSzPts val="1100"/>
+              <a:buFont typeface="Arial"/>
               <a:buChar char="●"/>
-              <a:defRPr sz="1100"/>
+              <a:defRPr b="0" i="0" sz="1100" u="none" cap="none" strike="noStrike">
+                <a:solidFill>
+                  <a:srgbClr val="000000"/>
+                </a:solidFill>
+                <a:latin typeface="Arial"/>
+                <a:ea typeface="Arial"/>
+                <a:cs typeface="Arial"/>
+                <a:sym typeface="Arial"/>
+              </a:defRPr>
             </a:lvl4pPr>
-            <a:lvl5pPr indent="-298450" lvl="4" marL="2286000">
-              <a:spcBef>
-                <a:spcPts val="0"/>
-              </a:spcBef>
-              <a:spcAft>
-                <a:spcPts val="0"/>
-              </a:spcAft>
+            <a:lvl5pPr indent="-298450" lvl="4" marL="2286000" marR="0" rtl="0" algn="l">
+              <a:lnSpc>
+                <a:spcPct val="100000"/>
+              </a:lnSpc>
+              <a:spcBef>
+                <a:spcPts val="0"/>
+              </a:spcBef>
+              <a:spcAft>
+                <a:spcPts val="0"/>
+              </a:spcAft>
+              <a:buClr>
+                <a:srgbClr val="000000"/>
+              </a:buClr>
               <a:buSzPts val="1100"/>
+              <a:buFont typeface="Arial"/>
               <a:buChar char="○"/>
-              <a:defRPr sz="1100"/>
+              <a:defRPr b="0" i="0" sz="1100" u="none" cap="none" strike="noStrike">
+                <a:solidFill>
+                  <a:srgbClr val="000000"/>
+                </a:solidFill>
+                <a:latin typeface="Arial"/>
+                <a:ea typeface="Arial"/>
+                <a:cs typeface="Arial"/>
+                <a:sym typeface="Arial"/>
+              </a:defRPr>
             </a:lvl5pPr>
-            <a:lvl6pPr indent="-298450" lvl="5" marL="2743200">
-              <a:spcBef>
-                <a:spcPts val="0"/>
-              </a:spcBef>
-              <a:spcAft>
-                <a:spcPts val="0"/>
-              </a:spcAft>
+            <a:lvl6pPr indent="-298450" lvl="5" marL="2743200" marR="0" rtl="0" algn="l">
+              <a:lnSpc>
+                <a:spcPct val="100000"/>
+              </a:lnSpc>
+              <a:spcBef>
+                <a:spcPts val="0"/>
+              </a:spcBef>
+              <a:spcAft>
+                <a:spcPts val="0"/>
+              </a:spcAft>
+              <a:buClr>
+                <a:srgbClr val="000000"/>
+              </a:buClr>
               <a:buSzPts val="1100"/>
+              <a:buFont typeface="Arial"/>
               <a:buChar char="■"/>
-              <a:defRPr sz="1100"/>
+              <a:defRPr b="0" i="0" sz="1100" u="none" cap="none" strike="noStrike">
+                <a:solidFill>
+                  <a:srgbClr val="000000"/>
+                </a:solidFill>
+                <a:latin typeface="Arial"/>
+                <a:ea typeface="Arial"/>
+                <a:cs typeface="Arial"/>
+                <a:sym typeface="Arial"/>
+              </a:defRPr>
             </a:lvl6pPr>
-            <a:lvl7pPr indent="-298450" lvl="6" marL="3200400">
-              <a:spcBef>
-                <a:spcPts val="0"/>
-              </a:spcBef>
-              <a:spcAft>
-                <a:spcPts val="0"/>
-              </a:spcAft>
+            <a:lvl7pPr indent="-298450" lvl="6" marL="3200400" marR="0" rtl="0" algn="l">
+              <a:lnSpc>
+                <a:spcPct val="100000"/>
+              </a:lnSpc>
+              <a:spcBef>
+                <a:spcPts val="0"/>
+              </a:spcBef>
+              <a:spcAft>
+                <a:spcPts val="0"/>
+              </a:spcAft>
+              <a:buClr>
+                <a:srgbClr val="000000"/>
+              </a:buClr>
               <a:buSzPts val="1100"/>
+              <a:buFont typeface="Arial"/>
               <a:buChar char="●"/>
-              <a:defRPr sz="1100"/>
+              <a:defRPr b="0" i="0" sz="1100" u="none" cap="none" strike="noStrike">
+                <a:solidFill>
+                  <a:srgbClr val="000000"/>
+                </a:solidFill>
+                <a:latin typeface="Arial"/>
+                <a:ea typeface="Arial"/>
+                <a:cs typeface="Arial"/>
+                <a:sym typeface="Arial"/>
+              </a:defRPr>
             </a:lvl7pPr>
-            <a:lvl8pPr indent="-298450" lvl="7" marL="3657600">
-              <a:spcBef>
-                <a:spcPts val="0"/>
-              </a:spcBef>
-              <a:spcAft>
-                <a:spcPts val="0"/>
-              </a:spcAft>
+            <a:lvl8pPr indent="-298450" lvl="7" marL="3657600" marR="0" rtl="0" algn="l">
+              <a:lnSpc>
+                <a:spcPct val="100000"/>
+              </a:lnSpc>
+              <a:spcBef>
+                <a:spcPts val="0"/>
+              </a:spcBef>
+              <a:spcAft>
+                <a:spcPts val="0"/>
+              </a:spcAft>
+              <a:buClr>
+                <a:srgbClr val="000000"/>
+              </a:buClr>
               <a:buSzPts val="1100"/>
+              <a:buFont typeface="Arial"/>
               <a:buChar char="○"/>
-              <a:defRPr sz="1100"/>
+              <a:defRPr b="0" i="0" sz="1100" u="none" cap="none" strike="noStrike">
+                <a:solidFill>
+                  <a:srgbClr val="000000"/>
+                </a:solidFill>
+                <a:latin typeface="Arial"/>
+                <a:ea typeface="Arial"/>
+                <a:cs typeface="Arial"/>
+                <a:sym typeface="Arial"/>
+              </a:defRPr>
             </a:lvl8pPr>
-            <a:lvl9pPr indent="-298450" lvl="8" marL="4114800">
-              <a:spcBef>
-                <a:spcPts val="0"/>
-              </a:spcBef>
-              <a:spcAft>
-                <a:spcPts val="0"/>
-              </a:spcAft>
+            <a:lvl9pPr indent="-298450" lvl="8" marL="4114800" marR="0" rtl="0" algn="l">
+              <a:lnSpc>
+                <a:spcPct val="100000"/>
+              </a:lnSpc>
+              <a:spcBef>
+                <a:spcPts val="0"/>
+              </a:spcBef>
+              <a:spcAft>
+                <a:spcPts val="0"/>
+              </a:spcAft>
+              <a:buClr>
+                <a:srgbClr val="000000"/>
+              </a:buClr>
               <a:buSzPts val="1100"/>
+              <a:buFont typeface="Arial"/>
               <a:buChar char="■"/>
-              <a:defRPr sz="1100"/>
+              <a:defRPr b="0" i="0" sz="1100" u="none" cap="none" strike="noStrike">
+                <a:solidFill>
+                  <a:srgbClr val="000000"/>
+                </a:solidFill>
+                <a:latin typeface="Arial"/>
+                <a:ea typeface="Arial"/>
+                <a:cs typeface="Arial"/>
+                <a:sym typeface="Arial"/>
+              </a:defRPr>
             </a:lvl9pPr>
           </a:lstStyle>
           <a:p/>
@@ -720,6 +862,10 @@
           <a:prstGeom prst="rect">
             <a:avLst/>
           </a:prstGeom>
+          <a:noFill/>
+          <a:ln>
+            <a:noFill/>
+          </a:ln>
         </p:spPr>
         <p:txBody>
           <a:bodyPr anchorCtr="0" anchor="t" bIns="91425" lIns="91425" spcFirstLastPara="1" rIns="91425" wrap="square" tIns="91425">
@@ -728,12 +874,16 @@
           <a:lstStyle/>
           <a:p>
             <a:pPr indent="0" lvl="0" marL="0" rtl="0" algn="l">
-              <a:spcBef>
-                <a:spcPts val="0"/>
-              </a:spcBef>
-              <a:spcAft>
-                <a:spcPts val="0"/>
-              </a:spcAft>
+              <a:lnSpc>
+                <a:spcPct val="100000"/>
+              </a:lnSpc>
+              <a:spcBef>
+                <a:spcPts val="0"/>
+              </a:spcBef>
+              <a:spcAft>
+                <a:spcPts val="0"/>
+              </a:spcAft>
+              <a:buSzPts val="1100"/>
               <a:buNone/>
             </a:pPr>
             <a:r>
@@ -776,6 +926,484 @@
               </a:path>
             </a:pathLst>
           </a:custGeom>
+          <a:noFill/>
+          <a:ln cap="flat" cmpd="sng" w="9525">
+            <a:solidFill>
+              <a:srgbClr val="000000"/>
+            </a:solidFill>
+            <a:prstDash val="solid"/>
+            <a:round/>
+            <a:headEnd len="sm" w="sm" type="none"/>
+            <a:tailEnd len="sm" w="sm" type="none"/>
+          </a:ln>
+        </p:spPr>
+      </p:sp>
+    </p:spTree>
+  </p:cSld>
+  <p:clrMapOvr>
+    <a:masterClrMapping/>
+  </p:clrMapOvr>
+</p:notes>
+</file>
+
+<file path=ppt/notesSlides/notesSlide10.xml><?xml version="1.0" encoding="utf-8"?>
+<p:notes xmlns:a="http://schemas.openxmlformats.org/drawingml/2006/main" xmlns:r="http://schemas.openxmlformats.org/officeDocument/2006/relationships" xmlns:mc="http://schemas.openxmlformats.org/markup-compatibility/2006" xmlns:mv="urn:schemas-microsoft-com:mac:vml" xmlns:p="http://schemas.openxmlformats.org/presentationml/2006/main" xmlns:c="http://schemas.openxmlformats.org/drawingml/2006/chart" xmlns:dgm="http://schemas.openxmlformats.org/drawingml/2006/diagram" xmlns:o="urn:schemas-microsoft-com:office:office" xmlns:v="urn:schemas-microsoft-com:vml" xmlns:pvml="urn:schemas-microsoft-com:office:powerpoint" xmlns:com="http://schemas.openxmlformats.org/drawingml/2006/compatibility" xmlns:p14="http://schemas.microsoft.com/office/powerpoint/2010/main" xmlns:p15="http://schemas.microsoft.com/office/powerpoint/2012/main" xmlns:ahyp="http://schemas.microsoft.com/office/drawing/2018/hyperlinkcolor" showMasterPhAnim="0" showMasterSp="0">
+  <p:cSld>
+    <p:spTree>
+      <p:nvGrpSpPr>
+        <p:cNvPr id="133" name="Shape 133"/>
+        <p:cNvGrpSpPr/>
+        <p:nvPr/>
+      </p:nvGrpSpPr>
+      <p:grpSpPr>
+        <a:xfrm>
+          <a:off x="0" y="0"/>
+          <a:ext cx="0" cy="0"/>
+          <a:chOff x="0" y="0"/>
+          <a:chExt cx="0" cy="0"/>
+        </a:xfrm>
+      </p:grpSpPr>
+      <p:sp>
+        <p:nvSpPr>
+          <p:cNvPr id="134" name="Google Shape;134;g3d68296a725_0_48:notes"/>
+          <p:cNvSpPr txBox="1"/>
+          <p:nvPr>
+            <p:ph idx="1" type="body"/>
+          </p:nvPr>
+        </p:nvSpPr>
+        <p:spPr>
+          <a:xfrm>
+            <a:off x="685800" y="4343400"/>
+            <a:ext cx="5486400" cy="4114800"/>
+          </a:xfrm>
+          <a:prstGeom prst="rect">
+            <a:avLst/>
+          </a:prstGeom>
+          <a:noFill/>
+          <a:ln>
+            <a:noFill/>
+          </a:ln>
+        </p:spPr>
+        <p:txBody>
+          <a:bodyPr anchorCtr="0" anchor="t" bIns="91425" lIns="91425" spcFirstLastPara="1" rIns="91425" wrap="square" tIns="91425">
+            <a:noAutofit/>
+          </a:bodyPr>
+          <a:lstStyle/>
+          <a:p>
+            <a:pPr indent="0" lvl="0" marL="0" rtl="0" algn="l">
+              <a:lnSpc>
+                <a:spcPct val="100000"/>
+              </a:lnSpc>
+              <a:spcBef>
+                <a:spcPts val="0"/>
+              </a:spcBef>
+              <a:spcAft>
+                <a:spcPts val="0"/>
+              </a:spcAft>
+              <a:buSzPts val="1100"/>
+              <a:buNone/>
+            </a:pPr>
+            <a:r>
+              <a:t/>
+            </a:r>
+            <a:endParaRPr/>
+          </a:p>
+        </p:txBody>
+      </p:sp>
+      <p:sp>
+        <p:nvSpPr>
+          <p:cNvPr id="135" name="Google Shape;135;g3d68296a725_0_48:notes"/>
+          <p:cNvSpPr/>
+          <p:nvPr>
+            <p:ph idx="2" type="sldImg"/>
+          </p:nvPr>
+        </p:nvSpPr>
+        <p:spPr>
+          <a:xfrm>
+            <a:off x="1143225" y="685800"/>
+            <a:ext cx="4572300" cy="3429000"/>
+          </a:xfrm>
+          <a:custGeom>
+            <a:rect b="b" l="l" r="r" t="t"/>
+            <a:pathLst>
+              <a:path extrusionOk="0" h="120000" w="120000">
+                <a:moveTo>
+                  <a:pt x="0" y="0"/>
+                </a:moveTo>
+                <a:lnTo>
+                  <a:pt x="120000" y="0"/>
+                </a:lnTo>
+                <a:lnTo>
+                  <a:pt x="120000" y="120000"/>
+                </a:lnTo>
+                <a:lnTo>
+                  <a:pt x="0" y="120000"/>
+                </a:lnTo>
+                <a:close/>
+              </a:path>
+            </a:pathLst>
+          </a:custGeom>
+          <a:noFill/>
+          <a:ln cap="flat" cmpd="sng" w="9525">
+            <a:solidFill>
+              <a:srgbClr val="000000"/>
+            </a:solidFill>
+            <a:prstDash val="solid"/>
+            <a:round/>
+            <a:headEnd len="sm" w="sm" type="none"/>
+            <a:tailEnd len="sm" w="sm" type="none"/>
+          </a:ln>
+        </p:spPr>
+      </p:sp>
+    </p:spTree>
+  </p:cSld>
+  <p:clrMapOvr>
+    <a:masterClrMapping/>
+  </p:clrMapOvr>
+</p:notes>
+</file>
+
+<file path=ppt/notesSlides/notesSlide11.xml><?xml version="1.0" encoding="utf-8"?>
+<p:notes xmlns:a="http://schemas.openxmlformats.org/drawingml/2006/main" xmlns:r="http://schemas.openxmlformats.org/officeDocument/2006/relationships" xmlns:mc="http://schemas.openxmlformats.org/markup-compatibility/2006" xmlns:mv="urn:schemas-microsoft-com:mac:vml" xmlns:p="http://schemas.openxmlformats.org/presentationml/2006/main" xmlns:c="http://schemas.openxmlformats.org/drawingml/2006/chart" xmlns:dgm="http://schemas.openxmlformats.org/drawingml/2006/diagram" xmlns:o="urn:schemas-microsoft-com:office:office" xmlns:v="urn:schemas-microsoft-com:vml" xmlns:pvml="urn:schemas-microsoft-com:office:powerpoint" xmlns:com="http://schemas.openxmlformats.org/drawingml/2006/compatibility" xmlns:p14="http://schemas.microsoft.com/office/powerpoint/2010/main" xmlns:p15="http://schemas.microsoft.com/office/powerpoint/2012/main" xmlns:ahyp="http://schemas.microsoft.com/office/drawing/2018/hyperlinkcolor" showMasterPhAnim="0" showMasterSp="0">
+  <p:cSld>
+    <p:spTree>
+      <p:nvGrpSpPr>
+        <p:cNvPr id="140" name="Shape 140"/>
+        <p:cNvGrpSpPr/>
+        <p:nvPr/>
+      </p:nvGrpSpPr>
+      <p:grpSpPr>
+        <a:xfrm>
+          <a:off x="0" y="0"/>
+          <a:ext cx="0" cy="0"/>
+          <a:chOff x="0" y="0"/>
+          <a:chExt cx="0" cy="0"/>
+        </a:xfrm>
+      </p:grpSpPr>
+      <p:sp>
+        <p:nvSpPr>
+          <p:cNvPr id="141" name="Google Shape;141;p5:notes"/>
+          <p:cNvSpPr txBox="1"/>
+          <p:nvPr>
+            <p:ph idx="1" type="body"/>
+          </p:nvPr>
+        </p:nvSpPr>
+        <p:spPr>
+          <a:xfrm>
+            <a:off x="685800" y="4343400"/>
+            <a:ext cx="5486400" cy="4114800"/>
+          </a:xfrm>
+          <a:prstGeom prst="rect">
+            <a:avLst/>
+          </a:prstGeom>
+          <a:noFill/>
+          <a:ln>
+            <a:noFill/>
+          </a:ln>
+        </p:spPr>
+        <p:txBody>
+          <a:bodyPr anchorCtr="0" anchor="t" bIns="91425" lIns="91425" spcFirstLastPara="1" rIns="91425" wrap="square" tIns="91425">
+            <a:noAutofit/>
+          </a:bodyPr>
+          <a:lstStyle/>
+          <a:p>
+            <a:pPr indent="0" lvl="0" marL="0" rtl="0" algn="l">
+              <a:lnSpc>
+                <a:spcPct val="100000"/>
+              </a:lnSpc>
+              <a:spcBef>
+                <a:spcPts val="0"/>
+              </a:spcBef>
+              <a:spcAft>
+                <a:spcPts val="0"/>
+              </a:spcAft>
+              <a:buSzPts val="1100"/>
+              <a:buNone/>
+            </a:pPr>
+            <a:r>
+              <a:t/>
+            </a:r>
+            <a:endParaRPr/>
+          </a:p>
+        </p:txBody>
+      </p:sp>
+      <p:sp>
+        <p:nvSpPr>
+          <p:cNvPr id="142" name="Google Shape;142;p5:notes"/>
+          <p:cNvSpPr/>
+          <p:nvPr>
+            <p:ph idx="2" type="sldImg"/>
+          </p:nvPr>
+        </p:nvSpPr>
+        <p:spPr>
+          <a:xfrm>
+            <a:off x="1143225" y="685800"/>
+            <a:ext cx="4572225" cy="3429000"/>
+          </a:xfrm>
+          <a:custGeom>
+            <a:rect b="b" l="l" r="r" t="t"/>
+            <a:pathLst>
+              <a:path extrusionOk="0" h="120000" w="120000">
+                <a:moveTo>
+                  <a:pt x="0" y="0"/>
+                </a:moveTo>
+                <a:lnTo>
+                  <a:pt x="120000" y="0"/>
+                </a:lnTo>
+                <a:lnTo>
+                  <a:pt x="120000" y="120000"/>
+                </a:lnTo>
+                <a:lnTo>
+                  <a:pt x="0" y="120000"/>
+                </a:lnTo>
+                <a:close/>
+              </a:path>
+            </a:pathLst>
+          </a:custGeom>
+          <a:noFill/>
+          <a:ln cap="flat" cmpd="sng" w="9525">
+            <a:solidFill>
+              <a:srgbClr val="000000"/>
+            </a:solidFill>
+            <a:prstDash val="solid"/>
+            <a:round/>
+            <a:headEnd len="sm" w="sm" type="none"/>
+            <a:tailEnd len="sm" w="sm" type="none"/>
+          </a:ln>
+        </p:spPr>
+      </p:sp>
+    </p:spTree>
+  </p:cSld>
+  <p:clrMapOvr>
+    <a:masterClrMapping/>
+  </p:clrMapOvr>
+</p:notes>
+</file>
+
+<file path=ppt/notesSlides/notesSlide12.xml><?xml version="1.0" encoding="utf-8"?>
+<p:notes xmlns:a="http://schemas.openxmlformats.org/drawingml/2006/main" xmlns:r="http://schemas.openxmlformats.org/officeDocument/2006/relationships" xmlns:mc="http://schemas.openxmlformats.org/markup-compatibility/2006" xmlns:mv="urn:schemas-microsoft-com:mac:vml" xmlns:p="http://schemas.openxmlformats.org/presentationml/2006/main" xmlns:c="http://schemas.openxmlformats.org/drawingml/2006/chart" xmlns:dgm="http://schemas.openxmlformats.org/drawingml/2006/diagram" xmlns:o="urn:schemas-microsoft-com:office:office" xmlns:v="urn:schemas-microsoft-com:vml" xmlns:pvml="urn:schemas-microsoft-com:office:powerpoint" xmlns:com="http://schemas.openxmlformats.org/drawingml/2006/compatibility" xmlns:p14="http://schemas.microsoft.com/office/powerpoint/2010/main" xmlns:p15="http://schemas.microsoft.com/office/powerpoint/2012/main" xmlns:ahyp="http://schemas.microsoft.com/office/drawing/2018/hyperlinkcolor" showMasterPhAnim="0" showMasterSp="0">
+  <p:cSld>
+    <p:spTree>
+      <p:nvGrpSpPr>
+        <p:cNvPr id="146" name="Shape 146"/>
+        <p:cNvGrpSpPr/>
+        <p:nvPr/>
+      </p:nvGrpSpPr>
+      <p:grpSpPr>
+        <a:xfrm>
+          <a:off x="0" y="0"/>
+          <a:ext cx="0" cy="0"/>
+          <a:chOff x="0" y="0"/>
+          <a:chExt cx="0" cy="0"/>
+        </a:xfrm>
+      </p:grpSpPr>
+      <p:sp>
+        <p:nvSpPr>
+          <p:cNvPr id="147" name="Google Shape;147;p6:notes"/>
+          <p:cNvSpPr txBox="1"/>
+          <p:nvPr>
+            <p:ph idx="1" type="body"/>
+          </p:nvPr>
+        </p:nvSpPr>
+        <p:spPr>
+          <a:xfrm>
+            <a:off x="685800" y="4343400"/>
+            <a:ext cx="5486400" cy="4114800"/>
+          </a:xfrm>
+          <a:prstGeom prst="rect">
+            <a:avLst/>
+          </a:prstGeom>
+          <a:noFill/>
+          <a:ln>
+            <a:noFill/>
+          </a:ln>
+        </p:spPr>
+        <p:txBody>
+          <a:bodyPr anchorCtr="0" anchor="t" bIns="91425" lIns="91425" spcFirstLastPara="1" rIns="91425" wrap="square" tIns="91425">
+            <a:noAutofit/>
+          </a:bodyPr>
+          <a:lstStyle/>
+          <a:p>
+            <a:pPr indent="0" lvl="0" marL="0" rtl="0" algn="l">
+              <a:lnSpc>
+                <a:spcPct val="100000"/>
+              </a:lnSpc>
+              <a:spcBef>
+                <a:spcPts val="0"/>
+              </a:spcBef>
+              <a:spcAft>
+                <a:spcPts val="0"/>
+              </a:spcAft>
+              <a:buSzPts val="1100"/>
+              <a:buNone/>
+            </a:pPr>
+            <a:r>
+              <a:t/>
+            </a:r>
+            <a:endParaRPr/>
+          </a:p>
+        </p:txBody>
+      </p:sp>
+      <p:sp>
+        <p:nvSpPr>
+          <p:cNvPr id="148" name="Google Shape;148;p6:notes"/>
+          <p:cNvSpPr/>
+          <p:nvPr>
+            <p:ph idx="2" type="sldImg"/>
+          </p:nvPr>
+        </p:nvSpPr>
+        <p:spPr>
+          <a:xfrm>
+            <a:off x="1143225" y="685800"/>
+            <a:ext cx="4572225" cy="3429000"/>
+          </a:xfrm>
+          <a:custGeom>
+            <a:rect b="b" l="l" r="r" t="t"/>
+            <a:pathLst>
+              <a:path extrusionOk="0" h="120000" w="120000">
+                <a:moveTo>
+                  <a:pt x="0" y="0"/>
+                </a:moveTo>
+                <a:lnTo>
+                  <a:pt x="120000" y="0"/>
+                </a:lnTo>
+                <a:lnTo>
+                  <a:pt x="120000" y="120000"/>
+                </a:lnTo>
+                <a:lnTo>
+                  <a:pt x="0" y="120000"/>
+                </a:lnTo>
+                <a:close/>
+              </a:path>
+            </a:pathLst>
+          </a:custGeom>
+          <a:noFill/>
+          <a:ln cap="flat" cmpd="sng" w="9525">
+            <a:solidFill>
+              <a:srgbClr val="000000"/>
+            </a:solidFill>
+            <a:prstDash val="solid"/>
+            <a:round/>
+            <a:headEnd len="sm" w="sm" type="none"/>
+            <a:tailEnd len="sm" w="sm" type="none"/>
+          </a:ln>
+        </p:spPr>
+      </p:sp>
+    </p:spTree>
+  </p:cSld>
+  <p:clrMapOvr>
+    <a:masterClrMapping/>
+  </p:clrMapOvr>
+</p:notes>
+</file>
+
+<file path=ppt/notesSlides/notesSlide13.xml><?xml version="1.0" encoding="utf-8"?>
+<p:notes xmlns:a="http://schemas.openxmlformats.org/drawingml/2006/main" xmlns:r="http://schemas.openxmlformats.org/officeDocument/2006/relationships" xmlns:mc="http://schemas.openxmlformats.org/markup-compatibility/2006" xmlns:mv="urn:schemas-microsoft-com:mac:vml" xmlns:p="http://schemas.openxmlformats.org/presentationml/2006/main" xmlns:c="http://schemas.openxmlformats.org/drawingml/2006/chart" xmlns:dgm="http://schemas.openxmlformats.org/drawingml/2006/diagram" xmlns:o="urn:schemas-microsoft-com:office:office" xmlns:v="urn:schemas-microsoft-com:vml" xmlns:pvml="urn:schemas-microsoft-com:office:powerpoint" xmlns:com="http://schemas.openxmlformats.org/drawingml/2006/compatibility" xmlns:p14="http://schemas.microsoft.com/office/powerpoint/2010/main" xmlns:p15="http://schemas.microsoft.com/office/powerpoint/2012/main" xmlns:ahyp="http://schemas.microsoft.com/office/drawing/2018/hyperlinkcolor" showMasterPhAnim="0" showMasterSp="0">
+  <p:cSld>
+    <p:spTree>
+      <p:nvGrpSpPr>
+        <p:cNvPr id="152" name="Shape 152"/>
+        <p:cNvGrpSpPr/>
+        <p:nvPr/>
+      </p:nvGrpSpPr>
+      <p:grpSpPr>
+        <a:xfrm>
+          <a:off x="0" y="0"/>
+          <a:ext cx="0" cy="0"/>
+          <a:chOff x="0" y="0"/>
+          <a:chExt cx="0" cy="0"/>
+        </a:xfrm>
+      </p:grpSpPr>
+      <p:sp>
+        <p:nvSpPr>
+          <p:cNvPr id="153" name="Google Shape;153;p7:notes"/>
+          <p:cNvSpPr txBox="1"/>
+          <p:nvPr>
+            <p:ph idx="1" type="body"/>
+          </p:nvPr>
+        </p:nvSpPr>
+        <p:spPr>
+          <a:xfrm>
+            <a:off x="685800" y="4343400"/>
+            <a:ext cx="5486400" cy="4114800"/>
+          </a:xfrm>
+          <a:prstGeom prst="rect">
+            <a:avLst/>
+          </a:prstGeom>
+          <a:noFill/>
+          <a:ln>
+            <a:noFill/>
+          </a:ln>
+        </p:spPr>
+        <p:txBody>
+          <a:bodyPr anchorCtr="0" anchor="t" bIns="91425" lIns="91425" spcFirstLastPara="1" rIns="91425" wrap="square" tIns="91425">
+            <a:noAutofit/>
+          </a:bodyPr>
+          <a:lstStyle/>
+          <a:p>
+            <a:pPr indent="0" lvl="0" marL="0" rtl="0" algn="l">
+              <a:lnSpc>
+                <a:spcPct val="100000"/>
+              </a:lnSpc>
+              <a:spcBef>
+                <a:spcPts val="0"/>
+              </a:spcBef>
+              <a:spcAft>
+                <a:spcPts val="0"/>
+              </a:spcAft>
+              <a:buSzPts val="1100"/>
+              <a:buNone/>
+            </a:pPr>
+            <a:r>
+              <a:t/>
+            </a:r>
+            <a:endParaRPr/>
+          </a:p>
+        </p:txBody>
+      </p:sp>
+      <p:sp>
+        <p:nvSpPr>
+          <p:cNvPr id="154" name="Google Shape;154;p7:notes"/>
+          <p:cNvSpPr/>
+          <p:nvPr>
+            <p:ph idx="2" type="sldImg"/>
+          </p:nvPr>
+        </p:nvSpPr>
+        <p:spPr>
+          <a:xfrm>
+            <a:off x="1143225" y="685800"/>
+            <a:ext cx="4572225" cy="3429000"/>
+          </a:xfrm>
+          <a:custGeom>
+            <a:rect b="b" l="l" r="r" t="t"/>
+            <a:pathLst>
+              <a:path extrusionOk="0" h="120000" w="120000">
+                <a:moveTo>
+                  <a:pt x="0" y="0"/>
+                </a:moveTo>
+                <a:lnTo>
+                  <a:pt x="120000" y="0"/>
+                </a:lnTo>
+                <a:lnTo>
+                  <a:pt x="120000" y="120000"/>
+                </a:lnTo>
+                <a:lnTo>
+                  <a:pt x="0" y="120000"/>
+                </a:lnTo>
+                <a:close/>
+              </a:path>
+            </a:pathLst>
+          </a:custGeom>
+          <a:noFill/>
+          <a:ln cap="flat" cmpd="sng" w="9525">
+            <a:solidFill>
+              <a:srgbClr val="000000"/>
+            </a:solidFill>
+            <a:prstDash val="solid"/>
+            <a:round/>
+            <a:headEnd len="sm" w="sm" type="none"/>
+            <a:tailEnd len="sm" w="sm" type="none"/>
+          </a:ln>
         </p:spPr>
       </p:sp>
     </p:spTree>
@@ -819,6 +1447,10 @@
           <a:prstGeom prst="rect">
             <a:avLst/>
           </a:prstGeom>
+          <a:noFill/>
+          <a:ln>
+            <a:noFill/>
+          </a:ln>
         </p:spPr>
         <p:txBody>
           <a:bodyPr anchorCtr="0" anchor="t" bIns="91425" lIns="91425" spcFirstLastPara="1" rIns="91425" wrap="square" tIns="91425">
@@ -827,12 +1459,16 @@
           <a:lstStyle/>
           <a:p>
             <a:pPr indent="0" lvl="0" marL="0" rtl="0" algn="l">
-              <a:spcBef>
-                <a:spcPts val="0"/>
-              </a:spcBef>
-              <a:spcAft>
-                <a:spcPts val="0"/>
-              </a:spcAft>
+              <a:lnSpc>
+                <a:spcPct val="100000"/>
+              </a:lnSpc>
+              <a:spcBef>
+                <a:spcPts val="0"/>
+              </a:spcBef>
+              <a:spcAft>
+                <a:spcPts val="0"/>
+              </a:spcAft>
+              <a:buSzPts val="1100"/>
               <a:buNone/>
             </a:pPr>
             <a:r>
@@ -875,6 +1511,16 @@
               </a:path>
             </a:pathLst>
           </a:custGeom>
+          <a:noFill/>
+          <a:ln cap="flat" cmpd="sng" w="9525">
+            <a:solidFill>
+              <a:srgbClr val="000000"/>
+            </a:solidFill>
+            <a:prstDash val="solid"/>
+            <a:round/>
+            <a:headEnd len="sm" w="sm" type="none"/>
+            <a:tailEnd len="sm" w="sm" type="none"/>
+          </a:ln>
         </p:spPr>
       </p:sp>
     </p:spTree>
@@ -918,6 +1564,10 @@
           <a:prstGeom prst="rect">
             <a:avLst/>
           </a:prstGeom>
+          <a:noFill/>
+          <a:ln>
+            <a:noFill/>
+          </a:ln>
         </p:spPr>
         <p:txBody>
           <a:bodyPr anchorCtr="0" anchor="t" bIns="91425" lIns="91425" spcFirstLastPara="1" rIns="91425" wrap="square" tIns="91425">
@@ -926,12 +1576,16 @@
           <a:lstStyle/>
           <a:p>
             <a:pPr indent="0" lvl="0" marL="0" rtl="0" algn="l">
-              <a:spcBef>
-                <a:spcPts val="0"/>
-              </a:spcBef>
-              <a:spcAft>
-                <a:spcPts val="0"/>
-              </a:spcAft>
+              <a:lnSpc>
+                <a:spcPct val="100000"/>
+              </a:lnSpc>
+              <a:spcBef>
+                <a:spcPts val="0"/>
+              </a:spcBef>
+              <a:spcAft>
+                <a:spcPts val="0"/>
+              </a:spcAft>
+              <a:buSzPts val="1100"/>
               <a:buNone/>
             </a:pPr>
             <a:r>
@@ -974,6 +1628,16 @@
               </a:path>
             </a:pathLst>
           </a:custGeom>
+          <a:noFill/>
+          <a:ln cap="flat" cmpd="sng" w="9525">
+            <a:solidFill>
+              <a:srgbClr val="000000"/>
+            </a:solidFill>
+            <a:prstDash val="solid"/>
+            <a:round/>
+            <a:headEnd len="sm" w="sm" type="none"/>
+            <a:tailEnd len="sm" w="sm" type="none"/>
+          </a:ln>
         </p:spPr>
       </p:sp>
     </p:spTree>
@@ -1003,7 +1667,7 @@
       </p:grpSpPr>
       <p:sp>
         <p:nvSpPr>
-          <p:cNvPr id="98" name="Google Shape;98;p5:notes"/>
+          <p:cNvPr id="98" name="Google Shape;98;g3d68296a725_0_2:notes"/>
           <p:cNvSpPr txBox="1"/>
           <p:nvPr>
             <p:ph idx="1" type="body"/>
@@ -1017,6 +1681,10 @@
           <a:prstGeom prst="rect">
             <a:avLst/>
           </a:prstGeom>
+          <a:noFill/>
+          <a:ln>
+            <a:noFill/>
+          </a:ln>
         </p:spPr>
         <p:txBody>
           <a:bodyPr anchorCtr="0" anchor="t" bIns="91425" lIns="91425" spcFirstLastPara="1" rIns="91425" wrap="square" tIns="91425">
@@ -1025,12 +1693,16 @@
           <a:lstStyle/>
           <a:p>
             <a:pPr indent="0" lvl="0" marL="0" rtl="0" algn="l">
-              <a:spcBef>
-                <a:spcPts val="0"/>
-              </a:spcBef>
-              <a:spcAft>
-                <a:spcPts val="0"/>
-              </a:spcAft>
+              <a:lnSpc>
+                <a:spcPct val="100000"/>
+              </a:lnSpc>
+              <a:spcBef>
+                <a:spcPts val="0"/>
+              </a:spcBef>
+              <a:spcAft>
+                <a:spcPts val="0"/>
+              </a:spcAft>
+              <a:buSzPts val="1100"/>
               <a:buNone/>
             </a:pPr>
             <a:r>
@@ -1042,7 +1714,7 @@
       </p:sp>
       <p:sp>
         <p:nvSpPr>
-          <p:cNvPr id="99" name="Google Shape;99;p5:notes"/>
+          <p:cNvPr id="99" name="Google Shape;99;g3d68296a725_0_2:notes"/>
           <p:cNvSpPr/>
           <p:nvPr>
             <p:ph idx="2" type="sldImg"/>
@@ -1051,7 +1723,7 @@
         <p:spPr>
           <a:xfrm>
             <a:off x="1143225" y="685800"/>
-            <a:ext cx="4572225" cy="3429000"/>
+            <a:ext cx="4572300" cy="3429000"/>
           </a:xfrm>
           <a:custGeom>
             <a:rect b="b" l="l" r="r" t="t"/>
@@ -1073,6 +1745,16 @@
               </a:path>
             </a:pathLst>
           </a:custGeom>
+          <a:noFill/>
+          <a:ln cap="flat" cmpd="sng" w="9525">
+            <a:solidFill>
+              <a:srgbClr val="000000"/>
+            </a:solidFill>
+            <a:prstDash val="solid"/>
+            <a:round/>
+            <a:headEnd len="sm" w="sm" type="none"/>
+            <a:tailEnd len="sm" w="sm" type="none"/>
+          </a:ln>
         </p:spPr>
       </p:sp>
     </p:spTree>
@@ -1102,7 +1784,7 @@
       </p:grpSpPr>
       <p:sp>
         <p:nvSpPr>
-          <p:cNvPr id="104" name="Google Shape;104;p6:notes"/>
+          <p:cNvPr id="104" name="Google Shape;104;g3d68296a725_0_18:notes"/>
           <p:cNvSpPr txBox="1"/>
           <p:nvPr>
             <p:ph idx="1" type="body"/>
@@ -1116,6 +1798,10 @@
           <a:prstGeom prst="rect">
             <a:avLst/>
           </a:prstGeom>
+          <a:noFill/>
+          <a:ln>
+            <a:noFill/>
+          </a:ln>
         </p:spPr>
         <p:txBody>
           <a:bodyPr anchorCtr="0" anchor="t" bIns="91425" lIns="91425" spcFirstLastPara="1" rIns="91425" wrap="square" tIns="91425">
@@ -1124,12 +1810,16 @@
           <a:lstStyle/>
           <a:p>
             <a:pPr indent="0" lvl="0" marL="0" rtl="0" algn="l">
-              <a:spcBef>
-                <a:spcPts val="0"/>
-              </a:spcBef>
-              <a:spcAft>
-                <a:spcPts val="0"/>
-              </a:spcAft>
+              <a:lnSpc>
+                <a:spcPct val="100000"/>
+              </a:lnSpc>
+              <a:spcBef>
+                <a:spcPts val="0"/>
+              </a:spcBef>
+              <a:spcAft>
+                <a:spcPts val="0"/>
+              </a:spcAft>
+              <a:buSzPts val="1100"/>
               <a:buNone/>
             </a:pPr>
             <a:r>
@@ -1141,7 +1831,7 @@
       </p:sp>
       <p:sp>
         <p:nvSpPr>
-          <p:cNvPr id="105" name="Google Shape;105;p6:notes"/>
+          <p:cNvPr id="105" name="Google Shape;105;g3d68296a725_0_18:notes"/>
           <p:cNvSpPr/>
           <p:nvPr>
             <p:ph idx="2" type="sldImg"/>
@@ -1150,7 +1840,7 @@
         <p:spPr>
           <a:xfrm>
             <a:off x="1143225" y="685800"/>
-            <a:ext cx="4572225" cy="3429000"/>
+            <a:ext cx="4572300" cy="3429000"/>
           </a:xfrm>
           <a:custGeom>
             <a:rect b="b" l="l" r="r" t="t"/>
@@ -1172,6 +1862,16 @@
               </a:path>
             </a:pathLst>
           </a:custGeom>
+          <a:noFill/>
+          <a:ln cap="flat" cmpd="sng" w="9525">
+            <a:solidFill>
+              <a:srgbClr val="000000"/>
+            </a:solidFill>
+            <a:prstDash val="solid"/>
+            <a:round/>
+            <a:headEnd len="sm" w="sm" type="none"/>
+            <a:tailEnd len="sm" w="sm" type="none"/>
+          </a:ln>
         </p:spPr>
       </p:sp>
     </p:spTree>
@@ -1201,7 +1901,7 @@
       </p:grpSpPr>
       <p:sp>
         <p:nvSpPr>
-          <p:cNvPr id="110" name="Google Shape;110;p7:notes"/>
+          <p:cNvPr id="110" name="Google Shape;110;g3d68296a725_0_24:notes"/>
           <p:cNvSpPr txBox="1"/>
           <p:nvPr>
             <p:ph idx="1" type="body"/>
@@ -1215,6 +1915,10 @@
           <a:prstGeom prst="rect">
             <a:avLst/>
           </a:prstGeom>
+          <a:noFill/>
+          <a:ln>
+            <a:noFill/>
+          </a:ln>
         </p:spPr>
         <p:txBody>
           <a:bodyPr anchorCtr="0" anchor="t" bIns="91425" lIns="91425" spcFirstLastPara="1" rIns="91425" wrap="square" tIns="91425">
@@ -1223,12 +1927,16 @@
           <a:lstStyle/>
           <a:p>
             <a:pPr indent="0" lvl="0" marL="0" rtl="0" algn="l">
-              <a:spcBef>
-                <a:spcPts val="0"/>
-              </a:spcBef>
-              <a:spcAft>
-                <a:spcPts val="0"/>
-              </a:spcAft>
+              <a:lnSpc>
+                <a:spcPct val="100000"/>
+              </a:lnSpc>
+              <a:spcBef>
+                <a:spcPts val="0"/>
+              </a:spcBef>
+              <a:spcAft>
+                <a:spcPts val="0"/>
+              </a:spcAft>
+              <a:buSzPts val="1100"/>
               <a:buNone/>
             </a:pPr>
             <a:r>
@@ -1240,7 +1948,7 @@
       </p:sp>
       <p:sp>
         <p:nvSpPr>
-          <p:cNvPr id="111" name="Google Shape;111;p7:notes"/>
+          <p:cNvPr id="111" name="Google Shape;111;g3d68296a725_0_24:notes"/>
           <p:cNvSpPr/>
           <p:nvPr>
             <p:ph idx="2" type="sldImg"/>
@@ -1249,7 +1957,7 @@
         <p:spPr>
           <a:xfrm>
             <a:off x="1143225" y="685800"/>
-            <a:ext cx="4572225" cy="3429000"/>
+            <a:ext cx="4572300" cy="3429000"/>
           </a:xfrm>
           <a:custGeom>
             <a:rect b="b" l="l" r="r" t="t"/>
@@ -1271,6 +1979,367 @@
               </a:path>
             </a:pathLst>
           </a:custGeom>
+          <a:noFill/>
+          <a:ln cap="flat" cmpd="sng" w="9525">
+            <a:solidFill>
+              <a:srgbClr val="000000"/>
+            </a:solidFill>
+            <a:prstDash val="solid"/>
+            <a:round/>
+            <a:headEnd len="sm" w="sm" type="none"/>
+            <a:tailEnd len="sm" w="sm" type="none"/>
+          </a:ln>
+        </p:spPr>
+      </p:sp>
+    </p:spTree>
+  </p:cSld>
+  <p:clrMapOvr>
+    <a:masterClrMapping/>
+  </p:clrMapOvr>
+</p:notes>
+</file>
+
+<file path=ppt/notesSlides/notesSlide7.xml><?xml version="1.0" encoding="utf-8"?>
+<p:notes xmlns:a="http://schemas.openxmlformats.org/drawingml/2006/main" xmlns:r="http://schemas.openxmlformats.org/officeDocument/2006/relationships" xmlns:mc="http://schemas.openxmlformats.org/markup-compatibility/2006" xmlns:mv="urn:schemas-microsoft-com:mac:vml" xmlns:p="http://schemas.openxmlformats.org/presentationml/2006/main" xmlns:c="http://schemas.openxmlformats.org/drawingml/2006/chart" xmlns:dgm="http://schemas.openxmlformats.org/drawingml/2006/diagram" xmlns:o="urn:schemas-microsoft-com:office:office" xmlns:v="urn:schemas-microsoft-com:vml" xmlns:pvml="urn:schemas-microsoft-com:office:powerpoint" xmlns:com="http://schemas.openxmlformats.org/drawingml/2006/compatibility" xmlns:p14="http://schemas.microsoft.com/office/powerpoint/2010/main" xmlns:p15="http://schemas.microsoft.com/office/powerpoint/2012/main" xmlns:ahyp="http://schemas.microsoft.com/office/drawing/2018/hyperlinkcolor" showMasterPhAnim="0" showMasterSp="0">
+  <p:cSld>
+    <p:spTree>
+      <p:nvGrpSpPr>
+        <p:cNvPr id="115" name="Shape 115"/>
+        <p:cNvGrpSpPr/>
+        <p:nvPr/>
+      </p:nvGrpSpPr>
+      <p:grpSpPr>
+        <a:xfrm>
+          <a:off x="0" y="0"/>
+          <a:ext cx="0" cy="0"/>
+          <a:chOff x="0" y="0"/>
+          <a:chExt cx="0" cy="0"/>
+        </a:xfrm>
+      </p:grpSpPr>
+      <p:sp>
+        <p:nvSpPr>
+          <p:cNvPr id="116" name="Google Shape;116;g3d68296a725_0_30:notes"/>
+          <p:cNvSpPr txBox="1"/>
+          <p:nvPr>
+            <p:ph idx="1" type="body"/>
+          </p:nvPr>
+        </p:nvSpPr>
+        <p:spPr>
+          <a:xfrm>
+            <a:off x="685800" y="4343400"/>
+            <a:ext cx="5486400" cy="4114800"/>
+          </a:xfrm>
+          <a:prstGeom prst="rect">
+            <a:avLst/>
+          </a:prstGeom>
+          <a:noFill/>
+          <a:ln>
+            <a:noFill/>
+          </a:ln>
+        </p:spPr>
+        <p:txBody>
+          <a:bodyPr anchorCtr="0" anchor="t" bIns="91425" lIns="91425" spcFirstLastPara="1" rIns="91425" wrap="square" tIns="91425">
+            <a:noAutofit/>
+          </a:bodyPr>
+          <a:lstStyle/>
+          <a:p>
+            <a:pPr indent="0" lvl="0" marL="0" rtl="0" algn="l">
+              <a:lnSpc>
+                <a:spcPct val="100000"/>
+              </a:lnSpc>
+              <a:spcBef>
+                <a:spcPts val="0"/>
+              </a:spcBef>
+              <a:spcAft>
+                <a:spcPts val="0"/>
+              </a:spcAft>
+              <a:buSzPts val="1100"/>
+              <a:buNone/>
+            </a:pPr>
+            <a:r>
+              <a:t/>
+            </a:r>
+            <a:endParaRPr/>
+          </a:p>
+        </p:txBody>
+      </p:sp>
+      <p:sp>
+        <p:nvSpPr>
+          <p:cNvPr id="117" name="Google Shape;117;g3d68296a725_0_30:notes"/>
+          <p:cNvSpPr/>
+          <p:nvPr>
+            <p:ph idx="2" type="sldImg"/>
+          </p:nvPr>
+        </p:nvSpPr>
+        <p:spPr>
+          <a:xfrm>
+            <a:off x="1143225" y="685800"/>
+            <a:ext cx="4572300" cy="3429000"/>
+          </a:xfrm>
+          <a:custGeom>
+            <a:rect b="b" l="l" r="r" t="t"/>
+            <a:pathLst>
+              <a:path extrusionOk="0" h="120000" w="120000">
+                <a:moveTo>
+                  <a:pt x="0" y="0"/>
+                </a:moveTo>
+                <a:lnTo>
+                  <a:pt x="120000" y="0"/>
+                </a:lnTo>
+                <a:lnTo>
+                  <a:pt x="120000" y="120000"/>
+                </a:lnTo>
+                <a:lnTo>
+                  <a:pt x="0" y="120000"/>
+                </a:lnTo>
+                <a:close/>
+              </a:path>
+            </a:pathLst>
+          </a:custGeom>
+          <a:noFill/>
+          <a:ln cap="flat" cmpd="sng" w="9525">
+            <a:solidFill>
+              <a:srgbClr val="000000"/>
+            </a:solidFill>
+            <a:prstDash val="solid"/>
+            <a:round/>
+            <a:headEnd len="sm" w="sm" type="none"/>
+            <a:tailEnd len="sm" w="sm" type="none"/>
+          </a:ln>
+        </p:spPr>
+      </p:sp>
+    </p:spTree>
+  </p:cSld>
+  <p:clrMapOvr>
+    <a:masterClrMapping/>
+  </p:clrMapOvr>
+</p:notes>
+</file>
+
+<file path=ppt/notesSlides/notesSlide8.xml><?xml version="1.0" encoding="utf-8"?>
+<p:notes xmlns:a="http://schemas.openxmlformats.org/drawingml/2006/main" xmlns:r="http://schemas.openxmlformats.org/officeDocument/2006/relationships" xmlns:mc="http://schemas.openxmlformats.org/markup-compatibility/2006" xmlns:mv="urn:schemas-microsoft-com:mac:vml" xmlns:p="http://schemas.openxmlformats.org/presentationml/2006/main" xmlns:c="http://schemas.openxmlformats.org/drawingml/2006/chart" xmlns:dgm="http://schemas.openxmlformats.org/drawingml/2006/diagram" xmlns:o="urn:schemas-microsoft-com:office:office" xmlns:v="urn:schemas-microsoft-com:vml" xmlns:pvml="urn:schemas-microsoft-com:office:powerpoint" xmlns:com="http://schemas.openxmlformats.org/drawingml/2006/compatibility" xmlns:p14="http://schemas.microsoft.com/office/powerpoint/2010/main" xmlns:p15="http://schemas.microsoft.com/office/powerpoint/2012/main" xmlns:ahyp="http://schemas.microsoft.com/office/drawing/2018/hyperlinkcolor" showMasterPhAnim="0" showMasterSp="0">
+  <p:cSld>
+    <p:spTree>
+      <p:nvGrpSpPr>
+        <p:cNvPr id="121" name="Shape 121"/>
+        <p:cNvGrpSpPr/>
+        <p:nvPr/>
+      </p:nvGrpSpPr>
+      <p:grpSpPr>
+        <a:xfrm>
+          <a:off x="0" y="0"/>
+          <a:ext cx="0" cy="0"/>
+          <a:chOff x="0" y="0"/>
+          <a:chExt cx="0" cy="0"/>
+        </a:xfrm>
+      </p:grpSpPr>
+      <p:sp>
+        <p:nvSpPr>
+          <p:cNvPr id="122" name="Google Shape;122;g3d68296a725_0_36:notes"/>
+          <p:cNvSpPr txBox="1"/>
+          <p:nvPr>
+            <p:ph idx="1" type="body"/>
+          </p:nvPr>
+        </p:nvSpPr>
+        <p:spPr>
+          <a:xfrm>
+            <a:off x="685800" y="4343400"/>
+            <a:ext cx="5486400" cy="4114800"/>
+          </a:xfrm>
+          <a:prstGeom prst="rect">
+            <a:avLst/>
+          </a:prstGeom>
+          <a:noFill/>
+          <a:ln>
+            <a:noFill/>
+          </a:ln>
+        </p:spPr>
+        <p:txBody>
+          <a:bodyPr anchorCtr="0" anchor="t" bIns="91425" lIns="91425" spcFirstLastPara="1" rIns="91425" wrap="square" tIns="91425">
+            <a:noAutofit/>
+          </a:bodyPr>
+          <a:lstStyle/>
+          <a:p>
+            <a:pPr indent="0" lvl="0" marL="0" rtl="0" algn="l">
+              <a:lnSpc>
+                <a:spcPct val="100000"/>
+              </a:lnSpc>
+              <a:spcBef>
+                <a:spcPts val="0"/>
+              </a:spcBef>
+              <a:spcAft>
+                <a:spcPts val="0"/>
+              </a:spcAft>
+              <a:buSzPts val="1100"/>
+              <a:buNone/>
+            </a:pPr>
+            <a:r>
+              <a:t/>
+            </a:r>
+            <a:endParaRPr/>
+          </a:p>
+        </p:txBody>
+      </p:sp>
+      <p:sp>
+        <p:nvSpPr>
+          <p:cNvPr id="123" name="Google Shape;123;g3d68296a725_0_36:notes"/>
+          <p:cNvSpPr/>
+          <p:nvPr>
+            <p:ph idx="2" type="sldImg"/>
+          </p:nvPr>
+        </p:nvSpPr>
+        <p:spPr>
+          <a:xfrm>
+            <a:off x="1143225" y="685800"/>
+            <a:ext cx="4572300" cy="3429000"/>
+          </a:xfrm>
+          <a:custGeom>
+            <a:rect b="b" l="l" r="r" t="t"/>
+            <a:pathLst>
+              <a:path extrusionOk="0" h="120000" w="120000">
+                <a:moveTo>
+                  <a:pt x="0" y="0"/>
+                </a:moveTo>
+                <a:lnTo>
+                  <a:pt x="120000" y="0"/>
+                </a:lnTo>
+                <a:lnTo>
+                  <a:pt x="120000" y="120000"/>
+                </a:lnTo>
+                <a:lnTo>
+                  <a:pt x="0" y="120000"/>
+                </a:lnTo>
+                <a:close/>
+              </a:path>
+            </a:pathLst>
+          </a:custGeom>
+          <a:noFill/>
+          <a:ln cap="flat" cmpd="sng" w="9525">
+            <a:solidFill>
+              <a:srgbClr val="000000"/>
+            </a:solidFill>
+            <a:prstDash val="solid"/>
+            <a:round/>
+            <a:headEnd len="sm" w="sm" type="none"/>
+            <a:tailEnd len="sm" w="sm" type="none"/>
+          </a:ln>
+        </p:spPr>
+      </p:sp>
+    </p:spTree>
+  </p:cSld>
+  <p:clrMapOvr>
+    <a:masterClrMapping/>
+  </p:clrMapOvr>
+</p:notes>
+</file>
+
+<file path=ppt/notesSlides/notesSlide9.xml><?xml version="1.0" encoding="utf-8"?>
+<p:notes xmlns:a="http://schemas.openxmlformats.org/drawingml/2006/main" xmlns:r="http://schemas.openxmlformats.org/officeDocument/2006/relationships" xmlns:mc="http://schemas.openxmlformats.org/markup-compatibility/2006" xmlns:mv="urn:schemas-microsoft-com:mac:vml" xmlns:p="http://schemas.openxmlformats.org/presentationml/2006/main" xmlns:c="http://schemas.openxmlformats.org/drawingml/2006/chart" xmlns:dgm="http://schemas.openxmlformats.org/drawingml/2006/diagram" xmlns:o="urn:schemas-microsoft-com:office:office" xmlns:v="urn:schemas-microsoft-com:vml" xmlns:pvml="urn:schemas-microsoft-com:office:powerpoint" xmlns:com="http://schemas.openxmlformats.org/drawingml/2006/compatibility" xmlns:p14="http://schemas.microsoft.com/office/powerpoint/2010/main" xmlns:p15="http://schemas.microsoft.com/office/powerpoint/2012/main" xmlns:ahyp="http://schemas.microsoft.com/office/drawing/2018/hyperlinkcolor" showMasterPhAnim="0" showMasterSp="0">
+  <p:cSld>
+    <p:spTree>
+      <p:nvGrpSpPr>
+        <p:cNvPr id="127" name="Shape 127"/>
+        <p:cNvGrpSpPr/>
+        <p:nvPr/>
+      </p:nvGrpSpPr>
+      <p:grpSpPr>
+        <a:xfrm>
+          <a:off x="0" y="0"/>
+          <a:ext cx="0" cy="0"/>
+          <a:chOff x="0" y="0"/>
+          <a:chExt cx="0" cy="0"/>
+        </a:xfrm>
+      </p:grpSpPr>
+      <p:sp>
+        <p:nvSpPr>
+          <p:cNvPr id="128" name="Google Shape;128;g3d68296a725_0_42:notes"/>
+          <p:cNvSpPr txBox="1"/>
+          <p:nvPr>
+            <p:ph idx="1" type="body"/>
+          </p:nvPr>
+        </p:nvSpPr>
+        <p:spPr>
+          <a:xfrm>
+            <a:off x="685800" y="4343400"/>
+            <a:ext cx="5486400" cy="4114800"/>
+          </a:xfrm>
+          <a:prstGeom prst="rect">
+            <a:avLst/>
+          </a:prstGeom>
+          <a:noFill/>
+          <a:ln>
+            <a:noFill/>
+          </a:ln>
+        </p:spPr>
+        <p:txBody>
+          <a:bodyPr anchorCtr="0" anchor="t" bIns="91425" lIns="91425" spcFirstLastPara="1" rIns="91425" wrap="square" tIns="91425">
+            <a:noAutofit/>
+          </a:bodyPr>
+          <a:lstStyle/>
+          <a:p>
+            <a:pPr indent="0" lvl="0" marL="0" rtl="0" algn="l">
+              <a:lnSpc>
+                <a:spcPct val="100000"/>
+              </a:lnSpc>
+              <a:spcBef>
+                <a:spcPts val="0"/>
+              </a:spcBef>
+              <a:spcAft>
+                <a:spcPts val="0"/>
+              </a:spcAft>
+              <a:buSzPts val="1100"/>
+              <a:buNone/>
+            </a:pPr>
+            <a:r>
+              <a:t/>
+            </a:r>
+            <a:endParaRPr/>
+          </a:p>
+        </p:txBody>
+      </p:sp>
+      <p:sp>
+        <p:nvSpPr>
+          <p:cNvPr id="129" name="Google Shape;129;g3d68296a725_0_42:notes"/>
+          <p:cNvSpPr/>
+          <p:nvPr>
+            <p:ph idx="2" type="sldImg"/>
+          </p:nvPr>
+        </p:nvSpPr>
+        <p:spPr>
+          <a:xfrm>
+            <a:off x="1143225" y="685800"/>
+            <a:ext cx="4572300" cy="3429000"/>
+          </a:xfrm>
+          <a:custGeom>
+            <a:rect b="b" l="l" r="r" t="t"/>
+            <a:pathLst>
+              <a:path extrusionOk="0" h="120000" w="120000">
+                <a:moveTo>
+                  <a:pt x="0" y="0"/>
+                </a:moveTo>
+                <a:lnTo>
+                  <a:pt x="120000" y="0"/>
+                </a:lnTo>
+                <a:lnTo>
+                  <a:pt x="120000" y="120000"/>
+                </a:lnTo>
+                <a:lnTo>
+                  <a:pt x="0" y="120000"/>
+                </a:lnTo>
+                <a:close/>
+              </a:path>
+            </a:pathLst>
+          </a:custGeom>
+          <a:noFill/>
+          <a:ln cap="flat" cmpd="sng" w="9525">
+            <a:solidFill>
+              <a:srgbClr val="000000"/>
+            </a:solidFill>
+            <a:prstDash val="solid"/>
+            <a:round/>
+            <a:headEnd len="sm" w="sm" type="none"/>
+            <a:tailEnd len="sm" w="sm" type="none"/>
+          </a:ln>
         </p:spPr>
       </p:sp>
     </p:spTree>
@@ -1342,7 +2411,10 @@
               <a:buNone/>
               <a:defRPr sz="6000"/>
             </a:lvl1pPr>
-            <a:lvl2pPr lvl="1">
+            <a:lvl2pPr lvl="1" algn="l">
+              <a:lnSpc>
+                <a:spcPct val="100000"/>
+              </a:lnSpc>
               <a:spcBef>
                 <a:spcPts val="0"/>
               </a:spcBef>
@@ -1353,7 +2425,10 @@
               <a:buNone/>
               <a:defRPr/>
             </a:lvl2pPr>
-            <a:lvl3pPr lvl="2">
+            <a:lvl3pPr lvl="2" algn="l">
+              <a:lnSpc>
+                <a:spcPct val="100000"/>
+              </a:lnSpc>
               <a:spcBef>
                 <a:spcPts val="0"/>
               </a:spcBef>
@@ -1364,7 +2439,10 @@
               <a:buNone/>
               <a:defRPr/>
             </a:lvl3pPr>
-            <a:lvl4pPr lvl="3">
+            <a:lvl4pPr lvl="3" algn="l">
+              <a:lnSpc>
+                <a:spcPct val="100000"/>
+              </a:lnSpc>
               <a:spcBef>
                 <a:spcPts val="0"/>
               </a:spcBef>
@@ -1375,7 +2453,10 @@
               <a:buNone/>
               <a:defRPr/>
             </a:lvl4pPr>
-            <a:lvl5pPr lvl="4">
+            <a:lvl5pPr lvl="4" algn="l">
+              <a:lnSpc>
+                <a:spcPct val="100000"/>
+              </a:lnSpc>
               <a:spcBef>
                 <a:spcPts val="0"/>
               </a:spcBef>
@@ -1386,7 +2467,10 @@
               <a:buNone/>
               <a:defRPr/>
             </a:lvl5pPr>
-            <a:lvl6pPr lvl="5">
+            <a:lvl6pPr lvl="5" algn="l">
+              <a:lnSpc>
+                <a:spcPct val="100000"/>
+              </a:lnSpc>
               <a:spcBef>
                 <a:spcPts val="0"/>
               </a:spcBef>
@@ -1397,7 +2481,10 @@
               <a:buNone/>
               <a:defRPr/>
             </a:lvl6pPr>
-            <a:lvl7pPr lvl="6">
+            <a:lvl7pPr lvl="6" algn="l">
+              <a:lnSpc>
+                <a:spcPct val="100000"/>
+              </a:lnSpc>
               <a:spcBef>
                 <a:spcPts val="0"/>
               </a:spcBef>
@@ -1408,7 +2495,10 @@
               <a:buNone/>
               <a:defRPr/>
             </a:lvl7pPr>
-            <a:lvl8pPr lvl="7">
+            <a:lvl8pPr lvl="7" algn="l">
+              <a:lnSpc>
+                <a:spcPct val="100000"/>
+              </a:lnSpc>
               <a:spcBef>
                 <a:spcPts val="0"/>
               </a:spcBef>
@@ -1419,7 +2509,10 @@
               <a:buNone/>
               <a:defRPr/>
             </a:lvl8pPr>
-            <a:lvl9pPr lvl="8">
+            <a:lvl9pPr lvl="8" algn="l">
+              <a:lnSpc>
+                <a:spcPct val="100000"/>
+              </a:lnSpc>
               <a:spcBef>
                 <a:spcPts val="0"/>
               </a:spcBef>
@@ -1644,6 +2737,9 @@
           </a:bodyPr>
           <a:lstStyle>
             <a:lvl1pPr lvl="0" algn="l">
+              <a:lnSpc>
+                <a:spcPct val="100000"/>
+              </a:lnSpc>
               <a:spcBef>
                 <a:spcPts val="0"/>
               </a:spcBef>
@@ -1655,6 +2751,9 @@
               <a:defRPr/>
             </a:lvl1pPr>
             <a:lvl2pPr lvl="1" algn="l">
+              <a:lnSpc>
+                <a:spcPct val="100000"/>
+              </a:lnSpc>
               <a:spcBef>
                 <a:spcPts val="0"/>
               </a:spcBef>
@@ -1666,6 +2765,9 @@
               <a:defRPr/>
             </a:lvl2pPr>
             <a:lvl3pPr lvl="2" algn="l">
+              <a:lnSpc>
+                <a:spcPct val="100000"/>
+              </a:lnSpc>
               <a:spcBef>
                 <a:spcPts val="0"/>
               </a:spcBef>
@@ -1677,6 +2779,9 @@
               <a:defRPr/>
             </a:lvl3pPr>
             <a:lvl4pPr lvl="3" algn="l">
+              <a:lnSpc>
+                <a:spcPct val="100000"/>
+              </a:lnSpc>
               <a:spcBef>
                 <a:spcPts val="0"/>
               </a:spcBef>
@@ -1688,6 +2793,9 @@
               <a:defRPr/>
             </a:lvl4pPr>
             <a:lvl5pPr lvl="4" algn="l">
+              <a:lnSpc>
+                <a:spcPct val="100000"/>
+              </a:lnSpc>
               <a:spcBef>
                 <a:spcPts val="0"/>
               </a:spcBef>
@@ -1699,6 +2807,9 @@
               <a:defRPr/>
             </a:lvl5pPr>
             <a:lvl6pPr lvl="5" algn="l">
+              <a:lnSpc>
+                <a:spcPct val="100000"/>
+              </a:lnSpc>
               <a:spcBef>
                 <a:spcPts val="0"/>
               </a:spcBef>
@@ -1710,6 +2821,9 @@
               <a:defRPr/>
             </a:lvl6pPr>
             <a:lvl7pPr lvl="6" algn="l">
+              <a:lnSpc>
+                <a:spcPct val="100000"/>
+              </a:lnSpc>
               <a:spcBef>
                 <a:spcPts val="0"/>
               </a:spcBef>
@@ -1721,6 +2835,9 @@
               <a:defRPr/>
             </a:lvl7pPr>
             <a:lvl8pPr lvl="7" algn="l">
+              <a:lnSpc>
+                <a:spcPct val="100000"/>
+              </a:lnSpc>
               <a:spcBef>
                 <a:spcPts val="0"/>
               </a:spcBef>
@@ -1732,6 +2849,9 @@
               <a:defRPr/>
             </a:lvl8pPr>
             <a:lvl9pPr lvl="8" algn="l">
+              <a:lnSpc>
+                <a:spcPct val="100000"/>
+              </a:lnSpc>
               <a:spcBef>
                 <a:spcPts val="0"/>
               </a:spcBef>
@@ -1773,6 +2893,9 @@
           </a:bodyPr>
           <a:lstStyle>
             <a:lvl1pPr lvl="0" algn="ctr">
+              <a:lnSpc>
+                <a:spcPct val="100000"/>
+              </a:lnSpc>
               <a:spcBef>
                 <a:spcPts val="0"/>
               </a:spcBef>
@@ -1784,6 +2907,9 @@
               <a:defRPr/>
             </a:lvl1pPr>
             <a:lvl2pPr lvl="1" algn="l">
+              <a:lnSpc>
+                <a:spcPct val="100000"/>
+              </a:lnSpc>
               <a:spcBef>
                 <a:spcPts val="0"/>
               </a:spcBef>
@@ -1795,6 +2921,9 @@
               <a:defRPr/>
             </a:lvl2pPr>
             <a:lvl3pPr lvl="2" algn="l">
+              <a:lnSpc>
+                <a:spcPct val="100000"/>
+              </a:lnSpc>
               <a:spcBef>
                 <a:spcPts val="0"/>
               </a:spcBef>
@@ -1806,6 +2935,9 @@
               <a:defRPr/>
             </a:lvl3pPr>
             <a:lvl4pPr lvl="3" algn="l">
+              <a:lnSpc>
+                <a:spcPct val="100000"/>
+              </a:lnSpc>
               <a:spcBef>
                 <a:spcPts val="0"/>
               </a:spcBef>
@@ -1817,6 +2949,9 @@
               <a:defRPr/>
             </a:lvl4pPr>
             <a:lvl5pPr lvl="4" algn="l">
+              <a:lnSpc>
+                <a:spcPct val="100000"/>
+              </a:lnSpc>
               <a:spcBef>
                 <a:spcPts val="0"/>
               </a:spcBef>
@@ -1828,6 +2963,9 @@
               <a:defRPr/>
             </a:lvl5pPr>
             <a:lvl6pPr lvl="5" algn="l">
+              <a:lnSpc>
+                <a:spcPct val="100000"/>
+              </a:lnSpc>
               <a:spcBef>
                 <a:spcPts val="0"/>
               </a:spcBef>
@@ -1839,6 +2977,9 @@
               <a:defRPr/>
             </a:lvl6pPr>
             <a:lvl7pPr lvl="6" algn="l">
+              <a:lnSpc>
+                <a:spcPct val="100000"/>
+              </a:lnSpc>
               <a:spcBef>
                 <a:spcPts val="0"/>
               </a:spcBef>
@@ -1850,6 +2991,9 @@
               <a:defRPr/>
             </a:lvl7pPr>
             <a:lvl8pPr lvl="7" algn="l">
+              <a:lnSpc>
+                <a:spcPct val="100000"/>
+              </a:lnSpc>
               <a:spcBef>
                 <a:spcPts val="0"/>
               </a:spcBef>
@@ -1861,6 +3005,9 @@
               <a:defRPr/>
             </a:lvl8pPr>
             <a:lvl9pPr lvl="8" algn="l">
+              <a:lnSpc>
+                <a:spcPct val="100000"/>
+              </a:lnSpc>
               <a:spcBef>
                 <a:spcPts val="0"/>
               </a:spcBef>
@@ -1901,68 +3048,239 @@
             <a:noAutofit/>
           </a:bodyPr>
           <a:lstStyle>
-            <a:lvl1pPr indent="0" lvl="0" marL="0" algn="r">
-              <a:spcBef>
-                <a:spcPts val="0"/>
-              </a:spcBef>
-              <a:buNone/>
-              <a:defRPr/>
+            <a:lvl1pPr indent="0" lvl="0" marL="0" marR="0" algn="r">
+              <a:lnSpc>
+                <a:spcPct val="100000"/>
+              </a:lnSpc>
+              <a:spcBef>
+                <a:spcPts val="0"/>
+              </a:spcBef>
+              <a:spcAft>
+                <a:spcPts val="0"/>
+              </a:spcAft>
+              <a:buClr>
+                <a:srgbClr val="000000"/>
+              </a:buClr>
+              <a:buSzPts val="1200"/>
+              <a:buFont typeface="Arial"/>
+              <a:buNone/>
+              <a:defRPr b="0" i="0" sz="1200" u="none" cap="none" strike="noStrike">
+                <a:solidFill>
+                  <a:srgbClr val="E9E9E9"/>
+                </a:solidFill>
+                <a:latin typeface="Arial"/>
+                <a:ea typeface="Arial"/>
+                <a:cs typeface="Arial"/>
+                <a:sym typeface="Arial"/>
+              </a:defRPr>
             </a:lvl1pPr>
-            <a:lvl2pPr indent="0" lvl="1" marL="0" algn="r">
-              <a:spcBef>
-                <a:spcPts val="0"/>
-              </a:spcBef>
-              <a:buNone/>
-              <a:defRPr/>
+            <a:lvl2pPr indent="0" lvl="1" marL="0" marR="0" algn="r">
+              <a:lnSpc>
+                <a:spcPct val="100000"/>
+              </a:lnSpc>
+              <a:spcBef>
+                <a:spcPts val="0"/>
+              </a:spcBef>
+              <a:spcAft>
+                <a:spcPts val="0"/>
+              </a:spcAft>
+              <a:buClr>
+                <a:srgbClr val="000000"/>
+              </a:buClr>
+              <a:buSzPts val="1200"/>
+              <a:buFont typeface="Arial"/>
+              <a:buNone/>
+              <a:defRPr b="0" i="0" sz="1200" u="none" cap="none" strike="noStrike">
+                <a:solidFill>
+                  <a:srgbClr val="E9E9E9"/>
+                </a:solidFill>
+                <a:latin typeface="Arial"/>
+                <a:ea typeface="Arial"/>
+                <a:cs typeface="Arial"/>
+                <a:sym typeface="Arial"/>
+              </a:defRPr>
             </a:lvl2pPr>
-            <a:lvl3pPr indent="0" lvl="2" marL="0" algn="r">
-              <a:spcBef>
-                <a:spcPts val="0"/>
-              </a:spcBef>
-              <a:buNone/>
-              <a:defRPr/>
+            <a:lvl3pPr indent="0" lvl="2" marL="0" marR="0" algn="r">
+              <a:lnSpc>
+                <a:spcPct val="100000"/>
+              </a:lnSpc>
+              <a:spcBef>
+                <a:spcPts val="0"/>
+              </a:spcBef>
+              <a:spcAft>
+                <a:spcPts val="0"/>
+              </a:spcAft>
+              <a:buClr>
+                <a:srgbClr val="000000"/>
+              </a:buClr>
+              <a:buSzPts val="1200"/>
+              <a:buFont typeface="Arial"/>
+              <a:buNone/>
+              <a:defRPr b="0" i="0" sz="1200" u="none" cap="none" strike="noStrike">
+                <a:solidFill>
+                  <a:srgbClr val="E9E9E9"/>
+                </a:solidFill>
+                <a:latin typeface="Arial"/>
+                <a:ea typeface="Arial"/>
+                <a:cs typeface="Arial"/>
+                <a:sym typeface="Arial"/>
+              </a:defRPr>
             </a:lvl3pPr>
-            <a:lvl4pPr indent="0" lvl="3" marL="0" algn="r">
-              <a:spcBef>
-                <a:spcPts val="0"/>
-              </a:spcBef>
-              <a:buNone/>
-              <a:defRPr/>
+            <a:lvl4pPr indent="0" lvl="3" marL="0" marR="0" algn="r">
+              <a:lnSpc>
+                <a:spcPct val="100000"/>
+              </a:lnSpc>
+              <a:spcBef>
+                <a:spcPts val="0"/>
+              </a:spcBef>
+              <a:spcAft>
+                <a:spcPts val="0"/>
+              </a:spcAft>
+              <a:buClr>
+                <a:srgbClr val="000000"/>
+              </a:buClr>
+              <a:buSzPts val="1200"/>
+              <a:buFont typeface="Arial"/>
+              <a:buNone/>
+              <a:defRPr b="0" i="0" sz="1200" u="none" cap="none" strike="noStrike">
+                <a:solidFill>
+                  <a:srgbClr val="E9E9E9"/>
+                </a:solidFill>
+                <a:latin typeface="Arial"/>
+                <a:ea typeface="Arial"/>
+                <a:cs typeface="Arial"/>
+                <a:sym typeface="Arial"/>
+              </a:defRPr>
             </a:lvl4pPr>
-            <a:lvl5pPr indent="0" lvl="4" marL="0" algn="r">
-              <a:spcBef>
-                <a:spcPts val="0"/>
-              </a:spcBef>
-              <a:buNone/>
-              <a:defRPr/>
+            <a:lvl5pPr indent="0" lvl="4" marL="0" marR="0" algn="r">
+              <a:lnSpc>
+                <a:spcPct val="100000"/>
+              </a:lnSpc>
+              <a:spcBef>
+                <a:spcPts val="0"/>
+              </a:spcBef>
+              <a:spcAft>
+                <a:spcPts val="0"/>
+              </a:spcAft>
+              <a:buClr>
+                <a:srgbClr val="000000"/>
+              </a:buClr>
+              <a:buSzPts val="1200"/>
+              <a:buFont typeface="Arial"/>
+              <a:buNone/>
+              <a:defRPr b="0" i="0" sz="1200" u="none" cap="none" strike="noStrike">
+                <a:solidFill>
+                  <a:srgbClr val="E9E9E9"/>
+                </a:solidFill>
+                <a:latin typeface="Arial"/>
+                <a:ea typeface="Arial"/>
+                <a:cs typeface="Arial"/>
+                <a:sym typeface="Arial"/>
+              </a:defRPr>
             </a:lvl5pPr>
-            <a:lvl6pPr indent="0" lvl="5" marL="0" algn="r">
-              <a:spcBef>
-                <a:spcPts val="0"/>
-              </a:spcBef>
-              <a:buNone/>
-              <a:defRPr/>
+            <a:lvl6pPr indent="0" lvl="5" marL="0" marR="0" algn="r">
+              <a:lnSpc>
+                <a:spcPct val="100000"/>
+              </a:lnSpc>
+              <a:spcBef>
+                <a:spcPts val="0"/>
+              </a:spcBef>
+              <a:spcAft>
+                <a:spcPts val="0"/>
+              </a:spcAft>
+              <a:buClr>
+                <a:srgbClr val="000000"/>
+              </a:buClr>
+              <a:buSzPts val="1200"/>
+              <a:buFont typeface="Arial"/>
+              <a:buNone/>
+              <a:defRPr b="0" i="0" sz="1200" u="none" cap="none" strike="noStrike">
+                <a:solidFill>
+                  <a:srgbClr val="E9E9E9"/>
+                </a:solidFill>
+                <a:latin typeface="Arial"/>
+                <a:ea typeface="Arial"/>
+                <a:cs typeface="Arial"/>
+                <a:sym typeface="Arial"/>
+              </a:defRPr>
             </a:lvl6pPr>
-            <a:lvl7pPr indent="0" lvl="6" marL="0" algn="r">
-              <a:spcBef>
-                <a:spcPts val="0"/>
-              </a:spcBef>
-              <a:buNone/>
-              <a:defRPr/>
+            <a:lvl7pPr indent="0" lvl="6" marL="0" marR="0" algn="r">
+              <a:lnSpc>
+                <a:spcPct val="100000"/>
+              </a:lnSpc>
+              <a:spcBef>
+                <a:spcPts val="0"/>
+              </a:spcBef>
+              <a:spcAft>
+                <a:spcPts val="0"/>
+              </a:spcAft>
+              <a:buClr>
+                <a:srgbClr val="000000"/>
+              </a:buClr>
+              <a:buSzPts val="1200"/>
+              <a:buFont typeface="Arial"/>
+              <a:buNone/>
+              <a:defRPr b="0" i="0" sz="1200" u="none" cap="none" strike="noStrike">
+                <a:solidFill>
+                  <a:srgbClr val="E9E9E9"/>
+                </a:solidFill>
+                <a:latin typeface="Arial"/>
+                <a:ea typeface="Arial"/>
+                <a:cs typeface="Arial"/>
+                <a:sym typeface="Arial"/>
+              </a:defRPr>
             </a:lvl7pPr>
-            <a:lvl8pPr indent="0" lvl="7" marL="0" algn="r">
-              <a:spcBef>
-                <a:spcPts val="0"/>
-              </a:spcBef>
-              <a:buNone/>
-              <a:defRPr/>
+            <a:lvl8pPr indent="0" lvl="7" marL="0" marR="0" algn="r">
+              <a:lnSpc>
+                <a:spcPct val="100000"/>
+              </a:lnSpc>
+              <a:spcBef>
+                <a:spcPts val="0"/>
+              </a:spcBef>
+              <a:spcAft>
+                <a:spcPts val="0"/>
+              </a:spcAft>
+              <a:buClr>
+                <a:srgbClr val="000000"/>
+              </a:buClr>
+              <a:buSzPts val="1200"/>
+              <a:buFont typeface="Arial"/>
+              <a:buNone/>
+              <a:defRPr b="0" i="0" sz="1200" u="none" cap="none" strike="noStrike">
+                <a:solidFill>
+                  <a:srgbClr val="E9E9E9"/>
+                </a:solidFill>
+                <a:latin typeface="Arial"/>
+                <a:ea typeface="Arial"/>
+                <a:cs typeface="Arial"/>
+                <a:sym typeface="Arial"/>
+              </a:defRPr>
             </a:lvl8pPr>
-            <a:lvl9pPr indent="0" lvl="8" marL="0" algn="r">
-              <a:spcBef>
-                <a:spcPts val="0"/>
-              </a:spcBef>
-              <a:buNone/>
-              <a:defRPr/>
+            <a:lvl9pPr indent="0" lvl="8" marL="0" marR="0" algn="r">
+              <a:lnSpc>
+                <a:spcPct val="100000"/>
+              </a:lnSpc>
+              <a:spcBef>
+                <a:spcPts val="0"/>
+              </a:spcBef>
+              <a:spcAft>
+                <a:spcPts val="0"/>
+              </a:spcAft>
+              <a:buClr>
+                <a:srgbClr val="000000"/>
+              </a:buClr>
+              <a:buSzPts val="1200"/>
+              <a:buFont typeface="Arial"/>
+              <a:buNone/>
+              <a:defRPr b="0" i="0" sz="1200" u="none" cap="none" strike="noStrike">
+                <a:solidFill>
+                  <a:srgbClr val="E9E9E9"/>
+                </a:solidFill>
+                <a:latin typeface="Arial"/>
+                <a:ea typeface="Arial"/>
+                <a:cs typeface="Arial"/>
+                <a:sym typeface="Arial"/>
+              </a:defRPr>
             </a:lvl9pPr>
           </a:lstStyle>
           <a:p>
@@ -2051,7 +3369,10 @@
               <a:buNone/>
               <a:defRPr/>
             </a:lvl1pPr>
-            <a:lvl2pPr lvl="1">
+            <a:lvl2pPr lvl="1" algn="l">
+              <a:lnSpc>
+                <a:spcPct val="100000"/>
+              </a:lnSpc>
               <a:spcBef>
                 <a:spcPts val="0"/>
               </a:spcBef>
@@ -2062,7 +3383,10 @@
               <a:buNone/>
               <a:defRPr/>
             </a:lvl2pPr>
-            <a:lvl3pPr lvl="2">
+            <a:lvl3pPr lvl="2" algn="l">
+              <a:lnSpc>
+                <a:spcPct val="100000"/>
+              </a:lnSpc>
               <a:spcBef>
                 <a:spcPts val="0"/>
               </a:spcBef>
@@ -2073,7 +3397,10 @@
               <a:buNone/>
               <a:defRPr/>
             </a:lvl3pPr>
-            <a:lvl4pPr lvl="3">
+            <a:lvl4pPr lvl="3" algn="l">
+              <a:lnSpc>
+                <a:spcPct val="100000"/>
+              </a:lnSpc>
               <a:spcBef>
                 <a:spcPts val="0"/>
               </a:spcBef>
@@ -2084,7 +3411,10 @@
               <a:buNone/>
               <a:defRPr/>
             </a:lvl4pPr>
-            <a:lvl5pPr lvl="4">
+            <a:lvl5pPr lvl="4" algn="l">
+              <a:lnSpc>
+                <a:spcPct val="100000"/>
+              </a:lnSpc>
               <a:spcBef>
                 <a:spcPts val="0"/>
               </a:spcBef>
@@ -2095,7 +3425,10 @@
               <a:buNone/>
               <a:defRPr/>
             </a:lvl5pPr>
-            <a:lvl6pPr lvl="5">
+            <a:lvl6pPr lvl="5" algn="l">
+              <a:lnSpc>
+                <a:spcPct val="100000"/>
+              </a:lnSpc>
               <a:spcBef>
                 <a:spcPts val="0"/>
               </a:spcBef>
@@ -2106,7 +3439,10 @@
               <a:buNone/>
               <a:defRPr/>
             </a:lvl6pPr>
-            <a:lvl7pPr lvl="6">
+            <a:lvl7pPr lvl="6" algn="l">
+              <a:lnSpc>
+                <a:spcPct val="100000"/>
+              </a:lnSpc>
               <a:spcBef>
                 <a:spcPts val="0"/>
               </a:spcBef>
@@ -2117,7 +3453,10 @@
               <a:buNone/>
               <a:defRPr/>
             </a:lvl7pPr>
-            <a:lvl8pPr lvl="7">
+            <a:lvl8pPr lvl="7" algn="l">
+              <a:lnSpc>
+                <a:spcPct val="100000"/>
+              </a:lnSpc>
               <a:spcBef>
                 <a:spcPts val="0"/>
               </a:spcBef>
@@ -2128,7 +3467,10 @@
               <a:buNone/>
               <a:defRPr/>
             </a:lvl8pPr>
-            <a:lvl9pPr lvl="8">
+            <a:lvl9pPr lvl="8" algn="l">
+              <a:lnSpc>
+                <a:spcPct val="100000"/>
+              </a:lnSpc>
               <a:spcBef>
                 <a:spcPts val="0"/>
               </a:spcBef>
@@ -2353,6 +3695,9 @@
           </a:bodyPr>
           <a:lstStyle>
             <a:lvl1pPr lvl="0" algn="l">
+              <a:lnSpc>
+                <a:spcPct val="100000"/>
+              </a:lnSpc>
               <a:spcBef>
                 <a:spcPts val="0"/>
               </a:spcBef>
@@ -2364,6 +3709,9 @@
               <a:defRPr/>
             </a:lvl1pPr>
             <a:lvl2pPr lvl="1" algn="l">
+              <a:lnSpc>
+                <a:spcPct val="100000"/>
+              </a:lnSpc>
               <a:spcBef>
                 <a:spcPts val="0"/>
               </a:spcBef>
@@ -2375,6 +3723,9 @@
               <a:defRPr/>
             </a:lvl2pPr>
             <a:lvl3pPr lvl="2" algn="l">
+              <a:lnSpc>
+                <a:spcPct val="100000"/>
+              </a:lnSpc>
               <a:spcBef>
                 <a:spcPts val="0"/>
               </a:spcBef>
@@ -2386,6 +3737,9 @@
               <a:defRPr/>
             </a:lvl3pPr>
             <a:lvl4pPr lvl="3" algn="l">
+              <a:lnSpc>
+                <a:spcPct val="100000"/>
+              </a:lnSpc>
               <a:spcBef>
                 <a:spcPts val="0"/>
               </a:spcBef>
@@ -2397,6 +3751,9 @@
               <a:defRPr/>
             </a:lvl4pPr>
             <a:lvl5pPr lvl="4" algn="l">
+              <a:lnSpc>
+                <a:spcPct val="100000"/>
+              </a:lnSpc>
               <a:spcBef>
                 <a:spcPts val="0"/>
               </a:spcBef>
@@ -2408,6 +3765,9 @@
               <a:defRPr/>
             </a:lvl5pPr>
             <a:lvl6pPr lvl="5" algn="l">
+              <a:lnSpc>
+                <a:spcPct val="100000"/>
+              </a:lnSpc>
               <a:spcBef>
                 <a:spcPts val="0"/>
               </a:spcBef>
@@ -2419,6 +3779,9 @@
               <a:defRPr/>
             </a:lvl6pPr>
             <a:lvl7pPr lvl="6" algn="l">
+              <a:lnSpc>
+                <a:spcPct val="100000"/>
+              </a:lnSpc>
               <a:spcBef>
                 <a:spcPts val="0"/>
               </a:spcBef>
@@ -2430,6 +3793,9 @@
               <a:defRPr/>
             </a:lvl7pPr>
             <a:lvl8pPr lvl="7" algn="l">
+              <a:lnSpc>
+                <a:spcPct val="100000"/>
+              </a:lnSpc>
               <a:spcBef>
                 <a:spcPts val="0"/>
               </a:spcBef>
@@ -2441,6 +3807,9 @@
               <a:defRPr/>
             </a:lvl8pPr>
             <a:lvl9pPr lvl="8" algn="l">
+              <a:lnSpc>
+                <a:spcPct val="100000"/>
+              </a:lnSpc>
               <a:spcBef>
                 <a:spcPts val="0"/>
               </a:spcBef>
@@ -2482,6 +3851,9 @@
           </a:bodyPr>
           <a:lstStyle>
             <a:lvl1pPr lvl="0" algn="ctr">
+              <a:lnSpc>
+                <a:spcPct val="100000"/>
+              </a:lnSpc>
               <a:spcBef>
                 <a:spcPts val="0"/>
               </a:spcBef>
@@ -2493,6 +3865,9 @@
               <a:defRPr/>
             </a:lvl1pPr>
             <a:lvl2pPr lvl="1" algn="l">
+              <a:lnSpc>
+                <a:spcPct val="100000"/>
+              </a:lnSpc>
               <a:spcBef>
                 <a:spcPts val="0"/>
               </a:spcBef>
@@ -2504,6 +3879,9 @@
               <a:defRPr/>
             </a:lvl2pPr>
             <a:lvl3pPr lvl="2" algn="l">
+              <a:lnSpc>
+                <a:spcPct val="100000"/>
+              </a:lnSpc>
               <a:spcBef>
                 <a:spcPts val="0"/>
               </a:spcBef>
@@ -2515,6 +3893,9 @@
               <a:defRPr/>
             </a:lvl3pPr>
             <a:lvl4pPr lvl="3" algn="l">
+              <a:lnSpc>
+                <a:spcPct val="100000"/>
+              </a:lnSpc>
               <a:spcBef>
                 <a:spcPts val="0"/>
               </a:spcBef>
@@ -2526,6 +3907,9 @@
               <a:defRPr/>
             </a:lvl4pPr>
             <a:lvl5pPr lvl="4" algn="l">
+              <a:lnSpc>
+                <a:spcPct val="100000"/>
+              </a:lnSpc>
               <a:spcBef>
                 <a:spcPts val="0"/>
               </a:spcBef>
@@ -2537,6 +3921,9 @@
               <a:defRPr/>
             </a:lvl5pPr>
             <a:lvl6pPr lvl="5" algn="l">
+              <a:lnSpc>
+                <a:spcPct val="100000"/>
+              </a:lnSpc>
               <a:spcBef>
                 <a:spcPts val="0"/>
               </a:spcBef>
@@ -2548,6 +3935,9 @@
               <a:defRPr/>
             </a:lvl6pPr>
             <a:lvl7pPr lvl="6" algn="l">
+              <a:lnSpc>
+                <a:spcPct val="100000"/>
+              </a:lnSpc>
               <a:spcBef>
                 <a:spcPts val="0"/>
               </a:spcBef>
@@ -2559,6 +3949,9 @@
               <a:defRPr/>
             </a:lvl7pPr>
             <a:lvl8pPr lvl="7" algn="l">
+              <a:lnSpc>
+                <a:spcPct val="100000"/>
+              </a:lnSpc>
               <a:spcBef>
                 <a:spcPts val="0"/>
               </a:spcBef>
@@ -2570,6 +3963,9 @@
               <a:defRPr/>
             </a:lvl8pPr>
             <a:lvl9pPr lvl="8" algn="l">
+              <a:lnSpc>
+                <a:spcPct val="100000"/>
+              </a:lnSpc>
               <a:spcBef>
                 <a:spcPts val="0"/>
               </a:spcBef>
@@ -2610,68 +4006,239 @@
             <a:noAutofit/>
           </a:bodyPr>
           <a:lstStyle>
-            <a:lvl1pPr indent="0" lvl="0" marL="0" algn="r">
-              <a:spcBef>
-                <a:spcPts val="0"/>
-              </a:spcBef>
-              <a:buNone/>
-              <a:defRPr/>
+            <a:lvl1pPr indent="0" lvl="0" marL="0" marR="0" algn="r">
+              <a:lnSpc>
+                <a:spcPct val="100000"/>
+              </a:lnSpc>
+              <a:spcBef>
+                <a:spcPts val="0"/>
+              </a:spcBef>
+              <a:spcAft>
+                <a:spcPts val="0"/>
+              </a:spcAft>
+              <a:buClr>
+                <a:srgbClr val="000000"/>
+              </a:buClr>
+              <a:buSzPts val="1200"/>
+              <a:buFont typeface="Arial"/>
+              <a:buNone/>
+              <a:defRPr b="0" i="0" sz="1200" u="none" cap="none" strike="noStrike">
+                <a:solidFill>
+                  <a:srgbClr val="E9E9E9"/>
+                </a:solidFill>
+                <a:latin typeface="Arial"/>
+                <a:ea typeface="Arial"/>
+                <a:cs typeface="Arial"/>
+                <a:sym typeface="Arial"/>
+              </a:defRPr>
             </a:lvl1pPr>
-            <a:lvl2pPr indent="0" lvl="1" marL="0" algn="r">
-              <a:spcBef>
-                <a:spcPts val="0"/>
-              </a:spcBef>
-              <a:buNone/>
-              <a:defRPr/>
+            <a:lvl2pPr indent="0" lvl="1" marL="0" marR="0" algn="r">
+              <a:lnSpc>
+                <a:spcPct val="100000"/>
+              </a:lnSpc>
+              <a:spcBef>
+                <a:spcPts val="0"/>
+              </a:spcBef>
+              <a:spcAft>
+                <a:spcPts val="0"/>
+              </a:spcAft>
+              <a:buClr>
+                <a:srgbClr val="000000"/>
+              </a:buClr>
+              <a:buSzPts val="1200"/>
+              <a:buFont typeface="Arial"/>
+              <a:buNone/>
+              <a:defRPr b="0" i="0" sz="1200" u="none" cap="none" strike="noStrike">
+                <a:solidFill>
+                  <a:srgbClr val="E9E9E9"/>
+                </a:solidFill>
+                <a:latin typeface="Arial"/>
+                <a:ea typeface="Arial"/>
+                <a:cs typeface="Arial"/>
+                <a:sym typeface="Arial"/>
+              </a:defRPr>
             </a:lvl2pPr>
-            <a:lvl3pPr indent="0" lvl="2" marL="0" algn="r">
-              <a:spcBef>
-                <a:spcPts val="0"/>
-              </a:spcBef>
-              <a:buNone/>
-              <a:defRPr/>
+            <a:lvl3pPr indent="0" lvl="2" marL="0" marR="0" algn="r">
+              <a:lnSpc>
+                <a:spcPct val="100000"/>
+              </a:lnSpc>
+              <a:spcBef>
+                <a:spcPts val="0"/>
+              </a:spcBef>
+              <a:spcAft>
+                <a:spcPts val="0"/>
+              </a:spcAft>
+              <a:buClr>
+                <a:srgbClr val="000000"/>
+              </a:buClr>
+              <a:buSzPts val="1200"/>
+              <a:buFont typeface="Arial"/>
+              <a:buNone/>
+              <a:defRPr b="0" i="0" sz="1200" u="none" cap="none" strike="noStrike">
+                <a:solidFill>
+                  <a:srgbClr val="E9E9E9"/>
+                </a:solidFill>
+                <a:latin typeface="Arial"/>
+                <a:ea typeface="Arial"/>
+                <a:cs typeface="Arial"/>
+                <a:sym typeface="Arial"/>
+              </a:defRPr>
             </a:lvl3pPr>
-            <a:lvl4pPr indent="0" lvl="3" marL="0" algn="r">
-              <a:spcBef>
-                <a:spcPts val="0"/>
-              </a:spcBef>
-              <a:buNone/>
-              <a:defRPr/>
+            <a:lvl4pPr indent="0" lvl="3" marL="0" marR="0" algn="r">
+              <a:lnSpc>
+                <a:spcPct val="100000"/>
+              </a:lnSpc>
+              <a:spcBef>
+                <a:spcPts val="0"/>
+              </a:spcBef>
+              <a:spcAft>
+                <a:spcPts val="0"/>
+              </a:spcAft>
+              <a:buClr>
+                <a:srgbClr val="000000"/>
+              </a:buClr>
+              <a:buSzPts val="1200"/>
+              <a:buFont typeface="Arial"/>
+              <a:buNone/>
+              <a:defRPr b="0" i="0" sz="1200" u="none" cap="none" strike="noStrike">
+                <a:solidFill>
+                  <a:srgbClr val="E9E9E9"/>
+                </a:solidFill>
+                <a:latin typeface="Arial"/>
+                <a:ea typeface="Arial"/>
+                <a:cs typeface="Arial"/>
+                <a:sym typeface="Arial"/>
+              </a:defRPr>
             </a:lvl4pPr>
-            <a:lvl5pPr indent="0" lvl="4" marL="0" algn="r">
-              <a:spcBef>
-                <a:spcPts val="0"/>
-              </a:spcBef>
-              <a:buNone/>
-              <a:defRPr/>
+            <a:lvl5pPr indent="0" lvl="4" marL="0" marR="0" algn="r">
+              <a:lnSpc>
+                <a:spcPct val="100000"/>
+              </a:lnSpc>
+              <a:spcBef>
+                <a:spcPts val="0"/>
+              </a:spcBef>
+              <a:spcAft>
+                <a:spcPts val="0"/>
+              </a:spcAft>
+              <a:buClr>
+                <a:srgbClr val="000000"/>
+              </a:buClr>
+              <a:buSzPts val="1200"/>
+              <a:buFont typeface="Arial"/>
+              <a:buNone/>
+              <a:defRPr b="0" i="0" sz="1200" u="none" cap="none" strike="noStrike">
+                <a:solidFill>
+                  <a:srgbClr val="E9E9E9"/>
+                </a:solidFill>
+                <a:latin typeface="Arial"/>
+                <a:ea typeface="Arial"/>
+                <a:cs typeface="Arial"/>
+                <a:sym typeface="Arial"/>
+              </a:defRPr>
             </a:lvl5pPr>
-            <a:lvl6pPr indent="0" lvl="5" marL="0" algn="r">
-              <a:spcBef>
-                <a:spcPts val="0"/>
-              </a:spcBef>
-              <a:buNone/>
-              <a:defRPr/>
+            <a:lvl6pPr indent="0" lvl="5" marL="0" marR="0" algn="r">
+              <a:lnSpc>
+                <a:spcPct val="100000"/>
+              </a:lnSpc>
+              <a:spcBef>
+                <a:spcPts val="0"/>
+              </a:spcBef>
+              <a:spcAft>
+                <a:spcPts val="0"/>
+              </a:spcAft>
+              <a:buClr>
+                <a:srgbClr val="000000"/>
+              </a:buClr>
+              <a:buSzPts val="1200"/>
+              <a:buFont typeface="Arial"/>
+              <a:buNone/>
+              <a:defRPr b="0" i="0" sz="1200" u="none" cap="none" strike="noStrike">
+                <a:solidFill>
+                  <a:srgbClr val="E9E9E9"/>
+                </a:solidFill>
+                <a:latin typeface="Arial"/>
+                <a:ea typeface="Arial"/>
+                <a:cs typeface="Arial"/>
+                <a:sym typeface="Arial"/>
+              </a:defRPr>
             </a:lvl6pPr>
-            <a:lvl7pPr indent="0" lvl="6" marL="0" algn="r">
-              <a:spcBef>
-                <a:spcPts val="0"/>
-              </a:spcBef>
-              <a:buNone/>
-              <a:defRPr/>
+            <a:lvl7pPr indent="0" lvl="6" marL="0" marR="0" algn="r">
+              <a:lnSpc>
+                <a:spcPct val="100000"/>
+              </a:lnSpc>
+              <a:spcBef>
+                <a:spcPts val="0"/>
+              </a:spcBef>
+              <a:spcAft>
+                <a:spcPts val="0"/>
+              </a:spcAft>
+              <a:buClr>
+                <a:srgbClr val="000000"/>
+              </a:buClr>
+              <a:buSzPts val="1200"/>
+              <a:buFont typeface="Arial"/>
+              <a:buNone/>
+              <a:defRPr b="0" i="0" sz="1200" u="none" cap="none" strike="noStrike">
+                <a:solidFill>
+                  <a:srgbClr val="E9E9E9"/>
+                </a:solidFill>
+                <a:latin typeface="Arial"/>
+                <a:ea typeface="Arial"/>
+                <a:cs typeface="Arial"/>
+                <a:sym typeface="Arial"/>
+              </a:defRPr>
             </a:lvl7pPr>
-            <a:lvl8pPr indent="0" lvl="7" marL="0" algn="r">
-              <a:spcBef>
-                <a:spcPts val="0"/>
-              </a:spcBef>
-              <a:buNone/>
-              <a:defRPr/>
+            <a:lvl8pPr indent="0" lvl="7" marL="0" marR="0" algn="r">
+              <a:lnSpc>
+                <a:spcPct val="100000"/>
+              </a:lnSpc>
+              <a:spcBef>
+                <a:spcPts val="0"/>
+              </a:spcBef>
+              <a:spcAft>
+                <a:spcPts val="0"/>
+              </a:spcAft>
+              <a:buClr>
+                <a:srgbClr val="000000"/>
+              </a:buClr>
+              <a:buSzPts val="1200"/>
+              <a:buFont typeface="Arial"/>
+              <a:buNone/>
+              <a:defRPr b="0" i="0" sz="1200" u="none" cap="none" strike="noStrike">
+                <a:solidFill>
+                  <a:srgbClr val="E9E9E9"/>
+                </a:solidFill>
+                <a:latin typeface="Arial"/>
+                <a:ea typeface="Arial"/>
+                <a:cs typeface="Arial"/>
+                <a:sym typeface="Arial"/>
+              </a:defRPr>
             </a:lvl8pPr>
-            <a:lvl9pPr indent="0" lvl="8" marL="0" algn="r">
-              <a:spcBef>
-                <a:spcPts val="0"/>
-              </a:spcBef>
-              <a:buNone/>
-              <a:defRPr/>
+            <a:lvl9pPr indent="0" lvl="8" marL="0" marR="0" algn="r">
+              <a:lnSpc>
+                <a:spcPct val="100000"/>
+              </a:lnSpc>
+              <a:spcBef>
+                <a:spcPts val="0"/>
+              </a:spcBef>
+              <a:spcAft>
+                <a:spcPts val="0"/>
+              </a:spcAft>
+              <a:buClr>
+                <a:srgbClr val="000000"/>
+              </a:buClr>
+              <a:buSzPts val="1200"/>
+              <a:buFont typeface="Arial"/>
+              <a:buNone/>
+              <a:defRPr b="0" i="0" sz="1200" u="none" cap="none" strike="noStrike">
+                <a:solidFill>
+                  <a:srgbClr val="E9E9E9"/>
+                </a:solidFill>
+                <a:latin typeface="Arial"/>
+                <a:ea typeface="Arial"/>
+                <a:cs typeface="Arial"/>
+                <a:sym typeface="Arial"/>
+              </a:defRPr>
             </a:lvl9pPr>
           </a:lstStyle>
           <a:p>
@@ -2760,7 +4327,10 @@
               <a:buNone/>
               <a:defRPr/>
             </a:lvl1pPr>
-            <a:lvl2pPr lvl="1">
+            <a:lvl2pPr lvl="1" algn="l">
+              <a:lnSpc>
+                <a:spcPct val="100000"/>
+              </a:lnSpc>
               <a:spcBef>
                 <a:spcPts val="0"/>
               </a:spcBef>
@@ -2771,7 +4341,10 @@
               <a:buNone/>
               <a:defRPr/>
             </a:lvl2pPr>
-            <a:lvl3pPr lvl="2">
+            <a:lvl3pPr lvl="2" algn="l">
+              <a:lnSpc>
+                <a:spcPct val="100000"/>
+              </a:lnSpc>
               <a:spcBef>
                 <a:spcPts val="0"/>
               </a:spcBef>
@@ -2782,7 +4355,10 @@
               <a:buNone/>
               <a:defRPr/>
             </a:lvl3pPr>
-            <a:lvl4pPr lvl="3">
+            <a:lvl4pPr lvl="3" algn="l">
+              <a:lnSpc>
+                <a:spcPct val="100000"/>
+              </a:lnSpc>
               <a:spcBef>
                 <a:spcPts val="0"/>
               </a:spcBef>
@@ -2793,7 +4369,10 @@
               <a:buNone/>
               <a:defRPr/>
             </a:lvl4pPr>
-            <a:lvl5pPr lvl="4">
+            <a:lvl5pPr lvl="4" algn="l">
+              <a:lnSpc>
+                <a:spcPct val="100000"/>
+              </a:lnSpc>
               <a:spcBef>
                 <a:spcPts val="0"/>
               </a:spcBef>
@@ -2804,7 +4383,10 @@
               <a:buNone/>
               <a:defRPr/>
             </a:lvl5pPr>
-            <a:lvl6pPr lvl="5">
+            <a:lvl6pPr lvl="5" algn="l">
+              <a:lnSpc>
+                <a:spcPct val="100000"/>
+              </a:lnSpc>
               <a:spcBef>
                 <a:spcPts val="0"/>
               </a:spcBef>
@@ -2815,7 +4397,10 @@
               <a:buNone/>
               <a:defRPr/>
             </a:lvl6pPr>
-            <a:lvl7pPr lvl="6">
+            <a:lvl7pPr lvl="6" algn="l">
+              <a:lnSpc>
+                <a:spcPct val="100000"/>
+              </a:lnSpc>
               <a:spcBef>
                 <a:spcPts val="0"/>
               </a:spcBef>
@@ -2826,7 +4411,10 @@
               <a:buNone/>
               <a:defRPr/>
             </a:lvl7pPr>
-            <a:lvl8pPr lvl="7">
+            <a:lvl8pPr lvl="7" algn="l">
+              <a:lnSpc>
+                <a:spcPct val="100000"/>
+              </a:lnSpc>
               <a:spcBef>
                 <a:spcPts val="0"/>
               </a:spcBef>
@@ -2837,7 +4425,10 @@
               <a:buNone/>
               <a:defRPr/>
             </a:lvl8pPr>
-            <a:lvl9pPr lvl="8">
+            <a:lvl9pPr lvl="8" algn="l">
+              <a:lnSpc>
+                <a:spcPct val="100000"/>
+              </a:lnSpc>
               <a:spcBef>
                 <a:spcPts val="0"/>
               </a:spcBef>
@@ -3062,6 +4653,9 @@
           </a:bodyPr>
           <a:lstStyle>
             <a:lvl1pPr lvl="0" algn="l">
+              <a:lnSpc>
+                <a:spcPct val="100000"/>
+              </a:lnSpc>
               <a:spcBef>
                 <a:spcPts val="0"/>
               </a:spcBef>
@@ -3073,6 +4667,9 @@
               <a:defRPr/>
             </a:lvl1pPr>
             <a:lvl2pPr lvl="1" algn="l">
+              <a:lnSpc>
+                <a:spcPct val="100000"/>
+              </a:lnSpc>
               <a:spcBef>
                 <a:spcPts val="0"/>
               </a:spcBef>
@@ -3084,6 +4681,9 @@
               <a:defRPr/>
             </a:lvl2pPr>
             <a:lvl3pPr lvl="2" algn="l">
+              <a:lnSpc>
+                <a:spcPct val="100000"/>
+              </a:lnSpc>
               <a:spcBef>
                 <a:spcPts val="0"/>
               </a:spcBef>
@@ -3095,6 +4695,9 @@
               <a:defRPr/>
             </a:lvl3pPr>
             <a:lvl4pPr lvl="3" algn="l">
+              <a:lnSpc>
+                <a:spcPct val="100000"/>
+              </a:lnSpc>
               <a:spcBef>
                 <a:spcPts val="0"/>
               </a:spcBef>
@@ -3106,6 +4709,9 @@
               <a:defRPr/>
             </a:lvl4pPr>
             <a:lvl5pPr lvl="4" algn="l">
+              <a:lnSpc>
+                <a:spcPct val="100000"/>
+              </a:lnSpc>
               <a:spcBef>
                 <a:spcPts val="0"/>
               </a:spcBef>
@@ -3117,6 +4723,9 @@
               <a:defRPr/>
             </a:lvl5pPr>
             <a:lvl6pPr lvl="5" algn="l">
+              <a:lnSpc>
+                <a:spcPct val="100000"/>
+              </a:lnSpc>
               <a:spcBef>
                 <a:spcPts val="0"/>
               </a:spcBef>
@@ -3128,6 +4737,9 @@
               <a:defRPr/>
             </a:lvl6pPr>
             <a:lvl7pPr lvl="6" algn="l">
+              <a:lnSpc>
+                <a:spcPct val="100000"/>
+              </a:lnSpc>
               <a:spcBef>
                 <a:spcPts val="0"/>
               </a:spcBef>
@@ -3139,6 +4751,9 @@
               <a:defRPr/>
             </a:lvl7pPr>
             <a:lvl8pPr lvl="7" algn="l">
+              <a:lnSpc>
+                <a:spcPct val="100000"/>
+              </a:lnSpc>
               <a:spcBef>
                 <a:spcPts val="0"/>
               </a:spcBef>
@@ -3150,6 +4765,9 @@
               <a:defRPr/>
             </a:lvl8pPr>
             <a:lvl9pPr lvl="8" algn="l">
+              <a:lnSpc>
+                <a:spcPct val="100000"/>
+              </a:lnSpc>
               <a:spcBef>
                 <a:spcPts val="0"/>
               </a:spcBef>
@@ -3191,6 +4809,9 @@
           </a:bodyPr>
           <a:lstStyle>
             <a:lvl1pPr lvl="0" algn="ctr">
+              <a:lnSpc>
+                <a:spcPct val="100000"/>
+              </a:lnSpc>
               <a:spcBef>
                 <a:spcPts val="0"/>
               </a:spcBef>
@@ -3202,6 +4823,9 @@
               <a:defRPr/>
             </a:lvl1pPr>
             <a:lvl2pPr lvl="1" algn="l">
+              <a:lnSpc>
+                <a:spcPct val="100000"/>
+              </a:lnSpc>
               <a:spcBef>
                 <a:spcPts val="0"/>
               </a:spcBef>
@@ -3213,6 +4837,9 @@
               <a:defRPr/>
             </a:lvl2pPr>
             <a:lvl3pPr lvl="2" algn="l">
+              <a:lnSpc>
+                <a:spcPct val="100000"/>
+              </a:lnSpc>
               <a:spcBef>
                 <a:spcPts val="0"/>
               </a:spcBef>
@@ -3224,6 +4851,9 @@
               <a:defRPr/>
             </a:lvl3pPr>
             <a:lvl4pPr lvl="3" algn="l">
+              <a:lnSpc>
+                <a:spcPct val="100000"/>
+              </a:lnSpc>
               <a:spcBef>
                 <a:spcPts val="0"/>
               </a:spcBef>
@@ -3235,6 +4865,9 @@
               <a:defRPr/>
             </a:lvl4pPr>
             <a:lvl5pPr lvl="4" algn="l">
+              <a:lnSpc>
+                <a:spcPct val="100000"/>
+              </a:lnSpc>
               <a:spcBef>
                 <a:spcPts val="0"/>
               </a:spcBef>
@@ -3246,6 +4879,9 @@
               <a:defRPr/>
             </a:lvl5pPr>
             <a:lvl6pPr lvl="5" algn="l">
+              <a:lnSpc>
+                <a:spcPct val="100000"/>
+              </a:lnSpc>
               <a:spcBef>
                 <a:spcPts val="0"/>
               </a:spcBef>
@@ -3257,6 +4893,9 @@
               <a:defRPr/>
             </a:lvl6pPr>
             <a:lvl7pPr lvl="6" algn="l">
+              <a:lnSpc>
+                <a:spcPct val="100000"/>
+              </a:lnSpc>
               <a:spcBef>
                 <a:spcPts val="0"/>
               </a:spcBef>
@@ -3268,6 +4907,9 @@
               <a:defRPr/>
             </a:lvl7pPr>
             <a:lvl8pPr lvl="7" algn="l">
+              <a:lnSpc>
+                <a:spcPct val="100000"/>
+              </a:lnSpc>
               <a:spcBef>
                 <a:spcPts val="0"/>
               </a:spcBef>
@@ -3279,6 +4921,9 @@
               <a:defRPr/>
             </a:lvl8pPr>
             <a:lvl9pPr lvl="8" algn="l">
+              <a:lnSpc>
+                <a:spcPct val="100000"/>
+              </a:lnSpc>
               <a:spcBef>
                 <a:spcPts val="0"/>
               </a:spcBef>
@@ -3319,68 +4964,239 @@
             <a:noAutofit/>
           </a:bodyPr>
           <a:lstStyle>
-            <a:lvl1pPr indent="0" lvl="0" marL="0" algn="r">
-              <a:spcBef>
-                <a:spcPts val="0"/>
-              </a:spcBef>
-              <a:buNone/>
-              <a:defRPr/>
+            <a:lvl1pPr indent="0" lvl="0" marL="0" marR="0" algn="r">
+              <a:lnSpc>
+                <a:spcPct val="100000"/>
+              </a:lnSpc>
+              <a:spcBef>
+                <a:spcPts val="0"/>
+              </a:spcBef>
+              <a:spcAft>
+                <a:spcPts val="0"/>
+              </a:spcAft>
+              <a:buClr>
+                <a:srgbClr val="000000"/>
+              </a:buClr>
+              <a:buSzPts val="1200"/>
+              <a:buFont typeface="Arial"/>
+              <a:buNone/>
+              <a:defRPr b="0" i="0" sz="1200" u="none" cap="none" strike="noStrike">
+                <a:solidFill>
+                  <a:srgbClr val="E9E9E9"/>
+                </a:solidFill>
+                <a:latin typeface="Arial"/>
+                <a:ea typeface="Arial"/>
+                <a:cs typeface="Arial"/>
+                <a:sym typeface="Arial"/>
+              </a:defRPr>
             </a:lvl1pPr>
-            <a:lvl2pPr indent="0" lvl="1" marL="0" algn="r">
-              <a:spcBef>
-                <a:spcPts val="0"/>
-              </a:spcBef>
-              <a:buNone/>
-              <a:defRPr/>
+            <a:lvl2pPr indent="0" lvl="1" marL="0" marR="0" algn="r">
+              <a:lnSpc>
+                <a:spcPct val="100000"/>
+              </a:lnSpc>
+              <a:spcBef>
+                <a:spcPts val="0"/>
+              </a:spcBef>
+              <a:spcAft>
+                <a:spcPts val="0"/>
+              </a:spcAft>
+              <a:buClr>
+                <a:srgbClr val="000000"/>
+              </a:buClr>
+              <a:buSzPts val="1200"/>
+              <a:buFont typeface="Arial"/>
+              <a:buNone/>
+              <a:defRPr b="0" i="0" sz="1200" u="none" cap="none" strike="noStrike">
+                <a:solidFill>
+                  <a:srgbClr val="E9E9E9"/>
+                </a:solidFill>
+                <a:latin typeface="Arial"/>
+                <a:ea typeface="Arial"/>
+                <a:cs typeface="Arial"/>
+                <a:sym typeface="Arial"/>
+              </a:defRPr>
             </a:lvl2pPr>
-            <a:lvl3pPr indent="0" lvl="2" marL="0" algn="r">
-              <a:spcBef>
-                <a:spcPts val="0"/>
-              </a:spcBef>
-              <a:buNone/>
-              <a:defRPr/>
+            <a:lvl3pPr indent="0" lvl="2" marL="0" marR="0" algn="r">
+              <a:lnSpc>
+                <a:spcPct val="100000"/>
+              </a:lnSpc>
+              <a:spcBef>
+                <a:spcPts val="0"/>
+              </a:spcBef>
+              <a:spcAft>
+                <a:spcPts val="0"/>
+              </a:spcAft>
+              <a:buClr>
+                <a:srgbClr val="000000"/>
+              </a:buClr>
+              <a:buSzPts val="1200"/>
+              <a:buFont typeface="Arial"/>
+              <a:buNone/>
+              <a:defRPr b="0" i="0" sz="1200" u="none" cap="none" strike="noStrike">
+                <a:solidFill>
+                  <a:srgbClr val="E9E9E9"/>
+                </a:solidFill>
+                <a:latin typeface="Arial"/>
+                <a:ea typeface="Arial"/>
+                <a:cs typeface="Arial"/>
+                <a:sym typeface="Arial"/>
+              </a:defRPr>
             </a:lvl3pPr>
-            <a:lvl4pPr indent="0" lvl="3" marL="0" algn="r">
-              <a:spcBef>
-                <a:spcPts val="0"/>
-              </a:spcBef>
-              <a:buNone/>
-              <a:defRPr/>
+            <a:lvl4pPr indent="0" lvl="3" marL="0" marR="0" algn="r">
+              <a:lnSpc>
+                <a:spcPct val="100000"/>
+              </a:lnSpc>
+              <a:spcBef>
+                <a:spcPts val="0"/>
+              </a:spcBef>
+              <a:spcAft>
+                <a:spcPts val="0"/>
+              </a:spcAft>
+              <a:buClr>
+                <a:srgbClr val="000000"/>
+              </a:buClr>
+              <a:buSzPts val="1200"/>
+              <a:buFont typeface="Arial"/>
+              <a:buNone/>
+              <a:defRPr b="0" i="0" sz="1200" u="none" cap="none" strike="noStrike">
+                <a:solidFill>
+                  <a:srgbClr val="E9E9E9"/>
+                </a:solidFill>
+                <a:latin typeface="Arial"/>
+                <a:ea typeface="Arial"/>
+                <a:cs typeface="Arial"/>
+                <a:sym typeface="Arial"/>
+              </a:defRPr>
             </a:lvl4pPr>
-            <a:lvl5pPr indent="0" lvl="4" marL="0" algn="r">
-              <a:spcBef>
-                <a:spcPts val="0"/>
-              </a:spcBef>
-              <a:buNone/>
-              <a:defRPr/>
+            <a:lvl5pPr indent="0" lvl="4" marL="0" marR="0" algn="r">
+              <a:lnSpc>
+                <a:spcPct val="100000"/>
+              </a:lnSpc>
+              <a:spcBef>
+                <a:spcPts val="0"/>
+              </a:spcBef>
+              <a:spcAft>
+                <a:spcPts val="0"/>
+              </a:spcAft>
+              <a:buClr>
+                <a:srgbClr val="000000"/>
+              </a:buClr>
+              <a:buSzPts val="1200"/>
+              <a:buFont typeface="Arial"/>
+              <a:buNone/>
+              <a:defRPr b="0" i="0" sz="1200" u="none" cap="none" strike="noStrike">
+                <a:solidFill>
+                  <a:srgbClr val="E9E9E9"/>
+                </a:solidFill>
+                <a:latin typeface="Arial"/>
+                <a:ea typeface="Arial"/>
+                <a:cs typeface="Arial"/>
+                <a:sym typeface="Arial"/>
+              </a:defRPr>
             </a:lvl5pPr>
-            <a:lvl6pPr indent="0" lvl="5" marL="0" algn="r">
-              <a:spcBef>
-                <a:spcPts val="0"/>
-              </a:spcBef>
-              <a:buNone/>
-              <a:defRPr/>
+            <a:lvl6pPr indent="0" lvl="5" marL="0" marR="0" algn="r">
+              <a:lnSpc>
+                <a:spcPct val="100000"/>
+              </a:lnSpc>
+              <a:spcBef>
+                <a:spcPts val="0"/>
+              </a:spcBef>
+              <a:spcAft>
+                <a:spcPts val="0"/>
+              </a:spcAft>
+              <a:buClr>
+                <a:srgbClr val="000000"/>
+              </a:buClr>
+              <a:buSzPts val="1200"/>
+              <a:buFont typeface="Arial"/>
+              <a:buNone/>
+              <a:defRPr b="0" i="0" sz="1200" u="none" cap="none" strike="noStrike">
+                <a:solidFill>
+                  <a:srgbClr val="E9E9E9"/>
+                </a:solidFill>
+                <a:latin typeface="Arial"/>
+                <a:ea typeface="Arial"/>
+                <a:cs typeface="Arial"/>
+                <a:sym typeface="Arial"/>
+              </a:defRPr>
             </a:lvl6pPr>
-            <a:lvl7pPr indent="0" lvl="6" marL="0" algn="r">
-              <a:spcBef>
-                <a:spcPts val="0"/>
-              </a:spcBef>
-              <a:buNone/>
-              <a:defRPr/>
+            <a:lvl7pPr indent="0" lvl="6" marL="0" marR="0" algn="r">
+              <a:lnSpc>
+                <a:spcPct val="100000"/>
+              </a:lnSpc>
+              <a:spcBef>
+                <a:spcPts val="0"/>
+              </a:spcBef>
+              <a:spcAft>
+                <a:spcPts val="0"/>
+              </a:spcAft>
+              <a:buClr>
+                <a:srgbClr val="000000"/>
+              </a:buClr>
+              <a:buSzPts val="1200"/>
+              <a:buFont typeface="Arial"/>
+              <a:buNone/>
+              <a:defRPr b="0" i="0" sz="1200" u="none" cap="none" strike="noStrike">
+                <a:solidFill>
+                  <a:srgbClr val="E9E9E9"/>
+                </a:solidFill>
+                <a:latin typeface="Arial"/>
+                <a:ea typeface="Arial"/>
+                <a:cs typeface="Arial"/>
+                <a:sym typeface="Arial"/>
+              </a:defRPr>
             </a:lvl7pPr>
-            <a:lvl8pPr indent="0" lvl="7" marL="0" algn="r">
-              <a:spcBef>
-                <a:spcPts val="0"/>
-              </a:spcBef>
-              <a:buNone/>
-              <a:defRPr/>
+            <a:lvl8pPr indent="0" lvl="7" marL="0" marR="0" algn="r">
+              <a:lnSpc>
+                <a:spcPct val="100000"/>
+              </a:lnSpc>
+              <a:spcBef>
+                <a:spcPts val="0"/>
+              </a:spcBef>
+              <a:spcAft>
+                <a:spcPts val="0"/>
+              </a:spcAft>
+              <a:buClr>
+                <a:srgbClr val="000000"/>
+              </a:buClr>
+              <a:buSzPts val="1200"/>
+              <a:buFont typeface="Arial"/>
+              <a:buNone/>
+              <a:defRPr b="0" i="0" sz="1200" u="none" cap="none" strike="noStrike">
+                <a:solidFill>
+                  <a:srgbClr val="E9E9E9"/>
+                </a:solidFill>
+                <a:latin typeface="Arial"/>
+                <a:ea typeface="Arial"/>
+                <a:cs typeface="Arial"/>
+                <a:sym typeface="Arial"/>
+              </a:defRPr>
             </a:lvl8pPr>
-            <a:lvl9pPr indent="0" lvl="8" marL="0" algn="r">
-              <a:spcBef>
-                <a:spcPts val="0"/>
-              </a:spcBef>
-              <a:buNone/>
-              <a:defRPr/>
+            <a:lvl9pPr indent="0" lvl="8" marL="0" marR="0" algn="r">
+              <a:lnSpc>
+                <a:spcPct val="100000"/>
+              </a:lnSpc>
+              <a:spcBef>
+                <a:spcPts val="0"/>
+              </a:spcBef>
+              <a:spcAft>
+                <a:spcPts val="0"/>
+              </a:spcAft>
+              <a:buClr>
+                <a:srgbClr val="000000"/>
+              </a:buClr>
+              <a:buSzPts val="1200"/>
+              <a:buFont typeface="Arial"/>
+              <a:buNone/>
+              <a:defRPr b="0" i="0" sz="1200" u="none" cap="none" strike="noStrike">
+                <a:solidFill>
+                  <a:srgbClr val="E9E9E9"/>
+                </a:solidFill>
+                <a:latin typeface="Arial"/>
+                <a:ea typeface="Arial"/>
+                <a:cs typeface="Arial"/>
+                <a:sym typeface="Arial"/>
+              </a:defRPr>
             </a:lvl9pPr>
           </a:lstStyle>
           <a:p>
@@ -3469,7 +5285,10 @@
               <a:buNone/>
               <a:defRPr/>
             </a:lvl1pPr>
-            <a:lvl2pPr lvl="1">
+            <a:lvl2pPr lvl="1" algn="l">
+              <a:lnSpc>
+                <a:spcPct val="100000"/>
+              </a:lnSpc>
               <a:spcBef>
                 <a:spcPts val="0"/>
               </a:spcBef>
@@ -3480,7 +5299,10 @@
               <a:buNone/>
               <a:defRPr/>
             </a:lvl2pPr>
-            <a:lvl3pPr lvl="2">
+            <a:lvl3pPr lvl="2" algn="l">
+              <a:lnSpc>
+                <a:spcPct val="100000"/>
+              </a:lnSpc>
               <a:spcBef>
                 <a:spcPts val="0"/>
               </a:spcBef>
@@ -3491,7 +5313,10 @@
               <a:buNone/>
               <a:defRPr/>
             </a:lvl3pPr>
-            <a:lvl4pPr lvl="3">
+            <a:lvl4pPr lvl="3" algn="l">
+              <a:lnSpc>
+                <a:spcPct val="100000"/>
+              </a:lnSpc>
               <a:spcBef>
                 <a:spcPts val="0"/>
               </a:spcBef>
@@ -3502,7 +5327,10 @@
               <a:buNone/>
               <a:defRPr/>
             </a:lvl4pPr>
-            <a:lvl5pPr lvl="4">
+            <a:lvl5pPr lvl="4" algn="l">
+              <a:lnSpc>
+                <a:spcPct val="100000"/>
+              </a:lnSpc>
               <a:spcBef>
                 <a:spcPts val="0"/>
               </a:spcBef>
@@ -3513,7 +5341,10 @@
               <a:buNone/>
               <a:defRPr/>
             </a:lvl5pPr>
-            <a:lvl6pPr lvl="5">
+            <a:lvl6pPr lvl="5" algn="l">
+              <a:lnSpc>
+                <a:spcPct val="100000"/>
+              </a:lnSpc>
               <a:spcBef>
                 <a:spcPts val="0"/>
               </a:spcBef>
@@ -3524,7 +5355,10 @@
               <a:buNone/>
               <a:defRPr/>
             </a:lvl6pPr>
-            <a:lvl7pPr lvl="6">
+            <a:lvl7pPr lvl="6" algn="l">
+              <a:lnSpc>
+                <a:spcPct val="100000"/>
+              </a:lnSpc>
               <a:spcBef>
                 <a:spcPts val="0"/>
               </a:spcBef>
@@ -3535,7 +5369,10 @@
               <a:buNone/>
               <a:defRPr/>
             </a:lvl7pPr>
-            <a:lvl8pPr lvl="7">
+            <a:lvl8pPr lvl="7" algn="l">
+              <a:lnSpc>
+                <a:spcPct val="100000"/>
+              </a:lnSpc>
               <a:spcBef>
                 <a:spcPts val="0"/>
               </a:spcBef>
@@ -3546,7 +5383,10 @@
               <a:buNone/>
               <a:defRPr/>
             </a:lvl8pPr>
-            <a:lvl9pPr lvl="8">
+            <a:lvl9pPr lvl="8" algn="l">
+              <a:lnSpc>
+                <a:spcPct val="100000"/>
+              </a:lnSpc>
               <a:spcBef>
                 <a:spcPts val="0"/>
               </a:spcBef>
@@ -3588,6 +5428,9 @@
           </a:bodyPr>
           <a:lstStyle>
             <a:lvl1pPr lvl="0" algn="l">
+              <a:lnSpc>
+                <a:spcPct val="100000"/>
+              </a:lnSpc>
               <a:spcBef>
                 <a:spcPts val="0"/>
               </a:spcBef>
@@ -3599,6 +5442,9 @@
               <a:defRPr/>
             </a:lvl1pPr>
             <a:lvl2pPr lvl="1" algn="l">
+              <a:lnSpc>
+                <a:spcPct val="100000"/>
+              </a:lnSpc>
               <a:spcBef>
                 <a:spcPts val="0"/>
               </a:spcBef>
@@ -3610,6 +5456,9 @@
               <a:defRPr/>
             </a:lvl2pPr>
             <a:lvl3pPr lvl="2" algn="l">
+              <a:lnSpc>
+                <a:spcPct val="100000"/>
+              </a:lnSpc>
               <a:spcBef>
                 <a:spcPts val="0"/>
               </a:spcBef>
@@ -3621,6 +5470,9 @@
               <a:defRPr/>
             </a:lvl3pPr>
             <a:lvl4pPr lvl="3" algn="l">
+              <a:lnSpc>
+                <a:spcPct val="100000"/>
+              </a:lnSpc>
               <a:spcBef>
                 <a:spcPts val="0"/>
               </a:spcBef>
@@ -3632,6 +5484,9 @@
               <a:defRPr/>
             </a:lvl4pPr>
             <a:lvl5pPr lvl="4" algn="l">
+              <a:lnSpc>
+                <a:spcPct val="100000"/>
+              </a:lnSpc>
               <a:spcBef>
                 <a:spcPts val="0"/>
               </a:spcBef>
@@ -3643,6 +5498,9 @@
               <a:defRPr/>
             </a:lvl5pPr>
             <a:lvl6pPr lvl="5" algn="l">
+              <a:lnSpc>
+                <a:spcPct val="100000"/>
+              </a:lnSpc>
               <a:spcBef>
                 <a:spcPts val="0"/>
               </a:spcBef>
@@ -3654,6 +5512,9 @@
               <a:defRPr/>
             </a:lvl6pPr>
             <a:lvl7pPr lvl="6" algn="l">
+              <a:lnSpc>
+                <a:spcPct val="100000"/>
+              </a:lnSpc>
               <a:spcBef>
                 <a:spcPts val="0"/>
               </a:spcBef>
@@ -3665,6 +5526,9 @@
               <a:defRPr/>
             </a:lvl7pPr>
             <a:lvl8pPr lvl="7" algn="l">
+              <a:lnSpc>
+                <a:spcPct val="100000"/>
+              </a:lnSpc>
               <a:spcBef>
                 <a:spcPts val="0"/>
               </a:spcBef>
@@ -3676,6 +5540,9 @@
               <a:defRPr/>
             </a:lvl8pPr>
             <a:lvl9pPr lvl="8" algn="l">
+              <a:lnSpc>
+                <a:spcPct val="100000"/>
+              </a:lnSpc>
               <a:spcBef>
                 <a:spcPts val="0"/>
               </a:spcBef>
@@ -3717,6 +5584,9 @@
           </a:bodyPr>
           <a:lstStyle>
             <a:lvl1pPr lvl="0" algn="ctr">
+              <a:lnSpc>
+                <a:spcPct val="100000"/>
+              </a:lnSpc>
               <a:spcBef>
                 <a:spcPts val="0"/>
               </a:spcBef>
@@ -3728,6 +5598,9 @@
               <a:defRPr/>
             </a:lvl1pPr>
             <a:lvl2pPr lvl="1" algn="l">
+              <a:lnSpc>
+                <a:spcPct val="100000"/>
+              </a:lnSpc>
               <a:spcBef>
                 <a:spcPts val="0"/>
               </a:spcBef>
@@ -3739,6 +5612,9 @@
               <a:defRPr/>
             </a:lvl2pPr>
             <a:lvl3pPr lvl="2" algn="l">
+              <a:lnSpc>
+                <a:spcPct val="100000"/>
+              </a:lnSpc>
               <a:spcBef>
                 <a:spcPts val="0"/>
               </a:spcBef>
@@ -3750,6 +5626,9 @@
               <a:defRPr/>
             </a:lvl3pPr>
             <a:lvl4pPr lvl="3" algn="l">
+              <a:lnSpc>
+                <a:spcPct val="100000"/>
+              </a:lnSpc>
               <a:spcBef>
                 <a:spcPts val="0"/>
               </a:spcBef>
@@ -3761,6 +5640,9 @@
               <a:defRPr/>
             </a:lvl4pPr>
             <a:lvl5pPr lvl="4" algn="l">
+              <a:lnSpc>
+                <a:spcPct val="100000"/>
+              </a:lnSpc>
               <a:spcBef>
                 <a:spcPts val="0"/>
               </a:spcBef>
@@ -3772,6 +5654,9 @@
               <a:defRPr/>
             </a:lvl5pPr>
             <a:lvl6pPr lvl="5" algn="l">
+              <a:lnSpc>
+                <a:spcPct val="100000"/>
+              </a:lnSpc>
               <a:spcBef>
                 <a:spcPts val="0"/>
               </a:spcBef>
@@ -3783,6 +5668,9 @@
               <a:defRPr/>
             </a:lvl6pPr>
             <a:lvl7pPr lvl="6" algn="l">
+              <a:lnSpc>
+                <a:spcPct val="100000"/>
+              </a:lnSpc>
               <a:spcBef>
                 <a:spcPts val="0"/>
               </a:spcBef>
@@ -3794,6 +5682,9 @@
               <a:defRPr/>
             </a:lvl7pPr>
             <a:lvl8pPr lvl="7" algn="l">
+              <a:lnSpc>
+                <a:spcPct val="100000"/>
+              </a:lnSpc>
               <a:spcBef>
                 <a:spcPts val="0"/>
               </a:spcBef>
@@ -3805,6 +5696,9 @@
               <a:defRPr/>
             </a:lvl8pPr>
             <a:lvl9pPr lvl="8" algn="l">
+              <a:lnSpc>
+                <a:spcPct val="100000"/>
+              </a:lnSpc>
               <a:spcBef>
                 <a:spcPts val="0"/>
               </a:spcBef>
@@ -3845,68 +5739,239 @@
             <a:noAutofit/>
           </a:bodyPr>
           <a:lstStyle>
-            <a:lvl1pPr indent="0" lvl="0" marL="0" algn="r">
-              <a:spcBef>
-                <a:spcPts val="0"/>
-              </a:spcBef>
-              <a:buNone/>
-              <a:defRPr/>
+            <a:lvl1pPr indent="0" lvl="0" marL="0" marR="0" algn="r">
+              <a:lnSpc>
+                <a:spcPct val="100000"/>
+              </a:lnSpc>
+              <a:spcBef>
+                <a:spcPts val="0"/>
+              </a:spcBef>
+              <a:spcAft>
+                <a:spcPts val="0"/>
+              </a:spcAft>
+              <a:buClr>
+                <a:srgbClr val="000000"/>
+              </a:buClr>
+              <a:buSzPts val="1200"/>
+              <a:buFont typeface="Arial"/>
+              <a:buNone/>
+              <a:defRPr b="0" i="0" sz="1200" u="none" cap="none" strike="noStrike">
+                <a:solidFill>
+                  <a:srgbClr val="E9E9E9"/>
+                </a:solidFill>
+                <a:latin typeface="Arial"/>
+                <a:ea typeface="Arial"/>
+                <a:cs typeface="Arial"/>
+                <a:sym typeface="Arial"/>
+              </a:defRPr>
             </a:lvl1pPr>
-            <a:lvl2pPr indent="0" lvl="1" marL="0" algn="r">
-              <a:spcBef>
-                <a:spcPts val="0"/>
-              </a:spcBef>
-              <a:buNone/>
-              <a:defRPr/>
+            <a:lvl2pPr indent="0" lvl="1" marL="0" marR="0" algn="r">
+              <a:lnSpc>
+                <a:spcPct val="100000"/>
+              </a:lnSpc>
+              <a:spcBef>
+                <a:spcPts val="0"/>
+              </a:spcBef>
+              <a:spcAft>
+                <a:spcPts val="0"/>
+              </a:spcAft>
+              <a:buClr>
+                <a:srgbClr val="000000"/>
+              </a:buClr>
+              <a:buSzPts val="1200"/>
+              <a:buFont typeface="Arial"/>
+              <a:buNone/>
+              <a:defRPr b="0" i="0" sz="1200" u="none" cap="none" strike="noStrike">
+                <a:solidFill>
+                  <a:srgbClr val="E9E9E9"/>
+                </a:solidFill>
+                <a:latin typeface="Arial"/>
+                <a:ea typeface="Arial"/>
+                <a:cs typeface="Arial"/>
+                <a:sym typeface="Arial"/>
+              </a:defRPr>
             </a:lvl2pPr>
-            <a:lvl3pPr indent="0" lvl="2" marL="0" algn="r">
-              <a:spcBef>
-                <a:spcPts val="0"/>
-              </a:spcBef>
-              <a:buNone/>
-              <a:defRPr/>
+            <a:lvl3pPr indent="0" lvl="2" marL="0" marR="0" algn="r">
+              <a:lnSpc>
+                <a:spcPct val="100000"/>
+              </a:lnSpc>
+              <a:spcBef>
+                <a:spcPts val="0"/>
+              </a:spcBef>
+              <a:spcAft>
+                <a:spcPts val="0"/>
+              </a:spcAft>
+              <a:buClr>
+                <a:srgbClr val="000000"/>
+              </a:buClr>
+              <a:buSzPts val="1200"/>
+              <a:buFont typeface="Arial"/>
+              <a:buNone/>
+              <a:defRPr b="0" i="0" sz="1200" u="none" cap="none" strike="noStrike">
+                <a:solidFill>
+                  <a:srgbClr val="E9E9E9"/>
+                </a:solidFill>
+                <a:latin typeface="Arial"/>
+                <a:ea typeface="Arial"/>
+                <a:cs typeface="Arial"/>
+                <a:sym typeface="Arial"/>
+              </a:defRPr>
             </a:lvl3pPr>
-            <a:lvl4pPr indent="0" lvl="3" marL="0" algn="r">
-              <a:spcBef>
-                <a:spcPts val="0"/>
-              </a:spcBef>
-              <a:buNone/>
-              <a:defRPr/>
+            <a:lvl4pPr indent="0" lvl="3" marL="0" marR="0" algn="r">
+              <a:lnSpc>
+                <a:spcPct val="100000"/>
+              </a:lnSpc>
+              <a:spcBef>
+                <a:spcPts val="0"/>
+              </a:spcBef>
+              <a:spcAft>
+                <a:spcPts val="0"/>
+              </a:spcAft>
+              <a:buClr>
+                <a:srgbClr val="000000"/>
+              </a:buClr>
+              <a:buSzPts val="1200"/>
+              <a:buFont typeface="Arial"/>
+              <a:buNone/>
+              <a:defRPr b="0" i="0" sz="1200" u="none" cap="none" strike="noStrike">
+                <a:solidFill>
+                  <a:srgbClr val="E9E9E9"/>
+                </a:solidFill>
+                <a:latin typeface="Arial"/>
+                <a:ea typeface="Arial"/>
+                <a:cs typeface="Arial"/>
+                <a:sym typeface="Arial"/>
+              </a:defRPr>
             </a:lvl4pPr>
-            <a:lvl5pPr indent="0" lvl="4" marL="0" algn="r">
-              <a:spcBef>
-                <a:spcPts val="0"/>
-              </a:spcBef>
-              <a:buNone/>
-              <a:defRPr/>
+            <a:lvl5pPr indent="0" lvl="4" marL="0" marR="0" algn="r">
+              <a:lnSpc>
+                <a:spcPct val="100000"/>
+              </a:lnSpc>
+              <a:spcBef>
+                <a:spcPts val="0"/>
+              </a:spcBef>
+              <a:spcAft>
+                <a:spcPts val="0"/>
+              </a:spcAft>
+              <a:buClr>
+                <a:srgbClr val="000000"/>
+              </a:buClr>
+              <a:buSzPts val="1200"/>
+              <a:buFont typeface="Arial"/>
+              <a:buNone/>
+              <a:defRPr b="0" i="0" sz="1200" u="none" cap="none" strike="noStrike">
+                <a:solidFill>
+                  <a:srgbClr val="E9E9E9"/>
+                </a:solidFill>
+                <a:latin typeface="Arial"/>
+                <a:ea typeface="Arial"/>
+                <a:cs typeface="Arial"/>
+                <a:sym typeface="Arial"/>
+              </a:defRPr>
             </a:lvl5pPr>
-            <a:lvl6pPr indent="0" lvl="5" marL="0" algn="r">
-              <a:spcBef>
-                <a:spcPts val="0"/>
-              </a:spcBef>
-              <a:buNone/>
-              <a:defRPr/>
+            <a:lvl6pPr indent="0" lvl="5" marL="0" marR="0" algn="r">
+              <a:lnSpc>
+                <a:spcPct val="100000"/>
+              </a:lnSpc>
+              <a:spcBef>
+                <a:spcPts val="0"/>
+              </a:spcBef>
+              <a:spcAft>
+                <a:spcPts val="0"/>
+              </a:spcAft>
+              <a:buClr>
+                <a:srgbClr val="000000"/>
+              </a:buClr>
+              <a:buSzPts val="1200"/>
+              <a:buFont typeface="Arial"/>
+              <a:buNone/>
+              <a:defRPr b="0" i="0" sz="1200" u="none" cap="none" strike="noStrike">
+                <a:solidFill>
+                  <a:srgbClr val="E9E9E9"/>
+                </a:solidFill>
+                <a:latin typeface="Arial"/>
+                <a:ea typeface="Arial"/>
+                <a:cs typeface="Arial"/>
+                <a:sym typeface="Arial"/>
+              </a:defRPr>
             </a:lvl6pPr>
-            <a:lvl7pPr indent="0" lvl="6" marL="0" algn="r">
-              <a:spcBef>
-                <a:spcPts val="0"/>
-              </a:spcBef>
-              <a:buNone/>
-              <a:defRPr/>
+            <a:lvl7pPr indent="0" lvl="6" marL="0" marR="0" algn="r">
+              <a:lnSpc>
+                <a:spcPct val="100000"/>
+              </a:lnSpc>
+              <a:spcBef>
+                <a:spcPts val="0"/>
+              </a:spcBef>
+              <a:spcAft>
+                <a:spcPts val="0"/>
+              </a:spcAft>
+              <a:buClr>
+                <a:srgbClr val="000000"/>
+              </a:buClr>
+              <a:buSzPts val="1200"/>
+              <a:buFont typeface="Arial"/>
+              <a:buNone/>
+              <a:defRPr b="0" i="0" sz="1200" u="none" cap="none" strike="noStrike">
+                <a:solidFill>
+                  <a:srgbClr val="E9E9E9"/>
+                </a:solidFill>
+                <a:latin typeface="Arial"/>
+                <a:ea typeface="Arial"/>
+                <a:cs typeface="Arial"/>
+                <a:sym typeface="Arial"/>
+              </a:defRPr>
             </a:lvl7pPr>
-            <a:lvl8pPr indent="0" lvl="7" marL="0" algn="r">
-              <a:spcBef>
-                <a:spcPts val="0"/>
-              </a:spcBef>
-              <a:buNone/>
-              <a:defRPr/>
+            <a:lvl8pPr indent="0" lvl="7" marL="0" marR="0" algn="r">
+              <a:lnSpc>
+                <a:spcPct val="100000"/>
+              </a:lnSpc>
+              <a:spcBef>
+                <a:spcPts val="0"/>
+              </a:spcBef>
+              <a:spcAft>
+                <a:spcPts val="0"/>
+              </a:spcAft>
+              <a:buClr>
+                <a:srgbClr val="000000"/>
+              </a:buClr>
+              <a:buSzPts val="1200"/>
+              <a:buFont typeface="Arial"/>
+              <a:buNone/>
+              <a:defRPr b="0" i="0" sz="1200" u="none" cap="none" strike="noStrike">
+                <a:solidFill>
+                  <a:srgbClr val="E9E9E9"/>
+                </a:solidFill>
+                <a:latin typeface="Arial"/>
+                <a:ea typeface="Arial"/>
+                <a:cs typeface="Arial"/>
+                <a:sym typeface="Arial"/>
+              </a:defRPr>
             </a:lvl8pPr>
-            <a:lvl9pPr indent="0" lvl="8" marL="0" algn="r">
-              <a:spcBef>
-                <a:spcPts val="0"/>
-              </a:spcBef>
-              <a:buNone/>
-              <a:defRPr/>
+            <a:lvl9pPr indent="0" lvl="8" marL="0" marR="0" algn="r">
+              <a:lnSpc>
+                <a:spcPct val="100000"/>
+              </a:lnSpc>
+              <a:spcBef>
+                <a:spcPts val="0"/>
+              </a:spcBef>
+              <a:spcAft>
+                <a:spcPts val="0"/>
+              </a:spcAft>
+              <a:buClr>
+                <a:srgbClr val="000000"/>
+              </a:buClr>
+              <a:buSzPts val="1200"/>
+              <a:buFont typeface="Arial"/>
+              <a:buNone/>
+              <a:defRPr b="0" i="0" sz="1200" u="none" cap="none" strike="noStrike">
+                <a:solidFill>
+                  <a:srgbClr val="E9E9E9"/>
+                </a:solidFill>
+                <a:latin typeface="Arial"/>
+                <a:ea typeface="Arial"/>
+                <a:cs typeface="Arial"/>
+                <a:sym typeface="Arial"/>
+              </a:defRPr>
             </a:lvl9pPr>
           </a:lstStyle>
           <a:p>
@@ -3995,7 +6060,10 @@
               <a:buNone/>
               <a:defRPr/>
             </a:lvl1pPr>
-            <a:lvl2pPr lvl="1">
+            <a:lvl2pPr lvl="1" algn="l">
+              <a:lnSpc>
+                <a:spcPct val="100000"/>
+              </a:lnSpc>
               <a:spcBef>
                 <a:spcPts val="0"/>
               </a:spcBef>
@@ -4006,7 +6074,10 @@
               <a:buNone/>
               <a:defRPr/>
             </a:lvl2pPr>
-            <a:lvl3pPr lvl="2">
+            <a:lvl3pPr lvl="2" algn="l">
+              <a:lnSpc>
+                <a:spcPct val="100000"/>
+              </a:lnSpc>
               <a:spcBef>
                 <a:spcPts val="0"/>
               </a:spcBef>
@@ -4017,7 +6088,10 @@
               <a:buNone/>
               <a:defRPr/>
             </a:lvl3pPr>
-            <a:lvl4pPr lvl="3">
+            <a:lvl4pPr lvl="3" algn="l">
+              <a:lnSpc>
+                <a:spcPct val="100000"/>
+              </a:lnSpc>
               <a:spcBef>
                 <a:spcPts val="0"/>
               </a:spcBef>
@@ -4028,7 +6102,10 @@
               <a:buNone/>
               <a:defRPr/>
             </a:lvl4pPr>
-            <a:lvl5pPr lvl="4">
+            <a:lvl5pPr lvl="4" algn="l">
+              <a:lnSpc>
+                <a:spcPct val="100000"/>
+              </a:lnSpc>
               <a:spcBef>
                 <a:spcPts val="0"/>
               </a:spcBef>
@@ -4039,7 +6116,10 @@
               <a:buNone/>
               <a:defRPr/>
             </a:lvl5pPr>
-            <a:lvl6pPr lvl="5">
+            <a:lvl6pPr lvl="5" algn="l">
+              <a:lnSpc>
+                <a:spcPct val="100000"/>
+              </a:lnSpc>
               <a:spcBef>
                 <a:spcPts val="0"/>
               </a:spcBef>
@@ -4050,7 +6130,10 @@
               <a:buNone/>
               <a:defRPr/>
             </a:lvl6pPr>
-            <a:lvl7pPr lvl="6">
+            <a:lvl7pPr lvl="6" algn="l">
+              <a:lnSpc>
+                <a:spcPct val="100000"/>
+              </a:lnSpc>
               <a:spcBef>
                 <a:spcPts val="0"/>
               </a:spcBef>
@@ -4061,7 +6144,10 @@
               <a:buNone/>
               <a:defRPr/>
             </a:lvl7pPr>
-            <a:lvl8pPr lvl="7">
+            <a:lvl8pPr lvl="7" algn="l">
+              <a:lnSpc>
+                <a:spcPct val="100000"/>
+              </a:lnSpc>
               <a:spcBef>
                 <a:spcPts val="0"/>
               </a:spcBef>
@@ -4072,7 +6158,10 @@
               <a:buNone/>
               <a:defRPr/>
             </a:lvl8pPr>
-            <a:lvl9pPr lvl="8">
+            <a:lvl9pPr lvl="8" algn="l">
+              <a:lnSpc>
+                <a:spcPct val="100000"/>
+              </a:lnSpc>
               <a:spcBef>
                 <a:spcPts val="0"/>
               </a:spcBef>
@@ -4297,6 +6386,9 @@
           </a:bodyPr>
           <a:lstStyle>
             <a:lvl1pPr lvl="0" algn="l">
+              <a:lnSpc>
+                <a:spcPct val="100000"/>
+              </a:lnSpc>
               <a:spcBef>
                 <a:spcPts val="0"/>
               </a:spcBef>
@@ -4308,6 +6400,9 @@
               <a:defRPr/>
             </a:lvl1pPr>
             <a:lvl2pPr lvl="1" algn="l">
+              <a:lnSpc>
+                <a:spcPct val="100000"/>
+              </a:lnSpc>
               <a:spcBef>
                 <a:spcPts val="0"/>
               </a:spcBef>
@@ -4319,6 +6414,9 @@
               <a:defRPr/>
             </a:lvl2pPr>
             <a:lvl3pPr lvl="2" algn="l">
+              <a:lnSpc>
+                <a:spcPct val="100000"/>
+              </a:lnSpc>
               <a:spcBef>
                 <a:spcPts val="0"/>
               </a:spcBef>
@@ -4330,6 +6428,9 @@
               <a:defRPr/>
             </a:lvl3pPr>
             <a:lvl4pPr lvl="3" algn="l">
+              <a:lnSpc>
+                <a:spcPct val="100000"/>
+              </a:lnSpc>
               <a:spcBef>
                 <a:spcPts val="0"/>
               </a:spcBef>
@@ -4341,6 +6442,9 @@
               <a:defRPr/>
             </a:lvl4pPr>
             <a:lvl5pPr lvl="4" algn="l">
+              <a:lnSpc>
+                <a:spcPct val="100000"/>
+              </a:lnSpc>
               <a:spcBef>
                 <a:spcPts val="0"/>
               </a:spcBef>
@@ -4352,6 +6456,9 @@
               <a:defRPr/>
             </a:lvl5pPr>
             <a:lvl6pPr lvl="5" algn="l">
+              <a:lnSpc>
+                <a:spcPct val="100000"/>
+              </a:lnSpc>
               <a:spcBef>
                 <a:spcPts val="0"/>
               </a:spcBef>
@@ -4363,6 +6470,9 @@
               <a:defRPr/>
             </a:lvl6pPr>
             <a:lvl7pPr lvl="6" algn="l">
+              <a:lnSpc>
+                <a:spcPct val="100000"/>
+              </a:lnSpc>
               <a:spcBef>
                 <a:spcPts val="0"/>
               </a:spcBef>
@@ -4374,6 +6484,9 @@
               <a:defRPr/>
             </a:lvl7pPr>
             <a:lvl8pPr lvl="7" algn="l">
+              <a:lnSpc>
+                <a:spcPct val="100000"/>
+              </a:lnSpc>
               <a:spcBef>
                 <a:spcPts val="0"/>
               </a:spcBef>
@@ -4385,6 +6498,9 @@
               <a:defRPr/>
             </a:lvl8pPr>
             <a:lvl9pPr lvl="8" algn="l">
+              <a:lnSpc>
+                <a:spcPct val="100000"/>
+              </a:lnSpc>
               <a:spcBef>
                 <a:spcPts val="0"/>
               </a:spcBef>
@@ -4426,6 +6542,9 @@
           </a:bodyPr>
           <a:lstStyle>
             <a:lvl1pPr lvl="0" algn="ctr">
+              <a:lnSpc>
+                <a:spcPct val="100000"/>
+              </a:lnSpc>
               <a:spcBef>
                 <a:spcPts val="0"/>
               </a:spcBef>
@@ -4437,6 +6556,9 @@
               <a:defRPr/>
             </a:lvl1pPr>
             <a:lvl2pPr lvl="1" algn="l">
+              <a:lnSpc>
+                <a:spcPct val="100000"/>
+              </a:lnSpc>
               <a:spcBef>
                 <a:spcPts val="0"/>
               </a:spcBef>
@@ -4448,6 +6570,9 @@
               <a:defRPr/>
             </a:lvl2pPr>
             <a:lvl3pPr lvl="2" algn="l">
+              <a:lnSpc>
+                <a:spcPct val="100000"/>
+              </a:lnSpc>
               <a:spcBef>
                 <a:spcPts val="0"/>
               </a:spcBef>
@@ -4459,6 +6584,9 @@
               <a:defRPr/>
             </a:lvl3pPr>
             <a:lvl4pPr lvl="3" algn="l">
+              <a:lnSpc>
+                <a:spcPct val="100000"/>
+              </a:lnSpc>
               <a:spcBef>
                 <a:spcPts val="0"/>
               </a:spcBef>
@@ -4470,6 +6598,9 @@
               <a:defRPr/>
             </a:lvl4pPr>
             <a:lvl5pPr lvl="4" algn="l">
+              <a:lnSpc>
+                <a:spcPct val="100000"/>
+              </a:lnSpc>
               <a:spcBef>
                 <a:spcPts val="0"/>
               </a:spcBef>
@@ -4481,6 +6612,9 @@
               <a:defRPr/>
             </a:lvl5pPr>
             <a:lvl6pPr lvl="5" algn="l">
+              <a:lnSpc>
+                <a:spcPct val="100000"/>
+              </a:lnSpc>
               <a:spcBef>
                 <a:spcPts val="0"/>
               </a:spcBef>
@@ -4492,6 +6626,9 @@
               <a:defRPr/>
             </a:lvl6pPr>
             <a:lvl7pPr lvl="6" algn="l">
+              <a:lnSpc>
+                <a:spcPct val="100000"/>
+              </a:lnSpc>
               <a:spcBef>
                 <a:spcPts val="0"/>
               </a:spcBef>
@@ -4503,6 +6640,9 @@
               <a:defRPr/>
             </a:lvl7pPr>
             <a:lvl8pPr lvl="7" algn="l">
+              <a:lnSpc>
+                <a:spcPct val="100000"/>
+              </a:lnSpc>
               <a:spcBef>
                 <a:spcPts val="0"/>
               </a:spcBef>
@@ -4514,6 +6654,9 @@
               <a:defRPr/>
             </a:lvl8pPr>
             <a:lvl9pPr lvl="8" algn="l">
+              <a:lnSpc>
+                <a:spcPct val="100000"/>
+              </a:lnSpc>
               <a:spcBef>
                 <a:spcPts val="0"/>
               </a:spcBef>
@@ -4554,68 +6697,239 @@
             <a:noAutofit/>
           </a:bodyPr>
           <a:lstStyle>
-            <a:lvl1pPr indent="0" lvl="0" marL="0" algn="r">
-              <a:spcBef>
-                <a:spcPts val="0"/>
-              </a:spcBef>
-              <a:buNone/>
-              <a:defRPr/>
+            <a:lvl1pPr indent="0" lvl="0" marL="0" marR="0" algn="r">
+              <a:lnSpc>
+                <a:spcPct val="100000"/>
+              </a:lnSpc>
+              <a:spcBef>
+                <a:spcPts val="0"/>
+              </a:spcBef>
+              <a:spcAft>
+                <a:spcPts val="0"/>
+              </a:spcAft>
+              <a:buClr>
+                <a:srgbClr val="000000"/>
+              </a:buClr>
+              <a:buSzPts val="1200"/>
+              <a:buFont typeface="Arial"/>
+              <a:buNone/>
+              <a:defRPr b="0" i="0" sz="1200" u="none" cap="none" strike="noStrike">
+                <a:solidFill>
+                  <a:srgbClr val="E9E9E9"/>
+                </a:solidFill>
+                <a:latin typeface="Arial"/>
+                <a:ea typeface="Arial"/>
+                <a:cs typeface="Arial"/>
+                <a:sym typeface="Arial"/>
+              </a:defRPr>
             </a:lvl1pPr>
-            <a:lvl2pPr indent="0" lvl="1" marL="0" algn="r">
-              <a:spcBef>
-                <a:spcPts val="0"/>
-              </a:spcBef>
-              <a:buNone/>
-              <a:defRPr/>
+            <a:lvl2pPr indent="0" lvl="1" marL="0" marR="0" algn="r">
+              <a:lnSpc>
+                <a:spcPct val="100000"/>
+              </a:lnSpc>
+              <a:spcBef>
+                <a:spcPts val="0"/>
+              </a:spcBef>
+              <a:spcAft>
+                <a:spcPts val="0"/>
+              </a:spcAft>
+              <a:buClr>
+                <a:srgbClr val="000000"/>
+              </a:buClr>
+              <a:buSzPts val="1200"/>
+              <a:buFont typeface="Arial"/>
+              <a:buNone/>
+              <a:defRPr b="0" i="0" sz="1200" u="none" cap="none" strike="noStrike">
+                <a:solidFill>
+                  <a:srgbClr val="E9E9E9"/>
+                </a:solidFill>
+                <a:latin typeface="Arial"/>
+                <a:ea typeface="Arial"/>
+                <a:cs typeface="Arial"/>
+                <a:sym typeface="Arial"/>
+              </a:defRPr>
             </a:lvl2pPr>
-            <a:lvl3pPr indent="0" lvl="2" marL="0" algn="r">
-              <a:spcBef>
-                <a:spcPts val="0"/>
-              </a:spcBef>
-              <a:buNone/>
-              <a:defRPr/>
+            <a:lvl3pPr indent="0" lvl="2" marL="0" marR="0" algn="r">
+              <a:lnSpc>
+                <a:spcPct val="100000"/>
+              </a:lnSpc>
+              <a:spcBef>
+                <a:spcPts val="0"/>
+              </a:spcBef>
+              <a:spcAft>
+                <a:spcPts val="0"/>
+              </a:spcAft>
+              <a:buClr>
+                <a:srgbClr val="000000"/>
+              </a:buClr>
+              <a:buSzPts val="1200"/>
+              <a:buFont typeface="Arial"/>
+              <a:buNone/>
+              <a:defRPr b="0" i="0" sz="1200" u="none" cap="none" strike="noStrike">
+                <a:solidFill>
+                  <a:srgbClr val="E9E9E9"/>
+                </a:solidFill>
+                <a:latin typeface="Arial"/>
+                <a:ea typeface="Arial"/>
+                <a:cs typeface="Arial"/>
+                <a:sym typeface="Arial"/>
+              </a:defRPr>
             </a:lvl3pPr>
-            <a:lvl4pPr indent="0" lvl="3" marL="0" algn="r">
-              <a:spcBef>
-                <a:spcPts val="0"/>
-              </a:spcBef>
-              <a:buNone/>
-              <a:defRPr/>
+            <a:lvl4pPr indent="0" lvl="3" marL="0" marR="0" algn="r">
+              <a:lnSpc>
+                <a:spcPct val="100000"/>
+              </a:lnSpc>
+              <a:spcBef>
+                <a:spcPts val="0"/>
+              </a:spcBef>
+              <a:spcAft>
+                <a:spcPts val="0"/>
+              </a:spcAft>
+              <a:buClr>
+                <a:srgbClr val="000000"/>
+              </a:buClr>
+              <a:buSzPts val="1200"/>
+              <a:buFont typeface="Arial"/>
+              <a:buNone/>
+              <a:defRPr b="0" i="0" sz="1200" u="none" cap="none" strike="noStrike">
+                <a:solidFill>
+                  <a:srgbClr val="E9E9E9"/>
+                </a:solidFill>
+                <a:latin typeface="Arial"/>
+                <a:ea typeface="Arial"/>
+                <a:cs typeface="Arial"/>
+                <a:sym typeface="Arial"/>
+              </a:defRPr>
             </a:lvl4pPr>
-            <a:lvl5pPr indent="0" lvl="4" marL="0" algn="r">
-              <a:spcBef>
-                <a:spcPts val="0"/>
-              </a:spcBef>
-              <a:buNone/>
-              <a:defRPr/>
+            <a:lvl5pPr indent="0" lvl="4" marL="0" marR="0" algn="r">
+              <a:lnSpc>
+                <a:spcPct val="100000"/>
+              </a:lnSpc>
+              <a:spcBef>
+                <a:spcPts val="0"/>
+              </a:spcBef>
+              <a:spcAft>
+                <a:spcPts val="0"/>
+              </a:spcAft>
+              <a:buClr>
+                <a:srgbClr val="000000"/>
+              </a:buClr>
+              <a:buSzPts val="1200"/>
+              <a:buFont typeface="Arial"/>
+              <a:buNone/>
+              <a:defRPr b="0" i="0" sz="1200" u="none" cap="none" strike="noStrike">
+                <a:solidFill>
+                  <a:srgbClr val="E9E9E9"/>
+                </a:solidFill>
+                <a:latin typeface="Arial"/>
+                <a:ea typeface="Arial"/>
+                <a:cs typeface="Arial"/>
+                <a:sym typeface="Arial"/>
+              </a:defRPr>
             </a:lvl5pPr>
-            <a:lvl6pPr indent="0" lvl="5" marL="0" algn="r">
-              <a:spcBef>
-                <a:spcPts val="0"/>
-              </a:spcBef>
-              <a:buNone/>
-              <a:defRPr/>
+            <a:lvl6pPr indent="0" lvl="5" marL="0" marR="0" algn="r">
+              <a:lnSpc>
+                <a:spcPct val="100000"/>
+              </a:lnSpc>
+              <a:spcBef>
+                <a:spcPts val="0"/>
+              </a:spcBef>
+              <a:spcAft>
+                <a:spcPts val="0"/>
+              </a:spcAft>
+              <a:buClr>
+                <a:srgbClr val="000000"/>
+              </a:buClr>
+              <a:buSzPts val="1200"/>
+              <a:buFont typeface="Arial"/>
+              <a:buNone/>
+              <a:defRPr b="0" i="0" sz="1200" u="none" cap="none" strike="noStrike">
+                <a:solidFill>
+                  <a:srgbClr val="E9E9E9"/>
+                </a:solidFill>
+                <a:latin typeface="Arial"/>
+                <a:ea typeface="Arial"/>
+                <a:cs typeface="Arial"/>
+                <a:sym typeface="Arial"/>
+              </a:defRPr>
             </a:lvl6pPr>
-            <a:lvl7pPr indent="0" lvl="6" marL="0" algn="r">
-              <a:spcBef>
-                <a:spcPts val="0"/>
-              </a:spcBef>
-              <a:buNone/>
-              <a:defRPr/>
+            <a:lvl7pPr indent="0" lvl="6" marL="0" marR="0" algn="r">
+              <a:lnSpc>
+                <a:spcPct val="100000"/>
+              </a:lnSpc>
+              <a:spcBef>
+                <a:spcPts val="0"/>
+              </a:spcBef>
+              <a:spcAft>
+                <a:spcPts val="0"/>
+              </a:spcAft>
+              <a:buClr>
+                <a:srgbClr val="000000"/>
+              </a:buClr>
+              <a:buSzPts val="1200"/>
+              <a:buFont typeface="Arial"/>
+              <a:buNone/>
+              <a:defRPr b="0" i="0" sz="1200" u="none" cap="none" strike="noStrike">
+                <a:solidFill>
+                  <a:srgbClr val="E9E9E9"/>
+                </a:solidFill>
+                <a:latin typeface="Arial"/>
+                <a:ea typeface="Arial"/>
+                <a:cs typeface="Arial"/>
+                <a:sym typeface="Arial"/>
+              </a:defRPr>
             </a:lvl7pPr>
-            <a:lvl8pPr indent="0" lvl="7" marL="0" algn="r">
-              <a:spcBef>
-                <a:spcPts val="0"/>
-              </a:spcBef>
-              <a:buNone/>
-              <a:defRPr/>
+            <a:lvl8pPr indent="0" lvl="7" marL="0" marR="0" algn="r">
+              <a:lnSpc>
+                <a:spcPct val="100000"/>
+              </a:lnSpc>
+              <a:spcBef>
+                <a:spcPts val="0"/>
+              </a:spcBef>
+              <a:spcAft>
+                <a:spcPts val="0"/>
+              </a:spcAft>
+              <a:buClr>
+                <a:srgbClr val="000000"/>
+              </a:buClr>
+              <a:buSzPts val="1200"/>
+              <a:buFont typeface="Arial"/>
+              <a:buNone/>
+              <a:defRPr b="0" i="0" sz="1200" u="none" cap="none" strike="noStrike">
+                <a:solidFill>
+                  <a:srgbClr val="E9E9E9"/>
+                </a:solidFill>
+                <a:latin typeface="Arial"/>
+                <a:ea typeface="Arial"/>
+                <a:cs typeface="Arial"/>
+                <a:sym typeface="Arial"/>
+              </a:defRPr>
             </a:lvl8pPr>
-            <a:lvl9pPr indent="0" lvl="8" marL="0" algn="r">
-              <a:spcBef>
-                <a:spcPts val="0"/>
-              </a:spcBef>
-              <a:buNone/>
-              <a:defRPr/>
+            <a:lvl9pPr indent="0" lvl="8" marL="0" marR="0" algn="r">
+              <a:lnSpc>
+                <a:spcPct val="100000"/>
+              </a:lnSpc>
+              <a:spcBef>
+                <a:spcPts val="0"/>
+              </a:spcBef>
+              <a:spcAft>
+                <a:spcPts val="0"/>
+              </a:spcAft>
+              <a:buClr>
+                <a:srgbClr val="000000"/>
+              </a:buClr>
+              <a:buSzPts val="1200"/>
+              <a:buFont typeface="Arial"/>
+              <a:buNone/>
+              <a:defRPr b="0" i="0" sz="1200" u="none" cap="none" strike="noStrike">
+                <a:solidFill>
+                  <a:srgbClr val="E9E9E9"/>
+                </a:solidFill>
+                <a:latin typeface="Arial"/>
+                <a:ea typeface="Arial"/>
+                <a:cs typeface="Arial"/>
+                <a:sym typeface="Arial"/>
+              </a:defRPr>
             </a:lvl9pPr>
           </a:lstStyle>
           <a:p>
@@ -4705,7 +7019,10 @@
               <a:buNone/>
               <a:defRPr sz="6000"/>
             </a:lvl1pPr>
-            <a:lvl2pPr lvl="1">
+            <a:lvl2pPr lvl="1" algn="l">
+              <a:lnSpc>
+                <a:spcPct val="100000"/>
+              </a:lnSpc>
               <a:spcBef>
                 <a:spcPts val="0"/>
               </a:spcBef>
@@ -4716,7 +7033,10 @@
               <a:buNone/>
               <a:defRPr/>
             </a:lvl2pPr>
-            <a:lvl3pPr lvl="2">
+            <a:lvl3pPr lvl="2" algn="l">
+              <a:lnSpc>
+                <a:spcPct val="100000"/>
+              </a:lnSpc>
               <a:spcBef>
                 <a:spcPts val="0"/>
               </a:spcBef>
@@ -4727,7 +7047,10 @@
               <a:buNone/>
               <a:defRPr/>
             </a:lvl3pPr>
-            <a:lvl4pPr lvl="3">
+            <a:lvl4pPr lvl="3" algn="l">
+              <a:lnSpc>
+                <a:spcPct val="100000"/>
+              </a:lnSpc>
               <a:spcBef>
                 <a:spcPts val="0"/>
               </a:spcBef>
@@ -4738,7 +7061,10 @@
               <a:buNone/>
               <a:defRPr/>
             </a:lvl4pPr>
-            <a:lvl5pPr lvl="4">
+            <a:lvl5pPr lvl="4" algn="l">
+              <a:lnSpc>
+                <a:spcPct val="100000"/>
+              </a:lnSpc>
               <a:spcBef>
                 <a:spcPts val="0"/>
               </a:spcBef>
@@ -4749,7 +7075,10 @@
               <a:buNone/>
               <a:defRPr/>
             </a:lvl5pPr>
-            <a:lvl6pPr lvl="5">
+            <a:lvl6pPr lvl="5" algn="l">
+              <a:lnSpc>
+                <a:spcPct val="100000"/>
+              </a:lnSpc>
               <a:spcBef>
                 <a:spcPts val="0"/>
               </a:spcBef>
@@ -4760,7 +7089,10 @@
               <a:buNone/>
               <a:defRPr/>
             </a:lvl6pPr>
-            <a:lvl7pPr lvl="6">
+            <a:lvl7pPr lvl="6" algn="l">
+              <a:lnSpc>
+                <a:spcPct val="100000"/>
+              </a:lnSpc>
               <a:spcBef>
                 <a:spcPts val="0"/>
               </a:spcBef>
@@ -4771,7 +7103,10 @@
               <a:buNone/>
               <a:defRPr/>
             </a:lvl7pPr>
-            <a:lvl8pPr lvl="7">
+            <a:lvl8pPr lvl="7" algn="l">
+              <a:lnSpc>
+                <a:spcPct val="100000"/>
+              </a:lnSpc>
               <a:spcBef>
                 <a:spcPts val="0"/>
               </a:spcBef>
@@ -4782,7 +7117,10 @@
               <a:buNone/>
               <a:defRPr/>
             </a:lvl8pPr>
-            <a:lvl9pPr lvl="8">
+            <a:lvl9pPr lvl="8" algn="l">
+              <a:lnSpc>
+                <a:spcPct val="100000"/>
+              </a:lnSpc>
               <a:spcBef>
                 <a:spcPts val="0"/>
               </a:spcBef>
@@ -5043,6 +7381,9 @@
           </a:bodyPr>
           <a:lstStyle>
             <a:lvl1pPr lvl="0" algn="l">
+              <a:lnSpc>
+                <a:spcPct val="100000"/>
+              </a:lnSpc>
               <a:spcBef>
                 <a:spcPts val="0"/>
               </a:spcBef>
@@ -5054,6 +7395,9 @@
               <a:defRPr/>
             </a:lvl1pPr>
             <a:lvl2pPr lvl="1" algn="l">
+              <a:lnSpc>
+                <a:spcPct val="100000"/>
+              </a:lnSpc>
               <a:spcBef>
                 <a:spcPts val="0"/>
               </a:spcBef>
@@ -5065,6 +7409,9 @@
               <a:defRPr/>
             </a:lvl2pPr>
             <a:lvl3pPr lvl="2" algn="l">
+              <a:lnSpc>
+                <a:spcPct val="100000"/>
+              </a:lnSpc>
               <a:spcBef>
                 <a:spcPts val="0"/>
               </a:spcBef>
@@ -5076,6 +7423,9 @@
               <a:defRPr/>
             </a:lvl3pPr>
             <a:lvl4pPr lvl="3" algn="l">
+              <a:lnSpc>
+                <a:spcPct val="100000"/>
+              </a:lnSpc>
               <a:spcBef>
                 <a:spcPts val="0"/>
               </a:spcBef>
@@ -5087,6 +7437,9 @@
               <a:defRPr/>
             </a:lvl4pPr>
             <a:lvl5pPr lvl="4" algn="l">
+              <a:lnSpc>
+                <a:spcPct val="100000"/>
+              </a:lnSpc>
               <a:spcBef>
                 <a:spcPts val="0"/>
               </a:spcBef>
@@ -5098,6 +7451,9 @@
               <a:defRPr/>
             </a:lvl5pPr>
             <a:lvl6pPr lvl="5" algn="l">
+              <a:lnSpc>
+                <a:spcPct val="100000"/>
+              </a:lnSpc>
               <a:spcBef>
                 <a:spcPts val="0"/>
               </a:spcBef>
@@ -5109,6 +7465,9 @@
               <a:defRPr/>
             </a:lvl6pPr>
             <a:lvl7pPr lvl="6" algn="l">
+              <a:lnSpc>
+                <a:spcPct val="100000"/>
+              </a:lnSpc>
               <a:spcBef>
                 <a:spcPts val="0"/>
               </a:spcBef>
@@ -5120,6 +7479,9 @@
               <a:defRPr/>
             </a:lvl7pPr>
             <a:lvl8pPr lvl="7" algn="l">
+              <a:lnSpc>
+                <a:spcPct val="100000"/>
+              </a:lnSpc>
               <a:spcBef>
                 <a:spcPts val="0"/>
               </a:spcBef>
@@ -5131,6 +7493,9 @@
               <a:defRPr/>
             </a:lvl8pPr>
             <a:lvl9pPr lvl="8" algn="l">
+              <a:lnSpc>
+                <a:spcPct val="100000"/>
+              </a:lnSpc>
               <a:spcBef>
                 <a:spcPts val="0"/>
               </a:spcBef>
@@ -5172,6 +7537,9 @@
           </a:bodyPr>
           <a:lstStyle>
             <a:lvl1pPr lvl="0" algn="ctr">
+              <a:lnSpc>
+                <a:spcPct val="100000"/>
+              </a:lnSpc>
               <a:spcBef>
                 <a:spcPts val="0"/>
               </a:spcBef>
@@ -5183,6 +7551,9 @@
               <a:defRPr/>
             </a:lvl1pPr>
             <a:lvl2pPr lvl="1" algn="l">
+              <a:lnSpc>
+                <a:spcPct val="100000"/>
+              </a:lnSpc>
               <a:spcBef>
                 <a:spcPts val="0"/>
               </a:spcBef>
@@ -5194,6 +7565,9 @@
               <a:defRPr/>
             </a:lvl2pPr>
             <a:lvl3pPr lvl="2" algn="l">
+              <a:lnSpc>
+                <a:spcPct val="100000"/>
+              </a:lnSpc>
               <a:spcBef>
                 <a:spcPts val="0"/>
               </a:spcBef>
@@ -5205,6 +7579,9 @@
               <a:defRPr/>
             </a:lvl3pPr>
             <a:lvl4pPr lvl="3" algn="l">
+              <a:lnSpc>
+                <a:spcPct val="100000"/>
+              </a:lnSpc>
               <a:spcBef>
                 <a:spcPts val="0"/>
               </a:spcBef>
@@ -5216,6 +7593,9 @@
               <a:defRPr/>
             </a:lvl4pPr>
             <a:lvl5pPr lvl="4" algn="l">
+              <a:lnSpc>
+                <a:spcPct val="100000"/>
+              </a:lnSpc>
               <a:spcBef>
                 <a:spcPts val="0"/>
               </a:spcBef>
@@ -5227,6 +7607,9 @@
               <a:defRPr/>
             </a:lvl5pPr>
             <a:lvl6pPr lvl="5" algn="l">
+              <a:lnSpc>
+                <a:spcPct val="100000"/>
+              </a:lnSpc>
               <a:spcBef>
                 <a:spcPts val="0"/>
               </a:spcBef>
@@ -5238,6 +7621,9 @@
               <a:defRPr/>
             </a:lvl6pPr>
             <a:lvl7pPr lvl="6" algn="l">
+              <a:lnSpc>
+                <a:spcPct val="100000"/>
+              </a:lnSpc>
               <a:spcBef>
                 <a:spcPts val="0"/>
               </a:spcBef>
@@ -5249,6 +7635,9 @@
               <a:defRPr/>
             </a:lvl7pPr>
             <a:lvl8pPr lvl="7" algn="l">
+              <a:lnSpc>
+                <a:spcPct val="100000"/>
+              </a:lnSpc>
               <a:spcBef>
                 <a:spcPts val="0"/>
               </a:spcBef>
@@ -5260,6 +7649,9 @@
               <a:defRPr/>
             </a:lvl8pPr>
             <a:lvl9pPr lvl="8" algn="l">
+              <a:lnSpc>
+                <a:spcPct val="100000"/>
+              </a:lnSpc>
               <a:spcBef>
                 <a:spcPts val="0"/>
               </a:spcBef>
@@ -5300,68 +7692,239 @@
             <a:noAutofit/>
           </a:bodyPr>
           <a:lstStyle>
-            <a:lvl1pPr indent="0" lvl="0" marL="0" algn="r">
-              <a:spcBef>
-                <a:spcPts val="0"/>
-              </a:spcBef>
-              <a:buNone/>
-              <a:defRPr/>
+            <a:lvl1pPr indent="0" lvl="0" marL="0" marR="0" algn="r">
+              <a:lnSpc>
+                <a:spcPct val="100000"/>
+              </a:lnSpc>
+              <a:spcBef>
+                <a:spcPts val="0"/>
+              </a:spcBef>
+              <a:spcAft>
+                <a:spcPts val="0"/>
+              </a:spcAft>
+              <a:buClr>
+                <a:srgbClr val="000000"/>
+              </a:buClr>
+              <a:buSzPts val="1200"/>
+              <a:buFont typeface="Arial"/>
+              <a:buNone/>
+              <a:defRPr b="0" i="0" sz="1200" u="none" cap="none" strike="noStrike">
+                <a:solidFill>
+                  <a:srgbClr val="E9E9E9"/>
+                </a:solidFill>
+                <a:latin typeface="Arial"/>
+                <a:ea typeface="Arial"/>
+                <a:cs typeface="Arial"/>
+                <a:sym typeface="Arial"/>
+              </a:defRPr>
             </a:lvl1pPr>
-            <a:lvl2pPr indent="0" lvl="1" marL="0" algn="r">
-              <a:spcBef>
-                <a:spcPts val="0"/>
-              </a:spcBef>
-              <a:buNone/>
-              <a:defRPr/>
+            <a:lvl2pPr indent="0" lvl="1" marL="0" marR="0" algn="r">
+              <a:lnSpc>
+                <a:spcPct val="100000"/>
+              </a:lnSpc>
+              <a:spcBef>
+                <a:spcPts val="0"/>
+              </a:spcBef>
+              <a:spcAft>
+                <a:spcPts val="0"/>
+              </a:spcAft>
+              <a:buClr>
+                <a:srgbClr val="000000"/>
+              </a:buClr>
+              <a:buSzPts val="1200"/>
+              <a:buFont typeface="Arial"/>
+              <a:buNone/>
+              <a:defRPr b="0" i="0" sz="1200" u="none" cap="none" strike="noStrike">
+                <a:solidFill>
+                  <a:srgbClr val="E9E9E9"/>
+                </a:solidFill>
+                <a:latin typeface="Arial"/>
+                <a:ea typeface="Arial"/>
+                <a:cs typeface="Arial"/>
+                <a:sym typeface="Arial"/>
+              </a:defRPr>
             </a:lvl2pPr>
-            <a:lvl3pPr indent="0" lvl="2" marL="0" algn="r">
-              <a:spcBef>
-                <a:spcPts val="0"/>
-              </a:spcBef>
-              <a:buNone/>
-              <a:defRPr/>
+            <a:lvl3pPr indent="0" lvl="2" marL="0" marR="0" algn="r">
+              <a:lnSpc>
+                <a:spcPct val="100000"/>
+              </a:lnSpc>
+              <a:spcBef>
+                <a:spcPts val="0"/>
+              </a:spcBef>
+              <a:spcAft>
+                <a:spcPts val="0"/>
+              </a:spcAft>
+              <a:buClr>
+                <a:srgbClr val="000000"/>
+              </a:buClr>
+              <a:buSzPts val="1200"/>
+              <a:buFont typeface="Arial"/>
+              <a:buNone/>
+              <a:defRPr b="0" i="0" sz="1200" u="none" cap="none" strike="noStrike">
+                <a:solidFill>
+                  <a:srgbClr val="E9E9E9"/>
+                </a:solidFill>
+                <a:latin typeface="Arial"/>
+                <a:ea typeface="Arial"/>
+                <a:cs typeface="Arial"/>
+                <a:sym typeface="Arial"/>
+              </a:defRPr>
             </a:lvl3pPr>
-            <a:lvl4pPr indent="0" lvl="3" marL="0" algn="r">
-              <a:spcBef>
-                <a:spcPts val="0"/>
-              </a:spcBef>
-              <a:buNone/>
-              <a:defRPr/>
+            <a:lvl4pPr indent="0" lvl="3" marL="0" marR="0" algn="r">
+              <a:lnSpc>
+                <a:spcPct val="100000"/>
+              </a:lnSpc>
+              <a:spcBef>
+                <a:spcPts val="0"/>
+              </a:spcBef>
+              <a:spcAft>
+                <a:spcPts val="0"/>
+              </a:spcAft>
+              <a:buClr>
+                <a:srgbClr val="000000"/>
+              </a:buClr>
+              <a:buSzPts val="1200"/>
+              <a:buFont typeface="Arial"/>
+              <a:buNone/>
+              <a:defRPr b="0" i="0" sz="1200" u="none" cap="none" strike="noStrike">
+                <a:solidFill>
+                  <a:srgbClr val="E9E9E9"/>
+                </a:solidFill>
+                <a:latin typeface="Arial"/>
+                <a:ea typeface="Arial"/>
+                <a:cs typeface="Arial"/>
+                <a:sym typeface="Arial"/>
+              </a:defRPr>
             </a:lvl4pPr>
-            <a:lvl5pPr indent="0" lvl="4" marL="0" algn="r">
-              <a:spcBef>
-                <a:spcPts val="0"/>
-              </a:spcBef>
-              <a:buNone/>
-              <a:defRPr/>
+            <a:lvl5pPr indent="0" lvl="4" marL="0" marR="0" algn="r">
+              <a:lnSpc>
+                <a:spcPct val="100000"/>
+              </a:lnSpc>
+              <a:spcBef>
+                <a:spcPts val="0"/>
+              </a:spcBef>
+              <a:spcAft>
+                <a:spcPts val="0"/>
+              </a:spcAft>
+              <a:buClr>
+                <a:srgbClr val="000000"/>
+              </a:buClr>
+              <a:buSzPts val="1200"/>
+              <a:buFont typeface="Arial"/>
+              <a:buNone/>
+              <a:defRPr b="0" i="0" sz="1200" u="none" cap="none" strike="noStrike">
+                <a:solidFill>
+                  <a:srgbClr val="E9E9E9"/>
+                </a:solidFill>
+                <a:latin typeface="Arial"/>
+                <a:ea typeface="Arial"/>
+                <a:cs typeface="Arial"/>
+                <a:sym typeface="Arial"/>
+              </a:defRPr>
             </a:lvl5pPr>
-            <a:lvl6pPr indent="0" lvl="5" marL="0" algn="r">
-              <a:spcBef>
-                <a:spcPts val="0"/>
-              </a:spcBef>
-              <a:buNone/>
-              <a:defRPr/>
+            <a:lvl6pPr indent="0" lvl="5" marL="0" marR="0" algn="r">
+              <a:lnSpc>
+                <a:spcPct val="100000"/>
+              </a:lnSpc>
+              <a:spcBef>
+                <a:spcPts val="0"/>
+              </a:spcBef>
+              <a:spcAft>
+                <a:spcPts val="0"/>
+              </a:spcAft>
+              <a:buClr>
+                <a:srgbClr val="000000"/>
+              </a:buClr>
+              <a:buSzPts val="1200"/>
+              <a:buFont typeface="Arial"/>
+              <a:buNone/>
+              <a:defRPr b="0" i="0" sz="1200" u="none" cap="none" strike="noStrike">
+                <a:solidFill>
+                  <a:srgbClr val="E9E9E9"/>
+                </a:solidFill>
+                <a:latin typeface="Arial"/>
+                <a:ea typeface="Arial"/>
+                <a:cs typeface="Arial"/>
+                <a:sym typeface="Arial"/>
+              </a:defRPr>
             </a:lvl6pPr>
-            <a:lvl7pPr indent="0" lvl="6" marL="0" algn="r">
-              <a:spcBef>
-                <a:spcPts val="0"/>
-              </a:spcBef>
-              <a:buNone/>
-              <a:defRPr/>
+            <a:lvl7pPr indent="0" lvl="6" marL="0" marR="0" algn="r">
+              <a:lnSpc>
+                <a:spcPct val="100000"/>
+              </a:lnSpc>
+              <a:spcBef>
+                <a:spcPts val="0"/>
+              </a:spcBef>
+              <a:spcAft>
+                <a:spcPts val="0"/>
+              </a:spcAft>
+              <a:buClr>
+                <a:srgbClr val="000000"/>
+              </a:buClr>
+              <a:buSzPts val="1200"/>
+              <a:buFont typeface="Arial"/>
+              <a:buNone/>
+              <a:defRPr b="0" i="0" sz="1200" u="none" cap="none" strike="noStrike">
+                <a:solidFill>
+                  <a:srgbClr val="E9E9E9"/>
+                </a:solidFill>
+                <a:latin typeface="Arial"/>
+                <a:ea typeface="Arial"/>
+                <a:cs typeface="Arial"/>
+                <a:sym typeface="Arial"/>
+              </a:defRPr>
             </a:lvl7pPr>
-            <a:lvl8pPr indent="0" lvl="7" marL="0" algn="r">
-              <a:spcBef>
-                <a:spcPts val="0"/>
-              </a:spcBef>
-              <a:buNone/>
-              <a:defRPr/>
+            <a:lvl8pPr indent="0" lvl="7" marL="0" marR="0" algn="r">
+              <a:lnSpc>
+                <a:spcPct val="100000"/>
+              </a:lnSpc>
+              <a:spcBef>
+                <a:spcPts val="0"/>
+              </a:spcBef>
+              <a:spcAft>
+                <a:spcPts val="0"/>
+              </a:spcAft>
+              <a:buClr>
+                <a:srgbClr val="000000"/>
+              </a:buClr>
+              <a:buSzPts val="1200"/>
+              <a:buFont typeface="Arial"/>
+              <a:buNone/>
+              <a:defRPr b="0" i="0" sz="1200" u="none" cap="none" strike="noStrike">
+                <a:solidFill>
+                  <a:srgbClr val="E9E9E9"/>
+                </a:solidFill>
+                <a:latin typeface="Arial"/>
+                <a:ea typeface="Arial"/>
+                <a:cs typeface="Arial"/>
+                <a:sym typeface="Arial"/>
+              </a:defRPr>
             </a:lvl8pPr>
-            <a:lvl9pPr indent="0" lvl="8" marL="0" algn="r">
-              <a:spcBef>
-                <a:spcPts val="0"/>
-              </a:spcBef>
-              <a:buNone/>
-              <a:defRPr/>
+            <a:lvl9pPr indent="0" lvl="8" marL="0" marR="0" algn="r">
+              <a:lnSpc>
+                <a:spcPct val="100000"/>
+              </a:lnSpc>
+              <a:spcBef>
+                <a:spcPts val="0"/>
+              </a:spcBef>
+              <a:spcAft>
+                <a:spcPts val="0"/>
+              </a:spcAft>
+              <a:buClr>
+                <a:srgbClr val="000000"/>
+              </a:buClr>
+              <a:buSzPts val="1200"/>
+              <a:buFont typeface="Arial"/>
+              <a:buNone/>
+              <a:defRPr b="0" i="0" sz="1200" u="none" cap="none" strike="noStrike">
+                <a:solidFill>
+                  <a:srgbClr val="E9E9E9"/>
+                </a:solidFill>
+                <a:latin typeface="Arial"/>
+                <a:ea typeface="Arial"/>
+                <a:cs typeface="Arial"/>
+                <a:sym typeface="Arial"/>
+              </a:defRPr>
             </a:lvl9pPr>
           </a:lstStyle>
           <a:p>
@@ -5450,7 +8013,10 @@
               <a:buNone/>
               <a:defRPr/>
             </a:lvl1pPr>
-            <a:lvl2pPr lvl="1">
+            <a:lvl2pPr lvl="1" algn="l">
+              <a:lnSpc>
+                <a:spcPct val="100000"/>
+              </a:lnSpc>
               <a:spcBef>
                 <a:spcPts val="0"/>
               </a:spcBef>
@@ -5461,7 +8027,10 @@
               <a:buNone/>
               <a:defRPr/>
             </a:lvl2pPr>
-            <a:lvl3pPr lvl="2">
+            <a:lvl3pPr lvl="2" algn="l">
+              <a:lnSpc>
+                <a:spcPct val="100000"/>
+              </a:lnSpc>
               <a:spcBef>
                 <a:spcPts val="0"/>
               </a:spcBef>
@@ -5472,7 +8041,10 @@
               <a:buNone/>
               <a:defRPr/>
             </a:lvl3pPr>
-            <a:lvl4pPr lvl="3">
+            <a:lvl4pPr lvl="3" algn="l">
+              <a:lnSpc>
+                <a:spcPct val="100000"/>
+              </a:lnSpc>
               <a:spcBef>
                 <a:spcPts val="0"/>
               </a:spcBef>
@@ -5483,7 +8055,10 @@
               <a:buNone/>
               <a:defRPr/>
             </a:lvl4pPr>
-            <a:lvl5pPr lvl="4">
+            <a:lvl5pPr lvl="4" algn="l">
+              <a:lnSpc>
+                <a:spcPct val="100000"/>
+              </a:lnSpc>
               <a:spcBef>
                 <a:spcPts val="0"/>
               </a:spcBef>
@@ -5494,7 +8069,10 @@
               <a:buNone/>
               <a:defRPr/>
             </a:lvl5pPr>
-            <a:lvl6pPr lvl="5">
+            <a:lvl6pPr lvl="5" algn="l">
+              <a:lnSpc>
+                <a:spcPct val="100000"/>
+              </a:lnSpc>
               <a:spcBef>
                 <a:spcPts val="0"/>
               </a:spcBef>
@@ -5505,7 +8083,10 @@
               <a:buNone/>
               <a:defRPr/>
             </a:lvl6pPr>
-            <a:lvl7pPr lvl="6">
+            <a:lvl7pPr lvl="6" algn="l">
+              <a:lnSpc>
+                <a:spcPct val="100000"/>
+              </a:lnSpc>
               <a:spcBef>
                 <a:spcPts val="0"/>
               </a:spcBef>
@@ -5516,7 +8097,10 @@
               <a:buNone/>
               <a:defRPr/>
             </a:lvl7pPr>
-            <a:lvl8pPr lvl="7">
+            <a:lvl8pPr lvl="7" algn="l">
+              <a:lnSpc>
+                <a:spcPct val="100000"/>
+              </a:lnSpc>
               <a:spcBef>
                 <a:spcPts val="0"/>
               </a:spcBef>
@@ -5527,7 +8111,10 @@
               <a:buNone/>
               <a:defRPr/>
             </a:lvl8pPr>
-            <a:lvl9pPr lvl="8">
+            <a:lvl9pPr lvl="8" algn="l">
+              <a:lnSpc>
+                <a:spcPct val="100000"/>
+              </a:lnSpc>
               <a:spcBef>
                 <a:spcPts val="0"/>
               </a:spcBef>
@@ -5935,6 +8522,9 @@
           </a:bodyPr>
           <a:lstStyle>
             <a:lvl1pPr lvl="0" algn="l">
+              <a:lnSpc>
+                <a:spcPct val="100000"/>
+              </a:lnSpc>
               <a:spcBef>
                 <a:spcPts val="0"/>
               </a:spcBef>
@@ -5946,6 +8536,9 @@
               <a:defRPr/>
             </a:lvl1pPr>
             <a:lvl2pPr lvl="1" algn="l">
+              <a:lnSpc>
+                <a:spcPct val="100000"/>
+              </a:lnSpc>
               <a:spcBef>
                 <a:spcPts val="0"/>
               </a:spcBef>
@@ -5957,6 +8550,9 @@
               <a:defRPr/>
             </a:lvl2pPr>
             <a:lvl3pPr lvl="2" algn="l">
+              <a:lnSpc>
+                <a:spcPct val="100000"/>
+              </a:lnSpc>
               <a:spcBef>
                 <a:spcPts val="0"/>
               </a:spcBef>
@@ -5968,6 +8564,9 @@
               <a:defRPr/>
             </a:lvl3pPr>
             <a:lvl4pPr lvl="3" algn="l">
+              <a:lnSpc>
+                <a:spcPct val="100000"/>
+              </a:lnSpc>
               <a:spcBef>
                 <a:spcPts val="0"/>
               </a:spcBef>
@@ -5979,6 +8578,9 @@
               <a:defRPr/>
             </a:lvl4pPr>
             <a:lvl5pPr lvl="4" algn="l">
+              <a:lnSpc>
+                <a:spcPct val="100000"/>
+              </a:lnSpc>
               <a:spcBef>
                 <a:spcPts val="0"/>
               </a:spcBef>
@@ -5990,6 +8592,9 @@
               <a:defRPr/>
             </a:lvl5pPr>
             <a:lvl6pPr lvl="5" algn="l">
+              <a:lnSpc>
+                <a:spcPct val="100000"/>
+              </a:lnSpc>
               <a:spcBef>
                 <a:spcPts val="0"/>
               </a:spcBef>
@@ -6001,6 +8606,9 @@
               <a:defRPr/>
             </a:lvl6pPr>
             <a:lvl7pPr lvl="6" algn="l">
+              <a:lnSpc>
+                <a:spcPct val="100000"/>
+              </a:lnSpc>
               <a:spcBef>
                 <a:spcPts val="0"/>
               </a:spcBef>
@@ -6012,6 +8620,9 @@
               <a:defRPr/>
             </a:lvl7pPr>
             <a:lvl8pPr lvl="7" algn="l">
+              <a:lnSpc>
+                <a:spcPct val="100000"/>
+              </a:lnSpc>
               <a:spcBef>
                 <a:spcPts val="0"/>
               </a:spcBef>
@@ -6023,6 +8634,9 @@
               <a:defRPr/>
             </a:lvl8pPr>
             <a:lvl9pPr lvl="8" algn="l">
+              <a:lnSpc>
+                <a:spcPct val="100000"/>
+              </a:lnSpc>
               <a:spcBef>
                 <a:spcPts val="0"/>
               </a:spcBef>
@@ -6064,6 +8678,9 @@
           </a:bodyPr>
           <a:lstStyle>
             <a:lvl1pPr lvl="0" algn="ctr">
+              <a:lnSpc>
+                <a:spcPct val="100000"/>
+              </a:lnSpc>
               <a:spcBef>
                 <a:spcPts val="0"/>
               </a:spcBef>
@@ -6075,6 +8692,9 @@
               <a:defRPr/>
             </a:lvl1pPr>
             <a:lvl2pPr lvl="1" algn="l">
+              <a:lnSpc>
+                <a:spcPct val="100000"/>
+              </a:lnSpc>
               <a:spcBef>
                 <a:spcPts val="0"/>
               </a:spcBef>
@@ -6086,6 +8706,9 @@
               <a:defRPr/>
             </a:lvl2pPr>
             <a:lvl3pPr lvl="2" algn="l">
+              <a:lnSpc>
+                <a:spcPct val="100000"/>
+              </a:lnSpc>
               <a:spcBef>
                 <a:spcPts val="0"/>
               </a:spcBef>
@@ -6097,6 +8720,9 @@
               <a:defRPr/>
             </a:lvl3pPr>
             <a:lvl4pPr lvl="3" algn="l">
+              <a:lnSpc>
+                <a:spcPct val="100000"/>
+              </a:lnSpc>
               <a:spcBef>
                 <a:spcPts val="0"/>
               </a:spcBef>
@@ -6108,6 +8734,9 @@
               <a:defRPr/>
             </a:lvl4pPr>
             <a:lvl5pPr lvl="4" algn="l">
+              <a:lnSpc>
+                <a:spcPct val="100000"/>
+              </a:lnSpc>
               <a:spcBef>
                 <a:spcPts val="0"/>
               </a:spcBef>
@@ -6119,6 +8748,9 @@
               <a:defRPr/>
             </a:lvl5pPr>
             <a:lvl6pPr lvl="5" algn="l">
+              <a:lnSpc>
+                <a:spcPct val="100000"/>
+              </a:lnSpc>
               <a:spcBef>
                 <a:spcPts val="0"/>
               </a:spcBef>
@@ -6130,6 +8762,9 @@
               <a:defRPr/>
             </a:lvl6pPr>
             <a:lvl7pPr lvl="6" algn="l">
+              <a:lnSpc>
+                <a:spcPct val="100000"/>
+              </a:lnSpc>
               <a:spcBef>
                 <a:spcPts val="0"/>
               </a:spcBef>
@@ -6141,6 +8776,9 @@
               <a:defRPr/>
             </a:lvl7pPr>
             <a:lvl8pPr lvl="7" algn="l">
+              <a:lnSpc>
+                <a:spcPct val="100000"/>
+              </a:lnSpc>
               <a:spcBef>
                 <a:spcPts val="0"/>
               </a:spcBef>
@@ -6152,6 +8790,9 @@
               <a:defRPr/>
             </a:lvl8pPr>
             <a:lvl9pPr lvl="8" algn="l">
+              <a:lnSpc>
+                <a:spcPct val="100000"/>
+              </a:lnSpc>
               <a:spcBef>
                 <a:spcPts val="0"/>
               </a:spcBef>
@@ -6192,68 +8833,239 @@
             <a:noAutofit/>
           </a:bodyPr>
           <a:lstStyle>
-            <a:lvl1pPr indent="0" lvl="0" marL="0" algn="r">
-              <a:spcBef>
-                <a:spcPts val="0"/>
-              </a:spcBef>
-              <a:buNone/>
-              <a:defRPr/>
+            <a:lvl1pPr indent="0" lvl="0" marL="0" marR="0" algn="r">
+              <a:lnSpc>
+                <a:spcPct val="100000"/>
+              </a:lnSpc>
+              <a:spcBef>
+                <a:spcPts val="0"/>
+              </a:spcBef>
+              <a:spcAft>
+                <a:spcPts val="0"/>
+              </a:spcAft>
+              <a:buClr>
+                <a:srgbClr val="000000"/>
+              </a:buClr>
+              <a:buSzPts val="1200"/>
+              <a:buFont typeface="Arial"/>
+              <a:buNone/>
+              <a:defRPr b="0" i="0" sz="1200" u="none" cap="none" strike="noStrike">
+                <a:solidFill>
+                  <a:srgbClr val="E9E9E9"/>
+                </a:solidFill>
+                <a:latin typeface="Arial"/>
+                <a:ea typeface="Arial"/>
+                <a:cs typeface="Arial"/>
+                <a:sym typeface="Arial"/>
+              </a:defRPr>
             </a:lvl1pPr>
-            <a:lvl2pPr indent="0" lvl="1" marL="0" algn="r">
-              <a:spcBef>
-                <a:spcPts val="0"/>
-              </a:spcBef>
-              <a:buNone/>
-              <a:defRPr/>
+            <a:lvl2pPr indent="0" lvl="1" marL="0" marR="0" algn="r">
+              <a:lnSpc>
+                <a:spcPct val="100000"/>
+              </a:lnSpc>
+              <a:spcBef>
+                <a:spcPts val="0"/>
+              </a:spcBef>
+              <a:spcAft>
+                <a:spcPts val="0"/>
+              </a:spcAft>
+              <a:buClr>
+                <a:srgbClr val="000000"/>
+              </a:buClr>
+              <a:buSzPts val="1200"/>
+              <a:buFont typeface="Arial"/>
+              <a:buNone/>
+              <a:defRPr b="0" i="0" sz="1200" u="none" cap="none" strike="noStrike">
+                <a:solidFill>
+                  <a:srgbClr val="E9E9E9"/>
+                </a:solidFill>
+                <a:latin typeface="Arial"/>
+                <a:ea typeface="Arial"/>
+                <a:cs typeface="Arial"/>
+                <a:sym typeface="Arial"/>
+              </a:defRPr>
             </a:lvl2pPr>
-            <a:lvl3pPr indent="0" lvl="2" marL="0" algn="r">
-              <a:spcBef>
-                <a:spcPts val="0"/>
-              </a:spcBef>
-              <a:buNone/>
-              <a:defRPr/>
+            <a:lvl3pPr indent="0" lvl="2" marL="0" marR="0" algn="r">
+              <a:lnSpc>
+                <a:spcPct val="100000"/>
+              </a:lnSpc>
+              <a:spcBef>
+                <a:spcPts val="0"/>
+              </a:spcBef>
+              <a:spcAft>
+                <a:spcPts val="0"/>
+              </a:spcAft>
+              <a:buClr>
+                <a:srgbClr val="000000"/>
+              </a:buClr>
+              <a:buSzPts val="1200"/>
+              <a:buFont typeface="Arial"/>
+              <a:buNone/>
+              <a:defRPr b="0" i="0" sz="1200" u="none" cap="none" strike="noStrike">
+                <a:solidFill>
+                  <a:srgbClr val="E9E9E9"/>
+                </a:solidFill>
+                <a:latin typeface="Arial"/>
+                <a:ea typeface="Arial"/>
+                <a:cs typeface="Arial"/>
+                <a:sym typeface="Arial"/>
+              </a:defRPr>
             </a:lvl3pPr>
-            <a:lvl4pPr indent="0" lvl="3" marL="0" algn="r">
-              <a:spcBef>
-                <a:spcPts val="0"/>
-              </a:spcBef>
-              <a:buNone/>
-              <a:defRPr/>
+            <a:lvl4pPr indent="0" lvl="3" marL="0" marR="0" algn="r">
+              <a:lnSpc>
+                <a:spcPct val="100000"/>
+              </a:lnSpc>
+              <a:spcBef>
+                <a:spcPts val="0"/>
+              </a:spcBef>
+              <a:spcAft>
+                <a:spcPts val="0"/>
+              </a:spcAft>
+              <a:buClr>
+                <a:srgbClr val="000000"/>
+              </a:buClr>
+              <a:buSzPts val="1200"/>
+              <a:buFont typeface="Arial"/>
+              <a:buNone/>
+              <a:defRPr b="0" i="0" sz="1200" u="none" cap="none" strike="noStrike">
+                <a:solidFill>
+                  <a:srgbClr val="E9E9E9"/>
+                </a:solidFill>
+                <a:latin typeface="Arial"/>
+                <a:ea typeface="Arial"/>
+                <a:cs typeface="Arial"/>
+                <a:sym typeface="Arial"/>
+              </a:defRPr>
             </a:lvl4pPr>
-            <a:lvl5pPr indent="0" lvl="4" marL="0" algn="r">
-              <a:spcBef>
-                <a:spcPts val="0"/>
-              </a:spcBef>
-              <a:buNone/>
-              <a:defRPr/>
+            <a:lvl5pPr indent="0" lvl="4" marL="0" marR="0" algn="r">
+              <a:lnSpc>
+                <a:spcPct val="100000"/>
+              </a:lnSpc>
+              <a:spcBef>
+                <a:spcPts val="0"/>
+              </a:spcBef>
+              <a:spcAft>
+                <a:spcPts val="0"/>
+              </a:spcAft>
+              <a:buClr>
+                <a:srgbClr val="000000"/>
+              </a:buClr>
+              <a:buSzPts val="1200"/>
+              <a:buFont typeface="Arial"/>
+              <a:buNone/>
+              <a:defRPr b="0" i="0" sz="1200" u="none" cap="none" strike="noStrike">
+                <a:solidFill>
+                  <a:srgbClr val="E9E9E9"/>
+                </a:solidFill>
+                <a:latin typeface="Arial"/>
+                <a:ea typeface="Arial"/>
+                <a:cs typeface="Arial"/>
+                <a:sym typeface="Arial"/>
+              </a:defRPr>
             </a:lvl5pPr>
-            <a:lvl6pPr indent="0" lvl="5" marL="0" algn="r">
-              <a:spcBef>
-                <a:spcPts val="0"/>
-              </a:spcBef>
-              <a:buNone/>
-              <a:defRPr/>
+            <a:lvl6pPr indent="0" lvl="5" marL="0" marR="0" algn="r">
+              <a:lnSpc>
+                <a:spcPct val="100000"/>
+              </a:lnSpc>
+              <a:spcBef>
+                <a:spcPts val="0"/>
+              </a:spcBef>
+              <a:spcAft>
+                <a:spcPts val="0"/>
+              </a:spcAft>
+              <a:buClr>
+                <a:srgbClr val="000000"/>
+              </a:buClr>
+              <a:buSzPts val="1200"/>
+              <a:buFont typeface="Arial"/>
+              <a:buNone/>
+              <a:defRPr b="0" i="0" sz="1200" u="none" cap="none" strike="noStrike">
+                <a:solidFill>
+                  <a:srgbClr val="E9E9E9"/>
+                </a:solidFill>
+                <a:latin typeface="Arial"/>
+                <a:ea typeface="Arial"/>
+                <a:cs typeface="Arial"/>
+                <a:sym typeface="Arial"/>
+              </a:defRPr>
             </a:lvl6pPr>
-            <a:lvl7pPr indent="0" lvl="6" marL="0" algn="r">
-              <a:spcBef>
-                <a:spcPts val="0"/>
-              </a:spcBef>
-              <a:buNone/>
-              <a:defRPr/>
+            <a:lvl7pPr indent="0" lvl="6" marL="0" marR="0" algn="r">
+              <a:lnSpc>
+                <a:spcPct val="100000"/>
+              </a:lnSpc>
+              <a:spcBef>
+                <a:spcPts val="0"/>
+              </a:spcBef>
+              <a:spcAft>
+                <a:spcPts val="0"/>
+              </a:spcAft>
+              <a:buClr>
+                <a:srgbClr val="000000"/>
+              </a:buClr>
+              <a:buSzPts val="1200"/>
+              <a:buFont typeface="Arial"/>
+              <a:buNone/>
+              <a:defRPr b="0" i="0" sz="1200" u="none" cap="none" strike="noStrike">
+                <a:solidFill>
+                  <a:srgbClr val="E9E9E9"/>
+                </a:solidFill>
+                <a:latin typeface="Arial"/>
+                <a:ea typeface="Arial"/>
+                <a:cs typeface="Arial"/>
+                <a:sym typeface="Arial"/>
+              </a:defRPr>
             </a:lvl7pPr>
-            <a:lvl8pPr indent="0" lvl="7" marL="0" algn="r">
-              <a:spcBef>
-                <a:spcPts val="0"/>
-              </a:spcBef>
-              <a:buNone/>
-              <a:defRPr/>
+            <a:lvl8pPr indent="0" lvl="7" marL="0" marR="0" algn="r">
+              <a:lnSpc>
+                <a:spcPct val="100000"/>
+              </a:lnSpc>
+              <a:spcBef>
+                <a:spcPts val="0"/>
+              </a:spcBef>
+              <a:spcAft>
+                <a:spcPts val="0"/>
+              </a:spcAft>
+              <a:buClr>
+                <a:srgbClr val="000000"/>
+              </a:buClr>
+              <a:buSzPts val="1200"/>
+              <a:buFont typeface="Arial"/>
+              <a:buNone/>
+              <a:defRPr b="0" i="0" sz="1200" u="none" cap="none" strike="noStrike">
+                <a:solidFill>
+                  <a:srgbClr val="E9E9E9"/>
+                </a:solidFill>
+                <a:latin typeface="Arial"/>
+                <a:ea typeface="Arial"/>
+                <a:cs typeface="Arial"/>
+                <a:sym typeface="Arial"/>
+              </a:defRPr>
             </a:lvl8pPr>
-            <a:lvl9pPr indent="0" lvl="8" marL="0" algn="r">
-              <a:spcBef>
-                <a:spcPts val="0"/>
-              </a:spcBef>
-              <a:buNone/>
-              <a:defRPr/>
+            <a:lvl9pPr indent="0" lvl="8" marL="0" marR="0" algn="r">
+              <a:lnSpc>
+                <a:spcPct val="100000"/>
+              </a:lnSpc>
+              <a:spcBef>
+                <a:spcPts val="0"/>
+              </a:spcBef>
+              <a:spcAft>
+                <a:spcPts val="0"/>
+              </a:spcAft>
+              <a:buClr>
+                <a:srgbClr val="000000"/>
+              </a:buClr>
+              <a:buSzPts val="1200"/>
+              <a:buFont typeface="Arial"/>
+              <a:buNone/>
+              <a:defRPr b="0" i="0" sz="1200" u="none" cap="none" strike="noStrike">
+                <a:solidFill>
+                  <a:srgbClr val="E9E9E9"/>
+                </a:solidFill>
+                <a:latin typeface="Arial"/>
+                <a:ea typeface="Arial"/>
+                <a:cs typeface="Arial"/>
+                <a:sym typeface="Arial"/>
+              </a:defRPr>
             </a:lvl9pPr>
           </a:lstStyle>
           <a:p>
@@ -6342,7 +9154,10 @@
               <a:buNone/>
               <a:defRPr/>
             </a:lvl1pPr>
-            <a:lvl2pPr lvl="1">
+            <a:lvl2pPr lvl="1" algn="l">
+              <a:lnSpc>
+                <a:spcPct val="100000"/>
+              </a:lnSpc>
               <a:spcBef>
                 <a:spcPts val="0"/>
               </a:spcBef>
@@ -6353,7 +9168,10 @@
               <a:buNone/>
               <a:defRPr/>
             </a:lvl2pPr>
-            <a:lvl3pPr lvl="2">
+            <a:lvl3pPr lvl="2" algn="l">
+              <a:lnSpc>
+                <a:spcPct val="100000"/>
+              </a:lnSpc>
               <a:spcBef>
                 <a:spcPts val="0"/>
               </a:spcBef>
@@ -6364,7 +9182,10 @@
               <a:buNone/>
               <a:defRPr/>
             </a:lvl3pPr>
-            <a:lvl4pPr lvl="3">
+            <a:lvl4pPr lvl="3" algn="l">
+              <a:lnSpc>
+                <a:spcPct val="100000"/>
+              </a:lnSpc>
               <a:spcBef>
                 <a:spcPts val="0"/>
               </a:spcBef>
@@ -6375,7 +9196,10 @@
               <a:buNone/>
               <a:defRPr/>
             </a:lvl4pPr>
-            <a:lvl5pPr lvl="4">
+            <a:lvl5pPr lvl="4" algn="l">
+              <a:lnSpc>
+                <a:spcPct val="100000"/>
+              </a:lnSpc>
               <a:spcBef>
                 <a:spcPts val="0"/>
               </a:spcBef>
@@ -6386,7 +9210,10 @@
               <a:buNone/>
               <a:defRPr/>
             </a:lvl5pPr>
-            <a:lvl6pPr lvl="5">
+            <a:lvl6pPr lvl="5" algn="l">
+              <a:lnSpc>
+                <a:spcPct val="100000"/>
+              </a:lnSpc>
               <a:spcBef>
                 <a:spcPts val="0"/>
               </a:spcBef>
@@ -6397,7 +9224,10 @@
               <a:buNone/>
               <a:defRPr/>
             </a:lvl6pPr>
-            <a:lvl7pPr lvl="6">
+            <a:lvl7pPr lvl="6" algn="l">
+              <a:lnSpc>
+                <a:spcPct val="100000"/>
+              </a:lnSpc>
               <a:spcBef>
                 <a:spcPts val="0"/>
               </a:spcBef>
@@ -6408,7 +9238,10 @@
               <a:buNone/>
               <a:defRPr/>
             </a:lvl7pPr>
-            <a:lvl8pPr lvl="7">
+            <a:lvl8pPr lvl="7" algn="l">
+              <a:lnSpc>
+                <a:spcPct val="100000"/>
+              </a:lnSpc>
               <a:spcBef>
                 <a:spcPts val="0"/>
               </a:spcBef>
@@ -6419,7 +9252,10 @@
               <a:buNone/>
               <a:defRPr/>
             </a:lvl8pPr>
-            <a:lvl9pPr lvl="8">
+            <a:lvl9pPr lvl="8" algn="l">
+              <a:lnSpc>
+                <a:spcPct val="100000"/>
+              </a:lnSpc>
               <a:spcBef>
                 <a:spcPts val="0"/>
               </a:spcBef>
@@ -7193,6 +10029,9 @@
           </a:bodyPr>
           <a:lstStyle>
             <a:lvl1pPr lvl="0" algn="l">
+              <a:lnSpc>
+                <a:spcPct val="100000"/>
+              </a:lnSpc>
               <a:spcBef>
                 <a:spcPts val="0"/>
               </a:spcBef>
@@ -7204,6 +10043,9 @@
               <a:defRPr/>
             </a:lvl1pPr>
             <a:lvl2pPr lvl="1" algn="l">
+              <a:lnSpc>
+                <a:spcPct val="100000"/>
+              </a:lnSpc>
               <a:spcBef>
                 <a:spcPts val="0"/>
               </a:spcBef>
@@ -7215,6 +10057,9 @@
               <a:defRPr/>
             </a:lvl2pPr>
             <a:lvl3pPr lvl="2" algn="l">
+              <a:lnSpc>
+                <a:spcPct val="100000"/>
+              </a:lnSpc>
               <a:spcBef>
                 <a:spcPts val="0"/>
               </a:spcBef>
@@ -7226,6 +10071,9 @@
               <a:defRPr/>
             </a:lvl3pPr>
             <a:lvl4pPr lvl="3" algn="l">
+              <a:lnSpc>
+                <a:spcPct val="100000"/>
+              </a:lnSpc>
               <a:spcBef>
                 <a:spcPts val="0"/>
               </a:spcBef>
@@ -7237,6 +10085,9 @@
               <a:defRPr/>
             </a:lvl4pPr>
             <a:lvl5pPr lvl="4" algn="l">
+              <a:lnSpc>
+                <a:spcPct val="100000"/>
+              </a:lnSpc>
               <a:spcBef>
                 <a:spcPts val="0"/>
               </a:spcBef>
@@ -7248,6 +10099,9 @@
               <a:defRPr/>
             </a:lvl5pPr>
             <a:lvl6pPr lvl="5" algn="l">
+              <a:lnSpc>
+                <a:spcPct val="100000"/>
+              </a:lnSpc>
               <a:spcBef>
                 <a:spcPts val="0"/>
               </a:spcBef>
@@ -7259,6 +10113,9 @@
               <a:defRPr/>
             </a:lvl6pPr>
             <a:lvl7pPr lvl="6" algn="l">
+              <a:lnSpc>
+                <a:spcPct val="100000"/>
+              </a:lnSpc>
               <a:spcBef>
                 <a:spcPts val="0"/>
               </a:spcBef>
@@ -7270,6 +10127,9 @@
               <a:defRPr/>
             </a:lvl7pPr>
             <a:lvl8pPr lvl="7" algn="l">
+              <a:lnSpc>
+                <a:spcPct val="100000"/>
+              </a:lnSpc>
               <a:spcBef>
                 <a:spcPts val="0"/>
               </a:spcBef>
@@ -7281,6 +10141,9 @@
               <a:defRPr/>
             </a:lvl8pPr>
             <a:lvl9pPr lvl="8" algn="l">
+              <a:lnSpc>
+                <a:spcPct val="100000"/>
+              </a:lnSpc>
               <a:spcBef>
                 <a:spcPts val="0"/>
               </a:spcBef>
@@ -7322,6 +10185,9 @@
           </a:bodyPr>
           <a:lstStyle>
             <a:lvl1pPr lvl="0" algn="ctr">
+              <a:lnSpc>
+                <a:spcPct val="100000"/>
+              </a:lnSpc>
               <a:spcBef>
                 <a:spcPts val="0"/>
               </a:spcBef>
@@ -7333,6 +10199,9 @@
               <a:defRPr/>
             </a:lvl1pPr>
             <a:lvl2pPr lvl="1" algn="l">
+              <a:lnSpc>
+                <a:spcPct val="100000"/>
+              </a:lnSpc>
               <a:spcBef>
                 <a:spcPts val="0"/>
               </a:spcBef>
@@ -7344,6 +10213,9 @@
               <a:defRPr/>
             </a:lvl2pPr>
             <a:lvl3pPr lvl="2" algn="l">
+              <a:lnSpc>
+                <a:spcPct val="100000"/>
+              </a:lnSpc>
               <a:spcBef>
                 <a:spcPts val="0"/>
               </a:spcBef>
@@ -7355,6 +10227,9 @@
               <a:defRPr/>
             </a:lvl3pPr>
             <a:lvl4pPr lvl="3" algn="l">
+              <a:lnSpc>
+                <a:spcPct val="100000"/>
+              </a:lnSpc>
               <a:spcBef>
                 <a:spcPts val="0"/>
               </a:spcBef>
@@ -7366,6 +10241,9 @@
               <a:defRPr/>
             </a:lvl4pPr>
             <a:lvl5pPr lvl="4" algn="l">
+              <a:lnSpc>
+                <a:spcPct val="100000"/>
+              </a:lnSpc>
               <a:spcBef>
                 <a:spcPts val="0"/>
               </a:spcBef>
@@ -7377,6 +10255,9 @@
               <a:defRPr/>
             </a:lvl5pPr>
             <a:lvl6pPr lvl="5" algn="l">
+              <a:lnSpc>
+                <a:spcPct val="100000"/>
+              </a:lnSpc>
               <a:spcBef>
                 <a:spcPts val="0"/>
               </a:spcBef>
@@ -7388,6 +10269,9 @@
               <a:defRPr/>
             </a:lvl6pPr>
             <a:lvl7pPr lvl="6" algn="l">
+              <a:lnSpc>
+                <a:spcPct val="100000"/>
+              </a:lnSpc>
               <a:spcBef>
                 <a:spcPts val="0"/>
               </a:spcBef>
@@ -7399,6 +10283,9 @@
               <a:defRPr/>
             </a:lvl7pPr>
             <a:lvl8pPr lvl="7" algn="l">
+              <a:lnSpc>
+                <a:spcPct val="100000"/>
+              </a:lnSpc>
               <a:spcBef>
                 <a:spcPts val="0"/>
               </a:spcBef>
@@ -7410,6 +10297,9 @@
               <a:defRPr/>
             </a:lvl8pPr>
             <a:lvl9pPr lvl="8" algn="l">
+              <a:lnSpc>
+                <a:spcPct val="100000"/>
+              </a:lnSpc>
               <a:spcBef>
                 <a:spcPts val="0"/>
               </a:spcBef>
@@ -7450,68 +10340,239 @@
             <a:noAutofit/>
           </a:bodyPr>
           <a:lstStyle>
-            <a:lvl1pPr indent="0" lvl="0" marL="0" algn="r">
-              <a:spcBef>
-                <a:spcPts val="0"/>
-              </a:spcBef>
-              <a:buNone/>
-              <a:defRPr/>
+            <a:lvl1pPr indent="0" lvl="0" marL="0" marR="0" algn="r">
+              <a:lnSpc>
+                <a:spcPct val="100000"/>
+              </a:lnSpc>
+              <a:spcBef>
+                <a:spcPts val="0"/>
+              </a:spcBef>
+              <a:spcAft>
+                <a:spcPts val="0"/>
+              </a:spcAft>
+              <a:buClr>
+                <a:srgbClr val="000000"/>
+              </a:buClr>
+              <a:buSzPts val="1200"/>
+              <a:buFont typeface="Arial"/>
+              <a:buNone/>
+              <a:defRPr b="0" i="0" sz="1200" u="none" cap="none" strike="noStrike">
+                <a:solidFill>
+                  <a:srgbClr val="E9E9E9"/>
+                </a:solidFill>
+                <a:latin typeface="Arial"/>
+                <a:ea typeface="Arial"/>
+                <a:cs typeface="Arial"/>
+                <a:sym typeface="Arial"/>
+              </a:defRPr>
             </a:lvl1pPr>
-            <a:lvl2pPr indent="0" lvl="1" marL="0" algn="r">
-              <a:spcBef>
-                <a:spcPts val="0"/>
-              </a:spcBef>
-              <a:buNone/>
-              <a:defRPr/>
+            <a:lvl2pPr indent="0" lvl="1" marL="0" marR="0" algn="r">
+              <a:lnSpc>
+                <a:spcPct val="100000"/>
+              </a:lnSpc>
+              <a:spcBef>
+                <a:spcPts val="0"/>
+              </a:spcBef>
+              <a:spcAft>
+                <a:spcPts val="0"/>
+              </a:spcAft>
+              <a:buClr>
+                <a:srgbClr val="000000"/>
+              </a:buClr>
+              <a:buSzPts val="1200"/>
+              <a:buFont typeface="Arial"/>
+              <a:buNone/>
+              <a:defRPr b="0" i="0" sz="1200" u="none" cap="none" strike="noStrike">
+                <a:solidFill>
+                  <a:srgbClr val="E9E9E9"/>
+                </a:solidFill>
+                <a:latin typeface="Arial"/>
+                <a:ea typeface="Arial"/>
+                <a:cs typeface="Arial"/>
+                <a:sym typeface="Arial"/>
+              </a:defRPr>
             </a:lvl2pPr>
-            <a:lvl3pPr indent="0" lvl="2" marL="0" algn="r">
-              <a:spcBef>
-                <a:spcPts val="0"/>
-              </a:spcBef>
-              <a:buNone/>
-              <a:defRPr/>
+            <a:lvl3pPr indent="0" lvl="2" marL="0" marR="0" algn="r">
+              <a:lnSpc>
+                <a:spcPct val="100000"/>
+              </a:lnSpc>
+              <a:spcBef>
+                <a:spcPts val="0"/>
+              </a:spcBef>
+              <a:spcAft>
+                <a:spcPts val="0"/>
+              </a:spcAft>
+              <a:buClr>
+                <a:srgbClr val="000000"/>
+              </a:buClr>
+              <a:buSzPts val="1200"/>
+              <a:buFont typeface="Arial"/>
+              <a:buNone/>
+              <a:defRPr b="0" i="0" sz="1200" u="none" cap="none" strike="noStrike">
+                <a:solidFill>
+                  <a:srgbClr val="E9E9E9"/>
+                </a:solidFill>
+                <a:latin typeface="Arial"/>
+                <a:ea typeface="Arial"/>
+                <a:cs typeface="Arial"/>
+                <a:sym typeface="Arial"/>
+              </a:defRPr>
             </a:lvl3pPr>
-            <a:lvl4pPr indent="0" lvl="3" marL="0" algn="r">
-              <a:spcBef>
-                <a:spcPts val="0"/>
-              </a:spcBef>
-              <a:buNone/>
-              <a:defRPr/>
+            <a:lvl4pPr indent="0" lvl="3" marL="0" marR="0" algn="r">
+              <a:lnSpc>
+                <a:spcPct val="100000"/>
+              </a:lnSpc>
+              <a:spcBef>
+                <a:spcPts val="0"/>
+              </a:spcBef>
+              <a:spcAft>
+                <a:spcPts val="0"/>
+              </a:spcAft>
+              <a:buClr>
+                <a:srgbClr val="000000"/>
+              </a:buClr>
+              <a:buSzPts val="1200"/>
+              <a:buFont typeface="Arial"/>
+              <a:buNone/>
+              <a:defRPr b="0" i="0" sz="1200" u="none" cap="none" strike="noStrike">
+                <a:solidFill>
+                  <a:srgbClr val="E9E9E9"/>
+                </a:solidFill>
+                <a:latin typeface="Arial"/>
+                <a:ea typeface="Arial"/>
+                <a:cs typeface="Arial"/>
+                <a:sym typeface="Arial"/>
+              </a:defRPr>
             </a:lvl4pPr>
-            <a:lvl5pPr indent="0" lvl="4" marL="0" algn="r">
-              <a:spcBef>
-                <a:spcPts val="0"/>
-              </a:spcBef>
-              <a:buNone/>
-              <a:defRPr/>
+            <a:lvl5pPr indent="0" lvl="4" marL="0" marR="0" algn="r">
+              <a:lnSpc>
+                <a:spcPct val="100000"/>
+              </a:lnSpc>
+              <a:spcBef>
+                <a:spcPts val="0"/>
+              </a:spcBef>
+              <a:spcAft>
+                <a:spcPts val="0"/>
+              </a:spcAft>
+              <a:buClr>
+                <a:srgbClr val="000000"/>
+              </a:buClr>
+              <a:buSzPts val="1200"/>
+              <a:buFont typeface="Arial"/>
+              <a:buNone/>
+              <a:defRPr b="0" i="0" sz="1200" u="none" cap="none" strike="noStrike">
+                <a:solidFill>
+                  <a:srgbClr val="E9E9E9"/>
+                </a:solidFill>
+                <a:latin typeface="Arial"/>
+                <a:ea typeface="Arial"/>
+                <a:cs typeface="Arial"/>
+                <a:sym typeface="Arial"/>
+              </a:defRPr>
             </a:lvl5pPr>
-            <a:lvl6pPr indent="0" lvl="5" marL="0" algn="r">
-              <a:spcBef>
-                <a:spcPts val="0"/>
-              </a:spcBef>
-              <a:buNone/>
-              <a:defRPr/>
+            <a:lvl6pPr indent="0" lvl="5" marL="0" marR="0" algn="r">
+              <a:lnSpc>
+                <a:spcPct val="100000"/>
+              </a:lnSpc>
+              <a:spcBef>
+                <a:spcPts val="0"/>
+              </a:spcBef>
+              <a:spcAft>
+                <a:spcPts val="0"/>
+              </a:spcAft>
+              <a:buClr>
+                <a:srgbClr val="000000"/>
+              </a:buClr>
+              <a:buSzPts val="1200"/>
+              <a:buFont typeface="Arial"/>
+              <a:buNone/>
+              <a:defRPr b="0" i="0" sz="1200" u="none" cap="none" strike="noStrike">
+                <a:solidFill>
+                  <a:srgbClr val="E9E9E9"/>
+                </a:solidFill>
+                <a:latin typeface="Arial"/>
+                <a:ea typeface="Arial"/>
+                <a:cs typeface="Arial"/>
+                <a:sym typeface="Arial"/>
+              </a:defRPr>
             </a:lvl6pPr>
-            <a:lvl7pPr indent="0" lvl="6" marL="0" algn="r">
-              <a:spcBef>
-                <a:spcPts val="0"/>
-              </a:spcBef>
-              <a:buNone/>
-              <a:defRPr/>
+            <a:lvl7pPr indent="0" lvl="6" marL="0" marR="0" algn="r">
+              <a:lnSpc>
+                <a:spcPct val="100000"/>
+              </a:lnSpc>
+              <a:spcBef>
+                <a:spcPts val="0"/>
+              </a:spcBef>
+              <a:spcAft>
+                <a:spcPts val="0"/>
+              </a:spcAft>
+              <a:buClr>
+                <a:srgbClr val="000000"/>
+              </a:buClr>
+              <a:buSzPts val="1200"/>
+              <a:buFont typeface="Arial"/>
+              <a:buNone/>
+              <a:defRPr b="0" i="0" sz="1200" u="none" cap="none" strike="noStrike">
+                <a:solidFill>
+                  <a:srgbClr val="E9E9E9"/>
+                </a:solidFill>
+                <a:latin typeface="Arial"/>
+                <a:ea typeface="Arial"/>
+                <a:cs typeface="Arial"/>
+                <a:sym typeface="Arial"/>
+              </a:defRPr>
             </a:lvl7pPr>
-            <a:lvl8pPr indent="0" lvl="7" marL="0" algn="r">
-              <a:spcBef>
-                <a:spcPts val="0"/>
-              </a:spcBef>
-              <a:buNone/>
-              <a:defRPr/>
+            <a:lvl8pPr indent="0" lvl="7" marL="0" marR="0" algn="r">
+              <a:lnSpc>
+                <a:spcPct val="100000"/>
+              </a:lnSpc>
+              <a:spcBef>
+                <a:spcPts val="0"/>
+              </a:spcBef>
+              <a:spcAft>
+                <a:spcPts val="0"/>
+              </a:spcAft>
+              <a:buClr>
+                <a:srgbClr val="000000"/>
+              </a:buClr>
+              <a:buSzPts val="1200"/>
+              <a:buFont typeface="Arial"/>
+              <a:buNone/>
+              <a:defRPr b="0" i="0" sz="1200" u="none" cap="none" strike="noStrike">
+                <a:solidFill>
+                  <a:srgbClr val="E9E9E9"/>
+                </a:solidFill>
+                <a:latin typeface="Arial"/>
+                <a:ea typeface="Arial"/>
+                <a:cs typeface="Arial"/>
+                <a:sym typeface="Arial"/>
+              </a:defRPr>
             </a:lvl8pPr>
-            <a:lvl9pPr indent="0" lvl="8" marL="0" algn="r">
-              <a:spcBef>
-                <a:spcPts val="0"/>
-              </a:spcBef>
-              <a:buNone/>
-              <a:defRPr/>
+            <a:lvl9pPr indent="0" lvl="8" marL="0" marR="0" algn="r">
+              <a:lnSpc>
+                <a:spcPct val="100000"/>
+              </a:lnSpc>
+              <a:spcBef>
+                <a:spcPts val="0"/>
+              </a:spcBef>
+              <a:spcAft>
+                <a:spcPts val="0"/>
+              </a:spcAft>
+              <a:buClr>
+                <a:srgbClr val="000000"/>
+              </a:buClr>
+              <a:buSzPts val="1200"/>
+              <a:buFont typeface="Arial"/>
+              <a:buNone/>
+              <a:defRPr b="0" i="0" sz="1200" u="none" cap="none" strike="noStrike">
+                <a:solidFill>
+                  <a:srgbClr val="E9E9E9"/>
+                </a:solidFill>
+                <a:latin typeface="Arial"/>
+                <a:ea typeface="Arial"/>
+                <a:cs typeface="Arial"/>
+                <a:sym typeface="Arial"/>
+              </a:defRPr>
             </a:lvl9pPr>
           </a:lstStyle>
           <a:p>
@@ -7584,6 +10645,9 @@
           </a:bodyPr>
           <a:lstStyle>
             <a:lvl1pPr lvl="0" algn="l">
+              <a:lnSpc>
+                <a:spcPct val="100000"/>
+              </a:lnSpc>
               <a:spcBef>
                 <a:spcPts val="0"/>
               </a:spcBef>
@@ -7595,6 +10659,9 @@
               <a:defRPr/>
             </a:lvl1pPr>
             <a:lvl2pPr lvl="1" algn="l">
+              <a:lnSpc>
+                <a:spcPct val="100000"/>
+              </a:lnSpc>
               <a:spcBef>
                 <a:spcPts val="0"/>
               </a:spcBef>
@@ -7606,6 +10673,9 @@
               <a:defRPr/>
             </a:lvl2pPr>
             <a:lvl3pPr lvl="2" algn="l">
+              <a:lnSpc>
+                <a:spcPct val="100000"/>
+              </a:lnSpc>
               <a:spcBef>
                 <a:spcPts val="0"/>
               </a:spcBef>
@@ -7617,6 +10687,9 @@
               <a:defRPr/>
             </a:lvl3pPr>
             <a:lvl4pPr lvl="3" algn="l">
+              <a:lnSpc>
+                <a:spcPct val="100000"/>
+              </a:lnSpc>
               <a:spcBef>
                 <a:spcPts val="0"/>
               </a:spcBef>
@@ -7628,6 +10701,9 @@
               <a:defRPr/>
             </a:lvl4pPr>
             <a:lvl5pPr lvl="4" algn="l">
+              <a:lnSpc>
+                <a:spcPct val="100000"/>
+              </a:lnSpc>
               <a:spcBef>
                 <a:spcPts val="0"/>
               </a:spcBef>
@@ -7639,6 +10715,9 @@
               <a:defRPr/>
             </a:lvl5pPr>
             <a:lvl6pPr lvl="5" algn="l">
+              <a:lnSpc>
+                <a:spcPct val="100000"/>
+              </a:lnSpc>
               <a:spcBef>
                 <a:spcPts val="0"/>
               </a:spcBef>
@@ -7650,6 +10729,9 @@
               <a:defRPr/>
             </a:lvl6pPr>
             <a:lvl7pPr lvl="6" algn="l">
+              <a:lnSpc>
+                <a:spcPct val="100000"/>
+              </a:lnSpc>
               <a:spcBef>
                 <a:spcPts val="0"/>
               </a:spcBef>
@@ -7661,6 +10743,9 @@
               <a:defRPr/>
             </a:lvl7pPr>
             <a:lvl8pPr lvl="7" algn="l">
+              <a:lnSpc>
+                <a:spcPct val="100000"/>
+              </a:lnSpc>
               <a:spcBef>
                 <a:spcPts val="0"/>
               </a:spcBef>
@@ -7672,6 +10757,9 @@
               <a:defRPr/>
             </a:lvl8pPr>
             <a:lvl9pPr lvl="8" algn="l">
+              <a:lnSpc>
+                <a:spcPct val="100000"/>
+              </a:lnSpc>
               <a:spcBef>
                 <a:spcPts val="0"/>
               </a:spcBef>
@@ -7713,6 +10801,9 @@
           </a:bodyPr>
           <a:lstStyle>
             <a:lvl1pPr lvl="0" algn="ctr">
+              <a:lnSpc>
+                <a:spcPct val="100000"/>
+              </a:lnSpc>
               <a:spcBef>
                 <a:spcPts val="0"/>
               </a:spcBef>
@@ -7724,6 +10815,9 @@
               <a:defRPr/>
             </a:lvl1pPr>
             <a:lvl2pPr lvl="1" algn="l">
+              <a:lnSpc>
+                <a:spcPct val="100000"/>
+              </a:lnSpc>
               <a:spcBef>
                 <a:spcPts val="0"/>
               </a:spcBef>
@@ -7735,6 +10829,9 @@
               <a:defRPr/>
             </a:lvl2pPr>
             <a:lvl3pPr lvl="2" algn="l">
+              <a:lnSpc>
+                <a:spcPct val="100000"/>
+              </a:lnSpc>
               <a:spcBef>
                 <a:spcPts val="0"/>
               </a:spcBef>
@@ -7746,6 +10843,9 @@
               <a:defRPr/>
             </a:lvl3pPr>
             <a:lvl4pPr lvl="3" algn="l">
+              <a:lnSpc>
+                <a:spcPct val="100000"/>
+              </a:lnSpc>
               <a:spcBef>
                 <a:spcPts val="0"/>
               </a:spcBef>
@@ -7757,6 +10857,9 @@
               <a:defRPr/>
             </a:lvl4pPr>
             <a:lvl5pPr lvl="4" algn="l">
+              <a:lnSpc>
+                <a:spcPct val="100000"/>
+              </a:lnSpc>
               <a:spcBef>
                 <a:spcPts val="0"/>
               </a:spcBef>
@@ -7768,6 +10871,9 @@
               <a:defRPr/>
             </a:lvl5pPr>
             <a:lvl6pPr lvl="5" algn="l">
+              <a:lnSpc>
+                <a:spcPct val="100000"/>
+              </a:lnSpc>
               <a:spcBef>
                 <a:spcPts val="0"/>
               </a:spcBef>
@@ -7779,6 +10885,9 @@
               <a:defRPr/>
             </a:lvl6pPr>
             <a:lvl7pPr lvl="6" algn="l">
+              <a:lnSpc>
+                <a:spcPct val="100000"/>
+              </a:lnSpc>
               <a:spcBef>
                 <a:spcPts val="0"/>
               </a:spcBef>
@@ -7790,6 +10899,9 @@
               <a:defRPr/>
             </a:lvl7pPr>
             <a:lvl8pPr lvl="7" algn="l">
+              <a:lnSpc>
+                <a:spcPct val="100000"/>
+              </a:lnSpc>
               <a:spcBef>
                 <a:spcPts val="0"/>
               </a:spcBef>
@@ -7801,6 +10913,9 @@
               <a:defRPr/>
             </a:lvl8pPr>
             <a:lvl9pPr lvl="8" algn="l">
+              <a:lnSpc>
+                <a:spcPct val="100000"/>
+              </a:lnSpc>
               <a:spcBef>
                 <a:spcPts val="0"/>
               </a:spcBef>
@@ -7841,68 +10956,239 @@
             <a:noAutofit/>
           </a:bodyPr>
           <a:lstStyle>
-            <a:lvl1pPr indent="0" lvl="0" marL="0" algn="r">
-              <a:spcBef>
-                <a:spcPts val="0"/>
-              </a:spcBef>
-              <a:buNone/>
-              <a:defRPr/>
+            <a:lvl1pPr indent="0" lvl="0" marL="0" marR="0" algn="r">
+              <a:lnSpc>
+                <a:spcPct val="100000"/>
+              </a:lnSpc>
+              <a:spcBef>
+                <a:spcPts val="0"/>
+              </a:spcBef>
+              <a:spcAft>
+                <a:spcPts val="0"/>
+              </a:spcAft>
+              <a:buClr>
+                <a:srgbClr val="000000"/>
+              </a:buClr>
+              <a:buSzPts val="1200"/>
+              <a:buFont typeface="Arial"/>
+              <a:buNone/>
+              <a:defRPr b="0" i="0" sz="1200" u="none" cap="none" strike="noStrike">
+                <a:solidFill>
+                  <a:srgbClr val="E9E9E9"/>
+                </a:solidFill>
+                <a:latin typeface="Arial"/>
+                <a:ea typeface="Arial"/>
+                <a:cs typeface="Arial"/>
+                <a:sym typeface="Arial"/>
+              </a:defRPr>
             </a:lvl1pPr>
-            <a:lvl2pPr indent="0" lvl="1" marL="0" algn="r">
-              <a:spcBef>
-                <a:spcPts val="0"/>
-              </a:spcBef>
-              <a:buNone/>
-              <a:defRPr/>
+            <a:lvl2pPr indent="0" lvl="1" marL="0" marR="0" algn="r">
+              <a:lnSpc>
+                <a:spcPct val="100000"/>
+              </a:lnSpc>
+              <a:spcBef>
+                <a:spcPts val="0"/>
+              </a:spcBef>
+              <a:spcAft>
+                <a:spcPts val="0"/>
+              </a:spcAft>
+              <a:buClr>
+                <a:srgbClr val="000000"/>
+              </a:buClr>
+              <a:buSzPts val="1200"/>
+              <a:buFont typeface="Arial"/>
+              <a:buNone/>
+              <a:defRPr b="0" i="0" sz="1200" u="none" cap="none" strike="noStrike">
+                <a:solidFill>
+                  <a:srgbClr val="E9E9E9"/>
+                </a:solidFill>
+                <a:latin typeface="Arial"/>
+                <a:ea typeface="Arial"/>
+                <a:cs typeface="Arial"/>
+                <a:sym typeface="Arial"/>
+              </a:defRPr>
             </a:lvl2pPr>
-            <a:lvl3pPr indent="0" lvl="2" marL="0" algn="r">
-              <a:spcBef>
-                <a:spcPts val="0"/>
-              </a:spcBef>
-              <a:buNone/>
-              <a:defRPr/>
+            <a:lvl3pPr indent="0" lvl="2" marL="0" marR="0" algn="r">
+              <a:lnSpc>
+                <a:spcPct val="100000"/>
+              </a:lnSpc>
+              <a:spcBef>
+                <a:spcPts val="0"/>
+              </a:spcBef>
+              <a:spcAft>
+                <a:spcPts val="0"/>
+              </a:spcAft>
+              <a:buClr>
+                <a:srgbClr val="000000"/>
+              </a:buClr>
+              <a:buSzPts val="1200"/>
+              <a:buFont typeface="Arial"/>
+              <a:buNone/>
+              <a:defRPr b="0" i="0" sz="1200" u="none" cap="none" strike="noStrike">
+                <a:solidFill>
+                  <a:srgbClr val="E9E9E9"/>
+                </a:solidFill>
+                <a:latin typeface="Arial"/>
+                <a:ea typeface="Arial"/>
+                <a:cs typeface="Arial"/>
+                <a:sym typeface="Arial"/>
+              </a:defRPr>
             </a:lvl3pPr>
-            <a:lvl4pPr indent="0" lvl="3" marL="0" algn="r">
-              <a:spcBef>
-                <a:spcPts val="0"/>
-              </a:spcBef>
-              <a:buNone/>
-              <a:defRPr/>
+            <a:lvl4pPr indent="0" lvl="3" marL="0" marR="0" algn="r">
+              <a:lnSpc>
+                <a:spcPct val="100000"/>
+              </a:lnSpc>
+              <a:spcBef>
+                <a:spcPts val="0"/>
+              </a:spcBef>
+              <a:spcAft>
+                <a:spcPts val="0"/>
+              </a:spcAft>
+              <a:buClr>
+                <a:srgbClr val="000000"/>
+              </a:buClr>
+              <a:buSzPts val="1200"/>
+              <a:buFont typeface="Arial"/>
+              <a:buNone/>
+              <a:defRPr b="0" i="0" sz="1200" u="none" cap="none" strike="noStrike">
+                <a:solidFill>
+                  <a:srgbClr val="E9E9E9"/>
+                </a:solidFill>
+                <a:latin typeface="Arial"/>
+                <a:ea typeface="Arial"/>
+                <a:cs typeface="Arial"/>
+                <a:sym typeface="Arial"/>
+              </a:defRPr>
             </a:lvl4pPr>
-            <a:lvl5pPr indent="0" lvl="4" marL="0" algn="r">
-              <a:spcBef>
-                <a:spcPts val="0"/>
-              </a:spcBef>
-              <a:buNone/>
-              <a:defRPr/>
+            <a:lvl5pPr indent="0" lvl="4" marL="0" marR="0" algn="r">
+              <a:lnSpc>
+                <a:spcPct val="100000"/>
+              </a:lnSpc>
+              <a:spcBef>
+                <a:spcPts val="0"/>
+              </a:spcBef>
+              <a:spcAft>
+                <a:spcPts val="0"/>
+              </a:spcAft>
+              <a:buClr>
+                <a:srgbClr val="000000"/>
+              </a:buClr>
+              <a:buSzPts val="1200"/>
+              <a:buFont typeface="Arial"/>
+              <a:buNone/>
+              <a:defRPr b="0" i="0" sz="1200" u="none" cap="none" strike="noStrike">
+                <a:solidFill>
+                  <a:srgbClr val="E9E9E9"/>
+                </a:solidFill>
+                <a:latin typeface="Arial"/>
+                <a:ea typeface="Arial"/>
+                <a:cs typeface="Arial"/>
+                <a:sym typeface="Arial"/>
+              </a:defRPr>
             </a:lvl5pPr>
-            <a:lvl6pPr indent="0" lvl="5" marL="0" algn="r">
-              <a:spcBef>
-                <a:spcPts val="0"/>
-              </a:spcBef>
-              <a:buNone/>
-              <a:defRPr/>
+            <a:lvl6pPr indent="0" lvl="5" marL="0" marR="0" algn="r">
+              <a:lnSpc>
+                <a:spcPct val="100000"/>
+              </a:lnSpc>
+              <a:spcBef>
+                <a:spcPts val="0"/>
+              </a:spcBef>
+              <a:spcAft>
+                <a:spcPts val="0"/>
+              </a:spcAft>
+              <a:buClr>
+                <a:srgbClr val="000000"/>
+              </a:buClr>
+              <a:buSzPts val="1200"/>
+              <a:buFont typeface="Arial"/>
+              <a:buNone/>
+              <a:defRPr b="0" i="0" sz="1200" u="none" cap="none" strike="noStrike">
+                <a:solidFill>
+                  <a:srgbClr val="E9E9E9"/>
+                </a:solidFill>
+                <a:latin typeface="Arial"/>
+                <a:ea typeface="Arial"/>
+                <a:cs typeface="Arial"/>
+                <a:sym typeface="Arial"/>
+              </a:defRPr>
             </a:lvl6pPr>
-            <a:lvl7pPr indent="0" lvl="6" marL="0" algn="r">
-              <a:spcBef>
-                <a:spcPts val="0"/>
-              </a:spcBef>
-              <a:buNone/>
-              <a:defRPr/>
+            <a:lvl7pPr indent="0" lvl="6" marL="0" marR="0" algn="r">
+              <a:lnSpc>
+                <a:spcPct val="100000"/>
+              </a:lnSpc>
+              <a:spcBef>
+                <a:spcPts val="0"/>
+              </a:spcBef>
+              <a:spcAft>
+                <a:spcPts val="0"/>
+              </a:spcAft>
+              <a:buClr>
+                <a:srgbClr val="000000"/>
+              </a:buClr>
+              <a:buSzPts val="1200"/>
+              <a:buFont typeface="Arial"/>
+              <a:buNone/>
+              <a:defRPr b="0" i="0" sz="1200" u="none" cap="none" strike="noStrike">
+                <a:solidFill>
+                  <a:srgbClr val="E9E9E9"/>
+                </a:solidFill>
+                <a:latin typeface="Arial"/>
+                <a:ea typeface="Arial"/>
+                <a:cs typeface="Arial"/>
+                <a:sym typeface="Arial"/>
+              </a:defRPr>
             </a:lvl7pPr>
-            <a:lvl8pPr indent="0" lvl="7" marL="0" algn="r">
-              <a:spcBef>
-                <a:spcPts val="0"/>
-              </a:spcBef>
-              <a:buNone/>
-              <a:defRPr/>
+            <a:lvl8pPr indent="0" lvl="7" marL="0" marR="0" algn="r">
+              <a:lnSpc>
+                <a:spcPct val="100000"/>
+              </a:lnSpc>
+              <a:spcBef>
+                <a:spcPts val="0"/>
+              </a:spcBef>
+              <a:spcAft>
+                <a:spcPts val="0"/>
+              </a:spcAft>
+              <a:buClr>
+                <a:srgbClr val="000000"/>
+              </a:buClr>
+              <a:buSzPts val="1200"/>
+              <a:buFont typeface="Arial"/>
+              <a:buNone/>
+              <a:defRPr b="0" i="0" sz="1200" u="none" cap="none" strike="noStrike">
+                <a:solidFill>
+                  <a:srgbClr val="E9E9E9"/>
+                </a:solidFill>
+                <a:latin typeface="Arial"/>
+                <a:ea typeface="Arial"/>
+                <a:cs typeface="Arial"/>
+                <a:sym typeface="Arial"/>
+              </a:defRPr>
             </a:lvl8pPr>
-            <a:lvl9pPr indent="0" lvl="8" marL="0" algn="r">
-              <a:spcBef>
-                <a:spcPts val="0"/>
-              </a:spcBef>
-              <a:buNone/>
-              <a:defRPr/>
+            <a:lvl9pPr indent="0" lvl="8" marL="0" marR="0" algn="r">
+              <a:lnSpc>
+                <a:spcPct val="100000"/>
+              </a:lnSpc>
+              <a:spcBef>
+                <a:spcPts val="0"/>
+              </a:spcBef>
+              <a:spcAft>
+                <a:spcPts val="0"/>
+              </a:spcAft>
+              <a:buClr>
+                <a:srgbClr val="000000"/>
+              </a:buClr>
+              <a:buSzPts val="1200"/>
+              <a:buFont typeface="Arial"/>
+              <a:buNone/>
+              <a:defRPr b="0" i="0" sz="1200" u="none" cap="none" strike="noStrike">
+                <a:solidFill>
+                  <a:srgbClr val="E9E9E9"/>
+                </a:solidFill>
+                <a:latin typeface="Arial"/>
+                <a:ea typeface="Arial"/>
+                <a:cs typeface="Arial"/>
+                <a:sym typeface="Arial"/>
+              </a:defRPr>
             </a:lvl9pPr>
           </a:lstStyle>
           <a:p>
@@ -7992,7 +11278,10 @@
               <a:buNone/>
               <a:defRPr sz="3200"/>
             </a:lvl1pPr>
-            <a:lvl2pPr lvl="1">
+            <a:lvl2pPr lvl="1" algn="l">
+              <a:lnSpc>
+                <a:spcPct val="100000"/>
+              </a:lnSpc>
               <a:spcBef>
                 <a:spcPts val="0"/>
               </a:spcBef>
@@ -8003,7 +11292,10 @@
               <a:buNone/>
               <a:defRPr/>
             </a:lvl2pPr>
-            <a:lvl3pPr lvl="2">
+            <a:lvl3pPr lvl="2" algn="l">
+              <a:lnSpc>
+                <a:spcPct val="100000"/>
+              </a:lnSpc>
               <a:spcBef>
                 <a:spcPts val="0"/>
               </a:spcBef>
@@ -8014,7 +11306,10 @@
               <a:buNone/>
               <a:defRPr/>
             </a:lvl3pPr>
-            <a:lvl4pPr lvl="3">
+            <a:lvl4pPr lvl="3" algn="l">
+              <a:lnSpc>
+                <a:spcPct val="100000"/>
+              </a:lnSpc>
               <a:spcBef>
                 <a:spcPts val="0"/>
               </a:spcBef>
@@ -8025,7 +11320,10 @@
               <a:buNone/>
               <a:defRPr/>
             </a:lvl4pPr>
-            <a:lvl5pPr lvl="4">
+            <a:lvl5pPr lvl="4" algn="l">
+              <a:lnSpc>
+                <a:spcPct val="100000"/>
+              </a:lnSpc>
               <a:spcBef>
                 <a:spcPts val="0"/>
               </a:spcBef>
@@ -8036,7 +11334,10 @@
               <a:buNone/>
               <a:defRPr/>
             </a:lvl5pPr>
-            <a:lvl6pPr lvl="5">
+            <a:lvl6pPr lvl="5" algn="l">
+              <a:lnSpc>
+                <a:spcPct val="100000"/>
+              </a:lnSpc>
               <a:spcBef>
                 <a:spcPts val="0"/>
               </a:spcBef>
@@ -8047,7 +11348,10 @@
               <a:buNone/>
               <a:defRPr/>
             </a:lvl6pPr>
-            <a:lvl7pPr lvl="6">
+            <a:lvl7pPr lvl="6" algn="l">
+              <a:lnSpc>
+                <a:spcPct val="100000"/>
+              </a:lnSpc>
               <a:spcBef>
                 <a:spcPts val="0"/>
               </a:spcBef>
@@ -8058,7 +11362,10 @@
               <a:buNone/>
               <a:defRPr/>
             </a:lvl7pPr>
-            <a:lvl8pPr lvl="7">
+            <a:lvl8pPr lvl="7" algn="l">
+              <a:lnSpc>
+                <a:spcPct val="100000"/>
+              </a:lnSpc>
               <a:spcBef>
                 <a:spcPts val="0"/>
               </a:spcBef>
@@ -8069,7 +11376,10 @@
               <a:buNone/>
               <a:defRPr/>
             </a:lvl8pPr>
-            <a:lvl9pPr lvl="8">
+            <a:lvl9pPr lvl="8" algn="l">
+              <a:lnSpc>
+                <a:spcPct val="100000"/>
+              </a:lnSpc>
               <a:spcBef>
                 <a:spcPts val="0"/>
               </a:spcBef>
@@ -8477,6 +11787,9 @@
           </a:bodyPr>
           <a:lstStyle>
             <a:lvl1pPr lvl="0" algn="l">
+              <a:lnSpc>
+                <a:spcPct val="100000"/>
+              </a:lnSpc>
               <a:spcBef>
                 <a:spcPts val="0"/>
               </a:spcBef>
@@ -8488,6 +11801,9 @@
               <a:defRPr/>
             </a:lvl1pPr>
             <a:lvl2pPr lvl="1" algn="l">
+              <a:lnSpc>
+                <a:spcPct val="100000"/>
+              </a:lnSpc>
               <a:spcBef>
                 <a:spcPts val="0"/>
               </a:spcBef>
@@ -8499,6 +11815,9 @@
               <a:defRPr/>
             </a:lvl2pPr>
             <a:lvl3pPr lvl="2" algn="l">
+              <a:lnSpc>
+                <a:spcPct val="100000"/>
+              </a:lnSpc>
               <a:spcBef>
                 <a:spcPts val="0"/>
               </a:spcBef>
@@ -8510,6 +11829,9 @@
               <a:defRPr/>
             </a:lvl3pPr>
             <a:lvl4pPr lvl="3" algn="l">
+              <a:lnSpc>
+                <a:spcPct val="100000"/>
+              </a:lnSpc>
               <a:spcBef>
                 <a:spcPts val="0"/>
               </a:spcBef>
@@ -8521,6 +11843,9 @@
               <a:defRPr/>
             </a:lvl4pPr>
             <a:lvl5pPr lvl="4" algn="l">
+              <a:lnSpc>
+                <a:spcPct val="100000"/>
+              </a:lnSpc>
               <a:spcBef>
                 <a:spcPts val="0"/>
               </a:spcBef>
@@ -8532,6 +11857,9 @@
               <a:defRPr/>
             </a:lvl5pPr>
             <a:lvl6pPr lvl="5" algn="l">
+              <a:lnSpc>
+                <a:spcPct val="100000"/>
+              </a:lnSpc>
               <a:spcBef>
                 <a:spcPts val="0"/>
               </a:spcBef>
@@ -8543,6 +11871,9 @@
               <a:defRPr/>
             </a:lvl6pPr>
             <a:lvl7pPr lvl="6" algn="l">
+              <a:lnSpc>
+                <a:spcPct val="100000"/>
+              </a:lnSpc>
               <a:spcBef>
                 <a:spcPts val="0"/>
               </a:spcBef>
@@ -8554,6 +11885,9 @@
               <a:defRPr/>
             </a:lvl7pPr>
             <a:lvl8pPr lvl="7" algn="l">
+              <a:lnSpc>
+                <a:spcPct val="100000"/>
+              </a:lnSpc>
               <a:spcBef>
                 <a:spcPts val="0"/>
               </a:spcBef>
@@ -8565,6 +11899,9 @@
               <a:defRPr/>
             </a:lvl8pPr>
             <a:lvl9pPr lvl="8" algn="l">
+              <a:lnSpc>
+                <a:spcPct val="100000"/>
+              </a:lnSpc>
               <a:spcBef>
                 <a:spcPts val="0"/>
               </a:spcBef>
@@ -8606,6 +11943,9 @@
           </a:bodyPr>
           <a:lstStyle>
             <a:lvl1pPr lvl="0" algn="ctr">
+              <a:lnSpc>
+                <a:spcPct val="100000"/>
+              </a:lnSpc>
               <a:spcBef>
                 <a:spcPts val="0"/>
               </a:spcBef>
@@ -8617,6 +11957,9 @@
               <a:defRPr/>
             </a:lvl1pPr>
             <a:lvl2pPr lvl="1" algn="l">
+              <a:lnSpc>
+                <a:spcPct val="100000"/>
+              </a:lnSpc>
               <a:spcBef>
                 <a:spcPts val="0"/>
               </a:spcBef>
@@ -8628,6 +11971,9 @@
               <a:defRPr/>
             </a:lvl2pPr>
             <a:lvl3pPr lvl="2" algn="l">
+              <a:lnSpc>
+                <a:spcPct val="100000"/>
+              </a:lnSpc>
               <a:spcBef>
                 <a:spcPts val="0"/>
               </a:spcBef>
@@ -8639,6 +11985,9 @@
               <a:defRPr/>
             </a:lvl3pPr>
             <a:lvl4pPr lvl="3" algn="l">
+              <a:lnSpc>
+                <a:spcPct val="100000"/>
+              </a:lnSpc>
               <a:spcBef>
                 <a:spcPts val="0"/>
               </a:spcBef>
@@ -8650,6 +11999,9 @@
               <a:defRPr/>
             </a:lvl4pPr>
             <a:lvl5pPr lvl="4" algn="l">
+              <a:lnSpc>
+                <a:spcPct val="100000"/>
+              </a:lnSpc>
               <a:spcBef>
                 <a:spcPts val="0"/>
               </a:spcBef>
@@ -8661,6 +12013,9 @@
               <a:defRPr/>
             </a:lvl5pPr>
             <a:lvl6pPr lvl="5" algn="l">
+              <a:lnSpc>
+                <a:spcPct val="100000"/>
+              </a:lnSpc>
               <a:spcBef>
                 <a:spcPts val="0"/>
               </a:spcBef>
@@ -8672,6 +12027,9 @@
               <a:defRPr/>
             </a:lvl6pPr>
             <a:lvl7pPr lvl="6" algn="l">
+              <a:lnSpc>
+                <a:spcPct val="100000"/>
+              </a:lnSpc>
               <a:spcBef>
                 <a:spcPts val="0"/>
               </a:spcBef>
@@ -8683,6 +12041,9 @@
               <a:defRPr/>
             </a:lvl7pPr>
             <a:lvl8pPr lvl="7" algn="l">
+              <a:lnSpc>
+                <a:spcPct val="100000"/>
+              </a:lnSpc>
               <a:spcBef>
                 <a:spcPts val="0"/>
               </a:spcBef>
@@ -8694,6 +12055,9 @@
               <a:defRPr/>
             </a:lvl8pPr>
             <a:lvl9pPr lvl="8" algn="l">
+              <a:lnSpc>
+                <a:spcPct val="100000"/>
+              </a:lnSpc>
               <a:spcBef>
                 <a:spcPts val="0"/>
               </a:spcBef>
@@ -8734,68 +12098,239 @@
             <a:noAutofit/>
           </a:bodyPr>
           <a:lstStyle>
-            <a:lvl1pPr indent="0" lvl="0" marL="0" algn="r">
-              <a:spcBef>
-                <a:spcPts val="0"/>
-              </a:spcBef>
-              <a:buNone/>
-              <a:defRPr/>
+            <a:lvl1pPr indent="0" lvl="0" marL="0" marR="0" algn="r">
+              <a:lnSpc>
+                <a:spcPct val="100000"/>
+              </a:lnSpc>
+              <a:spcBef>
+                <a:spcPts val="0"/>
+              </a:spcBef>
+              <a:spcAft>
+                <a:spcPts val="0"/>
+              </a:spcAft>
+              <a:buClr>
+                <a:srgbClr val="000000"/>
+              </a:buClr>
+              <a:buSzPts val="1200"/>
+              <a:buFont typeface="Arial"/>
+              <a:buNone/>
+              <a:defRPr b="0" i="0" sz="1200" u="none" cap="none" strike="noStrike">
+                <a:solidFill>
+                  <a:srgbClr val="E9E9E9"/>
+                </a:solidFill>
+                <a:latin typeface="Arial"/>
+                <a:ea typeface="Arial"/>
+                <a:cs typeface="Arial"/>
+                <a:sym typeface="Arial"/>
+              </a:defRPr>
             </a:lvl1pPr>
-            <a:lvl2pPr indent="0" lvl="1" marL="0" algn="r">
-              <a:spcBef>
-                <a:spcPts val="0"/>
-              </a:spcBef>
-              <a:buNone/>
-              <a:defRPr/>
+            <a:lvl2pPr indent="0" lvl="1" marL="0" marR="0" algn="r">
+              <a:lnSpc>
+                <a:spcPct val="100000"/>
+              </a:lnSpc>
+              <a:spcBef>
+                <a:spcPts val="0"/>
+              </a:spcBef>
+              <a:spcAft>
+                <a:spcPts val="0"/>
+              </a:spcAft>
+              <a:buClr>
+                <a:srgbClr val="000000"/>
+              </a:buClr>
+              <a:buSzPts val="1200"/>
+              <a:buFont typeface="Arial"/>
+              <a:buNone/>
+              <a:defRPr b="0" i="0" sz="1200" u="none" cap="none" strike="noStrike">
+                <a:solidFill>
+                  <a:srgbClr val="E9E9E9"/>
+                </a:solidFill>
+                <a:latin typeface="Arial"/>
+                <a:ea typeface="Arial"/>
+                <a:cs typeface="Arial"/>
+                <a:sym typeface="Arial"/>
+              </a:defRPr>
             </a:lvl2pPr>
-            <a:lvl3pPr indent="0" lvl="2" marL="0" algn="r">
-              <a:spcBef>
-                <a:spcPts val="0"/>
-              </a:spcBef>
-              <a:buNone/>
-              <a:defRPr/>
+            <a:lvl3pPr indent="0" lvl="2" marL="0" marR="0" algn="r">
+              <a:lnSpc>
+                <a:spcPct val="100000"/>
+              </a:lnSpc>
+              <a:spcBef>
+                <a:spcPts val="0"/>
+              </a:spcBef>
+              <a:spcAft>
+                <a:spcPts val="0"/>
+              </a:spcAft>
+              <a:buClr>
+                <a:srgbClr val="000000"/>
+              </a:buClr>
+              <a:buSzPts val="1200"/>
+              <a:buFont typeface="Arial"/>
+              <a:buNone/>
+              <a:defRPr b="0" i="0" sz="1200" u="none" cap="none" strike="noStrike">
+                <a:solidFill>
+                  <a:srgbClr val="E9E9E9"/>
+                </a:solidFill>
+                <a:latin typeface="Arial"/>
+                <a:ea typeface="Arial"/>
+                <a:cs typeface="Arial"/>
+                <a:sym typeface="Arial"/>
+              </a:defRPr>
             </a:lvl3pPr>
-            <a:lvl4pPr indent="0" lvl="3" marL="0" algn="r">
-              <a:spcBef>
-                <a:spcPts val="0"/>
-              </a:spcBef>
-              <a:buNone/>
-              <a:defRPr/>
+            <a:lvl4pPr indent="0" lvl="3" marL="0" marR="0" algn="r">
+              <a:lnSpc>
+                <a:spcPct val="100000"/>
+              </a:lnSpc>
+              <a:spcBef>
+                <a:spcPts val="0"/>
+              </a:spcBef>
+              <a:spcAft>
+                <a:spcPts val="0"/>
+              </a:spcAft>
+              <a:buClr>
+                <a:srgbClr val="000000"/>
+              </a:buClr>
+              <a:buSzPts val="1200"/>
+              <a:buFont typeface="Arial"/>
+              <a:buNone/>
+              <a:defRPr b="0" i="0" sz="1200" u="none" cap="none" strike="noStrike">
+                <a:solidFill>
+                  <a:srgbClr val="E9E9E9"/>
+                </a:solidFill>
+                <a:latin typeface="Arial"/>
+                <a:ea typeface="Arial"/>
+                <a:cs typeface="Arial"/>
+                <a:sym typeface="Arial"/>
+              </a:defRPr>
             </a:lvl4pPr>
-            <a:lvl5pPr indent="0" lvl="4" marL="0" algn="r">
-              <a:spcBef>
-                <a:spcPts val="0"/>
-              </a:spcBef>
-              <a:buNone/>
-              <a:defRPr/>
+            <a:lvl5pPr indent="0" lvl="4" marL="0" marR="0" algn="r">
+              <a:lnSpc>
+                <a:spcPct val="100000"/>
+              </a:lnSpc>
+              <a:spcBef>
+                <a:spcPts val="0"/>
+              </a:spcBef>
+              <a:spcAft>
+                <a:spcPts val="0"/>
+              </a:spcAft>
+              <a:buClr>
+                <a:srgbClr val="000000"/>
+              </a:buClr>
+              <a:buSzPts val="1200"/>
+              <a:buFont typeface="Arial"/>
+              <a:buNone/>
+              <a:defRPr b="0" i="0" sz="1200" u="none" cap="none" strike="noStrike">
+                <a:solidFill>
+                  <a:srgbClr val="E9E9E9"/>
+                </a:solidFill>
+                <a:latin typeface="Arial"/>
+                <a:ea typeface="Arial"/>
+                <a:cs typeface="Arial"/>
+                <a:sym typeface="Arial"/>
+              </a:defRPr>
             </a:lvl5pPr>
-            <a:lvl6pPr indent="0" lvl="5" marL="0" algn="r">
-              <a:spcBef>
-                <a:spcPts val="0"/>
-              </a:spcBef>
-              <a:buNone/>
-              <a:defRPr/>
+            <a:lvl6pPr indent="0" lvl="5" marL="0" marR="0" algn="r">
+              <a:lnSpc>
+                <a:spcPct val="100000"/>
+              </a:lnSpc>
+              <a:spcBef>
+                <a:spcPts val="0"/>
+              </a:spcBef>
+              <a:spcAft>
+                <a:spcPts val="0"/>
+              </a:spcAft>
+              <a:buClr>
+                <a:srgbClr val="000000"/>
+              </a:buClr>
+              <a:buSzPts val="1200"/>
+              <a:buFont typeface="Arial"/>
+              <a:buNone/>
+              <a:defRPr b="0" i="0" sz="1200" u="none" cap="none" strike="noStrike">
+                <a:solidFill>
+                  <a:srgbClr val="E9E9E9"/>
+                </a:solidFill>
+                <a:latin typeface="Arial"/>
+                <a:ea typeface="Arial"/>
+                <a:cs typeface="Arial"/>
+                <a:sym typeface="Arial"/>
+              </a:defRPr>
             </a:lvl6pPr>
-            <a:lvl7pPr indent="0" lvl="6" marL="0" algn="r">
-              <a:spcBef>
-                <a:spcPts val="0"/>
-              </a:spcBef>
-              <a:buNone/>
-              <a:defRPr/>
+            <a:lvl7pPr indent="0" lvl="6" marL="0" marR="0" algn="r">
+              <a:lnSpc>
+                <a:spcPct val="100000"/>
+              </a:lnSpc>
+              <a:spcBef>
+                <a:spcPts val="0"/>
+              </a:spcBef>
+              <a:spcAft>
+                <a:spcPts val="0"/>
+              </a:spcAft>
+              <a:buClr>
+                <a:srgbClr val="000000"/>
+              </a:buClr>
+              <a:buSzPts val="1200"/>
+              <a:buFont typeface="Arial"/>
+              <a:buNone/>
+              <a:defRPr b="0" i="0" sz="1200" u="none" cap="none" strike="noStrike">
+                <a:solidFill>
+                  <a:srgbClr val="E9E9E9"/>
+                </a:solidFill>
+                <a:latin typeface="Arial"/>
+                <a:ea typeface="Arial"/>
+                <a:cs typeface="Arial"/>
+                <a:sym typeface="Arial"/>
+              </a:defRPr>
             </a:lvl7pPr>
-            <a:lvl8pPr indent="0" lvl="7" marL="0" algn="r">
-              <a:spcBef>
-                <a:spcPts val="0"/>
-              </a:spcBef>
-              <a:buNone/>
-              <a:defRPr/>
+            <a:lvl8pPr indent="0" lvl="7" marL="0" marR="0" algn="r">
+              <a:lnSpc>
+                <a:spcPct val="100000"/>
+              </a:lnSpc>
+              <a:spcBef>
+                <a:spcPts val="0"/>
+              </a:spcBef>
+              <a:spcAft>
+                <a:spcPts val="0"/>
+              </a:spcAft>
+              <a:buClr>
+                <a:srgbClr val="000000"/>
+              </a:buClr>
+              <a:buSzPts val="1200"/>
+              <a:buFont typeface="Arial"/>
+              <a:buNone/>
+              <a:defRPr b="0" i="0" sz="1200" u="none" cap="none" strike="noStrike">
+                <a:solidFill>
+                  <a:srgbClr val="E9E9E9"/>
+                </a:solidFill>
+                <a:latin typeface="Arial"/>
+                <a:ea typeface="Arial"/>
+                <a:cs typeface="Arial"/>
+                <a:sym typeface="Arial"/>
+              </a:defRPr>
             </a:lvl8pPr>
-            <a:lvl9pPr indent="0" lvl="8" marL="0" algn="r">
-              <a:spcBef>
-                <a:spcPts val="0"/>
-              </a:spcBef>
-              <a:buNone/>
-              <a:defRPr/>
+            <a:lvl9pPr indent="0" lvl="8" marL="0" marR="0" algn="r">
+              <a:lnSpc>
+                <a:spcPct val="100000"/>
+              </a:lnSpc>
+              <a:spcBef>
+                <a:spcPts val="0"/>
+              </a:spcBef>
+              <a:spcAft>
+                <a:spcPts val="0"/>
+              </a:spcAft>
+              <a:buClr>
+                <a:srgbClr val="000000"/>
+              </a:buClr>
+              <a:buSzPts val="1200"/>
+              <a:buFont typeface="Arial"/>
+              <a:buNone/>
+              <a:defRPr b="0" i="0" sz="1200" u="none" cap="none" strike="noStrike">
+                <a:solidFill>
+                  <a:srgbClr val="E9E9E9"/>
+                </a:solidFill>
+                <a:latin typeface="Arial"/>
+                <a:ea typeface="Arial"/>
+                <a:cs typeface="Arial"/>
+                <a:sym typeface="Arial"/>
+              </a:defRPr>
             </a:lvl9pPr>
           </a:lstStyle>
           <a:p>
@@ -8885,7 +12420,10 @@
               <a:buNone/>
               <a:defRPr sz="3200"/>
             </a:lvl1pPr>
-            <a:lvl2pPr lvl="1">
+            <a:lvl2pPr lvl="1" algn="l">
+              <a:lnSpc>
+                <a:spcPct val="100000"/>
+              </a:lnSpc>
               <a:spcBef>
                 <a:spcPts val="0"/>
               </a:spcBef>
@@ -8896,7 +12434,10 @@
               <a:buNone/>
               <a:defRPr/>
             </a:lvl2pPr>
-            <a:lvl3pPr lvl="2">
+            <a:lvl3pPr lvl="2" algn="l">
+              <a:lnSpc>
+                <a:spcPct val="100000"/>
+              </a:lnSpc>
               <a:spcBef>
                 <a:spcPts val="0"/>
               </a:spcBef>
@@ -8907,7 +12448,10 @@
               <a:buNone/>
               <a:defRPr/>
             </a:lvl3pPr>
-            <a:lvl4pPr lvl="3">
+            <a:lvl4pPr lvl="3" algn="l">
+              <a:lnSpc>
+                <a:spcPct val="100000"/>
+              </a:lnSpc>
               <a:spcBef>
                 <a:spcPts val="0"/>
               </a:spcBef>
@@ -8918,7 +12462,10 @@
               <a:buNone/>
               <a:defRPr/>
             </a:lvl4pPr>
-            <a:lvl5pPr lvl="4">
+            <a:lvl5pPr lvl="4" algn="l">
+              <a:lnSpc>
+                <a:spcPct val="100000"/>
+              </a:lnSpc>
               <a:spcBef>
                 <a:spcPts val="0"/>
               </a:spcBef>
@@ -8929,7 +12476,10 @@
               <a:buNone/>
               <a:defRPr/>
             </a:lvl5pPr>
-            <a:lvl6pPr lvl="5">
+            <a:lvl6pPr lvl="5" algn="l">
+              <a:lnSpc>
+                <a:spcPct val="100000"/>
+              </a:lnSpc>
               <a:spcBef>
                 <a:spcPts val="0"/>
               </a:spcBef>
@@ -8940,7 +12490,10 @@
               <a:buNone/>
               <a:defRPr/>
             </a:lvl6pPr>
-            <a:lvl7pPr lvl="6">
+            <a:lvl7pPr lvl="6" algn="l">
+              <a:lnSpc>
+                <a:spcPct val="100000"/>
+              </a:lnSpc>
               <a:spcBef>
                 <a:spcPts val="0"/>
               </a:spcBef>
@@ -8951,7 +12504,10 @@
               <a:buNone/>
               <a:defRPr/>
             </a:lvl7pPr>
-            <a:lvl8pPr lvl="7">
+            <a:lvl8pPr lvl="7" algn="l">
+              <a:lnSpc>
+                <a:spcPct val="100000"/>
+              </a:lnSpc>
               <a:spcBef>
                 <a:spcPts val="0"/>
               </a:spcBef>
@@ -8962,7 +12518,10 @@
               <a:buNone/>
               <a:defRPr/>
             </a:lvl8pPr>
-            <a:lvl9pPr lvl="8">
+            <a:lvl9pPr lvl="8" algn="l">
+              <a:lnSpc>
+                <a:spcPct val="100000"/>
+              </a:lnSpc>
               <a:spcBef>
                 <a:spcPts val="0"/>
               </a:spcBef>
@@ -9209,6 +12768,9 @@
           </a:bodyPr>
           <a:lstStyle>
             <a:lvl1pPr lvl="0" algn="l">
+              <a:lnSpc>
+                <a:spcPct val="100000"/>
+              </a:lnSpc>
               <a:spcBef>
                 <a:spcPts val="0"/>
               </a:spcBef>
@@ -9220,6 +12782,9 @@
               <a:defRPr/>
             </a:lvl1pPr>
             <a:lvl2pPr lvl="1" algn="l">
+              <a:lnSpc>
+                <a:spcPct val="100000"/>
+              </a:lnSpc>
               <a:spcBef>
                 <a:spcPts val="0"/>
               </a:spcBef>
@@ -9231,6 +12796,9 @@
               <a:defRPr/>
             </a:lvl2pPr>
             <a:lvl3pPr lvl="2" algn="l">
+              <a:lnSpc>
+                <a:spcPct val="100000"/>
+              </a:lnSpc>
               <a:spcBef>
                 <a:spcPts val="0"/>
               </a:spcBef>
@@ -9242,6 +12810,9 @@
               <a:defRPr/>
             </a:lvl3pPr>
             <a:lvl4pPr lvl="3" algn="l">
+              <a:lnSpc>
+                <a:spcPct val="100000"/>
+              </a:lnSpc>
               <a:spcBef>
                 <a:spcPts val="0"/>
               </a:spcBef>
@@ -9253,6 +12824,9 @@
               <a:defRPr/>
             </a:lvl4pPr>
             <a:lvl5pPr lvl="4" algn="l">
+              <a:lnSpc>
+                <a:spcPct val="100000"/>
+              </a:lnSpc>
               <a:spcBef>
                 <a:spcPts val="0"/>
               </a:spcBef>
@@ -9264,6 +12838,9 @@
               <a:defRPr/>
             </a:lvl5pPr>
             <a:lvl6pPr lvl="5" algn="l">
+              <a:lnSpc>
+                <a:spcPct val="100000"/>
+              </a:lnSpc>
               <a:spcBef>
                 <a:spcPts val="0"/>
               </a:spcBef>
@@ -9275,6 +12852,9 @@
               <a:defRPr/>
             </a:lvl6pPr>
             <a:lvl7pPr lvl="6" algn="l">
+              <a:lnSpc>
+                <a:spcPct val="100000"/>
+              </a:lnSpc>
               <a:spcBef>
                 <a:spcPts val="0"/>
               </a:spcBef>
@@ -9286,6 +12866,9 @@
               <a:defRPr/>
             </a:lvl7pPr>
             <a:lvl8pPr lvl="7" algn="l">
+              <a:lnSpc>
+                <a:spcPct val="100000"/>
+              </a:lnSpc>
               <a:spcBef>
                 <a:spcPts val="0"/>
               </a:spcBef>
@@ -9297,6 +12880,9 @@
               <a:defRPr/>
             </a:lvl8pPr>
             <a:lvl9pPr lvl="8" algn="l">
+              <a:lnSpc>
+                <a:spcPct val="100000"/>
+              </a:lnSpc>
               <a:spcBef>
                 <a:spcPts val="0"/>
               </a:spcBef>
@@ -9338,6 +12924,9 @@
           </a:bodyPr>
           <a:lstStyle>
             <a:lvl1pPr lvl="0" algn="ctr">
+              <a:lnSpc>
+                <a:spcPct val="100000"/>
+              </a:lnSpc>
               <a:spcBef>
                 <a:spcPts val="0"/>
               </a:spcBef>
@@ -9349,6 +12938,9 @@
               <a:defRPr/>
             </a:lvl1pPr>
             <a:lvl2pPr lvl="1" algn="l">
+              <a:lnSpc>
+                <a:spcPct val="100000"/>
+              </a:lnSpc>
               <a:spcBef>
                 <a:spcPts val="0"/>
               </a:spcBef>
@@ -9360,6 +12952,9 @@
               <a:defRPr/>
             </a:lvl2pPr>
             <a:lvl3pPr lvl="2" algn="l">
+              <a:lnSpc>
+                <a:spcPct val="100000"/>
+              </a:lnSpc>
               <a:spcBef>
                 <a:spcPts val="0"/>
               </a:spcBef>
@@ -9371,6 +12966,9 @@
               <a:defRPr/>
             </a:lvl3pPr>
             <a:lvl4pPr lvl="3" algn="l">
+              <a:lnSpc>
+                <a:spcPct val="100000"/>
+              </a:lnSpc>
               <a:spcBef>
                 <a:spcPts val="0"/>
               </a:spcBef>
@@ -9382,6 +12980,9 @@
               <a:defRPr/>
             </a:lvl4pPr>
             <a:lvl5pPr lvl="4" algn="l">
+              <a:lnSpc>
+                <a:spcPct val="100000"/>
+              </a:lnSpc>
               <a:spcBef>
                 <a:spcPts val="0"/>
               </a:spcBef>
@@ -9393,6 +12994,9 @@
               <a:defRPr/>
             </a:lvl5pPr>
             <a:lvl6pPr lvl="5" algn="l">
+              <a:lnSpc>
+                <a:spcPct val="100000"/>
+              </a:lnSpc>
               <a:spcBef>
                 <a:spcPts val="0"/>
               </a:spcBef>
@@ -9404,6 +13008,9 @@
               <a:defRPr/>
             </a:lvl6pPr>
             <a:lvl7pPr lvl="6" algn="l">
+              <a:lnSpc>
+                <a:spcPct val="100000"/>
+              </a:lnSpc>
               <a:spcBef>
                 <a:spcPts val="0"/>
               </a:spcBef>
@@ -9415,6 +13022,9 @@
               <a:defRPr/>
             </a:lvl7pPr>
             <a:lvl8pPr lvl="7" algn="l">
+              <a:lnSpc>
+                <a:spcPct val="100000"/>
+              </a:lnSpc>
               <a:spcBef>
                 <a:spcPts val="0"/>
               </a:spcBef>
@@ -9426,6 +13036,9 @@
               <a:defRPr/>
             </a:lvl8pPr>
             <a:lvl9pPr lvl="8" algn="l">
+              <a:lnSpc>
+                <a:spcPct val="100000"/>
+              </a:lnSpc>
               <a:spcBef>
                 <a:spcPts val="0"/>
               </a:spcBef>
@@ -9466,68 +13079,239 @@
             <a:noAutofit/>
           </a:bodyPr>
           <a:lstStyle>
-            <a:lvl1pPr indent="0" lvl="0" marL="0" algn="r">
-              <a:spcBef>
-                <a:spcPts val="0"/>
-              </a:spcBef>
-              <a:buNone/>
-              <a:defRPr/>
+            <a:lvl1pPr indent="0" lvl="0" marL="0" marR="0" algn="r">
+              <a:lnSpc>
+                <a:spcPct val="100000"/>
+              </a:lnSpc>
+              <a:spcBef>
+                <a:spcPts val="0"/>
+              </a:spcBef>
+              <a:spcAft>
+                <a:spcPts val="0"/>
+              </a:spcAft>
+              <a:buClr>
+                <a:srgbClr val="000000"/>
+              </a:buClr>
+              <a:buSzPts val="1200"/>
+              <a:buFont typeface="Arial"/>
+              <a:buNone/>
+              <a:defRPr b="0" i="0" sz="1200" u="none" cap="none" strike="noStrike">
+                <a:solidFill>
+                  <a:srgbClr val="E9E9E9"/>
+                </a:solidFill>
+                <a:latin typeface="Arial"/>
+                <a:ea typeface="Arial"/>
+                <a:cs typeface="Arial"/>
+                <a:sym typeface="Arial"/>
+              </a:defRPr>
             </a:lvl1pPr>
-            <a:lvl2pPr indent="0" lvl="1" marL="0" algn="r">
-              <a:spcBef>
-                <a:spcPts val="0"/>
-              </a:spcBef>
-              <a:buNone/>
-              <a:defRPr/>
+            <a:lvl2pPr indent="0" lvl="1" marL="0" marR="0" algn="r">
+              <a:lnSpc>
+                <a:spcPct val="100000"/>
+              </a:lnSpc>
+              <a:spcBef>
+                <a:spcPts val="0"/>
+              </a:spcBef>
+              <a:spcAft>
+                <a:spcPts val="0"/>
+              </a:spcAft>
+              <a:buClr>
+                <a:srgbClr val="000000"/>
+              </a:buClr>
+              <a:buSzPts val="1200"/>
+              <a:buFont typeface="Arial"/>
+              <a:buNone/>
+              <a:defRPr b="0" i="0" sz="1200" u="none" cap="none" strike="noStrike">
+                <a:solidFill>
+                  <a:srgbClr val="E9E9E9"/>
+                </a:solidFill>
+                <a:latin typeface="Arial"/>
+                <a:ea typeface="Arial"/>
+                <a:cs typeface="Arial"/>
+                <a:sym typeface="Arial"/>
+              </a:defRPr>
             </a:lvl2pPr>
-            <a:lvl3pPr indent="0" lvl="2" marL="0" algn="r">
-              <a:spcBef>
-                <a:spcPts val="0"/>
-              </a:spcBef>
-              <a:buNone/>
-              <a:defRPr/>
+            <a:lvl3pPr indent="0" lvl="2" marL="0" marR="0" algn="r">
+              <a:lnSpc>
+                <a:spcPct val="100000"/>
+              </a:lnSpc>
+              <a:spcBef>
+                <a:spcPts val="0"/>
+              </a:spcBef>
+              <a:spcAft>
+                <a:spcPts val="0"/>
+              </a:spcAft>
+              <a:buClr>
+                <a:srgbClr val="000000"/>
+              </a:buClr>
+              <a:buSzPts val="1200"/>
+              <a:buFont typeface="Arial"/>
+              <a:buNone/>
+              <a:defRPr b="0" i="0" sz="1200" u="none" cap="none" strike="noStrike">
+                <a:solidFill>
+                  <a:srgbClr val="E9E9E9"/>
+                </a:solidFill>
+                <a:latin typeface="Arial"/>
+                <a:ea typeface="Arial"/>
+                <a:cs typeface="Arial"/>
+                <a:sym typeface="Arial"/>
+              </a:defRPr>
             </a:lvl3pPr>
-            <a:lvl4pPr indent="0" lvl="3" marL="0" algn="r">
-              <a:spcBef>
-                <a:spcPts val="0"/>
-              </a:spcBef>
-              <a:buNone/>
-              <a:defRPr/>
+            <a:lvl4pPr indent="0" lvl="3" marL="0" marR="0" algn="r">
+              <a:lnSpc>
+                <a:spcPct val="100000"/>
+              </a:lnSpc>
+              <a:spcBef>
+                <a:spcPts val="0"/>
+              </a:spcBef>
+              <a:spcAft>
+                <a:spcPts val="0"/>
+              </a:spcAft>
+              <a:buClr>
+                <a:srgbClr val="000000"/>
+              </a:buClr>
+              <a:buSzPts val="1200"/>
+              <a:buFont typeface="Arial"/>
+              <a:buNone/>
+              <a:defRPr b="0" i="0" sz="1200" u="none" cap="none" strike="noStrike">
+                <a:solidFill>
+                  <a:srgbClr val="E9E9E9"/>
+                </a:solidFill>
+                <a:latin typeface="Arial"/>
+                <a:ea typeface="Arial"/>
+                <a:cs typeface="Arial"/>
+                <a:sym typeface="Arial"/>
+              </a:defRPr>
             </a:lvl4pPr>
-            <a:lvl5pPr indent="0" lvl="4" marL="0" algn="r">
-              <a:spcBef>
-                <a:spcPts val="0"/>
-              </a:spcBef>
-              <a:buNone/>
-              <a:defRPr/>
+            <a:lvl5pPr indent="0" lvl="4" marL="0" marR="0" algn="r">
+              <a:lnSpc>
+                <a:spcPct val="100000"/>
+              </a:lnSpc>
+              <a:spcBef>
+                <a:spcPts val="0"/>
+              </a:spcBef>
+              <a:spcAft>
+                <a:spcPts val="0"/>
+              </a:spcAft>
+              <a:buClr>
+                <a:srgbClr val="000000"/>
+              </a:buClr>
+              <a:buSzPts val="1200"/>
+              <a:buFont typeface="Arial"/>
+              <a:buNone/>
+              <a:defRPr b="0" i="0" sz="1200" u="none" cap="none" strike="noStrike">
+                <a:solidFill>
+                  <a:srgbClr val="E9E9E9"/>
+                </a:solidFill>
+                <a:latin typeface="Arial"/>
+                <a:ea typeface="Arial"/>
+                <a:cs typeface="Arial"/>
+                <a:sym typeface="Arial"/>
+              </a:defRPr>
             </a:lvl5pPr>
-            <a:lvl6pPr indent="0" lvl="5" marL="0" algn="r">
-              <a:spcBef>
-                <a:spcPts val="0"/>
-              </a:spcBef>
-              <a:buNone/>
-              <a:defRPr/>
+            <a:lvl6pPr indent="0" lvl="5" marL="0" marR="0" algn="r">
+              <a:lnSpc>
+                <a:spcPct val="100000"/>
+              </a:lnSpc>
+              <a:spcBef>
+                <a:spcPts val="0"/>
+              </a:spcBef>
+              <a:spcAft>
+                <a:spcPts val="0"/>
+              </a:spcAft>
+              <a:buClr>
+                <a:srgbClr val="000000"/>
+              </a:buClr>
+              <a:buSzPts val="1200"/>
+              <a:buFont typeface="Arial"/>
+              <a:buNone/>
+              <a:defRPr b="0" i="0" sz="1200" u="none" cap="none" strike="noStrike">
+                <a:solidFill>
+                  <a:srgbClr val="E9E9E9"/>
+                </a:solidFill>
+                <a:latin typeface="Arial"/>
+                <a:ea typeface="Arial"/>
+                <a:cs typeface="Arial"/>
+                <a:sym typeface="Arial"/>
+              </a:defRPr>
             </a:lvl6pPr>
-            <a:lvl7pPr indent="0" lvl="6" marL="0" algn="r">
-              <a:spcBef>
-                <a:spcPts val="0"/>
-              </a:spcBef>
-              <a:buNone/>
-              <a:defRPr/>
+            <a:lvl7pPr indent="0" lvl="6" marL="0" marR="0" algn="r">
+              <a:lnSpc>
+                <a:spcPct val="100000"/>
+              </a:lnSpc>
+              <a:spcBef>
+                <a:spcPts val="0"/>
+              </a:spcBef>
+              <a:spcAft>
+                <a:spcPts val="0"/>
+              </a:spcAft>
+              <a:buClr>
+                <a:srgbClr val="000000"/>
+              </a:buClr>
+              <a:buSzPts val="1200"/>
+              <a:buFont typeface="Arial"/>
+              <a:buNone/>
+              <a:defRPr b="0" i="0" sz="1200" u="none" cap="none" strike="noStrike">
+                <a:solidFill>
+                  <a:srgbClr val="E9E9E9"/>
+                </a:solidFill>
+                <a:latin typeface="Arial"/>
+                <a:ea typeface="Arial"/>
+                <a:cs typeface="Arial"/>
+                <a:sym typeface="Arial"/>
+              </a:defRPr>
             </a:lvl7pPr>
-            <a:lvl8pPr indent="0" lvl="7" marL="0" algn="r">
-              <a:spcBef>
-                <a:spcPts val="0"/>
-              </a:spcBef>
-              <a:buNone/>
-              <a:defRPr/>
+            <a:lvl8pPr indent="0" lvl="7" marL="0" marR="0" algn="r">
+              <a:lnSpc>
+                <a:spcPct val="100000"/>
+              </a:lnSpc>
+              <a:spcBef>
+                <a:spcPts val="0"/>
+              </a:spcBef>
+              <a:spcAft>
+                <a:spcPts val="0"/>
+              </a:spcAft>
+              <a:buClr>
+                <a:srgbClr val="000000"/>
+              </a:buClr>
+              <a:buSzPts val="1200"/>
+              <a:buFont typeface="Arial"/>
+              <a:buNone/>
+              <a:defRPr b="0" i="0" sz="1200" u="none" cap="none" strike="noStrike">
+                <a:solidFill>
+                  <a:srgbClr val="E9E9E9"/>
+                </a:solidFill>
+                <a:latin typeface="Arial"/>
+                <a:ea typeface="Arial"/>
+                <a:cs typeface="Arial"/>
+                <a:sym typeface="Arial"/>
+              </a:defRPr>
             </a:lvl8pPr>
-            <a:lvl9pPr indent="0" lvl="8" marL="0" algn="r">
-              <a:spcBef>
-                <a:spcPts val="0"/>
-              </a:spcBef>
-              <a:buNone/>
-              <a:defRPr/>
+            <a:lvl9pPr indent="0" lvl="8" marL="0" marR="0" algn="r">
+              <a:lnSpc>
+                <a:spcPct val="100000"/>
+              </a:lnSpc>
+              <a:spcBef>
+                <a:spcPts val="0"/>
+              </a:spcBef>
+              <a:spcAft>
+                <a:spcPts val="0"/>
+              </a:spcAft>
+              <a:buClr>
+                <a:srgbClr val="000000"/>
+              </a:buClr>
+              <a:buSzPts val="1200"/>
+              <a:buFont typeface="Arial"/>
+              <a:buNone/>
+              <a:defRPr b="0" i="0" sz="1200" u="none" cap="none" strike="noStrike">
+                <a:solidFill>
+                  <a:srgbClr val="E9E9E9"/>
+                </a:solidFill>
+                <a:latin typeface="Arial"/>
+                <a:ea typeface="Arial"/>
+                <a:cs typeface="Arial"/>
+                <a:sym typeface="Arial"/>
+              </a:defRPr>
             </a:lvl9pPr>
           </a:lstStyle>
           <a:p>
@@ -9632,93 +13416,213 @@
                 <a:sym typeface="Play"/>
               </a:defRPr>
             </a:lvl1pPr>
-            <a:lvl2pPr lvl="1">
-              <a:spcBef>
-                <a:spcPts val="0"/>
-              </a:spcBef>
-              <a:spcAft>
-                <a:spcPts val="0"/>
-              </a:spcAft>
-              <a:buSzPts val="1400"/>
-              <a:buNone/>
-              <a:defRPr sz="1800"/>
+            <a:lvl2pPr lvl="1" marR="0" rtl="0" algn="l">
+              <a:lnSpc>
+                <a:spcPct val="100000"/>
+              </a:lnSpc>
+              <a:spcBef>
+                <a:spcPts val="0"/>
+              </a:spcBef>
+              <a:spcAft>
+                <a:spcPts val="0"/>
+              </a:spcAft>
+              <a:buClr>
+                <a:srgbClr val="000000"/>
+              </a:buClr>
+              <a:buSzPts val="1400"/>
+              <a:buFont typeface="Arial"/>
+              <a:buNone/>
+              <a:defRPr b="0" i="0" sz="1800" u="none" cap="none" strike="noStrike">
+                <a:solidFill>
+                  <a:srgbClr val="000000"/>
+                </a:solidFill>
+                <a:latin typeface="Arial"/>
+                <a:ea typeface="Arial"/>
+                <a:cs typeface="Arial"/>
+                <a:sym typeface="Arial"/>
+              </a:defRPr>
             </a:lvl2pPr>
-            <a:lvl3pPr lvl="2">
-              <a:spcBef>
-                <a:spcPts val="0"/>
-              </a:spcBef>
-              <a:spcAft>
-                <a:spcPts val="0"/>
-              </a:spcAft>
-              <a:buSzPts val="1400"/>
-              <a:buNone/>
-              <a:defRPr sz="1800"/>
+            <a:lvl3pPr lvl="2" marR="0" rtl="0" algn="l">
+              <a:lnSpc>
+                <a:spcPct val="100000"/>
+              </a:lnSpc>
+              <a:spcBef>
+                <a:spcPts val="0"/>
+              </a:spcBef>
+              <a:spcAft>
+                <a:spcPts val="0"/>
+              </a:spcAft>
+              <a:buClr>
+                <a:srgbClr val="000000"/>
+              </a:buClr>
+              <a:buSzPts val="1400"/>
+              <a:buFont typeface="Arial"/>
+              <a:buNone/>
+              <a:defRPr b="0" i="0" sz="1800" u="none" cap="none" strike="noStrike">
+                <a:solidFill>
+                  <a:srgbClr val="000000"/>
+                </a:solidFill>
+                <a:latin typeface="Arial"/>
+                <a:ea typeface="Arial"/>
+                <a:cs typeface="Arial"/>
+                <a:sym typeface="Arial"/>
+              </a:defRPr>
             </a:lvl3pPr>
-            <a:lvl4pPr lvl="3">
-              <a:spcBef>
-                <a:spcPts val="0"/>
-              </a:spcBef>
-              <a:spcAft>
-                <a:spcPts val="0"/>
-              </a:spcAft>
-              <a:buSzPts val="1400"/>
-              <a:buNone/>
-              <a:defRPr sz="1800"/>
+            <a:lvl4pPr lvl="3" marR="0" rtl="0" algn="l">
+              <a:lnSpc>
+                <a:spcPct val="100000"/>
+              </a:lnSpc>
+              <a:spcBef>
+                <a:spcPts val="0"/>
+              </a:spcBef>
+              <a:spcAft>
+                <a:spcPts val="0"/>
+              </a:spcAft>
+              <a:buClr>
+                <a:srgbClr val="000000"/>
+              </a:buClr>
+              <a:buSzPts val="1400"/>
+              <a:buFont typeface="Arial"/>
+              <a:buNone/>
+              <a:defRPr b="0" i="0" sz="1800" u="none" cap="none" strike="noStrike">
+                <a:solidFill>
+                  <a:srgbClr val="000000"/>
+                </a:solidFill>
+                <a:latin typeface="Arial"/>
+                <a:ea typeface="Arial"/>
+                <a:cs typeface="Arial"/>
+                <a:sym typeface="Arial"/>
+              </a:defRPr>
             </a:lvl4pPr>
-            <a:lvl5pPr lvl="4">
-              <a:spcBef>
-                <a:spcPts val="0"/>
-              </a:spcBef>
-              <a:spcAft>
-                <a:spcPts val="0"/>
-              </a:spcAft>
-              <a:buSzPts val="1400"/>
-              <a:buNone/>
-              <a:defRPr sz="1800"/>
+            <a:lvl5pPr lvl="4" marR="0" rtl="0" algn="l">
+              <a:lnSpc>
+                <a:spcPct val="100000"/>
+              </a:lnSpc>
+              <a:spcBef>
+                <a:spcPts val="0"/>
+              </a:spcBef>
+              <a:spcAft>
+                <a:spcPts val="0"/>
+              </a:spcAft>
+              <a:buClr>
+                <a:srgbClr val="000000"/>
+              </a:buClr>
+              <a:buSzPts val="1400"/>
+              <a:buFont typeface="Arial"/>
+              <a:buNone/>
+              <a:defRPr b="0" i="0" sz="1800" u="none" cap="none" strike="noStrike">
+                <a:solidFill>
+                  <a:srgbClr val="000000"/>
+                </a:solidFill>
+                <a:latin typeface="Arial"/>
+                <a:ea typeface="Arial"/>
+                <a:cs typeface="Arial"/>
+                <a:sym typeface="Arial"/>
+              </a:defRPr>
             </a:lvl5pPr>
-            <a:lvl6pPr lvl="5">
-              <a:spcBef>
-                <a:spcPts val="0"/>
-              </a:spcBef>
-              <a:spcAft>
-                <a:spcPts val="0"/>
-              </a:spcAft>
-              <a:buSzPts val="1400"/>
-              <a:buNone/>
-              <a:defRPr sz="1800"/>
+            <a:lvl6pPr lvl="5" marR="0" rtl="0" algn="l">
+              <a:lnSpc>
+                <a:spcPct val="100000"/>
+              </a:lnSpc>
+              <a:spcBef>
+                <a:spcPts val="0"/>
+              </a:spcBef>
+              <a:spcAft>
+                <a:spcPts val="0"/>
+              </a:spcAft>
+              <a:buClr>
+                <a:srgbClr val="000000"/>
+              </a:buClr>
+              <a:buSzPts val="1400"/>
+              <a:buFont typeface="Arial"/>
+              <a:buNone/>
+              <a:defRPr b="0" i="0" sz="1800" u="none" cap="none" strike="noStrike">
+                <a:solidFill>
+                  <a:srgbClr val="000000"/>
+                </a:solidFill>
+                <a:latin typeface="Arial"/>
+                <a:ea typeface="Arial"/>
+                <a:cs typeface="Arial"/>
+                <a:sym typeface="Arial"/>
+              </a:defRPr>
             </a:lvl6pPr>
-            <a:lvl7pPr lvl="6">
-              <a:spcBef>
-                <a:spcPts val="0"/>
-              </a:spcBef>
-              <a:spcAft>
-                <a:spcPts val="0"/>
-              </a:spcAft>
-              <a:buSzPts val="1400"/>
-              <a:buNone/>
-              <a:defRPr sz="1800"/>
+            <a:lvl7pPr lvl="6" marR="0" rtl="0" algn="l">
+              <a:lnSpc>
+                <a:spcPct val="100000"/>
+              </a:lnSpc>
+              <a:spcBef>
+                <a:spcPts val="0"/>
+              </a:spcBef>
+              <a:spcAft>
+                <a:spcPts val="0"/>
+              </a:spcAft>
+              <a:buClr>
+                <a:srgbClr val="000000"/>
+              </a:buClr>
+              <a:buSzPts val="1400"/>
+              <a:buFont typeface="Arial"/>
+              <a:buNone/>
+              <a:defRPr b="0" i="0" sz="1800" u="none" cap="none" strike="noStrike">
+                <a:solidFill>
+                  <a:srgbClr val="000000"/>
+                </a:solidFill>
+                <a:latin typeface="Arial"/>
+                <a:ea typeface="Arial"/>
+                <a:cs typeface="Arial"/>
+                <a:sym typeface="Arial"/>
+              </a:defRPr>
             </a:lvl7pPr>
-            <a:lvl8pPr lvl="7">
-              <a:spcBef>
-                <a:spcPts val="0"/>
-              </a:spcBef>
-              <a:spcAft>
-                <a:spcPts val="0"/>
-              </a:spcAft>
-              <a:buSzPts val="1400"/>
-              <a:buNone/>
-              <a:defRPr sz="1800"/>
+            <a:lvl8pPr lvl="7" marR="0" rtl="0" algn="l">
+              <a:lnSpc>
+                <a:spcPct val="100000"/>
+              </a:lnSpc>
+              <a:spcBef>
+                <a:spcPts val="0"/>
+              </a:spcBef>
+              <a:spcAft>
+                <a:spcPts val="0"/>
+              </a:spcAft>
+              <a:buClr>
+                <a:srgbClr val="000000"/>
+              </a:buClr>
+              <a:buSzPts val="1400"/>
+              <a:buFont typeface="Arial"/>
+              <a:buNone/>
+              <a:defRPr b="0" i="0" sz="1800" u="none" cap="none" strike="noStrike">
+                <a:solidFill>
+                  <a:srgbClr val="000000"/>
+                </a:solidFill>
+                <a:latin typeface="Arial"/>
+                <a:ea typeface="Arial"/>
+                <a:cs typeface="Arial"/>
+                <a:sym typeface="Arial"/>
+              </a:defRPr>
             </a:lvl8pPr>
-            <a:lvl9pPr lvl="8">
-              <a:spcBef>
-                <a:spcPts val="0"/>
-              </a:spcBef>
-              <a:spcAft>
-                <a:spcPts val="0"/>
-              </a:spcAft>
-              <a:buSzPts val="1400"/>
-              <a:buNone/>
-              <a:defRPr sz="1800"/>
+            <a:lvl9pPr lvl="8" marR="0" rtl="0" algn="l">
+              <a:lnSpc>
+                <a:spcPct val="100000"/>
+              </a:lnSpc>
+              <a:spcBef>
+                <a:spcPts val="0"/>
+              </a:spcBef>
+              <a:spcAft>
+                <a:spcPts val="0"/>
+              </a:spcAft>
+              <a:buClr>
+                <a:srgbClr val="000000"/>
+              </a:buClr>
+              <a:buSzPts val="1400"/>
+              <a:buFont typeface="Arial"/>
+              <a:buNone/>
+              <a:defRPr b="0" i="0" sz="1800" u="none" cap="none" strike="noStrike">
+                <a:solidFill>
+                  <a:srgbClr val="000000"/>
+                </a:solidFill>
+                <a:latin typeface="Arial"/>
+                <a:ea typeface="Arial"/>
+                <a:cs typeface="Arial"/>
+                <a:sym typeface="Arial"/>
+              </a:defRPr>
             </a:lvl9pPr>
           </a:lstStyle>
           <a:p/>
@@ -10015,13 +13919,20 @@
           </a:bodyPr>
           <a:lstStyle>
             <a:lvl1pPr lvl="0" marR="0" rtl="0" algn="l">
-              <a:spcBef>
-                <a:spcPts val="0"/>
-              </a:spcBef>
-              <a:spcAft>
-                <a:spcPts val="0"/>
-              </a:spcAft>
-              <a:buSzPts val="1400"/>
+              <a:lnSpc>
+                <a:spcPct val="100000"/>
+              </a:lnSpc>
+              <a:spcBef>
+                <a:spcPts val="0"/>
+              </a:spcBef>
+              <a:spcAft>
+                <a:spcPts val="0"/>
+              </a:spcAft>
+              <a:buClr>
+                <a:srgbClr val="000000"/>
+              </a:buClr>
+              <a:buSzPts val="1400"/>
+              <a:buFont typeface="Arial"/>
               <a:buNone/>
               <a:defRPr b="0" i="0" sz="1200" u="none" cap="none" strike="noStrike">
                 <a:solidFill>
@@ -10034,13 +13945,20 @@
               </a:defRPr>
             </a:lvl1pPr>
             <a:lvl2pPr lvl="1" marR="0" rtl="0" algn="l">
-              <a:spcBef>
-                <a:spcPts val="0"/>
-              </a:spcBef>
-              <a:spcAft>
-                <a:spcPts val="0"/>
-              </a:spcAft>
-              <a:buSzPts val="1400"/>
+              <a:lnSpc>
+                <a:spcPct val="100000"/>
+              </a:lnSpc>
+              <a:spcBef>
+                <a:spcPts val="0"/>
+              </a:spcBef>
+              <a:spcAft>
+                <a:spcPts val="0"/>
+              </a:spcAft>
+              <a:buClr>
+                <a:srgbClr val="000000"/>
+              </a:buClr>
+              <a:buSzPts val="1400"/>
+              <a:buFont typeface="Arial"/>
               <a:buNone/>
               <a:defRPr b="0" i="0" sz="1800" u="none" cap="none" strike="noStrike">
                 <a:solidFill>
@@ -10053,13 +13971,20 @@
               </a:defRPr>
             </a:lvl2pPr>
             <a:lvl3pPr lvl="2" marR="0" rtl="0" algn="l">
-              <a:spcBef>
-                <a:spcPts val="0"/>
-              </a:spcBef>
-              <a:spcAft>
-                <a:spcPts val="0"/>
-              </a:spcAft>
-              <a:buSzPts val="1400"/>
+              <a:lnSpc>
+                <a:spcPct val="100000"/>
+              </a:lnSpc>
+              <a:spcBef>
+                <a:spcPts val="0"/>
+              </a:spcBef>
+              <a:spcAft>
+                <a:spcPts val="0"/>
+              </a:spcAft>
+              <a:buClr>
+                <a:srgbClr val="000000"/>
+              </a:buClr>
+              <a:buSzPts val="1400"/>
+              <a:buFont typeface="Arial"/>
               <a:buNone/>
               <a:defRPr b="0" i="0" sz="1800" u="none" cap="none" strike="noStrike">
                 <a:solidFill>
@@ -10072,13 +13997,20 @@
               </a:defRPr>
             </a:lvl3pPr>
             <a:lvl4pPr lvl="3" marR="0" rtl="0" algn="l">
-              <a:spcBef>
-                <a:spcPts val="0"/>
-              </a:spcBef>
-              <a:spcAft>
-                <a:spcPts val="0"/>
-              </a:spcAft>
-              <a:buSzPts val="1400"/>
+              <a:lnSpc>
+                <a:spcPct val="100000"/>
+              </a:lnSpc>
+              <a:spcBef>
+                <a:spcPts val="0"/>
+              </a:spcBef>
+              <a:spcAft>
+                <a:spcPts val="0"/>
+              </a:spcAft>
+              <a:buClr>
+                <a:srgbClr val="000000"/>
+              </a:buClr>
+              <a:buSzPts val="1400"/>
+              <a:buFont typeface="Arial"/>
               <a:buNone/>
               <a:defRPr b="0" i="0" sz="1800" u="none" cap="none" strike="noStrike">
                 <a:solidFill>
@@ -10091,13 +14023,20 @@
               </a:defRPr>
             </a:lvl4pPr>
             <a:lvl5pPr lvl="4" marR="0" rtl="0" algn="l">
-              <a:spcBef>
-                <a:spcPts val="0"/>
-              </a:spcBef>
-              <a:spcAft>
-                <a:spcPts val="0"/>
-              </a:spcAft>
-              <a:buSzPts val="1400"/>
+              <a:lnSpc>
+                <a:spcPct val="100000"/>
+              </a:lnSpc>
+              <a:spcBef>
+                <a:spcPts val="0"/>
+              </a:spcBef>
+              <a:spcAft>
+                <a:spcPts val="0"/>
+              </a:spcAft>
+              <a:buClr>
+                <a:srgbClr val="000000"/>
+              </a:buClr>
+              <a:buSzPts val="1400"/>
+              <a:buFont typeface="Arial"/>
               <a:buNone/>
               <a:defRPr b="0" i="0" sz="1800" u="none" cap="none" strike="noStrike">
                 <a:solidFill>
@@ -10110,13 +14049,20 @@
               </a:defRPr>
             </a:lvl5pPr>
             <a:lvl6pPr lvl="5" marR="0" rtl="0" algn="l">
-              <a:spcBef>
-                <a:spcPts val="0"/>
-              </a:spcBef>
-              <a:spcAft>
-                <a:spcPts val="0"/>
-              </a:spcAft>
-              <a:buSzPts val="1400"/>
+              <a:lnSpc>
+                <a:spcPct val="100000"/>
+              </a:lnSpc>
+              <a:spcBef>
+                <a:spcPts val="0"/>
+              </a:spcBef>
+              <a:spcAft>
+                <a:spcPts val="0"/>
+              </a:spcAft>
+              <a:buClr>
+                <a:srgbClr val="000000"/>
+              </a:buClr>
+              <a:buSzPts val="1400"/>
+              <a:buFont typeface="Arial"/>
               <a:buNone/>
               <a:defRPr b="0" i="0" sz="1800" u="none" cap="none" strike="noStrike">
                 <a:solidFill>
@@ -10129,13 +14075,20 @@
               </a:defRPr>
             </a:lvl6pPr>
             <a:lvl7pPr lvl="6" marR="0" rtl="0" algn="l">
-              <a:spcBef>
-                <a:spcPts val="0"/>
-              </a:spcBef>
-              <a:spcAft>
-                <a:spcPts val="0"/>
-              </a:spcAft>
-              <a:buSzPts val="1400"/>
+              <a:lnSpc>
+                <a:spcPct val="100000"/>
+              </a:lnSpc>
+              <a:spcBef>
+                <a:spcPts val="0"/>
+              </a:spcBef>
+              <a:spcAft>
+                <a:spcPts val="0"/>
+              </a:spcAft>
+              <a:buClr>
+                <a:srgbClr val="000000"/>
+              </a:buClr>
+              <a:buSzPts val="1400"/>
+              <a:buFont typeface="Arial"/>
               <a:buNone/>
               <a:defRPr b="0" i="0" sz="1800" u="none" cap="none" strike="noStrike">
                 <a:solidFill>
@@ -10148,13 +14101,20 @@
               </a:defRPr>
             </a:lvl7pPr>
             <a:lvl8pPr lvl="7" marR="0" rtl="0" algn="l">
-              <a:spcBef>
-                <a:spcPts val="0"/>
-              </a:spcBef>
-              <a:spcAft>
-                <a:spcPts val="0"/>
-              </a:spcAft>
-              <a:buSzPts val="1400"/>
+              <a:lnSpc>
+                <a:spcPct val="100000"/>
+              </a:lnSpc>
+              <a:spcBef>
+                <a:spcPts val="0"/>
+              </a:spcBef>
+              <a:spcAft>
+                <a:spcPts val="0"/>
+              </a:spcAft>
+              <a:buClr>
+                <a:srgbClr val="000000"/>
+              </a:buClr>
+              <a:buSzPts val="1400"/>
+              <a:buFont typeface="Arial"/>
               <a:buNone/>
               <a:defRPr b="0" i="0" sz="1800" u="none" cap="none" strike="noStrike">
                 <a:solidFill>
@@ -10167,13 +14127,20 @@
               </a:defRPr>
             </a:lvl8pPr>
             <a:lvl9pPr lvl="8" marR="0" rtl="0" algn="l">
-              <a:spcBef>
-                <a:spcPts val="0"/>
-              </a:spcBef>
-              <a:spcAft>
-                <a:spcPts val="0"/>
-              </a:spcAft>
-              <a:buSzPts val="1400"/>
+              <a:lnSpc>
+                <a:spcPct val="100000"/>
+              </a:lnSpc>
+              <a:spcBef>
+                <a:spcPts val="0"/>
+              </a:spcBef>
+              <a:spcAft>
+                <a:spcPts val="0"/>
+              </a:spcAft>
+              <a:buClr>
+                <a:srgbClr val="000000"/>
+              </a:buClr>
+              <a:buSzPts val="1400"/>
+              <a:buFont typeface="Arial"/>
               <a:buNone/>
               <a:defRPr b="0" i="0" sz="1800" u="none" cap="none" strike="noStrike">
                 <a:solidFill>
@@ -10216,13 +14183,20 @@
           </a:bodyPr>
           <a:lstStyle>
             <a:lvl1pPr lvl="0" marR="0" rtl="0" algn="ctr">
-              <a:spcBef>
-                <a:spcPts val="0"/>
-              </a:spcBef>
-              <a:spcAft>
-                <a:spcPts val="0"/>
-              </a:spcAft>
-              <a:buSzPts val="1400"/>
+              <a:lnSpc>
+                <a:spcPct val="100000"/>
+              </a:lnSpc>
+              <a:spcBef>
+                <a:spcPts val="0"/>
+              </a:spcBef>
+              <a:spcAft>
+                <a:spcPts val="0"/>
+              </a:spcAft>
+              <a:buClr>
+                <a:srgbClr val="000000"/>
+              </a:buClr>
+              <a:buSzPts val="1400"/>
+              <a:buFont typeface="Arial"/>
               <a:buNone/>
               <a:defRPr b="0" i="0" sz="1200" u="none" cap="none" strike="noStrike">
                 <a:solidFill>
@@ -10235,13 +14209,20 @@
               </a:defRPr>
             </a:lvl1pPr>
             <a:lvl2pPr lvl="1" marR="0" rtl="0" algn="l">
-              <a:spcBef>
-                <a:spcPts val="0"/>
-              </a:spcBef>
-              <a:spcAft>
-                <a:spcPts val="0"/>
-              </a:spcAft>
-              <a:buSzPts val="1400"/>
+              <a:lnSpc>
+                <a:spcPct val="100000"/>
+              </a:lnSpc>
+              <a:spcBef>
+                <a:spcPts val="0"/>
+              </a:spcBef>
+              <a:spcAft>
+                <a:spcPts val="0"/>
+              </a:spcAft>
+              <a:buClr>
+                <a:srgbClr val="000000"/>
+              </a:buClr>
+              <a:buSzPts val="1400"/>
+              <a:buFont typeface="Arial"/>
               <a:buNone/>
               <a:defRPr b="0" i="0" sz="1800" u="none" cap="none" strike="noStrike">
                 <a:solidFill>
@@ -10254,13 +14235,20 @@
               </a:defRPr>
             </a:lvl2pPr>
             <a:lvl3pPr lvl="2" marR="0" rtl="0" algn="l">
-              <a:spcBef>
-                <a:spcPts val="0"/>
-              </a:spcBef>
-              <a:spcAft>
-                <a:spcPts val="0"/>
-              </a:spcAft>
-              <a:buSzPts val="1400"/>
+              <a:lnSpc>
+                <a:spcPct val="100000"/>
+              </a:lnSpc>
+              <a:spcBef>
+                <a:spcPts val="0"/>
+              </a:spcBef>
+              <a:spcAft>
+                <a:spcPts val="0"/>
+              </a:spcAft>
+              <a:buClr>
+                <a:srgbClr val="000000"/>
+              </a:buClr>
+              <a:buSzPts val="1400"/>
+              <a:buFont typeface="Arial"/>
               <a:buNone/>
               <a:defRPr b="0" i="0" sz="1800" u="none" cap="none" strike="noStrike">
                 <a:solidFill>
@@ -10273,13 +14261,20 @@
               </a:defRPr>
             </a:lvl3pPr>
             <a:lvl4pPr lvl="3" marR="0" rtl="0" algn="l">
-              <a:spcBef>
-                <a:spcPts val="0"/>
-              </a:spcBef>
-              <a:spcAft>
-                <a:spcPts val="0"/>
-              </a:spcAft>
-              <a:buSzPts val="1400"/>
+              <a:lnSpc>
+                <a:spcPct val="100000"/>
+              </a:lnSpc>
+              <a:spcBef>
+                <a:spcPts val="0"/>
+              </a:spcBef>
+              <a:spcAft>
+                <a:spcPts val="0"/>
+              </a:spcAft>
+              <a:buClr>
+                <a:srgbClr val="000000"/>
+              </a:buClr>
+              <a:buSzPts val="1400"/>
+              <a:buFont typeface="Arial"/>
               <a:buNone/>
               <a:defRPr b="0" i="0" sz="1800" u="none" cap="none" strike="noStrike">
                 <a:solidFill>
@@ -10292,13 +14287,20 @@
               </a:defRPr>
             </a:lvl4pPr>
             <a:lvl5pPr lvl="4" marR="0" rtl="0" algn="l">
-              <a:spcBef>
-                <a:spcPts val="0"/>
-              </a:spcBef>
-              <a:spcAft>
-                <a:spcPts val="0"/>
-              </a:spcAft>
-              <a:buSzPts val="1400"/>
+              <a:lnSpc>
+                <a:spcPct val="100000"/>
+              </a:lnSpc>
+              <a:spcBef>
+                <a:spcPts val="0"/>
+              </a:spcBef>
+              <a:spcAft>
+                <a:spcPts val="0"/>
+              </a:spcAft>
+              <a:buClr>
+                <a:srgbClr val="000000"/>
+              </a:buClr>
+              <a:buSzPts val="1400"/>
+              <a:buFont typeface="Arial"/>
               <a:buNone/>
               <a:defRPr b="0" i="0" sz="1800" u="none" cap="none" strike="noStrike">
                 <a:solidFill>
@@ -10311,13 +14313,20 @@
               </a:defRPr>
             </a:lvl5pPr>
             <a:lvl6pPr lvl="5" marR="0" rtl="0" algn="l">
-              <a:spcBef>
-                <a:spcPts val="0"/>
-              </a:spcBef>
-              <a:spcAft>
-                <a:spcPts val="0"/>
-              </a:spcAft>
-              <a:buSzPts val="1400"/>
+              <a:lnSpc>
+                <a:spcPct val="100000"/>
+              </a:lnSpc>
+              <a:spcBef>
+                <a:spcPts val="0"/>
+              </a:spcBef>
+              <a:spcAft>
+                <a:spcPts val="0"/>
+              </a:spcAft>
+              <a:buClr>
+                <a:srgbClr val="000000"/>
+              </a:buClr>
+              <a:buSzPts val="1400"/>
+              <a:buFont typeface="Arial"/>
               <a:buNone/>
               <a:defRPr b="0" i="0" sz="1800" u="none" cap="none" strike="noStrike">
                 <a:solidFill>
@@ -10330,13 +14339,20 @@
               </a:defRPr>
             </a:lvl6pPr>
             <a:lvl7pPr lvl="6" marR="0" rtl="0" algn="l">
-              <a:spcBef>
-                <a:spcPts val="0"/>
-              </a:spcBef>
-              <a:spcAft>
-                <a:spcPts val="0"/>
-              </a:spcAft>
-              <a:buSzPts val="1400"/>
+              <a:lnSpc>
+                <a:spcPct val="100000"/>
+              </a:lnSpc>
+              <a:spcBef>
+                <a:spcPts val="0"/>
+              </a:spcBef>
+              <a:spcAft>
+                <a:spcPts val="0"/>
+              </a:spcAft>
+              <a:buClr>
+                <a:srgbClr val="000000"/>
+              </a:buClr>
+              <a:buSzPts val="1400"/>
+              <a:buFont typeface="Arial"/>
               <a:buNone/>
               <a:defRPr b="0" i="0" sz="1800" u="none" cap="none" strike="noStrike">
                 <a:solidFill>
@@ -10349,13 +14365,20 @@
               </a:defRPr>
             </a:lvl7pPr>
             <a:lvl8pPr lvl="7" marR="0" rtl="0" algn="l">
-              <a:spcBef>
-                <a:spcPts val="0"/>
-              </a:spcBef>
-              <a:spcAft>
-                <a:spcPts val="0"/>
-              </a:spcAft>
-              <a:buSzPts val="1400"/>
+              <a:lnSpc>
+                <a:spcPct val="100000"/>
+              </a:lnSpc>
+              <a:spcBef>
+                <a:spcPts val="0"/>
+              </a:spcBef>
+              <a:spcAft>
+                <a:spcPts val="0"/>
+              </a:spcAft>
+              <a:buClr>
+                <a:srgbClr val="000000"/>
+              </a:buClr>
+              <a:buSzPts val="1400"/>
+              <a:buFont typeface="Arial"/>
               <a:buNone/>
               <a:defRPr b="0" i="0" sz="1800" u="none" cap="none" strike="noStrike">
                 <a:solidFill>
@@ -10368,13 +14391,20 @@
               </a:defRPr>
             </a:lvl8pPr>
             <a:lvl9pPr lvl="8" marR="0" rtl="0" algn="l">
-              <a:spcBef>
-                <a:spcPts val="0"/>
-              </a:spcBef>
-              <a:spcAft>
-                <a:spcPts val="0"/>
-              </a:spcAft>
-              <a:buSzPts val="1400"/>
+              <a:lnSpc>
+                <a:spcPct val="100000"/>
+              </a:lnSpc>
+              <a:spcBef>
+                <a:spcPts val="0"/>
+              </a:spcBef>
+              <a:spcAft>
+                <a:spcPts val="0"/>
+              </a:spcAft>
+              <a:buClr>
+                <a:srgbClr val="000000"/>
+              </a:buClr>
+              <a:buSzPts val="1400"/>
+              <a:buFont typeface="Arial"/>
               <a:buNone/>
               <a:defRPr b="0" i="0" sz="1800" u="none" cap="none" strike="noStrike">
                 <a:solidFill>
@@ -10417,9 +14447,20 @@
           </a:bodyPr>
           <a:lstStyle>
             <a:lvl1pPr indent="0" lvl="0" marL="0" marR="0" rtl="0" algn="r">
-              <a:spcBef>
-                <a:spcPts val="0"/>
-              </a:spcBef>
+              <a:lnSpc>
+                <a:spcPct val="100000"/>
+              </a:lnSpc>
+              <a:spcBef>
+                <a:spcPts val="0"/>
+              </a:spcBef>
+              <a:spcAft>
+                <a:spcPts val="0"/>
+              </a:spcAft>
+              <a:buClr>
+                <a:srgbClr val="000000"/>
+              </a:buClr>
+              <a:buSzPts val="1200"/>
+              <a:buFont typeface="Arial"/>
               <a:buNone/>
               <a:defRPr b="0" i="0" sz="1200" u="none" cap="none" strike="noStrike">
                 <a:solidFill>
@@ -10432,9 +14473,20 @@
               </a:defRPr>
             </a:lvl1pPr>
             <a:lvl2pPr indent="0" lvl="1" marL="0" marR="0" rtl="0" algn="r">
-              <a:spcBef>
-                <a:spcPts val="0"/>
-              </a:spcBef>
+              <a:lnSpc>
+                <a:spcPct val="100000"/>
+              </a:lnSpc>
+              <a:spcBef>
+                <a:spcPts val="0"/>
+              </a:spcBef>
+              <a:spcAft>
+                <a:spcPts val="0"/>
+              </a:spcAft>
+              <a:buClr>
+                <a:srgbClr val="000000"/>
+              </a:buClr>
+              <a:buSzPts val="1200"/>
+              <a:buFont typeface="Arial"/>
               <a:buNone/>
               <a:defRPr b="0" i="0" sz="1200" u="none" cap="none" strike="noStrike">
                 <a:solidFill>
@@ -10447,9 +14499,20 @@
               </a:defRPr>
             </a:lvl2pPr>
             <a:lvl3pPr indent="0" lvl="2" marL="0" marR="0" rtl="0" algn="r">
-              <a:spcBef>
-                <a:spcPts val="0"/>
-              </a:spcBef>
+              <a:lnSpc>
+                <a:spcPct val="100000"/>
+              </a:lnSpc>
+              <a:spcBef>
+                <a:spcPts val="0"/>
+              </a:spcBef>
+              <a:spcAft>
+                <a:spcPts val="0"/>
+              </a:spcAft>
+              <a:buClr>
+                <a:srgbClr val="000000"/>
+              </a:buClr>
+              <a:buSzPts val="1200"/>
+              <a:buFont typeface="Arial"/>
               <a:buNone/>
               <a:defRPr b="0" i="0" sz="1200" u="none" cap="none" strike="noStrike">
                 <a:solidFill>
@@ -10462,9 +14525,20 @@
               </a:defRPr>
             </a:lvl3pPr>
             <a:lvl4pPr indent="0" lvl="3" marL="0" marR="0" rtl="0" algn="r">
-              <a:spcBef>
-                <a:spcPts val="0"/>
-              </a:spcBef>
+              <a:lnSpc>
+                <a:spcPct val="100000"/>
+              </a:lnSpc>
+              <a:spcBef>
+                <a:spcPts val="0"/>
+              </a:spcBef>
+              <a:spcAft>
+                <a:spcPts val="0"/>
+              </a:spcAft>
+              <a:buClr>
+                <a:srgbClr val="000000"/>
+              </a:buClr>
+              <a:buSzPts val="1200"/>
+              <a:buFont typeface="Arial"/>
               <a:buNone/>
               <a:defRPr b="0" i="0" sz="1200" u="none" cap="none" strike="noStrike">
                 <a:solidFill>
@@ -10477,9 +14551,20 @@
               </a:defRPr>
             </a:lvl4pPr>
             <a:lvl5pPr indent="0" lvl="4" marL="0" marR="0" rtl="0" algn="r">
-              <a:spcBef>
-                <a:spcPts val="0"/>
-              </a:spcBef>
+              <a:lnSpc>
+                <a:spcPct val="100000"/>
+              </a:lnSpc>
+              <a:spcBef>
+                <a:spcPts val="0"/>
+              </a:spcBef>
+              <a:spcAft>
+                <a:spcPts val="0"/>
+              </a:spcAft>
+              <a:buClr>
+                <a:srgbClr val="000000"/>
+              </a:buClr>
+              <a:buSzPts val="1200"/>
+              <a:buFont typeface="Arial"/>
               <a:buNone/>
               <a:defRPr b="0" i="0" sz="1200" u="none" cap="none" strike="noStrike">
                 <a:solidFill>
@@ -10492,9 +14577,20 @@
               </a:defRPr>
             </a:lvl5pPr>
             <a:lvl6pPr indent="0" lvl="5" marL="0" marR="0" rtl="0" algn="r">
-              <a:spcBef>
-                <a:spcPts val="0"/>
-              </a:spcBef>
+              <a:lnSpc>
+                <a:spcPct val="100000"/>
+              </a:lnSpc>
+              <a:spcBef>
+                <a:spcPts val="0"/>
+              </a:spcBef>
+              <a:spcAft>
+                <a:spcPts val="0"/>
+              </a:spcAft>
+              <a:buClr>
+                <a:srgbClr val="000000"/>
+              </a:buClr>
+              <a:buSzPts val="1200"/>
+              <a:buFont typeface="Arial"/>
               <a:buNone/>
               <a:defRPr b="0" i="0" sz="1200" u="none" cap="none" strike="noStrike">
                 <a:solidFill>
@@ -10507,9 +14603,20 @@
               </a:defRPr>
             </a:lvl6pPr>
             <a:lvl7pPr indent="0" lvl="6" marL="0" marR="0" rtl="0" algn="r">
-              <a:spcBef>
-                <a:spcPts val="0"/>
-              </a:spcBef>
+              <a:lnSpc>
+                <a:spcPct val="100000"/>
+              </a:lnSpc>
+              <a:spcBef>
+                <a:spcPts val="0"/>
+              </a:spcBef>
+              <a:spcAft>
+                <a:spcPts val="0"/>
+              </a:spcAft>
+              <a:buClr>
+                <a:srgbClr val="000000"/>
+              </a:buClr>
+              <a:buSzPts val="1200"/>
+              <a:buFont typeface="Arial"/>
               <a:buNone/>
               <a:defRPr b="0" i="0" sz="1200" u="none" cap="none" strike="noStrike">
                 <a:solidFill>
@@ -10522,9 +14629,20 @@
               </a:defRPr>
             </a:lvl7pPr>
             <a:lvl8pPr indent="0" lvl="7" marL="0" marR="0" rtl="0" algn="r">
-              <a:spcBef>
-                <a:spcPts val="0"/>
-              </a:spcBef>
+              <a:lnSpc>
+                <a:spcPct val="100000"/>
+              </a:lnSpc>
+              <a:spcBef>
+                <a:spcPts val="0"/>
+              </a:spcBef>
+              <a:spcAft>
+                <a:spcPts val="0"/>
+              </a:spcAft>
+              <a:buClr>
+                <a:srgbClr val="000000"/>
+              </a:buClr>
+              <a:buSzPts val="1200"/>
+              <a:buFont typeface="Arial"/>
               <a:buNone/>
               <a:defRPr b="0" i="0" sz="1200" u="none" cap="none" strike="noStrike">
                 <a:solidFill>
@@ -10537,9 +14655,20 @@
               </a:defRPr>
             </a:lvl8pPr>
             <a:lvl9pPr indent="0" lvl="8" marL="0" marR="0" rtl="0" algn="r">
-              <a:spcBef>
-                <a:spcPts val="0"/>
-              </a:spcBef>
+              <a:lnSpc>
+                <a:spcPct val="100000"/>
+              </a:lnSpc>
+              <a:spcBef>
+                <a:spcPts val="0"/>
+              </a:spcBef>
+              <a:spcAft>
+                <a:spcPts val="0"/>
+              </a:spcAft>
+              <a:buClr>
+                <a:srgbClr val="000000"/>
+              </a:buClr>
+              <a:buSzPts val="1200"/>
+              <a:buFont typeface="Arial"/>
               <a:buNone/>
               <a:defRPr b="0" i="0" sz="1200" u="none" cap="none" strike="noStrike">
                 <a:solidFill>
@@ -11346,8 +15475,516 @@
             </a:r>
             <a:endParaRPr/>
           </a:p>
+          <a:p>
+            <a:pPr indent="0" lvl="0" marL="0" rtl="0" algn="ctr">
+              <a:lnSpc>
+                <a:spcPct val="90000"/>
+              </a:lnSpc>
+              <a:spcBef>
+                <a:spcPts val="0"/>
+              </a:spcBef>
+              <a:spcAft>
+                <a:spcPts val="0"/>
+              </a:spcAft>
+              <a:buClr>
+                <a:schemeClr val="lt1"/>
+              </a:buClr>
+              <a:buSzPts val="6000"/>
+              <a:buFont typeface="Play"/>
+              <a:buNone/>
+            </a:pPr>
+            <a:r>
+              <a:rPr lang="en-US"/>
+              <a:t>stage 2</a:t>
+            </a:r>
+            <a:endParaRPr/>
+          </a:p>
         </p:txBody>
       </p:sp>
+    </p:spTree>
+  </p:cSld>
+  <p:clrMapOvr>
+    <a:masterClrMapping/>
+  </p:clrMapOvr>
+</p:sld>
+</file>
+
+<file path=ppt/slides/slide10.xml><?xml version="1.0" encoding="utf-8"?>
+<p:sld xmlns:a="http://schemas.openxmlformats.org/drawingml/2006/main" xmlns:r="http://schemas.openxmlformats.org/officeDocument/2006/relationships" xmlns:mc="http://schemas.openxmlformats.org/markup-compatibility/2006" xmlns:mv="urn:schemas-microsoft-com:mac:vml" xmlns:p="http://schemas.openxmlformats.org/presentationml/2006/main" xmlns:c="http://schemas.openxmlformats.org/drawingml/2006/chart" xmlns:dgm="http://schemas.openxmlformats.org/drawingml/2006/diagram" xmlns:o="urn:schemas-microsoft-com:office:office" xmlns:v="urn:schemas-microsoft-com:vml" xmlns:pvml="urn:schemas-microsoft-com:office:powerpoint" xmlns:com="http://schemas.openxmlformats.org/drawingml/2006/compatibility" xmlns:p14="http://schemas.microsoft.com/office/powerpoint/2010/main" xmlns:p15="http://schemas.microsoft.com/office/powerpoint/2012/main" xmlns:ahyp="http://schemas.microsoft.com/office/drawing/2018/hyperlinkcolor">
+  <p:cSld>
+    <p:spTree>
+      <p:nvGrpSpPr>
+        <p:cNvPr id="136" name="Shape 136"/>
+        <p:cNvGrpSpPr/>
+        <p:nvPr/>
+      </p:nvGrpSpPr>
+      <p:grpSpPr>
+        <a:xfrm>
+          <a:off x="0" y="0"/>
+          <a:ext cx="0" cy="0"/>
+          <a:chOff x="0" y="0"/>
+          <a:chExt cx="0" cy="0"/>
+        </a:xfrm>
+      </p:grpSpPr>
+      <p:sp>
+        <p:nvSpPr>
+          <p:cNvPr id="137" name="Google Shape;137;g3d68296a725_0_48"/>
+          <p:cNvSpPr txBox="1"/>
+          <p:nvPr>
+            <p:ph type="title"/>
+          </p:nvPr>
+        </p:nvSpPr>
+        <p:spPr>
+          <a:xfrm>
+            <a:off x="838200" y="365125"/>
+            <a:ext cx="10515600" cy="1325700"/>
+          </a:xfrm>
+          <a:prstGeom prst="rect">
+            <a:avLst/>
+          </a:prstGeom>
+          <a:noFill/>
+          <a:ln>
+            <a:noFill/>
+          </a:ln>
+        </p:spPr>
+        <p:txBody>
+          <a:bodyPr anchorCtr="0" anchor="ctr" bIns="45700" lIns="91425" spcFirstLastPara="1" rIns="91425" wrap="square" tIns="45700">
+            <a:normAutofit/>
+          </a:bodyPr>
+          <a:lstStyle/>
+          <a:p>
+            <a:pPr indent="0" lvl="0" marL="0" rtl="0" algn="ctr">
+              <a:lnSpc>
+                <a:spcPct val="90000"/>
+              </a:lnSpc>
+              <a:spcBef>
+                <a:spcPts val="0"/>
+              </a:spcBef>
+              <a:spcAft>
+                <a:spcPts val="0"/>
+              </a:spcAft>
+              <a:buClr>
+                <a:schemeClr val="lt1"/>
+              </a:buClr>
+              <a:buSzPts val="4400"/>
+              <a:buFont typeface="Play"/>
+              <a:buNone/>
+            </a:pPr>
+            <a:r>
+              <a:rPr lang="en-US"/>
+              <a:t>Collected details shown on the sidebar during the process of collecting them</a:t>
+            </a:r>
+            <a:endParaRPr/>
+          </a:p>
+        </p:txBody>
+      </p:sp>
+      <p:pic>
+        <p:nvPicPr>
+          <p:cNvPr id="138" name="Google Shape;138;g3d68296a725_0_48"/>
+          <p:cNvPicPr preferRelativeResize="0"/>
+          <p:nvPr/>
+        </p:nvPicPr>
+        <p:blipFill>
+          <a:blip r:embed="rId3">
+            <a:alphaModFix/>
+          </a:blip>
+          <a:stretch>
+            <a:fillRect/>
+          </a:stretch>
+        </p:blipFill>
+        <p:spPr>
+          <a:xfrm>
+            <a:off x="2375950" y="1690837"/>
+            <a:ext cx="2278805" cy="4862375"/>
+          </a:xfrm>
+          <a:prstGeom prst="rect">
+            <a:avLst/>
+          </a:prstGeom>
+          <a:noFill/>
+          <a:ln>
+            <a:noFill/>
+          </a:ln>
+        </p:spPr>
+      </p:pic>
+      <p:sp>
+        <p:nvSpPr>
+          <p:cNvPr id="139" name="Google Shape;139;g3d68296a725_0_48"/>
+          <p:cNvSpPr txBox="1"/>
+          <p:nvPr/>
+        </p:nvSpPr>
+        <p:spPr>
+          <a:xfrm>
+            <a:off x="5503525" y="2474688"/>
+            <a:ext cx="4405800" cy="1908600"/>
+          </a:xfrm>
+          <a:prstGeom prst="rect">
+            <a:avLst/>
+          </a:prstGeom>
+          <a:noFill/>
+          <a:ln>
+            <a:noFill/>
+          </a:ln>
+        </p:spPr>
+        <p:txBody>
+          <a:bodyPr anchorCtr="0" anchor="t" bIns="91425" lIns="91425" spcFirstLastPara="1" rIns="91425" wrap="square" tIns="91425">
+            <a:spAutoFit/>
+          </a:bodyPr>
+          <a:lstStyle/>
+          <a:p>
+            <a:pPr indent="0" lvl="0" marL="0" rtl="0" algn="l">
+              <a:spcBef>
+                <a:spcPts val="0"/>
+              </a:spcBef>
+              <a:spcAft>
+                <a:spcPts val="0"/>
+              </a:spcAft>
+              <a:buNone/>
+            </a:pPr>
+            <a:r>
+              <a:rPr lang="en-US" sz="2800">
+                <a:solidFill>
+                  <a:schemeClr val="lt1"/>
+                </a:solidFill>
+              </a:rPr>
+              <a:t>Also statuses of connections are show. And there is </a:t>
+            </a:r>
+            <a:r>
+              <a:rPr lang="en-US" sz="2800">
+                <a:solidFill>
+                  <a:schemeClr val="lt1"/>
+                </a:solidFill>
+              </a:rPr>
+              <a:t>possibility</a:t>
+            </a:r>
+            <a:r>
+              <a:rPr lang="en-US" sz="2800">
+                <a:solidFill>
+                  <a:schemeClr val="lt1"/>
+                </a:solidFill>
+              </a:rPr>
+              <a:t> to start new conversation</a:t>
+            </a:r>
+            <a:endParaRPr sz="2800">
+              <a:solidFill>
+                <a:schemeClr val="lt1"/>
+              </a:solidFill>
+            </a:endParaRPr>
+          </a:p>
+        </p:txBody>
+      </p:sp>
+    </p:spTree>
+  </p:cSld>
+  <p:clrMapOvr>
+    <a:masterClrMapping/>
+  </p:clrMapOvr>
+</p:sld>
+</file>
+
+<file path=ppt/slides/slide11.xml><?xml version="1.0" encoding="utf-8"?>
+<p:sld xmlns:a="http://schemas.openxmlformats.org/drawingml/2006/main" xmlns:r="http://schemas.openxmlformats.org/officeDocument/2006/relationships" xmlns:mc="http://schemas.openxmlformats.org/markup-compatibility/2006" xmlns:mv="urn:schemas-microsoft-com:mac:vml" xmlns:p="http://schemas.openxmlformats.org/presentationml/2006/main" xmlns:c="http://schemas.openxmlformats.org/drawingml/2006/chart" xmlns:dgm="http://schemas.openxmlformats.org/drawingml/2006/diagram" xmlns:o="urn:schemas-microsoft-com:office:office" xmlns:v="urn:schemas-microsoft-com:vml" xmlns:pvml="urn:schemas-microsoft-com:office:powerpoint" xmlns:com="http://schemas.openxmlformats.org/drawingml/2006/compatibility" xmlns:p14="http://schemas.microsoft.com/office/powerpoint/2010/main" xmlns:p15="http://schemas.microsoft.com/office/powerpoint/2012/main" xmlns:ahyp="http://schemas.microsoft.com/office/drawing/2018/hyperlinkcolor">
+  <p:cSld>
+    <p:spTree>
+      <p:nvGrpSpPr>
+        <p:cNvPr id="143" name="Shape 143"/>
+        <p:cNvGrpSpPr/>
+        <p:nvPr/>
+      </p:nvGrpSpPr>
+      <p:grpSpPr>
+        <a:xfrm>
+          <a:off x="0" y="0"/>
+          <a:ext cx="0" cy="0"/>
+          <a:chOff x="0" y="0"/>
+          <a:chExt cx="0" cy="0"/>
+        </a:xfrm>
+      </p:grpSpPr>
+      <p:sp>
+        <p:nvSpPr>
+          <p:cNvPr id="144" name="Google Shape;144;p5"/>
+          <p:cNvSpPr txBox="1"/>
+          <p:nvPr>
+            <p:ph type="title"/>
+          </p:nvPr>
+        </p:nvSpPr>
+        <p:spPr>
+          <a:xfrm>
+            <a:off x="838200" y="365125"/>
+            <a:ext cx="10515600" cy="1325563"/>
+          </a:xfrm>
+          <a:prstGeom prst="rect">
+            <a:avLst/>
+          </a:prstGeom>
+          <a:noFill/>
+          <a:ln>
+            <a:noFill/>
+          </a:ln>
+        </p:spPr>
+        <p:txBody>
+          <a:bodyPr anchorCtr="0" anchor="ctr" bIns="45700" lIns="91425" spcFirstLastPara="1" rIns="91425" wrap="square" tIns="45700">
+            <a:normAutofit/>
+          </a:bodyPr>
+          <a:lstStyle/>
+          <a:p>
+            <a:pPr indent="0" lvl="0" marL="0" rtl="0" algn="ctr">
+              <a:lnSpc>
+                <a:spcPct val="90000"/>
+              </a:lnSpc>
+              <a:spcBef>
+                <a:spcPts val="0"/>
+              </a:spcBef>
+              <a:spcAft>
+                <a:spcPts val="0"/>
+              </a:spcAft>
+              <a:buClr>
+                <a:schemeClr val="lt1"/>
+              </a:buClr>
+              <a:buSzPts val="4400"/>
+              <a:buFont typeface="Play"/>
+              <a:buNone/>
+            </a:pPr>
+            <a:r>
+              <a:rPr lang="en-US"/>
+              <a:t>Guardrail mechanism</a:t>
+            </a:r>
+            <a:endParaRPr/>
+          </a:p>
+        </p:txBody>
+      </p:sp>
+      <p:pic>
+        <p:nvPicPr>
+          <p:cNvPr id="145" name="Google Shape;145;p5"/>
+          <p:cNvPicPr preferRelativeResize="0"/>
+          <p:nvPr/>
+        </p:nvPicPr>
+        <p:blipFill>
+          <a:blip r:embed="rId3">
+            <a:alphaModFix/>
+          </a:blip>
+          <a:stretch>
+            <a:fillRect/>
+          </a:stretch>
+        </p:blipFill>
+        <p:spPr>
+          <a:xfrm>
+            <a:off x="968075" y="1557938"/>
+            <a:ext cx="10255846" cy="4862513"/>
+          </a:xfrm>
+          <a:prstGeom prst="rect">
+            <a:avLst/>
+          </a:prstGeom>
+          <a:noFill/>
+          <a:ln>
+            <a:noFill/>
+          </a:ln>
+        </p:spPr>
+      </p:pic>
+    </p:spTree>
+  </p:cSld>
+  <p:clrMapOvr>
+    <a:masterClrMapping/>
+  </p:clrMapOvr>
+</p:sld>
+</file>
+
+<file path=ppt/slides/slide12.xml><?xml version="1.0" encoding="utf-8"?>
+<p:sld xmlns:a="http://schemas.openxmlformats.org/drawingml/2006/main" xmlns:r="http://schemas.openxmlformats.org/officeDocument/2006/relationships" xmlns:mc="http://schemas.openxmlformats.org/markup-compatibility/2006" xmlns:mv="urn:schemas-microsoft-com:mac:vml" xmlns:p="http://schemas.openxmlformats.org/presentationml/2006/main" xmlns:c="http://schemas.openxmlformats.org/drawingml/2006/chart" xmlns:dgm="http://schemas.openxmlformats.org/drawingml/2006/diagram" xmlns:o="urn:schemas-microsoft-com:office:office" xmlns:v="urn:schemas-microsoft-com:vml" xmlns:pvml="urn:schemas-microsoft-com:office:powerpoint" xmlns:com="http://schemas.openxmlformats.org/drawingml/2006/compatibility" xmlns:p14="http://schemas.microsoft.com/office/powerpoint/2010/main" xmlns:p15="http://schemas.microsoft.com/office/powerpoint/2012/main" xmlns:ahyp="http://schemas.microsoft.com/office/drawing/2018/hyperlinkcolor">
+  <p:cSld>
+    <p:spTree>
+      <p:nvGrpSpPr>
+        <p:cNvPr id="149" name="Shape 149"/>
+        <p:cNvGrpSpPr/>
+        <p:nvPr/>
+      </p:nvGrpSpPr>
+      <p:grpSpPr>
+        <a:xfrm>
+          <a:off x="0" y="0"/>
+          <a:ext cx="0" cy="0"/>
+          <a:chOff x="0" y="0"/>
+          <a:chExt cx="0" cy="0"/>
+        </a:xfrm>
+      </p:grpSpPr>
+      <p:sp>
+        <p:nvSpPr>
+          <p:cNvPr id="150" name="Google Shape;150;p6"/>
+          <p:cNvSpPr txBox="1"/>
+          <p:nvPr>
+            <p:ph type="title"/>
+          </p:nvPr>
+        </p:nvSpPr>
+        <p:spPr>
+          <a:xfrm>
+            <a:off x="838200" y="365125"/>
+            <a:ext cx="10515600" cy="1325563"/>
+          </a:xfrm>
+          <a:prstGeom prst="rect">
+            <a:avLst/>
+          </a:prstGeom>
+          <a:noFill/>
+          <a:ln>
+            <a:noFill/>
+          </a:ln>
+        </p:spPr>
+        <p:txBody>
+          <a:bodyPr anchorCtr="0" anchor="ctr" bIns="45700" lIns="91425" spcFirstLastPara="1" rIns="91425" wrap="square" tIns="45700">
+            <a:normAutofit/>
+          </a:bodyPr>
+          <a:lstStyle/>
+          <a:p>
+            <a:pPr indent="0" lvl="0" marL="0" rtl="0" algn="ctr">
+              <a:lnSpc>
+                <a:spcPct val="90000"/>
+              </a:lnSpc>
+              <a:spcBef>
+                <a:spcPts val="0"/>
+              </a:spcBef>
+              <a:spcAft>
+                <a:spcPts val="0"/>
+              </a:spcAft>
+              <a:buClr>
+                <a:schemeClr val="lt1"/>
+              </a:buClr>
+              <a:buSzPts val="4400"/>
+              <a:buFont typeface="Play"/>
+              <a:buNone/>
+            </a:pPr>
+            <a:r>
+              <a:rPr lang="en-US"/>
+              <a:t>Data model</a:t>
+            </a:r>
+            <a:endParaRPr/>
+          </a:p>
+        </p:txBody>
+      </p:sp>
+      <p:pic>
+        <p:nvPicPr>
+          <p:cNvPr id="151" name="Google Shape;151;p6"/>
+          <p:cNvPicPr preferRelativeResize="0"/>
+          <p:nvPr/>
+        </p:nvPicPr>
+        <p:blipFill rotWithShape="1">
+          <a:blip r:embed="rId3">
+            <a:alphaModFix/>
+          </a:blip>
+          <a:srcRect b="0" l="0" r="0" t="0"/>
+          <a:stretch/>
+        </p:blipFill>
+        <p:spPr>
+          <a:xfrm>
+            <a:off x="4257418" y="1644968"/>
+            <a:ext cx="3677163" cy="4810796"/>
+          </a:xfrm>
+          <a:prstGeom prst="rect">
+            <a:avLst/>
+          </a:prstGeom>
+          <a:noFill/>
+          <a:ln>
+            <a:noFill/>
+          </a:ln>
+        </p:spPr>
+      </p:pic>
+    </p:spTree>
+  </p:cSld>
+  <p:clrMapOvr>
+    <a:masterClrMapping/>
+  </p:clrMapOvr>
+</p:sld>
+</file>
+
+<file path=ppt/slides/slide13.xml><?xml version="1.0" encoding="utf-8"?>
+<p:sld xmlns:a="http://schemas.openxmlformats.org/drawingml/2006/main" xmlns:r="http://schemas.openxmlformats.org/officeDocument/2006/relationships" xmlns:mc="http://schemas.openxmlformats.org/markup-compatibility/2006" xmlns:mv="urn:schemas-microsoft-com:mac:vml" xmlns:p="http://schemas.openxmlformats.org/presentationml/2006/main" xmlns:c="http://schemas.openxmlformats.org/drawingml/2006/chart" xmlns:dgm="http://schemas.openxmlformats.org/drawingml/2006/diagram" xmlns:o="urn:schemas-microsoft-com:office:office" xmlns:v="urn:schemas-microsoft-com:vml" xmlns:pvml="urn:schemas-microsoft-com:office:powerpoint" xmlns:com="http://schemas.openxmlformats.org/drawingml/2006/compatibility" xmlns:p14="http://schemas.microsoft.com/office/powerpoint/2010/main" xmlns:p15="http://schemas.microsoft.com/office/powerpoint/2012/main" xmlns:ahyp="http://schemas.microsoft.com/office/drawing/2018/hyperlinkcolor">
+  <p:cSld>
+    <p:spTree>
+      <p:nvGrpSpPr>
+        <p:cNvPr id="155" name="Shape 155"/>
+        <p:cNvGrpSpPr/>
+        <p:nvPr/>
+      </p:nvGrpSpPr>
+      <p:grpSpPr>
+        <a:xfrm>
+          <a:off x="0" y="0"/>
+          <a:ext cx="0" cy="0"/>
+          <a:chOff x="0" y="0"/>
+          <a:chExt cx="0" cy="0"/>
+        </a:xfrm>
+      </p:grpSpPr>
+      <p:sp>
+        <p:nvSpPr>
+          <p:cNvPr id="156" name="Google Shape;156;p7"/>
+          <p:cNvSpPr txBox="1"/>
+          <p:nvPr>
+            <p:ph type="title"/>
+          </p:nvPr>
+        </p:nvSpPr>
+        <p:spPr>
+          <a:xfrm>
+            <a:off x="838200" y="365125"/>
+            <a:ext cx="10515600" cy="1325563"/>
+          </a:xfrm>
+          <a:prstGeom prst="rect">
+            <a:avLst/>
+          </a:prstGeom>
+          <a:noFill/>
+          <a:ln>
+            <a:noFill/>
+          </a:ln>
+        </p:spPr>
+        <p:txBody>
+          <a:bodyPr anchorCtr="0" anchor="ctr" bIns="45700" lIns="91425" spcFirstLastPara="1" rIns="91425" wrap="square" tIns="45700">
+            <a:normAutofit/>
+          </a:bodyPr>
+          <a:lstStyle/>
+          <a:p>
+            <a:pPr indent="0" lvl="0" marL="0" rtl="0" algn="ctr">
+              <a:lnSpc>
+                <a:spcPct val="90000"/>
+              </a:lnSpc>
+              <a:spcBef>
+                <a:spcPts val="0"/>
+              </a:spcBef>
+              <a:spcAft>
+                <a:spcPts val="0"/>
+              </a:spcAft>
+              <a:buClr>
+                <a:schemeClr val="lt1"/>
+              </a:buClr>
+              <a:buSzPts val="4400"/>
+              <a:buFont typeface="Play"/>
+              <a:buNone/>
+            </a:pPr>
+            <a:r>
+              <a:rPr lang="en-US"/>
+              <a:t>Evaluation</a:t>
+            </a:r>
+            <a:endParaRPr/>
+          </a:p>
+        </p:txBody>
+      </p:sp>
+      <p:pic>
+        <p:nvPicPr>
+          <p:cNvPr id="157" name="Google Shape;157;p7"/>
+          <p:cNvPicPr preferRelativeResize="0"/>
+          <p:nvPr/>
+        </p:nvPicPr>
+        <p:blipFill rotWithShape="1">
+          <a:blip r:embed="rId3">
+            <a:alphaModFix/>
+          </a:blip>
+          <a:srcRect b="0" l="0" r="0" t="0"/>
+          <a:stretch/>
+        </p:blipFill>
+        <p:spPr>
+          <a:xfrm>
+            <a:off x="2557313" y="1690699"/>
+            <a:ext cx="7077376" cy="4441650"/>
+          </a:xfrm>
+          <a:prstGeom prst="rect">
+            <a:avLst/>
+          </a:prstGeom>
+          <a:noFill/>
+          <a:ln>
+            <a:noFill/>
+          </a:ln>
+        </p:spPr>
+      </p:pic>
     </p:spTree>
   </p:cSld>
   <p:clrMapOvr>
@@ -11441,8 +16078,8 @@
         </p:blipFill>
         <p:spPr>
           <a:xfrm>
-            <a:off x="770638" y="1376888"/>
-            <a:ext cx="10650721" cy="4862512"/>
+            <a:off x="1971101" y="1519601"/>
+            <a:ext cx="8249800" cy="5067501"/>
           </a:xfrm>
           <a:prstGeom prst="rect">
             <a:avLst/>
@@ -11546,8 +16183,8 @@
         </p:blipFill>
         <p:spPr>
           <a:xfrm>
-            <a:off x="1566838" y="1690688"/>
-            <a:ext cx="9058319" cy="4862513"/>
+            <a:off x="2464188" y="1690688"/>
+            <a:ext cx="7263621" cy="4862512"/>
           </a:xfrm>
           <a:prstGeom prst="rect">
             <a:avLst/>
@@ -11585,7 +16222,7 @@
       </p:grpSpPr>
       <p:sp>
         <p:nvSpPr>
-          <p:cNvPr id="101" name="Google Shape;101;p5"/>
+          <p:cNvPr id="101" name="Google Shape;101;g3d68296a725_0_2"/>
           <p:cNvSpPr txBox="1"/>
           <p:nvPr>
             <p:ph type="title"/>
@@ -11594,7 +16231,7 @@
         <p:spPr>
           <a:xfrm>
             <a:off x="838200" y="365125"/>
-            <a:ext cx="10515600" cy="1325563"/>
+            <a:ext cx="10515600" cy="1325700"/>
           </a:xfrm>
           <a:prstGeom prst="rect">
             <a:avLst/>
@@ -11629,7 +16266,7 @@
             </a:pPr>
             <a:r>
               <a:rPr lang="en-US"/>
-              <a:t>Guardrail mechanism</a:t>
+              <a:t>Booking process and retrieving data from user</a:t>
             </a:r>
             <a:endParaRPr/>
           </a:p>
@@ -11637,7 +16274,7 @@
       </p:sp>
       <p:pic>
         <p:nvPicPr>
-          <p:cNvPr id="102" name="Google Shape;102;p5"/>
+          <p:cNvPr id="102" name="Google Shape;102;g3d68296a725_0_2"/>
           <p:cNvPicPr preferRelativeResize="0"/>
           <p:nvPr/>
         </p:nvPicPr>
@@ -11651,8 +16288,8 @@
         </p:blipFill>
         <p:spPr>
           <a:xfrm>
-            <a:off x="633050" y="2350524"/>
-            <a:ext cx="10925902" cy="3089376"/>
+            <a:off x="2442975" y="1690825"/>
+            <a:ext cx="7306045" cy="4862373"/>
           </a:xfrm>
           <a:prstGeom prst="rect">
             <a:avLst/>
@@ -11690,7 +16327,7 @@
       </p:grpSpPr>
       <p:sp>
         <p:nvSpPr>
-          <p:cNvPr id="107" name="Google Shape;107;p6"/>
+          <p:cNvPr id="107" name="Google Shape;107;g3d68296a725_0_18"/>
           <p:cNvSpPr txBox="1"/>
           <p:nvPr>
             <p:ph type="title"/>
@@ -11699,7 +16336,7 @@
         <p:spPr>
           <a:xfrm>
             <a:off x="838200" y="365125"/>
-            <a:ext cx="10515600" cy="1325563"/>
+            <a:ext cx="10515600" cy="1325700"/>
           </a:xfrm>
           <a:prstGeom prst="rect">
             <a:avLst/>
@@ -11734,7 +16371,7 @@
             </a:pPr>
             <a:r>
               <a:rPr lang="en-US"/>
-              <a:t>Data model</a:t>
+              <a:t>Getting confirmation from human admin (via API)</a:t>
             </a:r>
             <a:endParaRPr/>
           </a:p>
@@ -11742,21 +16379,22 @@
       </p:sp>
       <p:pic>
         <p:nvPicPr>
-          <p:cNvPr id="108" name="Google Shape;108;p6"/>
+          <p:cNvPr id="108" name="Google Shape;108;g3d68296a725_0_18"/>
           <p:cNvPicPr preferRelativeResize="0"/>
           <p:nvPr/>
         </p:nvPicPr>
-        <p:blipFill rotWithShape="1">
+        <p:blipFill>
           <a:blip r:embed="rId3">
             <a:alphaModFix/>
           </a:blip>
-          <a:srcRect b="0" l="0" r="0" t="0"/>
-          <a:stretch/>
+          <a:stretch>
+            <a:fillRect/>
+          </a:stretch>
         </p:blipFill>
         <p:spPr>
           <a:xfrm>
-            <a:off x="4257418" y="1644968"/>
-            <a:ext cx="3677163" cy="4810796"/>
+            <a:off x="2224250" y="1690825"/>
+            <a:ext cx="7743503" cy="4862376"/>
           </a:xfrm>
           <a:prstGeom prst="rect">
             <a:avLst/>
@@ -11794,7 +16432,7 @@
       </p:grpSpPr>
       <p:sp>
         <p:nvSpPr>
-          <p:cNvPr id="113" name="Google Shape;113;p7"/>
+          <p:cNvPr id="113" name="Google Shape;113;g3d68296a725_0_24"/>
           <p:cNvSpPr txBox="1"/>
           <p:nvPr>
             <p:ph type="title"/>
@@ -11803,7 +16441,7 @@
         <p:spPr>
           <a:xfrm>
             <a:off x="838200" y="365125"/>
-            <a:ext cx="10515600" cy="1325563"/>
+            <a:ext cx="10515600" cy="1325700"/>
           </a:xfrm>
           <a:prstGeom prst="rect">
             <a:avLst/>
@@ -11838,7 +16476,7 @@
             </a:pPr>
             <a:r>
               <a:rPr lang="en-US"/>
-              <a:t>Evaluation</a:t>
+              <a:t>Getting confirmation from human admin (via API)</a:t>
             </a:r>
             <a:endParaRPr/>
           </a:p>
@@ -11846,7 +16484,7 @@
       </p:sp>
       <p:pic>
         <p:nvPicPr>
-          <p:cNvPr id="114" name="Google Shape;114;p7"/>
+          <p:cNvPr id="114" name="Google Shape;114;g3d68296a725_0_24"/>
           <p:cNvPicPr preferRelativeResize="0"/>
           <p:nvPr/>
         </p:nvPicPr>
@@ -11860,8 +16498,331 @@
         </p:blipFill>
         <p:spPr>
           <a:xfrm>
-            <a:off x="2557313" y="1690699"/>
-            <a:ext cx="7077376" cy="4441650"/>
+            <a:off x="2224250" y="1690825"/>
+            <a:ext cx="7743503" cy="4862376"/>
+          </a:xfrm>
+          <a:prstGeom prst="rect">
+            <a:avLst/>
+          </a:prstGeom>
+          <a:noFill/>
+          <a:ln>
+            <a:noFill/>
+          </a:ln>
+        </p:spPr>
+      </p:pic>
+    </p:spTree>
+  </p:cSld>
+  <p:clrMapOvr>
+    <a:masterClrMapping/>
+  </p:clrMapOvr>
+</p:sld>
+</file>
+
+<file path=ppt/slides/slide7.xml><?xml version="1.0" encoding="utf-8"?>
+<p:sld xmlns:a="http://schemas.openxmlformats.org/drawingml/2006/main" xmlns:r="http://schemas.openxmlformats.org/officeDocument/2006/relationships" xmlns:mc="http://schemas.openxmlformats.org/markup-compatibility/2006" xmlns:mv="urn:schemas-microsoft-com:mac:vml" xmlns:p="http://schemas.openxmlformats.org/presentationml/2006/main" xmlns:c="http://schemas.openxmlformats.org/drawingml/2006/chart" xmlns:dgm="http://schemas.openxmlformats.org/drawingml/2006/diagram" xmlns:o="urn:schemas-microsoft-com:office:office" xmlns:v="urn:schemas-microsoft-com:vml" xmlns:pvml="urn:schemas-microsoft-com:office:powerpoint" xmlns:com="http://schemas.openxmlformats.org/drawingml/2006/compatibility" xmlns:p14="http://schemas.microsoft.com/office/powerpoint/2010/main" xmlns:p15="http://schemas.microsoft.com/office/powerpoint/2012/main" xmlns:ahyp="http://schemas.microsoft.com/office/drawing/2018/hyperlinkcolor">
+  <p:cSld>
+    <p:spTree>
+      <p:nvGrpSpPr>
+        <p:cNvPr id="118" name="Shape 118"/>
+        <p:cNvGrpSpPr/>
+        <p:nvPr/>
+      </p:nvGrpSpPr>
+      <p:grpSpPr>
+        <a:xfrm>
+          <a:off x="0" y="0"/>
+          <a:ext cx="0" cy="0"/>
+          <a:chOff x="0" y="0"/>
+          <a:chExt cx="0" cy="0"/>
+        </a:xfrm>
+      </p:grpSpPr>
+      <p:sp>
+        <p:nvSpPr>
+          <p:cNvPr id="119" name="Google Shape;119;g3d68296a725_0_30"/>
+          <p:cNvSpPr txBox="1"/>
+          <p:nvPr>
+            <p:ph type="title"/>
+          </p:nvPr>
+        </p:nvSpPr>
+        <p:spPr>
+          <a:xfrm>
+            <a:off x="838200" y="365125"/>
+            <a:ext cx="10515600" cy="1325700"/>
+          </a:xfrm>
+          <a:prstGeom prst="rect">
+            <a:avLst/>
+          </a:prstGeom>
+          <a:noFill/>
+          <a:ln>
+            <a:noFill/>
+          </a:ln>
+        </p:spPr>
+        <p:txBody>
+          <a:bodyPr anchorCtr="0" anchor="ctr" bIns="45700" lIns="91425" spcFirstLastPara="1" rIns="91425" wrap="square" tIns="45700">
+            <a:normAutofit/>
+          </a:bodyPr>
+          <a:lstStyle/>
+          <a:p>
+            <a:pPr indent="0" lvl="0" marL="0" rtl="0" algn="ctr">
+              <a:lnSpc>
+                <a:spcPct val="90000"/>
+              </a:lnSpc>
+              <a:spcBef>
+                <a:spcPts val="0"/>
+              </a:spcBef>
+              <a:spcAft>
+                <a:spcPts val="0"/>
+              </a:spcAft>
+              <a:buClr>
+                <a:schemeClr val="lt1"/>
+              </a:buClr>
+              <a:buSzPts val="4400"/>
+              <a:buFont typeface="Play"/>
+              <a:buNone/>
+            </a:pPr>
+            <a:r>
+              <a:rPr lang="en-US"/>
+              <a:t>Getting confirmation from human admin (via API)</a:t>
+            </a:r>
+            <a:endParaRPr/>
+          </a:p>
+        </p:txBody>
+      </p:sp>
+      <p:pic>
+        <p:nvPicPr>
+          <p:cNvPr id="120" name="Google Shape;120;g3d68296a725_0_30"/>
+          <p:cNvPicPr preferRelativeResize="0"/>
+          <p:nvPr/>
+        </p:nvPicPr>
+        <p:blipFill>
+          <a:blip r:embed="rId3">
+            <a:alphaModFix/>
+          </a:blip>
+          <a:stretch>
+            <a:fillRect/>
+          </a:stretch>
+        </p:blipFill>
+        <p:spPr>
+          <a:xfrm>
+            <a:off x="4104825" y="2228200"/>
+            <a:ext cx="3982350" cy="3689175"/>
+          </a:xfrm>
+          <a:prstGeom prst="rect">
+            <a:avLst/>
+          </a:prstGeom>
+          <a:noFill/>
+          <a:ln>
+            <a:noFill/>
+          </a:ln>
+        </p:spPr>
+      </p:pic>
+    </p:spTree>
+  </p:cSld>
+  <p:clrMapOvr>
+    <a:masterClrMapping/>
+  </p:clrMapOvr>
+</p:sld>
+</file>
+
+<file path=ppt/slides/slide8.xml><?xml version="1.0" encoding="utf-8"?>
+<p:sld xmlns:a="http://schemas.openxmlformats.org/drawingml/2006/main" xmlns:r="http://schemas.openxmlformats.org/officeDocument/2006/relationships" xmlns:mc="http://schemas.openxmlformats.org/markup-compatibility/2006" xmlns:mv="urn:schemas-microsoft-com:mac:vml" xmlns:p="http://schemas.openxmlformats.org/presentationml/2006/main" xmlns:c="http://schemas.openxmlformats.org/drawingml/2006/chart" xmlns:dgm="http://schemas.openxmlformats.org/drawingml/2006/diagram" xmlns:o="urn:schemas-microsoft-com:office:office" xmlns:v="urn:schemas-microsoft-com:vml" xmlns:pvml="urn:schemas-microsoft-com:office:powerpoint" xmlns:com="http://schemas.openxmlformats.org/drawingml/2006/compatibility" xmlns:p14="http://schemas.microsoft.com/office/powerpoint/2010/main" xmlns:p15="http://schemas.microsoft.com/office/powerpoint/2012/main" xmlns:ahyp="http://schemas.microsoft.com/office/drawing/2018/hyperlinkcolor">
+  <p:cSld>
+    <p:spTree>
+      <p:nvGrpSpPr>
+        <p:cNvPr id="124" name="Shape 124"/>
+        <p:cNvGrpSpPr/>
+        <p:nvPr/>
+      </p:nvGrpSpPr>
+      <p:grpSpPr>
+        <a:xfrm>
+          <a:off x="0" y="0"/>
+          <a:ext cx="0" cy="0"/>
+          <a:chOff x="0" y="0"/>
+          <a:chExt cx="0" cy="0"/>
+        </a:xfrm>
+      </p:grpSpPr>
+      <p:sp>
+        <p:nvSpPr>
+          <p:cNvPr id="125" name="Google Shape;125;g3d68296a725_0_36"/>
+          <p:cNvSpPr txBox="1"/>
+          <p:nvPr>
+            <p:ph type="title"/>
+          </p:nvPr>
+        </p:nvSpPr>
+        <p:spPr>
+          <a:xfrm>
+            <a:off x="838200" y="365125"/>
+            <a:ext cx="10515600" cy="1325700"/>
+          </a:xfrm>
+          <a:prstGeom prst="rect">
+            <a:avLst/>
+          </a:prstGeom>
+          <a:noFill/>
+          <a:ln>
+            <a:noFill/>
+          </a:ln>
+        </p:spPr>
+        <p:txBody>
+          <a:bodyPr anchorCtr="0" anchor="ctr" bIns="45700" lIns="91425" spcFirstLastPara="1" rIns="91425" wrap="square" tIns="45700">
+            <a:normAutofit/>
+          </a:bodyPr>
+          <a:lstStyle/>
+          <a:p>
+            <a:pPr indent="0" lvl="0" marL="0" rtl="0" algn="ctr">
+              <a:lnSpc>
+                <a:spcPct val="90000"/>
+              </a:lnSpc>
+              <a:spcBef>
+                <a:spcPts val="0"/>
+              </a:spcBef>
+              <a:spcAft>
+                <a:spcPts val="0"/>
+              </a:spcAft>
+              <a:buClr>
+                <a:schemeClr val="lt1"/>
+              </a:buClr>
+              <a:buSzPts val="4400"/>
+              <a:buFont typeface="Play"/>
+              <a:buNone/>
+            </a:pPr>
+            <a:r>
+              <a:rPr lang="en-US"/>
+              <a:t>Getting confirmation from human admin (via API)</a:t>
+            </a:r>
+            <a:endParaRPr/>
+          </a:p>
+        </p:txBody>
+      </p:sp>
+      <p:pic>
+        <p:nvPicPr>
+          <p:cNvPr id="126" name="Google Shape;126;g3d68296a725_0_36"/>
+          <p:cNvPicPr preferRelativeResize="0"/>
+          <p:nvPr/>
+        </p:nvPicPr>
+        <p:blipFill>
+          <a:blip r:embed="rId3">
+            <a:alphaModFix/>
+          </a:blip>
+          <a:stretch>
+            <a:fillRect/>
+          </a:stretch>
+        </p:blipFill>
+        <p:spPr>
+          <a:xfrm>
+            <a:off x="484775" y="2398699"/>
+            <a:ext cx="11222451" cy="3035775"/>
+          </a:xfrm>
+          <a:prstGeom prst="rect">
+            <a:avLst/>
+          </a:prstGeom>
+          <a:noFill/>
+          <a:ln>
+            <a:noFill/>
+          </a:ln>
+        </p:spPr>
+      </p:pic>
+    </p:spTree>
+  </p:cSld>
+  <p:clrMapOvr>
+    <a:masterClrMapping/>
+  </p:clrMapOvr>
+</p:sld>
+</file>
+
+<file path=ppt/slides/slide9.xml><?xml version="1.0" encoding="utf-8"?>
+<p:sld xmlns:a="http://schemas.openxmlformats.org/drawingml/2006/main" xmlns:r="http://schemas.openxmlformats.org/officeDocument/2006/relationships" xmlns:mc="http://schemas.openxmlformats.org/markup-compatibility/2006" xmlns:mv="urn:schemas-microsoft-com:mac:vml" xmlns:p="http://schemas.openxmlformats.org/presentationml/2006/main" xmlns:c="http://schemas.openxmlformats.org/drawingml/2006/chart" xmlns:dgm="http://schemas.openxmlformats.org/drawingml/2006/diagram" xmlns:o="urn:schemas-microsoft-com:office:office" xmlns:v="urn:schemas-microsoft-com:vml" xmlns:pvml="urn:schemas-microsoft-com:office:powerpoint" xmlns:com="http://schemas.openxmlformats.org/drawingml/2006/compatibility" xmlns:p14="http://schemas.microsoft.com/office/powerpoint/2010/main" xmlns:p15="http://schemas.microsoft.com/office/powerpoint/2012/main" xmlns:ahyp="http://schemas.microsoft.com/office/drawing/2018/hyperlinkcolor">
+  <p:cSld>
+    <p:spTree>
+      <p:nvGrpSpPr>
+        <p:cNvPr id="130" name="Shape 130"/>
+        <p:cNvGrpSpPr/>
+        <p:nvPr/>
+      </p:nvGrpSpPr>
+      <p:grpSpPr>
+        <a:xfrm>
+          <a:off x="0" y="0"/>
+          <a:ext cx="0" cy="0"/>
+          <a:chOff x="0" y="0"/>
+          <a:chExt cx="0" cy="0"/>
+        </a:xfrm>
+      </p:grpSpPr>
+      <p:sp>
+        <p:nvSpPr>
+          <p:cNvPr id="131" name="Google Shape;131;g3d68296a725_0_42"/>
+          <p:cNvSpPr txBox="1"/>
+          <p:nvPr>
+            <p:ph type="title"/>
+          </p:nvPr>
+        </p:nvSpPr>
+        <p:spPr>
+          <a:xfrm>
+            <a:off x="838200" y="365125"/>
+            <a:ext cx="10515600" cy="1325700"/>
+          </a:xfrm>
+          <a:prstGeom prst="rect">
+            <a:avLst/>
+          </a:prstGeom>
+          <a:noFill/>
+          <a:ln>
+            <a:noFill/>
+          </a:ln>
+        </p:spPr>
+        <p:txBody>
+          <a:bodyPr anchorCtr="0" anchor="ctr" bIns="45700" lIns="91425" spcFirstLastPara="1" rIns="91425" wrap="square" tIns="45700">
+            <a:normAutofit/>
+          </a:bodyPr>
+          <a:lstStyle/>
+          <a:p>
+            <a:pPr indent="0" lvl="0" marL="0" rtl="0" algn="ctr">
+              <a:lnSpc>
+                <a:spcPct val="90000"/>
+              </a:lnSpc>
+              <a:spcBef>
+                <a:spcPts val="0"/>
+              </a:spcBef>
+              <a:spcAft>
+                <a:spcPts val="0"/>
+              </a:spcAft>
+              <a:buClr>
+                <a:schemeClr val="lt1"/>
+              </a:buClr>
+              <a:buSzPts val="4400"/>
+              <a:buFont typeface="Play"/>
+              <a:buNone/>
+            </a:pPr>
+            <a:r>
+              <a:rPr lang="en-US"/>
+              <a:t>Chat resumes with </a:t>
+            </a:r>
+            <a:r>
+              <a:rPr lang="en-US"/>
+              <a:t>additional details</a:t>
+            </a:r>
+            <a:r>
+              <a:rPr lang="en-US"/>
+              <a:t> after admin approves/rejects</a:t>
+            </a:r>
+            <a:endParaRPr/>
+          </a:p>
+        </p:txBody>
+      </p:sp>
+      <p:pic>
+        <p:nvPicPr>
+          <p:cNvPr id="132" name="Google Shape;132;g3d68296a725_0_42"/>
+          <p:cNvPicPr preferRelativeResize="0"/>
+          <p:nvPr/>
+        </p:nvPicPr>
+        <p:blipFill>
+          <a:blip r:embed="rId3">
+            <a:alphaModFix/>
+          </a:blip>
+          <a:stretch>
+            <a:fillRect/>
+          </a:stretch>
+        </p:blipFill>
+        <p:spPr>
+          <a:xfrm>
+            <a:off x="1141700" y="1690825"/>
+            <a:ext cx="9908603" cy="4862376"/>
           </a:xfrm>
           <a:prstGeom prst="rect">
             <a:avLst/>

--- a/quick-presentation.pptx
+++ b/quick-presentation.pptx
@@ -20,15 +20,14 @@
     <p:sldId id="265" r:id="rId14"/>
     <p:sldId id="266" r:id="rId15"/>
     <p:sldId id="267" r:id="rId16"/>
-    <p:sldId id="268" r:id="rId17"/>
   </p:sldIdLst>
   <p:sldSz cy="6858000" cx="12192000"/>
   <p:notesSz cx="6858000" cy="9144000"/>
   <p:embeddedFontLst>
     <p:embeddedFont>
       <p:font typeface="Play"/>
-      <p:regular r:id="rId18"/>
-      <p:bold r:id="rId19"/>
+      <p:regular r:id="rId17"/>
+      <p:bold r:id="rId18"/>
     </p:embeddedFont>
   </p:embeddedFontLst>
   <p:defaultTextStyle>
@@ -262,7 +261,7 @@
   </p:defaultTextStyle>
   <p:extLst>
     <p:ext uri="GoogleSlidesCustomDataVersion2">
-      <go:slidesCustomData xmlns:go="http://customooxmlschemas.google.com/" r:id="rId20" roundtripDataSignature="AMtx7mhRjTtPN1Wy9WdGLyqcMQ/NOK7ZCw=="/>
+      <go:slidesCustomData xmlns:go="http://customooxmlschemas.google.com/" r:id="rId19" roundtripDataSignature="AMtx7mgO0ywHjOFU/1V9mik1Gc0ZSvWyXw=="/>
     </p:ext>
   </p:extLst>
 </p:presentation>
@@ -951,7 +950,7 @@
   <p:cSld>
     <p:spTree>
       <p:nvGrpSpPr>
-        <p:cNvPr id="133" name="Shape 133"/>
+        <p:cNvPr id="135" name="Shape 135"/>
         <p:cNvGrpSpPr/>
         <p:nvPr/>
       </p:nvGrpSpPr>
@@ -965,7 +964,7 @@
       </p:grpSpPr>
       <p:sp>
         <p:nvSpPr>
-          <p:cNvPr id="134" name="Google Shape;134;g3d68296a725_0_48:notes"/>
+          <p:cNvPr id="136" name="Google Shape;136;p5:notes"/>
           <p:cNvSpPr txBox="1"/>
           <p:nvPr>
             <p:ph idx="1" type="body"/>
@@ -1012,7 +1011,7 @@
       </p:sp>
       <p:sp>
         <p:nvSpPr>
-          <p:cNvPr id="135" name="Google Shape;135;g3d68296a725_0_48:notes"/>
+          <p:cNvPr id="137" name="Google Shape;137;p5:notes"/>
           <p:cNvSpPr/>
           <p:nvPr>
             <p:ph idx="2" type="sldImg"/>
@@ -1021,7 +1020,7 @@
         <p:spPr>
           <a:xfrm>
             <a:off x="1143225" y="685800"/>
-            <a:ext cx="4572300" cy="3429000"/>
+            <a:ext cx="4572225" cy="3429000"/>
           </a:xfrm>
           <a:custGeom>
             <a:rect b="b" l="l" r="r" t="t"/>
@@ -1068,7 +1067,7 @@
   <p:cSld>
     <p:spTree>
       <p:nvGrpSpPr>
-        <p:cNvPr id="140" name="Shape 140"/>
+        <p:cNvPr id="141" name="Shape 141"/>
         <p:cNvGrpSpPr/>
         <p:nvPr/>
       </p:nvGrpSpPr>
@@ -1082,7 +1081,7 @@
       </p:grpSpPr>
       <p:sp>
         <p:nvSpPr>
-          <p:cNvPr id="141" name="Google Shape;141;p5:notes"/>
+          <p:cNvPr id="142" name="Google Shape;142;p6:notes"/>
           <p:cNvSpPr txBox="1"/>
           <p:nvPr>
             <p:ph idx="1" type="body"/>
@@ -1129,7 +1128,7 @@
       </p:sp>
       <p:sp>
         <p:nvSpPr>
-          <p:cNvPr id="142" name="Google Shape;142;p5:notes"/>
+          <p:cNvPr id="143" name="Google Shape;143;p6:notes"/>
           <p:cNvSpPr/>
           <p:nvPr>
             <p:ph idx="2" type="sldImg"/>
@@ -1185,7 +1184,7 @@
   <p:cSld>
     <p:spTree>
       <p:nvGrpSpPr>
-        <p:cNvPr id="146" name="Shape 146"/>
+        <p:cNvPr id="147" name="Shape 147"/>
         <p:cNvGrpSpPr/>
         <p:nvPr/>
       </p:nvGrpSpPr>
@@ -1199,7 +1198,7 @@
       </p:grpSpPr>
       <p:sp>
         <p:nvSpPr>
-          <p:cNvPr id="147" name="Google Shape;147;p6:notes"/>
+          <p:cNvPr id="148" name="Google Shape;148;p7:notes"/>
           <p:cNvSpPr txBox="1"/>
           <p:nvPr>
             <p:ph idx="1" type="body"/>
@@ -1246,124 +1245,7 @@
       </p:sp>
       <p:sp>
         <p:nvSpPr>
-          <p:cNvPr id="148" name="Google Shape;148;p6:notes"/>
-          <p:cNvSpPr/>
-          <p:nvPr>
-            <p:ph idx="2" type="sldImg"/>
-          </p:nvPr>
-        </p:nvSpPr>
-        <p:spPr>
-          <a:xfrm>
-            <a:off x="1143225" y="685800"/>
-            <a:ext cx="4572225" cy="3429000"/>
-          </a:xfrm>
-          <a:custGeom>
-            <a:rect b="b" l="l" r="r" t="t"/>
-            <a:pathLst>
-              <a:path extrusionOk="0" h="120000" w="120000">
-                <a:moveTo>
-                  <a:pt x="0" y="0"/>
-                </a:moveTo>
-                <a:lnTo>
-                  <a:pt x="120000" y="0"/>
-                </a:lnTo>
-                <a:lnTo>
-                  <a:pt x="120000" y="120000"/>
-                </a:lnTo>
-                <a:lnTo>
-                  <a:pt x="0" y="120000"/>
-                </a:lnTo>
-                <a:close/>
-              </a:path>
-            </a:pathLst>
-          </a:custGeom>
-          <a:noFill/>
-          <a:ln cap="flat" cmpd="sng" w="9525">
-            <a:solidFill>
-              <a:srgbClr val="000000"/>
-            </a:solidFill>
-            <a:prstDash val="solid"/>
-            <a:round/>
-            <a:headEnd len="sm" w="sm" type="none"/>
-            <a:tailEnd len="sm" w="sm" type="none"/>
-          </a:ln>
-        </p:spPr>
-      </p:sp>
-    </p:spTree>
-  </p:cSld>
-  <p:clrMapOvr>
-    <a:masterClrMapping/>
-  </p:clrMapOvr>
-</p:notes>
-</file>
-
-<file path=ppt/notesSlides/notesSlide13.xml><?xml version="1.0" encoding="utf-8"?>
-<p:notes xmlns:a="http://schemas.openxmlformats.org/drawingml/2006/main" xmlns:r="http://schemas.openxmlformats.org/officeDocument/2006/relationships" xmlns:mc="http://schemas.openxmlformats.org/markup-compatibility/2006" xmlns:mv="urn:schemas-microsoft-com:mac:vml" xmlns:p="http://schemas.openxmlformats.org/presentationml/2006/main" xmlns:c="http://schemas.openxmlformats.org/drawingml/2006/chart" xmlns:dgm="http://schemas.openxmlformats.org/drawingml/2006/diagram" xmlns:o="urn:schemas-microsoft-com:office:office" xmlns:v="urn:schemas-microsoft-com:vml" xmlns:pvml="urn:schemas-microsoft-com:office:powerpoint" xmlns:com="http://schemas.openxmlformats.org/drawingml/2006/compatibility" xmlns:p14="http://schemas.microsoft.com/office/powerpoint/2010/main" xmlns:p15="http://schemas.microsoft.com/office/powerpoint/2012/main" xmlns:ahyp="http://schemas.microsoft.com/office/drawing/2018/hyperlinkcolor" showMasterPhAnim="0" showMasterSp="0">
-  <p:cSld>
-    <p:spTree>
-      <p:nvGrpSpPr>
-        <p:cNvPr id="152" name="Shape 152"/>
-        <p:cNvGrpSpPr/>
-        <p:nvPr/>
-      </p:nvGrpSpPr>
-      <p:grpSpPr>
-        <a:xfrm>
-          <a:off x="0" y="0"/>
-          <a:ext cx="0" cy="0"/>
-          <a:chOff x="0" y="0"/>
-          <a:chExt cx="0" cy="0"/>
-        </a:xfrm>
-      </p:grpSpPr>
-      <p:sp>
-        <p:nvSpPr>
-          <p:cNvPr id="153" name="Google Shape;153;p7:notes"/>
-          <p:cNvSpPr txBox="1"/>
-          <p:nvPr>
-            <p:ph idx="1" type="body"/>
-          </p:nvPr>
-        </p:nvSpPr>
-        <p:spPr>
-          <a:xfrm>
-            <a:off x="685800" y="4343400"/>
-            <a:ext cx="5486400" cy="4114800"/>
-          </a:xfrm>
-          <a:prstGeom prst="rect">
-            <a:avLst/>
-          </a:prstGeom>
-          <a:noFill/>
-          <a:ln>
-            <a:noFill/>
-          </a:ln>
-        </p:spPr>
-        <p:txBody>
-          <a:bodyPr anchorCtr="0" anchor="t" bIns="91425" lIns="91425" spcFirstLastPara="1" rIns="91425" wrap="square" tIns="91425">
-            <a:noAutofit/>
-          </a:bodyPr>
-          <a:lstStyle/>
-          <a:p>
-            <a:pPr indent="0" lvl="0" marL="0" rtl="0" algn="l">
-              <a:lnSpc>
-                <a:spcPct val="100000"/>
-              </a:lnSpc>
-              <a:spcBef>
-                <a:spcPts val="0"/>
-              </a:spcBef>
-              <a:spcAft>
-                <a:spcPts val="0"/>
-              </a:spcAft>
-              <a:buSzPts val="1100"/>
-              <a:buNone/>
-            </a:pPr>
-            <a:r>
-              <a:t/>
-            </a:r>
-            <a:endParaRPr/>
-          </a:p>
-        </p:txBody>
-      </p:sp>
-      <p:sp>
-        <p:nvSpPr>
-          <p:cNvPr id="154" name="Google Shape;154;p7:notes"/>
+          <p:cNvPr id="149" name="Google Shape;149;p7:notes"/>
           <p:cNvSpPr/>
           <p:nvPr>
             <p:ph idx="2" type="sldImg"/>
@@ -1667,7 +1549,7 @@
       </p:grpSpPr>
       <p:sp>
         <p:nvSpPr>
-          <p:cNvPr id="98" name="Google Shape;98;g3d68296a725_0_2:notes"/>
+          <p:cNvPr id="98" name="Google Shape;98;g3d68296a725_0_18:notes"/>
           <p:cNvSpPr txBox="1"/>
           <p:nvPr>
             <p:ph idx="1" type="body"/>
@@ -1714,7 +1596,7 @@
       </p:sp>
       <p:sp>
         <p:nvSpPr>
-          <p:cNvPr id="99" name="Google Shape;99;g3d68296a725_0_2:notes"/>
+          <p:cNvPr id="99" name="Google Shape;99;g3d68296a725_0_18:notes"/>
           <p:cNvSpPr/>
           <p:nvPr>
             <p:ph idx="2" type="sldImg"/>
@@ -1784,7 +1666,7 @@
       </p:grpSpPr>
       <p:sp>
         <p:nvSpPr>
-          <p:cNvPr id="104" name="Google Shape;104;g3d68296a725_0_18:notes"/>
+          <p:cNvPr id="104" name="Google Shape;104;g3d68296a725_0_30:notes"/>
           <p:cNvSpPr txBox="1"/>
           <p:nvPr>
             <p:ph idx="1" type="body"/>
@@ -1831,7 +1713,7 @@
       </p:sp>
       <p:sp>
         <p:nvSpPr>
-          <p:cNvPr id="105" name="Google Shape;105;g3d68296a725_0_18:notes"/>
+          <p:cNvPr id="105" name="Google Shape;105;g3d68296a725_0_30:notes"/>
           <p:cNvSpPr/>
           <p:nvPr>
             <p:ph idx="2" type="sldImg"/>
@@ -1901,7 +1783,7 @@
       </p:grpSpPr>
       <p:sp>
         <p:nvSpPr>
-          <p:cNvPr id="110" name="Google Shape;110;g3d68296a725_0_24:notes"/>
+          <p:cNvPr id="110" name="Google Shape;110;g3d68296a725_0_36:notes"/>
           <p:cNvSpPr txBox="1"/>
           <p:nvPr>
             <p:ph idx="1" type="body"/>
@@ -1948,7 +1830,7 @@
       </p:sp>
       <p:sp>
         <p:nvSpPr>
-          <p:cNvPr id="111" name="Google Shape;111;g3d68296a725_0_24:notes"/>
+          <p:cNvPr id="111" name="Google Shape;111;g3d68296a725_0_36:notes"/>
           <p:cNvSpPr/>
           <p:nvPr>
             <p:ph idx="2" type="sldImg"/>
@@ -2018,7 +1900,7 @@
       </p:grpSpPr>
       <p:sp>
         <p:nvSpPr>
-          <p:cNvPr id="116" name="Google Shape;116;g3d68296a725_0_30:notes"/>
+          <p:cNvPr id="116" name="Google Shape;116;g3d68296a725_0_42:notes"/>
           <p:cNvSpPr txBox="1"/>
           <p:nvPr>
             <p:ph idx="1" type="body"/>
@@ -2065,7 +1947,7 @@
       </p:sp>
       <p:sp>
         <p:nvSpPr>
-          <p:cNvPr id="117" name="Google Shape;117;g3d68296a725_0_30:notes"/>
+          <p:cNvPr id="117" name="Google Shape;117;g3d68296a725_0_42:notes"/>
           <p:cNvSpPr/>
           <p:nvPr>
             <p:ph idx="2" type="sldImg"/>
@@ -2135,7 +2017,7 @@
       </p:grpSpPr>
       <p:sp>
         <p:nvSpPr>
-          <p:cNvPr id="122" name="Google Shape;122;g3d68296a725_0_36:notes"/>
+          <p:cNvPr id="122" name="Google Shape;122;g3d68296a725_0_48:notes"/>
           <p:cNvSpPr txBox="1"/>
           <p:nvPr>
             <p:ph idx="1" type="body"/>
@@ -2182,7 +2064,7 @@
       </p:sp>
       <p:sp>
         <p:nvSpPr>
-          <p:cNvPr id="123" name="Google Shape;123;g3d68296a725_0_36:notes"/>
+          <p:cNvPr id="123" name="Google Shape;123;g3d68296a725_0_48:notes"/>
           <p:cNvSpPr/>
           <p:nvPr>
             <p:ph idx="2" type="sldImg"/>
@@ -2238,7 +2120,7 @@
   <p:cSld>
     <p:spTree>
       <p:nvGrpSpPr>
-        <p:cNvPr id="127" name="Shape 127"/>
+        <p:cNvPr id="128" name="Shape 128"/>
         <p:cNvGrpSpPr/>
         <p:nvPr/>
       </p:nvGrpSpPr>
@@ -2252,7 +2134,7 @@
       </p:grpSpPr>
       <p:sp>
         <p:nvSpPr>
-          <p:cNvPr id="128" name="Google Shape;128;g3d68296a725_0_42:notes"/>
+          <p:cNvPr id="129" name="Google Shape;129;g3d69d6e0da0_0_12:notes"/>
           <p:cNvSpPr txBox="1"/>
           <p:nvPr>
             <p:ph idx="1" type="body"/>
@@ -2299,7 +2181,7 @@
       </p:sp>
       <p:sp>
         <p:nvSpPr>
-          <p:cNvPr id="129" name="Google Shape;129;g3d68296a725_0_42:notes"/>
+          <p:cNvPr id="130" name="Google Shape;130;g3d69d6e0da0_0_12:notes"/>
           <p:cNvSpPr/>
           <p:nvPr>
             <p:ph idx="2" type="sldImg"/>
@@ -15495,7 +15377,7 @@
             </a:pPr>
             <a:r>
               <a:rPr lang="en-US"/>
-              <a:t>stage 2</a:t>
+              <a:t>stage 3</a:t>
             </a:r>
             <a:endParaRPr/>
           </a:p>
@@ -15514,7 +15396,7 @@
   <p:cSld>
     <p:spTree>
       <p:nvGrpSpPr>
-        <p:cNvPr id="136" name="Shape 136"/>
+        <p:cNvPr id="138" name="Shape 138"/>
         <p:cNvGrpSpPr/>
         <p:nvPr/>
       </p:nvGrpSpPr>
@@ -15528,178 +15410,7 @@
       </p:grpSpPr>
       <p:sp>
         <p:nvSpPr>
-          <p:cNvPr id="137" name="Google Shape;137;g3d68296a725_0_48"/>
-          <p:cNvSpPr txBox="1"/>
-          <p:nvPr>
-            <p:ph type="title"/>
-          </p:nvPr>
-        </p:nvSpPr>
-        <p:spPr>
-          <a:xfrm>
-            <a:off x="838200" y="365125"/>
-            <a:ext cx="10515600" cy="1325700"/>
-          </a:xfrm>
-          <a:prstGeom prst="rect">
-            <a:avLst/>
-          </a:prstGeom>
-          <a:noFill/>
-          <a:ln>
-            <a:noFill/>
-          </a:ln>
-        </p:spPr>
-        <p:txBody>
-          <a:bodyPr anchorCtr="0" anchor="ctr" bIns="45700" lIns="91425" spcFirstLastPara="1" rIns="91425" wrap="square" tIns="45700">
-            <a:normAutofit/>
-          </a:bodyPr>
-          <a:lstStyle/>
-          <a:p>
-            <a:pPr indent="0" lvl="0" marL="0" rtl="0" algn="ctr">
-              <a:lnSpc>
-                <a:spcPct val="90000"/>
-              </a:lnSpc>
-              <a:spcBef>
-                <a:spcPts val="0"/>
-              </a:spcBef>
-              <a:spcAft>
-                <a:spcPts val="0"/>
-              </a:spcAft>
-              <a:buClr>
-                <a:schemeClr val="lt1"/>
-              </a:buClr>
-              <a:buSzPts val="4400"/>
-              <a:buFont typeface="Play"/>
-              <a:buNone/>
-            </a:pPr>
-            <a:r>
-              <a:rPr lang="en-US"/>
-              <a:t>Collected details shown on the sidebar during the process of collecting them</a:t>
-            </a:r>
-            <a:endParaRPr/>
-          </a:p>
-        </p:txBody>
-      </p:sp>
-      <p:pic>
-        <p:nvPicPr>
-          <p:cNvPr id="138" name="Google Shape;138;g3d68296a725_0_48"/>
-          <p:cNvPicPr preferRelativeResize="0"/>
-          <p:nvPr/>
-        </p:nvPicPr>
-        <p:blipFill>
-          <a:blip r:embed="rId3">
-            <a:alphaModFix/>
-          </a:blip>
-          <a:stretch>
-            <a:fillRect/>
-          </a:stretch>
-        </p:blipFill>
-        <p:spPr>
-          <a:xfrm>
-            <a:off x="2375950" y="1690837"/>
-            <a:ext cx="2278805" cy="4862375"/>
-          </a:xfrm>
-          <a:prstGeom prst="rect">
-            <a:avLst/>
-          </a:prstGeom>
-          <a:noFill/>
-          <a:ln>
-            <a:noFill/>
-          </a:ln>
-        </p:spPr>
-      </p:pic>
-      <p:sp>
-        <p:nvSpPr>
-          <p:cNvPr id="139" name="Google Shape;139;g3d68296a725_0_48"/>
-          <p:cNvSpPr txBox="1"/>
-          <p:nvPr/>
-        </p:nvSpPr>
-        <p:spPr>
-          <a:xfrm>
-            <a:off x="5503525" y="2474688"/>
-            <a:ext cx="4405800" cy="1908600"/>
-          </a:xfrm>
-          <a:prstGeom prst="rect">
-            <a:avLst/>
-          </a:prstGeom>
-          <a:noFill/>
-          <a:ln>
-            <a:noFill/>
-          </a:ln>
-        </p:spPr>
-        <p:txBody>
-          <a:bodyPr anchorCtr="0" anchor="t" bIns="91425" lIns="91425" spcFirstLastPara="1" rIns="91425" wrap="square" tIns="91425">
-            <a:spAutoFit/>
-          </a:bodyPr>
-          <a:lstStyle/>
-          <a:p>
-            <a:pPr indent="0" lvl="0" marL="0" rtl="0" algn="l">
-              <a:spcBef>
-                <a:spcPts val="0"/>
-              </a:spcBef>
-              <a:spcAft>
-                <a:spcPts val="0"/>
-              </a:spcAft>
-              <a:buNone/>
-            </a:pPr>
-            <a:r>
-              <a:rPr lang="en-US" sz="2800">
-                <a:solidFill>
-                  <a:schemeClr val="lt1"/>
-                </a:solidFill>
-              </a:rPr>
-              <a:t>Also statuses of connections are show. And there is </a:t>
-            </a:r>
-            <a:r>
-              <a:rPr lang="en-US" sz="2800">
-                <a:solidFill>
-                  <a:schemeClr val="lt1"/>
-                </a:solidFill>
-              </a:rPr>
-              <a:t>possibility</a:t>
-            </a:r>
-            <a:r>
-              <a:rPr lang="en-US" sz="2800">
-                <a:solidFill>
-                  <a:schemeClr val="lt1"/>
-                </a:solidFill>
-              </a:rPr>
-              <a:t> to start new conversation</a:t>
-            </a:r>
-            <a:endParaRPr sz="2800">
-              <a:solidFill>
-                <a:schemeClr val="lt1"/>
-              </a:solidFill>
-            </a:endParaRPr>
-          </a:p>
-        </p:txBody>
-      </p:sp>
-    </p:spTree>
-  </p:cSld>
-  <p:clrMapOvr>
-    <a:masterClrMapping/>
-  </p:clrMapOvr>
-</p:sld>
-</file>
-
-<file path=ppt/slides/slide11.xml><?xml version="1.0" encoding="utf-8"?>
-<p:sld xmlns:a="http://schemas.openxmlformats.org/drawingml/2006/main" xmlns:r="http://schemas.openxmlformats.org/officeDocument/2006/relationships" xmlns:mc="http://schemas.openxmlformats.org/markup-compatibility/2006" xmlns:mv="urn:schemas-microsoft-com:mac:vml" xmlns:p="http://schemas.openxmlformats.org/presentationml/2006/main" xmlns:c="http://schemas.openxmlformats.org/drawingml/2006/chart" xmlns:dgm="http://schemas.openxmlformats.org/drawingml/2006/diagram" xmlns:o="urn:schemas-microsoft-com:office:office" xmlns:v="urn:schemas-microsoft-com:vml" xmlns:pvml="urn:schemas-microsoft-com:office:powerpoint" xmlns:com="http://schemas.openxmlformats.org/drawingml/2006/compatibility" xmlns:p14="http://schemas.microsoft.com/office/powerpoint/2010/main" xmlns:p15="http://schemas.microsoft.com/office/powerpoint/2012/main" xmlns:ahyp="http://schemas.microsoft.com/office/drawing/2018/hyperlinkcolor">
-  <p:cSld>
-    <p:spTree>
-      <p:nvGrpSpPr>
-        <p:cNvPr id="143" name="Shape 143"/>
-        <p:cNvGrpSpPr/>
-        <p:nvPr/>
-      </p:nvGrpSpPr>
-      <p:grpSpPr>
-        <a:xfrm>
-          <a:off x="0" y="0"/>
-          <a:ext cx="0" cy="0"/>
-          <a:chOff x="0" y="0"/>
-          <a:chExt cx="0" cy="0"/>
-        </a:xfrm>
-      </p:grpSpPr>
-      <p:sp>
-        <p:nvSpPr>
-          <p:cNvPr id="144" name="Google Shape;144;p5"/>
+          <p:cNvPr id="139" name="Google Shape;139;p5"/>
           <p:cNvSpPr txBox="1"/>
           <p:nvPr>
             <p:ph type="title"/>
@@ -15751,7 +15462,7 @@
       </p:sp>
       <p:pic>
         <p:nvPicPr>
-          <p:cNvPr id="145" name="Google Shape;145;p5"/>
+          <p:cNvPr id="140" name="Google Shape;140;p5"/>
           <p:cNvPicPr preferRelativeResize="0"/>
           <p:nvPr/>
         </p:nvPicPr>
@@ -15765,8 +15476,8 @@
         </p:blipFill>
         <p:spPr>
           <a:xfrm>
-            <a:off x="968075" y="1557938"/>
-            <a:ext cx="10255846" cy="4862513"/>
+            <a:off x="1025100" y="1614963"/>
+            <a:ext cx="10141812" cy="4862513"/>
           </a:xfrm>
           <a:prstGeom prst="rect">
             <a:avLst/>
@@ -15785,12 +15496,12 @@
 </p:sld>
 </file>
 
-<file path=ppt/slides/slide12.xml><?xml version="1.0" encoding="utf-8"?>
+<file path=ppt/slides/slide11.xml><?xml version="1.0" encoding="utf-8"?>
 <p:sld xmlns:a="http://schemas.openxmlformats.org/drawingml/2006/main" xmlns:r="http://schemas.openxmlformats.org/officeDocument/2006/relationships" xmlns:mc="http://schemas.openxmlformats.org/markup-compatibility/2006" xmlns:mv="urn:schemas-microsoft-com:mac:vml" xmlns:p="http://schemas.openxmlformats.org/presentationml/2006/main" xmlns:c="http://schemas.openxmlformats.org/drawingml/2006/chart" xmlns:dgm="http://schemas.openxmlformats.org/drawingml/2006/diagram" xmlns:o="urn:schemas-microsoft-com:office:office" xmlns:v="urn:schemas-microsoft-com:vml" xmlns:pvml="urn:schemas-microsoft-com:office:powerpoint" xmlns:com="http://schemas.openxmlformats.org/drawingml/2006/compatibility" xmlns:p14="http://schemas.microsoft.com/office/powerpoint/2010/main" xmlns:p15="http://schemas.microsoft.com/office/powerpoint/2012/main" xmlns:ahyp="http://schemas.microsoft.com/office/drawing/2018/hyperlinkcolor">
   <p:cSld>
     <p:spTree>
       <p:nvGrpSpPr>
-        <p:cNvPr id="149" name="Shape 149"/>
+        <p:cNvPr id="144" name="Shape 144"/>
         <p:cNvGrpSpPr/>
         <p:nvPr/>
       </p:nvGrpSpPr>
@@ -15804,7 +15515,7 @@
       </p:grpSpPr>
       <p:sp>
         <p:nvSpPr>
-          <p:cNvPr id="150" name="Google Shape;150;p6"/>
+          <p:cNvPr id="145" name="Google Shape;145;p6"/>
           <p:cNvSpPr txBox="1"/>
           <p:nvPr>
             <p:ph type="title"/>
@@ -15856,7 +15567,7 @@
       </p:sp>
       <p:pic>
         <p:nvPicPr>
-          <p:cNvPr id="151" name="Google Shape;151;p6"/>
+          <p:cNvPr id="146" name="Google Shape;146;p6"/>
           <p:cNvPicPr preferRelativeResize="0"/>
           <p:nvPr/>
         </p:nvPicPr>
@@ -15889,12 +15600,12 @@
 </p:sld>
 </file>
 
-<file path=ppt/slides/slide13.xml><?xml version="1.0" encoding="utf-8"?>
+<file path=ppt/slides/slide12.xml><?xml version="1.0" encoding="utf-8"?>
 <p:sld xmlns:a="http://schemas.openxmlformats.org/drawingml/2006/main" xmlns:r="http://schemas.openxmlformats.org/officeDocument/2006/relationships" xmlns:mc="http://schemas.openxmlformats.org/markup-compatibility/2006" xmlns:mv="urn:schemas-microsoft-com:mac:vml" xmlns:p="http://schemas.openxmlformats.org/presentationml/2006/main" xmlns:c="http://schemas.openxmlformats.org/drawingml/2006/chart" xmlns:dgm="http://schemas.openxmlformats.org/drawingml/2006/diagram" xmlns:o="urn:schemas-microsoft-com:office:office" xmlns:v="urn:schemas-microsoft-com:vml" xmlns:pvml="urn:schemas-microsoft-com:office:powerpoint" xmlns:com="http://schemas.openxmlformats.org/drawingml/2006/compatibility" xmlns:p14="http://schemas.microsoft.com/office/powerpoint/2010/main" xmlns:p15="http://schemas.microsoft.com/office/powerpoint/2012/main" xmlns:ahyp="http://schemas.microsoft.com/office/drawing/2018/hyperlinkcolor">
   <p:cSld>
     <p:spTree>
       <p:nvGrpSpPr>
-        <p:cNvPr id="155" name="Shape 155"/>
+        <p:cNvPr id="150" name="Shape 150"/>
         <p:cNvGrpSpPr/>
         <p:nvPr/>
       </p:nvGrpSpPr>
@@ -15908,7 +15619,7 @@
       </p:grpSpPr>
       <p:sp>
         <p:nvSpPr>
-          <p:cNvPr id="156" name="Google Shape;156;p7"/>
+          <p:cNvPr id="151" name="Google Shape;151;p7"/>
           <p:cNvSpPr txBox="1"/>
           <p:nvPr>
             <p:ph type="title"/>
@@ -15960,7 +15671,7 @@
       </p:sp>
       <p:pic>
         <p:nvPicPr>
-          <p:cNvPr id="157" name="Google Shape;157;p7"/>
+          <p:cNvPr id="152" name="Google Shape;152;p7"/>
           <p:cNvPicPr preferRelativeResize="0"/>
           <p:nvPr/>
         </p:nvPicPr>
@@ -16068,13 +15779,12 @@
           <p:cNvPicPr preferRelativeResize="0"/>
           <p:nvPr/>
         </p:nvPicPr>
-        <p:blipFill>
+        <p:blipFill rotWithShape="1">
           <a:blip r:embed="rId3">
             <a:alphaModFix/>
           </a:blip>
-          <a:stretch>
-            <a:fillRect/>
-          </a:stretch>
+          <a:srcRect b="0" l="0" r="0" t="0"/>
+          <a:stretch/>
         </p:blipFill>
         <p:spPr>
           <a:xfrm>
@@ -16183,8 +15893,8 @@
         </p:blipFill>
         <p:spPr>
           <a:xfrm>
-            <a:off x="2464188" y="1690688"/>
-            <a:ext cx="7263621" cy="4862512"/>
+            <a:off x="2480013" y="1690688"/>
+            <a:ext cx="7231974" cy="4862514"/>
           </a:xfrm>
           <a:prstGeom prst="rect">
             <a:avLst/>
@@ -16222,7 +15932,7 @@
       </p:grpSpPr>
       <p:sp>
         <p:nvSpPr>
-          <p:cNvPr id="101" name="Google Shape;101;g3d68296a725_0_2"/>
+          <p:cNvPr id="101" name="Google Shape;101;g3d68296a725_0_18"/>
           <p:cNvSpPr txBox="1"/>
           <p:nvPr>
             <p:ph type="title"/>
@@ -16266,7 +15976,7 @@
             </a:pPr>
             <a:r>
               <a:rPr lang="en-US"/>
-              <a:t>Booking process and retrieving data from user</a:t>
+              <a:t>Getting confirmation from human admin (via API)</a:t>
             </a:r>
             <a:endParaRPr/>
           </a:p>
@@ -16274,7 +15984,7 @@
       </p:sp>
       <p:pic>
         <p:nvPicPr>
-          <p:cNvPr id="102" name="Google Shape;102;g3d68296a725_0_2"/>
+          <p:cNvPr id="102" name="Google Shape;102;g3d68296a725_0_18"/>
           <p:cNvPicPr preferRelativeResize="0"/>
           <p:nvPr/>
         </p:nvPicPr>
@@ -16288,8 +15998,8 @@
         </p:blipFill>
         <p:spPr>
           <a:xfrm>
-            <a:off x="2442975" y="1690825"/>
-            <a:ext cx="7306045" cy="4862373"/>
+            <a:off x="2274488" y="1690825"/>
+            <a:ext cx="7643019" cy="4862373"/>
           </a:xfrm>
           <a:prstGeom prst="rect">
             <a:avLst/>
@@ -16327,7 +16037,7 @@
       </p:grpSpPr>
       <p:sp>
         <p:nvSpPr>
-          <p:cNvPr id="107" name="Google Shape;107;g3d68296a725_0_18"/>
+          <p:cNvPr id="107" name="Google Shape;107;g3d68296a725_0_30"/>
           <p:cNvSpPr txBox="1"/>
           <p:nvPr>
             <p:ph type="title"/>
@@ -16379,22 +16089,21 @@
       </p:sp>
       <p:pic>
         <p:nvPicPr>
-          <p:cNvPr id="108" name="Google Shape;108;g3d68296a725_0_18"/>
+          <p:cNvPr id="108" name="Google Shape;108;g3d68296a725_0_30"/>
           <p:cNvPicPr preferRelativeResize="0"/>
           <p:nvPr/>
         </p:nvPicPr>
-        <p:blipFill>
+        <p:blipFill rotWithShape="1">
           <a:blip r:embed="rId3">
             <a:alphaModFix/>
           </a:blip>
-          <a:stretch>
-            <a:fillRect/>
-          </a:stretch>
+          <a:srcRect b="0" l="0" r="0" t="0"/>
+          <a:stretch/>
         </p:blipFill>
         <p:spPr>
           <a:xfrm>
-            <a:off x="2224250" y="1690825"/>
-            <a:ext cx="7743503" cy="4862376"/>
+            <a:off x="4104825" y="2228200"/>
+            <a:ext cx="3982350" cy="3689175"/>
           </a:xfrm>
           <a:prstGeom prst="rect">
             <a:avLst/>
@@ -16432,7 +16141,7 @@
       </p:grpSpPr>
       <p:sp>
         <p:nvSpPr>
-          <p:cNvPr id="113" name="Google Shape;113;g3d68296a725_0_24"/>
+          <p:cNvPr id="113" name="Google Shape;113;g3d68296a725_0_36"/>
           <p:cNvSpPr txBox="1"/>
           <p:nvPr>
             <p:ph type="title"/>
@@ -16484,7 +16193,7 @@
       </p:sp>
       <p:pic>
         <p:nvPicPr>
-          <p:cNvPr id="114" name="Google Shape;114;g3d68296a725_0_24"/>
+          <p:cNvPr id="114" name="Google Shape;114;g3d68296a725_0_36"/>
           <p:cNvPicPr preferRelativeResize="0"/>
           <p:nvPr/>
         </p:nvPicPr>
@@ -16498,8 +16207,8 @@
         </p:blipFill>
         <p:spPr>
           <a:xfrm>
-            <a:off x="2224250" y="1690825"/>
-            <a:ext cx="7743503" cy="4862376"/>
+            <a:off x="152400" y="2484825"/>
+            <a:ext cx="11887201" cy="2339132"/>
           </a:xfrm>
           <a:prstGeom prst="rect">
             <a:avLst/>
@@ -16537,7 +16246,7 @@
       </p:grpSpPr>
       <p:sp>
         <p:nvSpPr>
-          <p:cNvPr id="119" name="Google Shape;119;g3d68296a725_0_30"/>
+          <p:cNvPr id="119" name="Google Shape;119;g3d68296a725_0_42"/>
           <p:cNvSpPr txBox="1"/>
           <p:nvPr>
             <p:ph type="title"/>
@@ -16581,7 +16290,7 @@
             </a:pPr>
             <a:r>
               <a:rPr lang="en-US"/>
-              <a:t>Getting confirmation from human admin (via API)</a:t>
+              <a:t>Chat resumes with additional details after admin approves/rejects</a:t>
             </a:r>
             <a:endParaRPr/>
           </a:p>
@@ -16589,7 +16298,7 @@
       </p:sp>
       <p:pic>
         <p:nvPicPr>
-          <p:cNvPr id="120" name="Google Shape;120;g3d68296a725_0_30"/>
+          <p:cNvPr id="120" name="Google Shape;120;g3d68296a725_0_42"/>
           <p:cNvPicPr preferRelativeResize="0"/>
           <p:nvPr/>
         </p:nvPicPr>
@@ -16603,8 +16312,8 @@
         </p:blipFill>
         <p:spPr>
           <a:xfrm>
-            <a:off x="4104825" y="2228200"/>
-            <a:ext cx="3982350" cy="3689175"/>
+            <a:off x="1081825" y="1757675"/>
+            <a:ext cx="10028344" cy="4862376"/>
           </a:xfrm>
           <a:prstGeom prst="rect">
             <a:avLst/>
@@ -16642,7 +16351,7 @@
       </p:grpSpPr>
       <p:sp>
         <p:nvSpPr>
-          <p:cNvPr id="125" name="Google Shape;125;g3d68296a725_0_36"/>
+          <p:cNvPr id="125" name="Google Shape;125;g3d68296a725_0_48"/>
           <p:cNvSpPr txBox="1"/>
           <p:nvPr>
             <p:ph type="title"/>
@@ -16686,15 +16395,81 @@
             </a:pPr>
             <a:r>
               <a:rPr lang="en-US"/>
-              <a:t>Getting confirmation from human admin (via API)</a:t>
+              <a:t>Collected details shown on the sidebar during the process of collecting them</a:t>
             </a:r>
             <a:endParaRPr/>
           </a:p>
         </p:txBody>
       </p:sp>
+      <p:sp>
+        <p:nvSpPr>
+          <p:cNvPr id="126" name="Google Shape;126;g3d68296a725_0_48"/>
+          <p:cNvSpPr txBox="1"/>
+          <p:nvPr/>
+        </p:nvSpPr>
+        <p:spPr>
+          <a:xfrm>
+            <a:off x="5503525" y="2474688"/>
+            <a:ext cx="4405800" cy="1908600"/>
+          </a:xfrm>
+          <a:prstGeom prst="rect">
+            <a:avLst/>
+          </a:prstGeom>
+          <a:noFill/>
+          <a:ln>
+            <a:noFill/>
+          </a:ln>
+        </p:spPr>
+        <p:txBody>
+          <a:bodyPr anchorCtr="0" anchor="t" bIns="91425" lIns="91425" spcFirstLastPara="1" rIns="91425" wrap="square" tIns="91425">
+            <a:spAutoFit/>
+          </a:bodyPr>
+          <a:lstStyle/>
+          <a:p>
+            <a:pPr indent="0" lvl="0" marL="0" marR="0" rtl="0" algn="l">
+              <a:lnSpc>
+                <a:spcPct val="100000"/>
+              </a:lnSpc>
+              <a:spcBef>
+                <a:spcPts val="0"/>
+              </a:spcBef>
+              <a:spcAft>
+                <a:spcPts val="0"/>
+              </a:spcAft>
+              <a:buClr>
+                <a:srgbClr val="000000"/>
+              </a:buClr>
+              <a:buSzPts val="2800"/>
+              <a:buFont typeface="Arial"/>
+              <a:buNone/>
+            </a:pPr>
+            <a:r>
+              <a:rPr b="0" i="0" lang="en-US" sz="2800" u="none" cap="none" strike="noStrike">
+                <a:solidFill>
+                  <a:schemeClr val="lt1"/>
+                </a:solidFill>
+                <a:latin typeface="Arial"/>
+                <a:ea typeface="Arial"/>
+                <a:cs typeface="Arial"/>
+                <a:sym typeface="Arial"/>
+              </a:rPr>
+              <a:t>Also statuses of connections are show. And there is possibility to start new conversation</a:t>
+            </a:r>
+            <a:endParaRPr b="0" i="0" sz="2800" u="none" cap="none" strike="noStrike">
+              <a:solidFill>
+                <a:schemeClr val="lt1"/>
+              </a:solidFill>
+              <a:latin typeface="Arial"/>
+              <a:ea typeface="Arial"/>
+              <a:cs typeface="Arial"/>
+              <a:sym typeface="Arial"/>
+            </a:endParaRPr>
+          </a:p>
+        </p:txBody>
+      </p:sp>
       <p:pic>
         <p:nvPicPr>
-          <p:cNvPr id="126" name="Google Shape;126;g3d68296a725_0_36"/>
+          <p:cNvPr id="127" name="Google Shape;127;g3d68296a725_0_48"/>
           <p:cNvPicPr preferRelativeResize="0"/>
           <p:nvPr/>
         </p:nvPicPr>
@@ -16708,8 +16483,8 @@
         </p:blipFill>
         <p:spPr>
           <a:xfrm>
-            <a:off x="484775" y="2398699"/>
-            <a:ext cx="11222451" cy="3035775"/>
+            <a:off x="2148500" y="1690825"/>
+            <a:ext cx="2192565" cy="4862377"/>
           </a:xfrm>
           <a:prstGeom prst="rect">
             <a:avLst/>
@@ -16733,7 +16508,7 @@
   <p:cSld>
     <p:spTree>
       <p:nvGrpSpPr>
-        <p:cNvPr id="130" name="Shape 130"/>
+        <p:cNvPr id="131" name="Shape 131"/>
         <p:cNvGrpSpPr/>
         <p:nvPr/>
       </p:nvGrpSpPr>
@@ -16747,7 +16522,7 @@
       </p:grpSpPr>
       <p:sp>
         <p:nvSpPr>
-          <p:cNvPr id="131" name="Google Shape;131;g3d68296a725_0_42"/>
+          <p:cNvPr id="132" name="Google Shape;132;g3d69d6e0da0_0_12"/>
           <p:cNvSpPr txBox="1"/>
           <p:nvPr>
             <p:ph type="title"/>
@@ -16791,23 +16566,77 @@
             </a:pPr>
             <a:r>
               <a:rPr lang="en-US"/>
-              <a:t>Chat resumes with </a:t>
+              <a:t>Triggering</a:t>
             </a:r>
             <a:r>
               <a:rPr lang="en-US"/>
-              <a:t>additional details</a:t>
-            </a:r>
-            <a:r>
-              <a:rPr lang="en-US"/>
-              <a:t> after admin approves/rejects</a:t>
+              <a:t> MCP server</a:t>
             </a:r>
             <a:endParaRPr/>
           </a:p>
         </p:txBody>
       </p:sp>
+      <p:sp>
+        <p:nvSpPr>
+          <p:cNvPr id="133" name="Google Shape;133;g3d69d6e0da0_0_12"/>
+          <p:cNvSpPr txBox="1"/>
+          <p:nvPr/>
+        </p:nvSpPr>
+        <p:spPr>
+          <a:xfrm>
+            <a:off x="2262900" y="1690825"/>
+            <a:ext cx="7666200" cy="1908600"/>
+          </a:xfrm>
+          <a:prstGeom prst="rect">
+            <a:avLst/>
+          </a:prstGeom>
+          <a:noFill/>
+          <a:ln>
+            <a:noFill/>
+          </a:ln>
+        </p:spPr>
+        <p:txBody>
+          <a:bodyPr anchorCtr="0" anchor="t" bIns="91425" lIns="91425" spcFirstLastPara="1" rIns="91425" wrap="square" tIns="91425">
+            <a:spAutoFit/>
+          </a:bodyPr>
+          <a:lstStyle/>
+          <a:p>
+            <a:pPr indent="0" lvl="0" marL="0" marR="0" rtl="0" algn="l">
+              <a:lnSpc>
+                <a:spcPct val="100000"/>
+              </a:lnSpc>
+              <a:spcBef>
+                <a:spcPts val="0"/>
+              </a:spcBef>
+              <a:spcAft>
+                <a:spcPts val="0"/>
+              </a:spcAft>
+              <a:buClr>
+                <a:srgbClr val="000000"/>
+              </a:buClr>
+              <a:buSzPts val="2800"/>
+              <a:buFont typeface="Arial"/>
+              <a:buNone/>
+            </a:pPr>
+            <a:r>
+              <a:rPr lang="en-US" sz="2800">
+                <a:solidFill>
+                  <a:schemeClr val="lt1"/>
+                </a:solidFill>
+              </a:rPr>
+              <a:t>Agent 2, after confirmation, triggers MCP server via a tool call to write reservation details to a file. It is saved to directory in the project root data/reservations.</a:t>
+            </a:r>
+            <a:endParaRPr sz="2800">
+              <a:solidFill>
+                <a:schemeClr val="lt1"/>
+              </a:solidFill>
+            </a:endParaRPr>
+          </a:p>
+        </p:txBody>
+      </p:sp>
       <p:pic>
         <p:nvPicPr>
-          <p:cNvPr id="132" name="Google Shape;132;g3d68296a725_0_42"/>
+          <p:cNvPr id="134" name="Google Shape;134;g3d69d6e0da0_0_12"/>
           <p:cNvPicPr preferRelativeResize="0"/>
           <p:nvPr/>
         </p:nvPicPr>
@@ -16821,8 +16650,8 @@
         </p:blipFill>
         <p:spPr>
           <a:xfrm>
-            <a:off x="1141700" y="1690825"/>
-            <a:ext cx="9908603" cy="4862376"/>
+            <a:off x="1826275" y="4002338"/>
+            <a:ext cx="8413983" cy="1738812"/>
           </a:xfrm>
           <a:prstGeom prst="rect">
             <a:avLst/>
@@ -16842,6 +16671,285 @@
 </file>
 
 <file path=ppt/theme/theme1.xml><?xml version="1.0" encoding="utf-8"?>
+<a:theme xmlns:a="http://schemas.openxmlformats.org/drawingml/2006/main" xmlns:r="http://schemas.openxmlformats.org/officeDocument/2006/relationships" name="Office Theme">
+  <a:themeElements>
+    <a:clrScheme name="Orange Red">
+      <a:dk1>
+        <a:srgbClr val="000000"/>
+      </a:dk1>
+      <a:lt1>
+        <a:srgbClr val="FFFFFF"/>
+      </a:lt1>
+      <a:dk2>
+        <a:srgbClr val="696464"/>
+      </a:dk2>
+      <a:lt2>
+        <a:srgbClr val="E9E5DC"/>
+      </a:lt2>
+      <a:accent1>
+        <a:srgbClr val="D34817"/>
+      </a:accent1>
+      <a:accent2>
+        <a:srgbClr val="9B2D1F"/>
+      </a:accent2>
+      <a:accent3>
+        <a:srgbClr val="A28E6A"/>
+      </a:accent3>
+      <a:accent4>
+        <a:srgbClr val="956251"/>
+      </a:accent4>
+      <a:accent5>
+        <a:srgbClr val="918485"/>
+      </a:accent5>
+      <a:accent6>
+        <a:srgbClr val="855D5D"/>
+      </a:accent6>
+      <a:hlink>
+        <a:srgbClr val="CC9900"/>
+      </a:hlink>
+      <a:folHlink>
+        <a:srgbClr val="96A9A9"/>
+      </a:folHlink>
+    </a:clrScheme>
+    <a:fontScheme name="Office">
+      <a:majorFont>
+        <a:latin typeface="Arial"/>
+        <a:ea typeface=""/>
+        <a:cs typeface=""/>
+        <a:font script="Jpan" typeface="ＭＳ Ｐゴシック"/>
+        <a:font script="Hang" typeface="맑은 고딕"/>
+        <a:font script="Hans" typeface="宋体"/>
+        <a:font script="Hant" typeface="新細明體"/>
+        <a:font script="Arab" typeface="Times New Roman"/>
+        <a:font script="Hebr" typeface="Times New Roman"/>
+        <a:font script="Thai" typeface="Angsana New"/>
+        <a:font script="Ethi" typeface="Nyala"/>
+        <a:font script="Beng" typeface="Vrinda"/>
+        <a:font script="Gujr" typeface="Shruti"/>
+        <a:font script="Khmr" typeface="MoolBoran"/>
+        <a:font script="Knda" typeface="Tunga"/>
+        <a:font script="Guru" typeface="Raavi"/>
+        <a:font script="Cans" typeface="Euphemia"/>
+        <a:font script="Cher" typeface="Plantagenet Cherokee"/>
+        <a:font script="Yiii" typeface="Microsoft Yi Baiti"/>
+        <a:font script="Tibt" typeface="Microsoft Himalaya"/>
+        <a:font script="Thaa" typeface="MV Boli"/>
+        <a:font script="Deva" typeface="Mangal"/>
+        <a:font script="Telu" typeface="Gautami"/>
+        <a:font script="Taml" typeface="Latha"/>
+        <a:font script="Syrc" typeface="Estrangelo Edessa"/>
+        <a:font script="Orya" typeface="Kalinga"/>
+        <a:font script="Mlym" typeface="Kartika"/>
+        <a:font script="Laoo" typeface="DokChampa"/>
+        <a:font script="Sinh" typeface="Iskoola Pota"/>
+        <a:font script="Mong" typeface="Mongolian Baiti"/>
+        <a:font script="Viet" typeface="Times New Roman"/>
+        <a:font script="Uigh" typeface="Microsoft Uighur"/>
+        <a:font script="Geor" typeface="Sylfaen"/>
+      </a:majorFont>
+      <a:minorFont>
+        <a:latin typeface="Arial"/>
+        <a:ea typeface=""/>
+        <a:cs typeface=""/>
+        <a:font script="Jpan" typeface="ＭＳ Ｐゴシック"/>
+        <a:font script="Hang" typeface="맑은 고딕"/>
+        <a:font script="Hans" typeface="宋体"/>
+        <a:font script="Hant" typeface="新細明體"/>
+        <a:font script="Arab" typeface="Arial"/>
+        <a:font script="Hebr" typeface="Arial"/>
+        <a:font script="Thai" typeface="Cordia New"/>
+        <a:font script="Ethi" typeface="Nyala"/>
+        <a:font script="Beng" typeface="Vrinda"/>
+        <a:font script="Gujr" typeface="Shruti"/>
+        <a:font script="Khmr" typeface="DaunPenh"/>
+        <a:font script="Knda" typeface="Tunga"/>
+        <a:font script="Guru" typeface="Raavi"/>
+        <a:font script="Cans" typeface="Euphemia"/>
+        <a:font script="Cher" typeface="Plantagenet Cherokee"/>
+        <a:font script="Yiii" typeface="Microsoft Yi Baiti"/>
+        <a:font script="Tibt" typeface="Microsoft Himalaya"/>
+        <a:font script="Thaa" typeface="MV Boli"/>
+        <a:font script="Deva" typeface="Mangal"/>
+        <a:font script="Telu" typeface="Gautami"/>
+        <a:font script="Taml" typeface="Latha"/>
+        <a:font script="Syrc" typeface="Estrangelo Edessa"/>
+        <a:font script="Orya" typeface="Kalinga"/>
+        <a:font script="Mlym" typeface="Kartika"/>
+        <a:font script="Laoo" typeface="DokChampa"/>
+        <a:font script="Sinh" typeface="Iskoola Pota"/>
+        <a:font script="Mong" typeface="Mongolian Baiti"/>
+        <a:font script="Viet" typeface="Arial"/>
+        <a:font script="Uigh" typeface="Microsoft Uighur"/>
+        <a:font script="Geor" typeface="Sylfaen"/>
+      </a:minorFont>
+    </a:fontScheme>
+    <a:fmtScheme name="Office">
+      <a:fillStyleLst>
+        <a:solidFill>
+          <a:schemeClr val="phClr"/>
+        </a:solidFill>
+        <a:gradFill rotWithShape="1">
+          <a:gsLst>
+            <a:gs pos="0">
+              <a:schemeClr val="phClr">
+                <a:tint val="50000"/>
+                <a:satMod val="300000"/>
+              </a:schemeClr>
+            </a:gs>
+            <a:gs pos="35000">
+              <a:schemeClr val="phClr">
+                <a:tint val="37000"/>
+                <a:satMod val="300000"/>
+              </a:schemeClr>
+            </a:gs>
+            <a:gs pos="100000">
+              <a:schemeClr val="phClr">
+                <a:tint val="15000"/>
+                <a:satMod val="350000"/>
+              </a:schemeClr>
+            </a:gs>
+          </a:gsLst>
+          <a:lin ang="16200000" scaled="1"/>
+        </a:gradFill>
+        <a:gradFill rotWithShape="1">
+          <a:gsLst>
+            <a:gs pos="0">
+              <a:schemeClr val="phClr">
+                <a:tint val="100000"/>
+                <a:shade val="100000"/>
+                <a:satMod val="130000"/>
+              </a:schemeClr>
+            </a:gs>
+            <a:gs pos="100000">
+              <a:schemeClr val="phClr">
+                <a:tint val="50000"/>
+                <a:shade val="100000"/>
+                <a:satMod val="350000"/>
+              </a:schemeClr>
+            </a:gs>
+          </a:gsLst>
+          <a:lin ang="16200000" scaled="0"/>
+        </a:gradFill>
+      </a:fillStyleLst>
+      <a:lnStyleLst>
+        <a:ln w="9525" cap="flat" cmpd="sng" algn="ctr">
+          <a:solidFill>
+            <a:schemeClr val="phClr">
+              <a:shade val="95000"/>
+              <a:satMod val="105000"/>
+            </a:schemeClr>
+          </a:solidFill>
+          <a:prstDash val="solid"/>
+        </a:ln>
+        <a:ln w="25400" cap="flat" cmpd="sng" algn="ctr">
+          <a:solidFill>
+            <a:schemeClr val="phClr"/>
+          </a:solidFill>
+          <a:prstDash val="solid"/>
+        </a:ln>
+        <a:ln w="38100" cap="flat" cmpd="sng" algn="ctr">
+          <a:solidFill>
+            <a:schemeClr val="phClr"/>
+          </a:solidFill>
+          <a:prstDash val="solid"/>
+        </a:ln>
+      </a:lnStyleLst>
+      <a:effectStyleLst>
+        <a:effectStyle>
+          <a:effectLst>
+            <a:outerShdw blurRad="40000" dist="20000" dir="5400000" rotWithShape="0">
+              <a:srgbClr val="000000">
+                <a:alpha val="38000"/>
+              </a:srgbClr>
+            </a:outerShdw>
+          </a:effectLst>
+        </a:effectStyle>
+        <a:effectStyle>
+          <a:effectLst>
+            <a:outerShdw blurRad="40000" dist="23000" dir="5400000" rotWithShape="0">
+              <a:srgbClr val="000000">
+                <a:alpha val="35000"/>
+              </a:srgbClr>
+            </a:outerShdw>
+          </a:effectLst>
+        </a:effectStyle>
+        <a:effectStyle>
+          <a:effectLst>
+            <a:outerShdw blurRad="40000" dist="23000" dir="5400000" rotWithShape="0">
+              <a:srgbClr val="000000">
+                <a:alpha val="35000"/>
+              </a:srgbClr>
+            </a:outerShdw>
+          </a:effectLst>
+          <a:scene3d>
+            <a:camera prst="orthographicFront">
+              <a:rot lat="0" lon="0" rev="0"/>
+            </a:camera>
+            <a:lightRig rig="threePt" dir="t">
+              <a:rot lat="0" lon="0" rev="1200000"/>
+            </a:lightRig>
+          </a:scene3d>
+          <a:sp3d>
+            <a:bevelT w="63500" h="25400"/>
+          </a:sp3d>
+        </a:effectStyle>
+      </a:effectStyleLst>
+      <a:bgFillStyleLst>
+        <a:solidFill>
+          <a:schemeClr val="phClr"/>
+        </a:solidFill>
+        <a:gradFill rotWithShape="1">
+          <a:gsLst>
+            <a:gs pos="0">
+              <a:schemeClr val="phClr">
+                <a:tint val="40000"/>
+                <a:satMod val="350000"/>
+              </a:schemeClr>
+            </a:gs>
+            <a:gs pos="40000">
+              <a:schemeClr val="phClr">
+                <a:tint val="45000"/>
+                <a:shade val="99000"/>
+                <a:satMod val="350000"/>
+              </a:schemeClr>
+            </a:gs>
+            <a:gs pos="100000">
+              <a:schemeClr val="phClr">
+                <a:shade val="20000"/>
+                <a:satMod val="255000"/>
+              </a:schemeClr>
+            </a:gs>
+          </a:gsLst>
+          <a:path path="circle">
+            <a:fillToRect l="50000" t="-80000" r="50000" b="180000"/>
+          </a:path>
+        </a:gradFill>
+        <a:gradFill rotWithShape="1">
+          <a:gsLst>
+            <a:gs pos="0">
+              <a:schemeClr val="phClr">
+                <a:tint val="80000"/>
+                <a:satMod val="300000"/>
+              </a:schemeClr>
+            </a:gs>
+            <a:gs pos="100000">
+              <a:schemeClr val="phClr">
+                <a:shade val="30000"/>
+                <a:satMod val="200000"/>
+              </a:schemeClr>
+            </a:gs>
+          </a:gsLst>
+          <a:path path="circle">
+            <a:fillToRect l="50000" t="50000" r="50000" b="50000"/>
+          </a:path>
+        </a:gradFill>
+      </a:bgFillStyleLst>
+    </a:fmtScheme>
+  </a:themeElements>
+</a:theme>
+</file>
+
+<file path=ppt/theme/theme2.xml><?xml version="1.0" encoding="utf-8"?>
 <a:theme xmlns:a="http://schemas.openxmlformats.org/drawingml/2006/main" xmlns:r="http://schemas.openxmlformats.org/officeDocument/2006/relationships">
   <a:themeElements>
     <a:clrScheme name="Default">
@@ -17118,283 +17226,4 @@
     </a:fmtScheme>
   </a:themeElements>
 </a:theme>
-</file>
-
-<file path=ppt/theme/theme2.xml><?xml version="1.0" encoding="utf-8"?>
-<a:theme xmlns:a="http://schemas.openxmlformats.org/drawingml/2006/main" xmlns:r="http://schemas.openxmlformats.org/officeDocument/2006/relationships" name="Office Theme">
-  <a:themeElements>
-    <a:clrScheme name="Orange Red">
-      <a:dk1>
-        <a:srgbClr val="000000"/>
-      </a:dk1>
-      <a:lt1>
-        <a:srgbClr val="FFFFFF"/>
-      </a:lt1>
-      <a:dk2>
-        <a:srgbClr val="696464"/>
-      </a:dk2>
-      <a:lt2>
-        <a:srgbClr val="E9E5DC"/>
-      </a:lt2>
-      <a:accent1>
-        <a:srgbClr val="D34817"/>
-      </a:accent1>
-      <a:accent2>
-        <a:srgbClr val="9B2D1F"/>
-      </a:accent2>
-      <a:accent3>
-        <a:srgbClr val="A28E6A"/>
-      </a:accent3>
-      <a:accent4>
-        <a:srgbClr val="956251"/>
-      </a:accent4>
-      <a:accent5>
-        <a:srgbClr val="918485"/>
-      </a:accent5>
-      <a:accent6>
-        <a:srgbClr val="855D5D"/>
-      </a:accent6>
-      <a:hlink>
-        <a:srgbClr val="CC9900"/>
-      </a:hlink>
-      <a:folHlink>
-        <a:srgbClr val="96A9A9"/>
-      </a:folHlink>
-    </a:clrScheme>
-    <a:fontScheme name="Office">
-      <a:majorFont>
-        <a:latin typeface="Arial"/>
-        <a:ea typeface=""/>
-        <a:cs typeface=""/>
-        <a:font script="Jpan" typeface="ＭＳ Ｐゴシック"/>
-        <a:font script="Hang" typeface="맑은 고딕"/>
-        <a:font script="Hans" typeface="宋体"/>
-        <a:font script="Hant" typeface="新細明體"/>
-        <a:font script="Arab" typeface="Times New Roman"/>
-        <a:font script="Hebr" typeface="Times New Roman"/>
-        <a:font script="Thai" typeface="Angsana New"/>
-        <a:font script="Ethi" typeface="Nyala"/>
-        <a:font script="Beng" typeface="Vrinda"/>
-        <a:font script="Gujr" typeface="Shruti"/>
-        <a:font script="Khmr" typeface="MoolBoran"/>
-        <a:font script="Knda" typeface="Tunga"/>
-        <a:font script="Guru" typeface="Raavi"/>
-        <a:font script="Cans" typeface="Euphemia"/>
-        <a:font script="Cher" typeface="Plantagenet Cherokee"/>
-        <a:font script="Yiii" typeface="Microsoft Yi Baiti"/>
-        <a:font script="Tibt" typeface="Microsoft Himalaya"/>
-        <a:font script="Thaa" typeface="MV Boli"/>
-        <a:font script="Deva" typeface="Mangal"/>
-        <a:font script="Telu" typeface="Gautami"/>
-        <a:font script="Taml" typeface="Latha"/>
-        <a:font script="Syrc" typeface="Estrangelo Edessa"/>
-        <a:font script="Orya" typeface="Kalinga"/>
-        <a:font script="Mlym" typeface="Kartika"/>
-        <a:font script="Laoo" typeface="DokChampa"/>
-        <a:font script="Sinh" typeface="Iskoola Pota"/>
-        <a:font script="Mong" typeface="Mongolian Baiti"/>
-        <a:font script="Viet" typeface="Times New Roman"/>
-        <a:font script="Uigh" typeface="Microsoft Uighur"/>
-        <a:font script="Geor" typeface="Sylfaen"/>
-      </a:majorFont>
-      <a:minorFont>
-        <a:latin typeface="Arial"/>
-        <a:ea typeface=""/>
-        <a:cs typeface=""/>
-        <a:font script="Jpan" typeface="ＭＳ Ｐゴシック"/>
-        <a:font script="Hang" typeface="맑은 고딕"/>
-        <a:font script="Hans" typeface="宋体"/>
-        <a:font script="Hant" typeface="新細明體"/>
-        <a:font script="Arab" typeface="Arial"/>
-        <a:font script="Hebr" typeface="Arial"/>
-        <a:font script="Thai" typeface="Cordia New"/>
-        <a:font script="Ethi" typeface="Nyala"/>
-        <a:font script="Beng" typeface="Vrinda"/>
-        <a:font script="Gujr" typeface="Shruti"/>
-        <a:font script="Khmr" typeface="DaunPenh"/>
-        <a:font script="Knda" typeface="Tunga"/>
-        <a:font script="Guru" typeface="Raavi"/>
-        <a:font script="Cans" typeface="Euphemia"/>
-        <a:font script="Cher" typeface="Plantagenet Cherokee"/>
-        <a:font script="Yiii" typeface="Microsoft Yi Baiti"/>
-        <a:font script="Tibt" typeface="Microsoft Himalaya"/>
-        <a:font script="Thaa" typeface="MV Boli"/>
-        <a:font script="Deva" typeface="Mangal"/>
-        <a:font script="Telu" typeface="Gautami"/>
-        <a:font script="Taml" typeface="Latha"/>
-        <a:font script="Syrc" typeface="Estrangelo Edessa"/>
-        <a:font script="Orya" typeface="Kalinga"/>
-        <a:font script="Mlym" typeface="Kartika"/>
-        <a:font script="Laoo" typeface="DokChampa"/>
-        <a:font script="Sinh" typeface="Iskoola Pota"/>
-        <a:font script="Mong" typeface="Mongolian Baiti"/>
-        <a:font script="Viet" typeface="Arial"/>
-        <a:font script="Uigh" typeface="Microsoft Uighur"/>
-        <a:font script="Geor" typeface="Sylfaen"/>
-      </a:minorFont>
-    </a:fontScheme>
-    <a:fmtScheme name="Office">
-      <a:fillStyleLst>
-        <a:solidFill>
-          <a:schemeClr val="phClr"/>
-        </a:solidFill>
-        <a:gradFill rotWithShape="1">
-          <a:gsLst>
-            <a:gs pos="0">
-              <a:schemeClr val="phClr">
-                <a:tint val="50000"/>
-                <a:satMod val="300000"/>
-              </a:schemeClr>
-            </a:gs>
-            <a:gs pos="35000">
-              <a:schemeClr val="phClr">
-                <a:tint val="37000"/>
-                <a:satMod val="300000"/>
-              </a:schemeClr>
-            </a:gs>
-            <a:gs pos="100000">
-              <a:schemeClr val="phClr">
-                <a:tint val="15000"/>
-                <a:satMod val="350000"/>
-              </a:schemeClr>
-            </a:gs>
-          </a:gsLst>
-          <a:lin ang="16200000" scaled="1"/>
-        </a:gradFill>
-        <a:gradFill rotWithShape="1">
-          <a:gsLst>
-            <a:gs pos="0">
-              <a:schemeClr val="phClr">
-                <a:tint val="100000"/>
-                <a:shade val="100000"/>
-                <a:satMod val="130000"/>
-              </a:schemeClr>
-            </a:gs>
-            <a:gs pos="100000">
-              <a:schemeClr val="phClr">
-                <a:tint val="50000"/>
-                <a:shade val="100000"/>
-                <a:satMod val="350000"/>
-              </a:schemeClr>
-            </a:gs>
-          </a:gsLst>
-          <a:lin ang="16200000" scaled="0"/>
-        </a:gradFill>
-      </a:fillStyleLst>
-      <a:lnStyleLst>
-        <a:ln w="9525" cap="flat" cmpd="sng" algn="ctr">
-          <a:solidFill>
-            <a:schemeClr val="phClr">
-              <a:shade val="95000"/>
-              <a:satMod val="105000"/>
-            </a:schemeClr>
-          </a:solidFill>
-          <a:prstDash val="solid"/>
-        </a:ln>
-        <a:ln w="25400" cap="flat" cmpd="sng" algn="ctr">
-          <a:solidFill>
-            <a:schemeClr val="phClr"/>
-          </a:solidFill>
-          <a:prstDash val="solid"/>
-        </a:ln>
-        <a:ln w="38100" cap="flat" cmpd="sng" algn="ctr">
-          <a:solidFill>
-            <a:schemeClr val="phClr"/>
-          </a:solidFill>
-          <a:prstDash val="solid"/>
-        </a:ln>
-      </a:lnStyleLst>
-      <a:effectStyleLst>
-        <a:effectStyle>
-          <a:effectLst>
-            <a:outerShdw blurRad="40000" dist="20000" dir="5400000" rotWithShape="0">
-              <a:srgbClr val="000000">
-                <a:alpha val="38000"/>
-              </a:srgbClr>
-            </a:outerShdw>
-          </a:effectLst>
-        </a:effectStyle>
-        <a:effectStyle>
-          <a:effectLst>
-            <a:outerShdw blurRad="40000" dist="23000" dir="5400000" rotWithShape="0">
-              <a:srgbClr val="000000">
-                <a:alpha val="35000"/>
-              </a:srgbClr>
-            </a:outerShdw>
-          </a:effectLst>
-        </a:effectStyle>
-        <a:effectStyle>
-          <a:effectLst>
-            <a:outerShdw blurRad="40000" dist="23000" dir="5400000" rotWithShape="0">
-              <a:srgbClr val="000000">
-                <a:alpha val="35000"/>
-              </a:srgbClr>
-            </a:outerShdw>
-          </a:effectLst>
-          <a:scene3d>
-            <a:camera prst="orthographicFront">
-              <a:rot lat="0" lon="0" rev="0"/>
-            </a:camera>
-            <a:lightRig rig="threePt" dir="t">
-              <a:rot lat="0" lon="0" rev="1200000"/>
-            </a:lightRig>
-          </a:scene3d>
-          <a:sp3d>
-            <a:bevelT w="63500" h="25400"/>
-          </a:sp3d>
-        </a:effectStyle>
-      </a:effectStyleLst>
-      <a:bgFillStyleLst>
-        <a:solidFill>
-          <a:schemeClr val="phClr"/>
-        </a:solidFill>
-        <a:gradFill rotWithShape="1">
-          <a:gsLst>
-            <a:gs pos="0">
-              <a:schemeClr val="phClr">
-                <a:tint val="40000"/>
-                <a:satMod val="350000"/>
-              </a:schemeClr>
-            </a:gs>
-            <a:gs pos="40000">
-              <a:schemeClr val="phClr">
-                <a:tint val="45000"/>
-                <a:shade val="99000"/>
-                <a:satMod val="350000"/>
-              </a:schemeClr>
-            </a:gs>
-            <a:gs pos="100000">
-              <a:schemeClr val="phClr">
-                <a:shade val="20000"/>
-                <a:satMod val="255000"/>
-              </a:schemeClr>
-            </a:gs>
-          </a:gsLst>
-          <a:path path="circle">
-            <a:fillToRect l="50000" t="-80000" r="50000" b="180000"/>
-          </a:path>
-        </a:gradFill>
-        <a:gradFill rotWithShape="1">
-          <a:gsLst>
-            <a:gs pos="0">
-              <a:schemeClr val="phClr">
-                <a:tint val="80000"/>
-                <a:satMod val="300000"/>
-              </a:schemeClr>
-            </a:gs>
-            <a:gs pos="100000">
-              <a:schemeClr val="phClr">
-                <a:shade val="30000"/>
-                <a:satMod val="200000"/>
-              </a:schemeClr>
-            </a:gs>
-          </a:gsLst>
-          <a:path path="circle">
-            <a:fillToRect l="50000" t="50000" r="50000" b="50000"/>
-          </a:path>
-        </a:gradFill>
-      </a:bgFillStyleLst>
-    </a:fmtScheme>
-  </a:themeElements>
-</a:theme>
 </file>